--- a/nextjs_postgresql_setup_updated.pptx
+++ b/nextjs_postgresql_setup_updated.pptx
@@ -13,7 +13,6 @@
     <p:sldId id="258" r:id="rId6"/>
     <p:sldId id="259" r:id="rId7"/>
     <p:sldId id="260" r:id="rId8"/>
-    <p:sldId id="261" r:id="rId9"/>
   </p:sldIdLst>
   <p:sldSz cx="12192000" cy="6858000"/>
   <p:notesSz cx="6858000" cy="12192000"/>
@@ -369,7 +368,7 @@
             <a:pPr indent="0" algn="r">
               <a:buNone/>
             </a:pPr>
-            <a:fld id="{5F0215D2-8806-40C2-A6B8-7BB64889F6A3}" type="slidenum">
+            <a:fld id="{603F1CCA-C452-4371-A9DD-04DC4C66A3B2}" type="slidenum">
               <a:rPr lang="en-US" sz="1400" b="0" u="none" strike="noStrike">
                 <a:solidFill>
                   <a:srgbClr val="000000"/>
@@ -416,7 +415,7 @@
       </p:grpSpPr>
       <p:sp>
         <p:nvSpPr>
-          <p:cNvPr id="134" name="PlaceHolder 1"/>
+          <p:cNvPr id="117" name="PlaceHolder 1"/>
           <p:cNvSpPr>
             <a:spLocks noGrp="1"/>
           </p:cNvSpPr>
@@ -427,19 +426,19 @@
         <p:spPr>
           <a:xfrm>
             <a:off x="685800" y="1143000"/>
-            <a:ext cx="5486040" cy="3085920"/>
-          </a:xfrm>
-          <a:prstGeom prst="rect">
-            <a:avLst/>
-          </a:prstGeom>
-          <a:ln w="0">
-            <a:noFill/>
-          </a:ln>
-        </p:spPr>
-      </p:sp>
-      <p:sp>
-        <p:nvSpPr>
-          <p:cNvPr id="135" name="PlaceHolder 2"/>
+            <a:ext cx="5485680" cy="3085560"/>
+          </a:xfrm>
+          <a:prstGeom prst="rect">
+            <a:avLst/>
+          </a:prstGeom>
+          <a:ln w="0">
+            <a:noFill/>
+          </a:ln>
+        </p:spPr>
+      </p:sp>
+      <p:sp>
+        <p:nvSpPr>
+          <p:cNvPr id="118" name="PlaceHolder 2"/>
           <p:cNvSpPr>
             <a:spLocks noGrp="1"/>
           </p:cNvSpPr>
@@ -450,7 +449,7 @@
         <p:spPr>
           <a:xfrm>
             <a:off x="685800" y="4400640"/>
-            <a:ext cx="5486040" cy="3600000"/>
+            <a:ext cx="5485680" cy="3599640"/>
           </a:xfrm>
           <a:prstGeom prst="rect">
             <a:avLst/>
@@ -481,18 +480,18 @@
       </p:sp>
       <p:sp>
         <p:nvSpPr>
-          <p:cNvPr id="136" name="PlaceHolder 3"/>
+          <p:cNvPr id="119" name="PlaceHolder 3"/>
           <p:cNvSpPr>
             <a:spLocks noGrp="1"/>
           </p:cNvSpPr>
           <p:nvPr>
-            <p:ph type="sldNum" idx="11"/>
+            <p:ph type="sldNum" idx="10"/>
           </p:nvPr>
         </p:nvSpPr>
         <p:spPr>
           <a:xfrm>
             <a:off x="3884760" y="8685360"/>
-            <a:ext cx="2971440" cy="458280"/>
+            <a:ext cx="2971080" cy="457920"/>
           </a:xfrm>
           <a:prstGeom prst="rect">
             <a:avLst/>
@@ -512,6 +511,9 @@
                 <a:spcPct val="100000"/>
               </a:lnSpc>
               <a:buNone/>
+              <a:tabLst>
+                <a:tab pos="0" algn="l"/>
+              </a:tabLst>
               <a:defRPr lang="en-US" sz="1200" b="0" u="none" strike="noStrike">
                 <a:solidFill>
                   <a:schemeClr val="dk1"/>
@@ -529,8 +531,11 @@
                 <a:spcPct val="100000"/>
               </a:lnSpc>
               <a:buNone/>
-            </a:pPr>
-            <a:fld id="{AE59C2F4-CF83-474D-BCB2-2759B893BB8B}" type="slidenum">
+              <a:tabLst>
+                <a:tab pos="0" algn="l"/>
+              </a:tabLst>
+            </a:pPr>
+            <a:fld id="{B7287DB5-89CF-4E46-9F08-1955891A5CC0}" type="slidenum">
               <a:rPr lang="en-US" sz="1200" b="0" u="none" strike="noStrike">
                 <a:solidFill>
                   <a:schemeClr val="dk1"/>
@@ -540,7 +545,7 @@
                 <a:latin typeface="+mn-lt"/>
                 <a:ea typeface="+mn-ea"/>
               </a:rPr>
-              <a:t>6</a:t>
+              <a:t>5</a:t>
             </a:fld>
             <a:endParaRPr lang="en-US" sz="1200" b="0" u="none" strike="noStrike">
               <a:solidFill>
@@ -577,7 +582,7 @@
       </p:grpSpPr>
       <p:sp>
         <p:nvSpPr>
-          <p:cNvPr id="137" name="PlaceHolder 1"/>
+          <p:cNvPr id="120" name="PlaceHolder 1"/>
           <p:cNvSpPr>
             <a:spLocks noGrp="1"/>
           </p:cNvSpPr>
@@ -588,19 +593,19 @@
         <p:spPr>
           <a:xfrm>
             <a:off x="685800" y="1143000"/>
-            <a:ext cx="5486040" cy="3085920"/>
-          </a:xfrm>
-          <a:prstGeom prst="rect">
-            <a:avLst/>
-          </a:prstGeom>
-          <a:ln w="0">
-            <a:noFill/>
-          </a:ln>
-        </p:spPr>
-      </p:sp>
-      <p:sp>
-        <p:nvSpPr>
-          <p:cNvPr id="138" name="PlaceHolder 2"/>
+            <a:ext cx="5485680" cy="3085560"/>
+          </a:xfrm>
+          <a:prstGeom prst="rect">
+            <a:avLst/>
+          </a:prstGeom>
+          <a:ln w="0">
+            <a:noFill/>
+          </a:ln>
+        </p:spPr>
+      </p:sp>
+      <p:sp>
+        <p:nvSpPr>
+          <p:cNvPr id="121" name="PlaceHolder 2"/>
           <p:cNvSpPr>
             <a:spLocks noGrp="1"/>
           </p:cNvSpPr>
@@ -611,7 +616,7 @@
         <p:spPr>
           <a:xfrm>
             <a:off x="685800" y="4400640"/>
-            <a:ext cx="5486040" cy="3600000"/>
+            <a:ext cx="5485680" cy="3599640"/>
           </a:xfrm>
           <a:prstGeom prst="rect">
             <a:avLst/>
@@ -642,18 +647,18 @@
       </p:sp>
       <p:sp>
         <p:nvSpPr>
-          <p:cNvPr id="139" name="PlaceHolder 3"/>
+          <p:cNvPr id="122" name="PlaceHolder 3"/>
           <p:cNvSpPr>
             <a:spLocks noGrp="1"/>
           </p:cNvSpPr>
           <p:nvPr>
-            <p:ph type="sldNum" idx="12"/>
+            <p:ph type="sldNum" idx="11"/>
           </p:nvPr>
         </p:nvSpPr>
         <p:spPr>
           <a:xfrm>
             <a:off x="3884760" y="8685360"/>
-            <a:ext cx="2971440" cy="458280"/>
+            <a:ext cx="2971080" cy="457920"/>
           </a:xfrm>
           <a:prstGeom prst="rect">
             <a:avLst/>
@@ -673,6 +678,9 @@
                 <a:spcPct val="100000"/>
               </a:lnSpc>
               <a:buNone/>
+              <a:tabLst>
+                <a:tab pos="0" algn="l"/>
+              </a:tabLst>
               <a:defRPr lang="en-US" sz="1200" b="0" u="none" strike="noStrike">
                 <a:solidFill>
                   <a:schemeClr val="dk1"/>
@@ -690,8 +698,11 @@
                 <a:spcPct val="100000"/>
               </a:lnSpc>
               <a:buNone/>
-            </a:pPr>
-            <a:fld id="{54206C08-55D3-46CB-B613-05646F2B8D66}" type="slidenum">
+              <a:tabLst>
+                <a:tab pos="0" algn="l"/>
+              </a:tabLst>
+            </a:pPr>
+            <a:fld id="{CC69E251-1572-423F-9433-1BAD2002B627}" type="slidenum">
               <a:rPr lang="en-US" sz="1200" b="0" u="none" strike="noStrike">
                 <a:solidFill>
                   <a:schemeClr val="dk1"/>
@@ -701,7 +712,7 @@
                 <a:latin typeface="+mn-lt"/>
                 <a:ea typeface="+mn-ea"/>
               </a:rPr>
-              <a:t>6</a:t>
+              <a:t>5</a:t>
             </a:fld>
             <a:endParaRPr lang="en-US" sz="1200" b="0" u="none" strike="noStrike">
               <a:solidFill>
@@ -738,7 +749,7 @@
       </p:grpSpPr>
       <p:sp>
         <p:nvSpPr>
-          <p:cNvPr id="140" name="PlaceHolder 1"/>
+          <p:cNvPr id="123" name="PlaceHolder 1"/>
           <p:cNvSpPr>
             <a:spLocks noGrp="1"/>
           </p:cNvSpPr>
@@ -749,19 +760,19 @@
         <p:spPr>
           <a:xfrm>
             <a:off x="685800" y="1143000"/>
-            <a:ext cx="5486040" cy="3085920"/>
-          </a:xfrm>
-          <a:prstGeom prst="rect">
-            <a:avLst/>
-          </a:prstGeom>
-          <a:ln w="0">
-            <a:noFill/>
-          </a:ln>
-        </p:spPr>
-      </p:sp>
-      <p:sp>
-        <p:nvSpPr>
-          <p:cNvPr id="141" name="PlaceHolder 2"/>
+            <a:ext cx="5485680" cy="3085560"/>
+          </a:xfrm>
+          <a:prstGeom prst="rect">
+            <a:avLst/>
+          </a:prstGeom>
+          <a:ln w="0">
+            <a:noFill/>
+          </a:ln>
+        </p:spPr>
+      </p:sp>
+      <p:sp>
+        <p:nvSpPr>
+          <p:cNvPr id="124" name="PlaceHolder 2"/>
           <p:cNvSpPr>
             <a:spLocks noGrp="1"/>
           </p:cNvSpPr>
@@ -772,7 +783,7 @@
         <p:spPr>
           <a:xfrm>
             <a:off x="685800" y="4400640"/>
-            <a:ext cx="5486040" cy="3600000"/>
+            <a:ext cx="5485680" cy="3599640"/>
           </a:xfrm>
           <a:prstGeom prst="rect">
             <a:avLst/>
@@ -803,18 +814,18 @@
       </p:sp>
       <p:sp>
         <p:nvSpPr>
-          <p:cNvPr id="142" name="PlaceHolder 3"/>
+          <p:cNvPr id="125" name="PlaceHolder 3"/>
           <p:cNvSpPr>
             <a:spLocks noGrp="1"/>
           </p:cNvSpPr>
           <p:nvPr>
-            <p:ph type="sldNum" idx="13"/>
+            <p:ph type="sldNum" idx="12"/>
           </p:nvPr>
         </p:nvSpPr>
         <p:spPr>
           <a:xfrm>
             <a:off x="3884760" y="8685360"/>
-            <a:ext cx="2971440" cy="458280"/>
+            <a:ext cx="2971080" cy="457920"/>
           </a:xfrm>
           <a:prstGeom prst="rect">
             <a:avLst/>
@@ -834,6 +845,9 @@
                 <a:spcPct val="100000"/>
               </a:lnSpc>
               <a:buNone/>
+              <a:tabLst>
+                <a:tab pos="0" algn="l"/>
+              </a:tabLst>
               <a:defRPr lang="en-US" sz="1200" b="0" u="none" strike="noStrike">
                 <a:solidFill>
                   <a:schemeClr val="dk1"/>
@@ -851,8 +865,11 @@
                 <a:spcPct val="100000"/>
               </a:lnSpc>
               <a:buNone/>
-            </a:pPr>
-            <a:fld id="{BC92221B-2DC1-4805-A924-1BCAF8B208D8}" type="slidenum">
+              <a:tabLst>
+                <a:tab pos="0" algn="l"/>
+              </a:tabLst>
+            </a:pPr>
+            <a:fld id="{CCA2D217-C4CD-4FDB-BE6A-1653B34655FB}" type="slidenum">
               <a:rPr lang="en-US" sz="1200" b="0" u="none" strike="noStrike">
                 <a:solidFill>
                   <a:schemeClr val="dk1"/>
@@ -862,7 +879,7 @@
                 <a:latin typeface="+mn-lt"/>
                 <a:ea typeface="+mn-ea"/>
               </a:rPr>
-              <a:t>6</a:t>
+              <a:t>5</a:t>
             </a:fld>
             <a:endParaRPr lang="en-US" sz="1200" b="0" u="none" strike="noStrike">
               <a:solidFill>
@@ -899,7 +916,7 @@
       </p:grpSpPr>
       <p:sp>
         <p:nvSpPr>
-          <p:cNvPr id="143" name="PlaceHolder 1"/>
+          <p:cNvPr id="126" name="PlaceHolder 1"/>
           <p:cNvSpPr>
             <a:spLocks noGrp="1"/>
           </p:cNvSpPr>
@@ -910,19 +927,19 @@
         <p:spPr>
           <a:xfrm>
             <a:off x="685800" y="1143000"/>
-            <a:ext cx="5486040" cy="3085920"/>
-          </a:xfrm>
-          <a:prstGeom prst="rect">
-            <a:avLst/>
-          </a:prstGeom>
-          <a:ln w="0">
-            <a:noFill/>
-          </a:ln>
-        </p:spPr>
-      </p:sp>
-      <p:sp>
-        <p:nvSpPr>
-          <p:cNvPr id="144" name="PlaceHolder 2"/>
+            <a:ext cx="5485680" cy="3085560"/>
+          </a:xfrm>
+          <a:prstGeom prst="rect">
+            <a:avLst/>
+          </a:prstGeom>
+          <a:ln w="0">
+            <a:noFill/>
+          </a:ln>
+        </p:spPr>
+      </p:sp>
+      <p:sp>
+        <p:nvSpPr>
+          <p:cNvPr id="127" name="PlaceHolder 2"/>
           <p:cNvSpPr>
             <a:spLocks noGrp="1"/>
           </p:cNvSpPr>
@@ -933,7 +950,7 @@
         <p:spPr>
           <a:xfrm>
             <a:off x="685800" y="4400640"/>
-            <a:ext cx="5486040" cy="3600000"/>
+            <a:ext cx="5485680" cy="3599640"/>
           </a:xfrm>
           <a:prstGeom prst="rect">
             <a:avLst/>
@@ -964,18 +981,18 @@
       </p:sp>
       <p:sp>
         <p:nvSpPr>
-          <p:cNvPr id="145" name="PlaceHolder 3"/>
+          <p:cNvPr id="128" name="PlaceHolder 3"/>
           <p:cNvSpPr>
             <a:spLocks noGrp="1"/>
           </p:cNvSpPr>
           <p:nvPr>
-            <p:ph type="sldNum" idx="14"/>
+            <p:ph type="sldNum" idx="13"/>
           </p:nvPr>
         </p:nvSpPr>
         <p:spPr>
           <a:xfrm>
             <a:off x="3884760" y="8685360"/>
-            <a:ext cx="2971440" cy="458280"/>
+            <a:ext cx="2971080" cy="457920"/>
           </a:xfrm>
           <a:prstGeom prst="rect">
             <a:avLst/>
@@ -995,6 +1012,9 @@
                 <a:spcPct val="100000"/>
               </a:lnSpc>
               <a:buNone/>
+              <a:tabLst>
+                <a:tab pos="0" algn="l"/>
+              </a:tabLst>
               <a:defRPr lang="en-US" sz="1200" b="0" u="none" strike="noStrike">
                 <a:solidFill>
                   <a:schemeClr val="dk1"/>
@@ -1012,8 +1032,11 @@
                 <a:spcPct val="100000"/>
               </a:lnSpc>
               <a:buNone/>
-            </a:pPr>
-            <a:fld id="{703795A9-A916-49E1-8838-1B76EC9D810E}" type="slidenum">
+              <a:tabLst>
+                <a:tab pos="0" algn="l"/>
+              </a:tabLst>
+            </a:pPr>
+            <a:fld id="{A63E76AD-FB3F-4EB6-A2AA-C6CF69DF2EEE}" type="slidenum">
               <a:rPr lang="en-US" sz="1200" b="0" u="none" strike="noStrike">
                 <a:solidFill>
                   <a:schemeClr val="dk1"/>
@@ -1023,7 +1046,7 @@
                 <a:latin typeface="+mn-lt"/>
                 <a:ea typeface="+mn-ea"/>
               </a:rPr>
-              <a:t>6</a:t>
+              <a:t>5</a:t>
             </a:fld>
             <a:endParaRPr lang="en-US" sz="1200" b="0" u="none" strike="noStrike">
               <a:solidFill>
@@ -1060,7 +1083,7 @@
       </p:grpSpPr>
       <p:sp>
         <p:nvSpPr>
-          <p:cNvPr id="146" name="PlaceHolder 1"/>
+          <p:cNvPr id="129" name="PlaceHolder 1"/>
           <p:cNvSpPr>
             <a:spLocks noGrp="1"/>
           </p:cNvSpPr>
@@ -1071,19 +1094,19 @@
         <p:spPr>
           <a:xfrm>
             <a:off x="685800" y="1143000"/>
-            <a:ext cx="5486040" cy="3085920"/>
-          </a:xfrm>
-          <a:prstGeom prst="rect">
-            <a:avLst/>
-          </a:prstGeom>
-          <a:ln w="0">
-            <a:noFill/>
-          </a:ln>
-        </p:spPr>
-      </p:sp>
-      <p:sp>
-        <p:nvSpPr>
-          <p:cNvPr id="147" name="PlaceHolder 2"/>
+            <a:ext cx="5485680" cy="3085560"/>
+          </a:xfrm>
+          <a:prstGeom prst="rect">
+            <a:avLst/>
+          </a:prstGeom>
+          <a:ln w="0">
+            <a:noFill/>
+          </a:ln>
+        </p:spPr>
+      </p:sp>
+      <p:sp>
+        <p:nvSpPr>
+          <p:cNvPr id="130" name="PlaceHolder 2"/>
           <p:cNvSpPr>
             <a:spLocks noGrp="1"/>
           </p:cNvSpPr>
@@ -1094,7 +1117,7 @@
         <p:spPr>
           <a:xfrm>
             <a:off x="685800" y="4400640"/>
-            <a:ext cx="5486040" cy="3600000"/>
+            <a:ext cx="5485680" cy="3599640"/>
           </a:xfrm>
           <a:prstGeom prst="rect">
             <a:avLst/>
@@ -1125,18 +1148,18 @@
       </p:sp>
       <p:sp>
         <p:nvSpPr>
-          <p:cNvPr id="148" name="PlaceHolder 3"/>
+          <p:cNvPr id="131" name="PlaceHolder 3"/>
           <p:cNvSpPr>
             <a:spLocks noGrp="1"/>
           </p:cNvSpPr>
           <p:nvPr>
-            <p:ph type="sldNum" idx="15"/>
+            <p:ph type="sldNum" idx="14"/>
           </p:nvPr>
         </p:nvSpPr>
         <p:spPr>
           <a:xfrm>
             <a:off x="3884760" y="8685360"/>
-            <a:ext cx="2971440" cy="458280"/>
+            <a:ext cx="2971080" cy="457920"/>
           </a:xfrm>
           <a:prstGeom prst="rect">
             <a:avLst/>
@@ -1156,6 +1179,9 @@
                 <a:spcPct val="100000"/>
               </a:lnSpc>
               <a:buNone/>
+              <a:tabLst>
+                <a:tab pos="0" algn="l"/>
+              </a:tabLst>
               <a:defRPr lang="en-US" sz="1200" b="0" u="none" strike="noStrike">
                 <a:solidFill>
                   <a:schemeClr val="dk1"/>
@@ -1173,8 +1199,11 @@
                 <a:spcPct val="100000"/>
               </a:lnSpc>
               <a:buNone/>
-            </a:pPr>
-            <a:fld id="{52BA59A2-A8C5-441B-979D-B16F24BD7ED8}" type="slidenum">
+              <a:tabLst>
+                <a:tab pos="0" algn="l"/>
+              </a:tabLst>
+            </a:pPr>
+            <a:fld id="{D6C19F37-1D5F-49D4-8ECB-1D21DE599703}" type="slidenum">
               <a:rPr lang="en-US" sz="1200" b="0" u="none" strike="noStrike">
                 <a:solidFill>
                   <a:schemeClr val="dk1"/>
@@ -1184,168 +1213,7 @@
                 <a:latin typeface="+mn-lt"/>
                 <a:ea typeface="+mn-ea"/>
               </a:rPr>
-              <a:t>6</a:t>
-            </a:fld>
-            <a:endParaRPr lang="en-US" sz="1200" b="0" u="none" strike="noStrike">
-              <a:solidFill>
-                <a:srgbClr val="000000"/>
-              </a:solidFill>
-              <a:effectLst/>
-              <a:uFillTx/>
-              <a:latin typeface="Times New Roman"/>
-            </a:endParaRPr>
-          </a:p>
-        </p:txBody>
-      </p:sp>
-    </p:spTree>
-  </p:cSld>
-</p:notes>
-</file>
-
-<file path=ppt/notesSlides/notesSlide6.xml><?xml version="1.0" encoding="utf-8"?>
-<p:notes xmlns:a="http://schemas.openxmlformats.org/drawingml/2006/main" xmlns:p="http://schemas.openxmlformats.org/presentationml/2006/main" xmlns:r="http://schemas.openxmlformats.org/officeDocument/2006/relationships" xmlns:p14="http://schemas.microsoft.com/office/powerpoint/2010/main" xmlns:p15="http://schemas.microsoft.com/office/powerpoint/2012/main" xmlns:mc="http://schemas.openxmlformats.org/markup-compatibility/2006">
-  <p:cSld>
-    <p:spTree>
-      <p:nvGrpSpPr>
-        <p:cNvPr id="1" name=""/>
-        <p:cNvGrpSpPr/>
-        <p:nvPr/>
-      </p:nvGrpSpPr>
-      <p:grpSpPr>
-        <a:xfrm>
-          <a:off x="0" y="0"/>
-          <a:ext cx="0" cy="0"/>
-          <a:chOff x="0" y="0"/>
-          <a:chExt cx="0" cy="0"/>
-        </a:xfrm>
-      </p:grpSpPr>
-      <p:sp>
-        <p:nvSpPr>
-          <p:cNvPr id="149" name="PlaceHolder 1"/>
-          <p:cNvSpPr>
-            <a:spLocks noGrp="1"/>
-          </p:cNvSpPr>
-          <p:nvPr>
-            <p:ph type="sldImg"/>
-          </p:nvPr>
-        </p:nvSpPr>
-        <p:spPr>
-          <a:xfrm>
-            <a:off x="685800" y="1143000"/>
-            <a:ext cx="5486040" cy="3085920"/>
-          </a:xfrm>
-          <a:prstGeom prst="rect">
-            <a:avLst/>
-          </a:prstGeom>
-          <a:ln w="0">
-            <a:noFill/>
-          </a:ln>
-        </p:spPr>
-      </p:sp>
-      <p:sp>
-        <p:nvSpPr>
-          <p:cNvPr id="150" name="PlaceHolder 2"/>
-          <p:cNvSpPr>
-            <a:spLocks noGrp="1"/>
-          </p:cNvSpPr>
-          <p:nvPr>
-            <p:ph type="body"/>
-          </p:nvPr>
-        </p:nvSpPr>
-        <p:spPr>
-          <a:xfrm>
-            <a:off x="685800" y="4400640"/>
-            <a:ext cx="5486040" cy="3600000"/>
-          </a:xfrm>
-          <a:prstGeom prst="rect">
-            <a:avLst/>
-          </a:prstGeom>
-          <a:noFill/>
-          <a:ln w="0">
-            <a:noFill/>
-          </a:ln>
-        </p:spPr>
-        <p:txBody>
-          <a:bodyPr lIns="91440" tIns="45720" rIns="91440" bIns="45720" anchor="t">
-            <a:noAutofit/>
-          </a:bodyPr>
-          <a:p>
-            <a:pPr indent="0" algn="l">
-              <a:buNone/>
-            </a:pPr>
-            <a:endParaRPr lang="en-US" sz="1800" b="0" u="none" strike="noStrike">
-              <a:solidFill>
-                <a:srgbClr val="000000"/>
-              </a:solidFill>
-              <a:effectLst/>
-              <a:uFillTx/>
-              <a:latin typeface="Arial"/>
-            </a:endParaRPr>
-          </a:p>
-        </p:txBody>
-      </p:sp>
-      <p:sp>
-        <p:nvSpPr>
-          <p:cNvPr id="151" name="PlaceHolder 3"/>
-          <p:cNvSpPr>
-            <a:spLocks noGrp="1"/>
-          </p:cNvSpPr>
-          <p:nvPr>
-            <p:ph type="sldNum" idx="16"/>
-          </p:nvPr>
-        </p:nvSpPr>
-        <p:spPr>
-          <a:xfrm>
-            <a:off x="3884760" y="8685360"/>
-            <a:ext cx="2971440" cy="458280"/>
-          </a:xfrm>
-          <a:prstGeom prst="rect">
-            <a:avLst/>
-          </a:prstGeom>
-          <a:noFill/>
-          <a:ln w="0">
-            <a:noFill/>
-          </a:ln>
-        </p:spPr>
-        <p:txBody>
-          <a:bodyPr lIns="91440" tIns="45720" rIns="91440" bIns="45720" anchor="b">
-            <a:noAutofit/>
-          </a:bodyPr>
-          <a:lstStyle>
-            <a:lvl1pPr indent="0" algn="r" defTabSz="914400">
-              <a:lnSpc>
-                <a:spcPct val="100000"/>
-              </a:lnSpc>
-              <a:buNone/>
-              <a:defRPr lang="en-US" sz="1200" b="0" u="none" strike="noStrike">
-                <a:solidFill>
-                  <a:schemeClr val="dk1"/>
-                </a:solidFill>
-                <a:effectLst/>
-                <a:uFillTx/>
-                <a:latin typeface="+mn-lt"/>
-                <a:ea typeface="+mn-ea"/>
-              </a:defRPr>
-            </a:lvl1pPr>
-          </a:lstStyle>
-          <a:p>
-            <a:pPr indent="0" algn="r" defTabSz="914400">
-              <a:lnSpc>
-                <a:spcPct val="100000"/>
-              </a:lnSpc>
-              <a:buNone/>
-            </a:pPr>
-            <a:fld id="{D387AFC7-3C5F-47CB-9F61-E0D4764A6E48}" type="slidenum">
-              <a:rPr lang="en-US" sz="1200" b="0" u="none" strike="noStrike">
-                <a:solidFill>
-                  <a:schemeClr val="dk1"/>
-                </a:solidFill>
-                <a:effectLst/>
-                <a:uFillTx/>
-                <a:latin typeface="+mn-lt"/>
-                <a:ea typeface="+mn-ea"/>
-              </a:rPr>
-              <a:t>&lt;number&gt;</a:t>
+              <a:t>5</a:t>
             </a:fld>
             <a:endParaRPr lang="en-US" sz="1200" b="0" u="none" strike="noStrike">
               <a:solidFill>
@@ -1425,7 +1293,7 @@
         <p:spPr>
           <a:xfrm>
             <a:off x="0" y="0"/>
-            <a:ext cx="12191400" cy="109440"/>
+            <a:ext cx="12191040" cy="109080"/>
           </a:xfrm>
           <a:prstGeom prst="rect">
             <a:avLst/>
@@ -1471,7 +1339,7 @@
         <p:spPr>
           <a:xfrm>
             <a:off x="411480" y="6473880"/>
-            <a:ext cx="5120280" cy="164160"/>
+            <a:ext cx="5119920" cy="163800"/>
           </a:xfrm>
           <a:prstGeom prst="rect">
             <a:avLst/>
@@ -1532,7 +1400,7 @@
         <p:spPr>
           <a:xfrm>
             <a:off x="10835640" y="6473880"/>
-            <a:ext cx="914040" cy="164160"/>
+            <a:ext cx="913680" cy="163800"/>
           </a:xfrm>
           <a:prstGeom prst="rect">
             <a:avLst/>
@@ -1597,7 +1465,7 @@
         <p:spPr>
           <a:xfrm>
             <a:off x="11841480" y="6473880"/>
-            <a:ext cx="799560" cy="299520"/>
+            <a:ext cx="799200" cy="299160"/>
           </a:xfrm>
           <a:prstGeom prst="rect">
             <a:avLst/>
@@ -1617,6 +1485,9 @@
                 <a:spcPct val="100000"/>
               </a:lnSpc>
               <a:buNone/>
+              <a:tabLst>
+                <a:tab pos="0" algn="l"/>
+              </a:tabLst>
               <a:defRPr lang="en-US" sz="800" b="0" u="none" strike="noStrike">
                 <a:solidFill>
                   <a:srgbClr val="6B7280"/>
@@ -1634,8 +1505,11 @@
                 <a:spcPct val="100000"/>
               </a:lnSpc>
               <a:buNone/>
-            </a:pPr>
-            <a:fld id="{3621D674-F794-4F54-BF5E-6C2FAFF2BD5C}" type="slidenum">
+              <a:tabLst>
+                <a:tab pos="0" algn="l"/>
+              </a:tabLst>
+            </a:pPr>
+            <a:fld id="{8EBD8D1C-0503-4025-A8F1-33DCA9A36B8C}" type="slidenum">
               <a:rPr lang="en-US" sz="800" b="0" u="none" strike="noStrike">
                 <a:solidFill>
                   <a:srgbClr val="6B7280"/>
@@ -1671,7 +1545,7 @@
         <p:spPr>
           <a:xfrm>
             <a:off x="609480" y="273600"/>
-            <a:ext cx="10972440" cy="1144800"/>
+            <a:ext cx="10972080" cy="1144440"/>
           </a:xfrm>
           <a:prstGeom prst="rect">
             <a:avLst/>
@@ -1687,7 +1561,13 @@
           </a:bodyPr>
           <a:lstStyle>
             <a:lvl1pPr indent="0" algn="l">
+              <a:lnSpc>
+                <a:spcPct val="100000"/>
+              </a:lnSpc>
               <a:buNone/>
+              <a:tabLst>
+                <a:tab pos="0" algn="l"/>
+              </a:tabLst>
               <a:defRPr lang="en-US" sz="1800" b="0" u="none" strike="noStrike">
                 <a:solidFill>
                   <a:schemeClr val="dk1"/>
@@ -1700,7 +1580,13 @@
           </a:lstStyle>
           <a:p>
             <a:pPr indent="0" algn="l">
+              <a:lnSpc>
+                <a:spcPct val="100000"/>
+              </a:lnSpc>
               <a:buNone/>
+              <a:tabLst>
+                <a:tab pos="0" algn="l"/>
+              </a:tabLst>
             </a:pPr>
             <a:r>
               <a:rPr lang="en-US" sz="1800" b="0" u="none" strike="noStrike">
@@ -1737,7 +1623,7 @@
         <p:spPr>
           <a:xfrm>
             <a:off x="609480" y="1604520"/>
-            <a:ext cx="10972440" cy="3977280"/>
+            <a:ext cx="10972080" cy="3976920"/>
           </a:xfrm>
           <a:prstGeom prst="rect">
             <a:avLst/>
@@ -1753,6 +1639,9 @@
           </a:bodyPr>
           <a:lstStyle>
             <a:lvl1pPr algn="l">
+              <a:lnSpc>
+                <a:spcPct val="100000"/>
+              </a:lnSpc>
               <a:spcBef>
                 <a:spcPts val="1417"/>
               </a:spcBef>
@@ -1772,6 +1661,9 @@
               </a:defRPr>
             </a:lvl1pPr>
             <a:lvl2pPr lvl="1" algn="l">
+              <a:lnSpc>
+                <a:spcPct val="100000"/>
+              </a:lnSpc>
               <a:spcBef>
                 <a:spcPts val="1134"/>
               </a:spcBef>
@@ -1791,6 +1683,9 @@
               </a:defRPr>
             </a:lvl2pPr>
             <a:lvl3pPr lvl="2" algn="l">
+              <a:lnSpc>
+                <a:spcPct val="100000"/>
+              </a:lnSpc>
               <a:spcBef>
                 <a:spcPts val="850"/>
               </a:spcBef>
@@ -1810,6 +1705,9 @@
               </a:defRPr>
             </a:lvl3pPr>
             <a:lvl4pPr lvl="3" algn="l">
+              <a:lnSpc>
+                <a:spcPct val="100000"/>
+              </a:lnSpc>
               <a:spcBef>
                 <a:spcPts val="567"/>
               </a:spcBef>
@@ -1829,6 +1727,9 @@
               </a:defRPr>
             </a:lvl4pPr>
             <a:lvl5pPr lvl="4" algn="l">
+              <a:lnSpc>
+                <a:spcPct val="100000"/>
+              </a:lnSpc>
               <a:spcBef>
                 <a:spcPts val="283"/>
               </a:spcBef>
@@ -1848,6 +1749,9 @@
               </a:defRPr>
             </a:lvl5pPr>
             <a:lvl6pPr lvl="5" algn="l">
+              <a:lnSpc>
+                <a:spcPct val="100000"/>
+              </a:lnSpc>
               <a:spcBef>
                 <a:spcPts val="283"/>
               </a:spcBef>
@@ -1867,6 +1771,9 @@
               </a:defRPr>
             </a:lvl6pPr>
             <a:lvl7pPr lvl="6" algn="l">
+              <a:lnSpc>
+                <a:spcPct val="100000"/>
+              </a:lnSpc>
               <a:spcBef>
                 <a:spcPts val="283"/>
               </a:spcBef>
@@ -1888,6 +1795,9 @@
           </a:lstStyle>
           <a:p>
             <a:pPr marL="432000" indent="-324000" algn="l">
+              <a:lnSpc>
+                <a:spcPct val="100000"/>
+              </a:lnSpc>
               <a:spcBef>
                 <a:spcPts val="1417"/>
               </a:spcBef>
@@ -1920,6 +1830,9 @@
           </a:p>
           <a:p>
             <a:pPr marL="864000" lvl="1" indent="-324000" algn="l">
+              <a:lnSpc>
+                <a:spcPct val="100000"/>
+              </a:lnSpc>
               <a:spcBef>
                 <a:spcPts val="1134"/>
               </a:spcBef>
@@ -1952,6 +1865,9 @@
           </a:p>
           <a:p>
             <a:pPr marL="1296000" lvl="2" indent="-288000" algn="l">
+              <a:lnSpc>
+                <a:spcPct val="100000"/>
+              </a:lnSpc>
               <a:spcBef>
                 <a:spcPts val="850"/>
               </a:spcBef>
@@ -1984,6 +1900,9 @@
           </a:p>
           <a:p>
             <a:pPr marL="1728000" lvl="3" indent="-216000" algn="l">
+              <a:lnSpc>
+                <a:spcPct val="100000"/>
+              </a:lnSpc>
               <a:spcBef>
                 <a:spcPts val="567"/>
               </a:spcBef>
@@ -2016,6 +1935,9 @@
           </a:p>
           <a:p>
             <a:pPr marL="2160000" lvl="4" indent="-216000" algn="l">
+              <a:lnSpc>
+                <a:spcPct val="100000"/>
+              </a:lnSpc>
               <a:spcBef>
                 <a:spcPts val="283"/>
               </a:spcBef>
@@ -2048,6 +1970,9 @@
           </a:p>
           <a:p>
             <a:pPr marL="2592000" lvl="5" indent="-216000" algn="l">
+              <a:lnSpc>
+                <a:spcPct val="100000"/>
+              </a:lnSpc>
               <a:spcBef>
                 <a:spcPts val="283"/>
               </a:spcBef>
@@ -2080,6 +2005,9 @@
           </a:p>
           <a:p>
             <a:pPr marL="3024000" lvl="6" indent="-216000" algn="l">
+              <a:lnSpc>
+                <a:spcPct val="100000"/>
+              </a:lnSpc>
               <a:spcBef>
                 <a:spcPts val="283"/>
               </a:spcBef>
@@ -2177,7 +2105,7 @@
         <p:spPr>
           <a:xfrm>
             <a:off x="640080" y="777240"/>
-            <a:ext cx="10926720" cy="5211720"/>
+            <a:ext cx="10926360" cy="5211360"/>
           </a:xfrm>
           <a:prstGeom prst="roundRect">
             <a:avLst>
@@ -2232,7 +2160,7 @@
         <p:spPr>
           <a:xfrm>
             <a:off x="1051560" y="1234440"/>
-            <a:ext cx="9875160" cy="685440"/>
+            <a:ext cx="9874800" cy="685080"/>
           </a:xfrm>
           <a:prstGeom prst="rect">
             <a:avLst/>
@@ -2293,7 +2221,7 @@
         <p:spPr>
           <a:xfrm>
             <a:off x="1188720" y="1993320"/>
-            <a:ext cx="9600840" cy="411120"/>
+            <a:ext cx="9600480" cy="410760"/>
           </a:xfrm>
           <a:prstGeom prst="rect">
             <a:avLst/>
@@ -2353,7 +2281,7 @@
         <p:spPr>
           <a:xfrm>
             <a:off x="1234440" y="2880360"/>
-            <a:ext cx="658080" cy="658080"/>
+            <a:ext cx="657720" cy="657720"/>
           </a:xfrm>
           <a:prstGeom prst="ellipse">
             <a:avLst/>
@@ -2399,7 +2327,7 @@
         <p:spPr>
           <a:xfrm>
             <a:off x="1234440" y="2990160"/>
-            <a:ext cx="658080" cy="273960"/>
+            <a:ext cx="657720" cy="273600"/>
           </a:xfrm>
           <a:prstGeom prst="rect">
             <a:avLst/>
@@ -2459,7 +2387,7 @@
         <p:spPr>
           <a:xfrm>
             <a:off x="914400" y="3730680"/>
-            <a:ext cx="1325520" cy="639720"/>
+            <a:ext cx="1325160" cy="639360"/>
           </a:xfrm>
           <a:prstGeom prst="rect">
             <a:avLst/>
@@ -2519,7 +2447,7 @@
         <p:spPr>
           <a:xfrm>
             <a:off x="2514600" y="3026520"/>
-            <a:ext cx="1325520" cy="383760"/>
+            <a:ext cx="1325160" cy="383400"/>
           </a:xfrm>
           <a:prstGeom prst="chevron">
             <a:avLst>
@@ -2567,7 +2495,7 @@
         <p:spPr>
           <a:xfrm>
             <a:off x="4572000" y="2880360"/>
-            <a:ext cx="658080" cy="658080"/>
+            <a:ext cx="657720" cy="657720"/>
           </a:xfrm>
           <a:prstGeom prst="ellipse">
             <a:avLst/>
@@ -2613,7 +2541,7 @@
         <p:spPr>
           <a:xfrm>
             <a:off x="4572000" y="2990160"/>
-            <a:ext cx="658080" cy="273960"/>
+            <a:ext cx="657720" cy="273600"/>
           </a:xfrm>
           <a:prstGeom prst="rect">
             <a:avLst/>
@@ -2673,7 +2601,7 @@
         <p:spPr>
           <a:xfrm>
             <a:off x="4251960" y="3730680"/>
-            <a:ext cx="1325520" cy="639720"/>
+            <a:ext cx="1325160" cy="639360"/>
           </a:xfrm>
           <a:prstGeom prst="rect">
             <a:avLst/>
@@ -2733,7 +2661,7 @@
         <p:spPr>
           <a:xfrm>
             <a:off x="5852160" y="3026520"/>
-            <a:ext cx="1325520" cy="383760"/>
+            <a:ext cx="1325160" cy="383400"/>
           </a:xfrm>
           <a:prstGeom prst="chevron">
             <a:avLst>
@@ -2781,7 +2709,7 @@
         <p:spPr>
           <a:xfrm>
             <a:off x="7909560" y="2880360"/>
-            <a:ext cx="658080" cy="658080"/>
+            <a:ext cx="657720" cy="657720"/>
           </a:xfrm>
           <a:prstGeom prst="ellipse">
             <a:avLst/>
@@ -2827,7 +2755,7 @@
         <p:spPr>
           <a:xfrm>
             <a:off x="7909560" y="2990160"/>
-            <a:ext cx="658080" cy="273960"/>
+            <a:ext cx="657720" cy="273600"/>
           </a:xfrm>
           <a:prstGeom prst="rect">
             <a:avLst/>
@@ -2887,7 +2815,7 @@
         <p:spPr>
           <a:xfrm>
             <a:off x="7589520" y="3730680"/>
-            <a:ext cx="1325520" cy="639720"/>
+            <a:ext cx="1325160" cy="639360"/>
           </a:xfrm>
           <a:prstGeom prst="rect">
             <a:avLst/>
@@ -2947,7 +2875,7 @@
         <p:spPr>
           <a:xfrm>
             <a:off x="3749040" y="4892040"/>
-            <a:ext cx="4663080" cy="365400"/>
+            <a:ext cx="4662720" cy="365040"/>
           </a:xfrm>
           <a:prstGeom prst="rect">
             <a:avLst/>
@@ -3011,7 +2939,7 @@
         <p:spPr>
           <a:xfrm>
             <a:off x="11841480" y="6473880"/>
-            <a:ext cx="799560" cy="299520"/>
+            <a:ext cx="799200" cy="299160"/>
           </a:xfrm>
           <a:prstGeom prst="rect">
             <a:avLst/>
@@ -3031,6 +2959,9 @@
                 <a:spcPct val="100000"/>
               </a:lnSpc>
               <a:buNone/>
+              <a:tabLst>
+                <a:tab pos="0" algn="l"/>
+              </a:tabLst>
               <a:defRPr lang="en-US" sz="800" b="0" u="none" strike="noStrike">
                 <a:solidFill>
                   <a:srgbClr val="6B7280"/>
@@ -3048,8 +2979,11 @@
                 <a:spcPct val="100000"/>
               </a:lnSpc>
               <a:buNone/>
-            </a:pPr>
-            <a:fld id="{CC3D4DEA-3206-4714-9BF3-D091AF2240A3}" type="slidenum">
+              <a:tabLst>
+                <a:tab pos="0" algn="l"/>
+              </a:tabLst>
+            </a:pPr>
+            <a:fld id="{27C8C220-5834-49E1-8AC3-285356476D28}" type="slidenum">
               <a:rPr lang="en-US" sz="800" b="0" u="none" strike="noStrike">
                 <a:solidFill>
                   <a:srgbClr val="6B7280"/>
@@ -3111,7 +3045,7 @@
         <p:spPr>
           <a:xfrm>
             <a:off x="502920" y="384120"/>
-            <a:ext cx="11155320" cy="502560"/>
+            <a:ext cx="11154960" cy="502200"/>
           </a:xfrm>
           <a:prstGeom prst="rect">
             <a:avLst/>
@@ -3150,7 +3084,7 @@
                 <a:latin typeface="Aptos Display"/>
                 <a:ea typeface="Aptos Display"/>
               </a:rPr>
-              <a:t>Windows: Install Node.js</a:t>
+              <a:t>Install Node.js</a:t>
             </a:r>
             <a:endParaRPr lang="en-US" sz="2700" b="0" u="none" strike="noStrike">
               <a:solidFill>
@@ -3172,7 +3106,7 @@
         <p:spPr>
           <a:xfrm>
             <a:off x="530280" y="914400"/>
-            <a:ext cx="10972440" cy="310680"/>
+            <a:ext cx="10972080" cy="310320"/>
           </a:xfrm>
           <a:prstGeom prst="rect">
             <a:avLst/>
@@ -3210,7 +3144,7 @@
                 <a:uFillTx/>
                 <a:latin typeface="Aptos"/>
               </a:rPr>
-              <a:t>Use the official LTS installer, which also installs npm.</a:t>
+              <a:t>Recommended classroom option: install the LTS package from Node.js.</a:t>
             </a:r>
             <a:endParaRPr lang="en-US" sz="1350" b="0" u="none" strike="noStrike">
               <a:solidFill>
@@ -3232,7 +3166,7 @@
         <p:spPr>
           <a:xfrm>
             <a:off x="594360" y="1353240"/>
-            <a:ext cx="5303160" cy="4434480"/>
+            <a:ext cx="5302800" cy="4434120"/>
           </a:xfrm>
           <a:prstGeom prst="roundRect">
             <a:avLst>
@@ -3249,8 +3183,10 @@
             <a:round/>
           </a:ln>
           <a:effectLst>
-            <a:outerShdw algn="bl" blurRad="322580160" dir="0" dist="161290080" kx="0" ky="0" rotWithShape="0" sx="100000" sy="100000">
-              <a:srgbClr val="000000"/>
+            <a:outerShdw algn="bl" dir="0" dist="0" kx="0" ky="0" rotWithShape="0" sx="100000" sy="100000">
+              <a:srgbClr val="000000">
+                <a:alpha val="0"/>
+              </a:srgbClr>
             </a:outerShdw>
           </a:effectLst>
         </p:spPr>
@@ -3285,7 +3221,7 @@
         <p:spPr>
           <a:xfrm>
             <a:off x="594360" y="1353240"/>
-            <a:ext cx="82080" cy="4434480"/>
+            <a:ext cx="81720" cy="4434120"/>
           </a:xfrm>
           <a:prstGeom prst="rect">
             <a:avLst/>
@@ -3307,7 +3243,7 @@
           <a:fontRef idx="minor"/>
         </p:style>
         <p:txBody>
-          <a:bodyPr lIns="90000" tIns="45000" rIns="90000" bIns="45000" anchor="t">
+          <a:bodyPr lIns="41040" tIns="45000" rIns="41040" bIns="45000" anchor="t">
             <a:noAutofit/>
           </a:bodyPr>
           <a:p>
@@ -3331,7 +3267,7 @@
         <p:spPr>
           <a:xfrm>
             <a:off x="850320" y="1536120"/>
-            <a:ext cx="4891680" cy="310680"/>
+            <a:ext cx="4891320" cy="310320"/>
           </a:xfrm>
           <a:prstGeom prst="rect">
             <a:avLst/>
@@ -3391,7 +3327,7 @@
         <p:spPr>
           <a:xfrm>
             <a:off x="850320" y="1956960"/>
-            <a:ext cx="4864320" cy="3666240"/>
+            <a:ext cx="4863960" cy="3665880"/>
           </a:xfrm>
           <a:prstGeom prst="rect">
             <a:avLst/>
@@ -3412,6 +3348,11 @@
             <a:noAutofit/>
           </a:bodyPr>
           <a:p>
+            <a:pPr>
+              <a:lnSpc>
+                <a:spcPct val="100000"/>
+              </a:lnSpc>
+            </a:pPr>
             <a:r>
               <a:rPr lang="en-US" sz="1350" b="1" u="none" strike="noStrike">
                 <a:solidFill>
@@ -3421,7 +3362,7 @@
                 <a:uFillTx/>
                 <a:latin typeface="Aptos"/>
               </a:rPr>
-              <a:t>Open the official download page:</a:t>
+              <a:t>Open:</a:t>
             </a:r>
             <a:endParaRPr lang="en-US" sz="1350" b="0" u="none" strike="noStrike">
               <a:solidFill>
@@ -3444,7 +3385,7 @@
             <a:r>
               <a:rPr lang="en-US" sz="1350" b="0" u="sng" strike="noStrike">
                 <a:solidFill>
-                  <a:srgbClr val="2563EB"/>
+                  <a:srgbClr val="0563C1"/>
                 </a:solidFill>
                 <a:effectLst/>
                 <a:uFillTx/>
@@ -3472,6 +3413,24 @@
                 <a:tab pos="0" algn="l"/>
               </a:tabLst>
             </a:pPr>
+            <a:endParaRPr lang="en-US" sz="1350" b="0" u="none" strike="noStrike">
+              <a:solidFill>
+                <a:srgbClr val="000000"/>
+              </a:solidFill>
+              <a:effectLst/>
+              <a:uFillTx/>
+              <a:latin typeface="Arial"/>
+            </a:endParaRPr>
+          </a:p>
+          <a:p>
+            <a:pPr defTabSz="914400">
+              <a:lnSpc>
+                <a:spcPct val="100000"/>
+              </a:lnSpc>
+              <a:tabLst>
+                <a:tab pos="0" algn="l"/>
+              </a:tabLst>
+            </a:pPr>
             <a:r>
               <a:rPr lang="en-US" sz="1350" b="0" u="none" strike="noStrike">
                 <a:solidFill>
@@ -3481,6 +3440,111 @@
                 <a:uFillTx/>
                 <a:latin typeface="Aptos"/>
               </a:rPr>
+              <a:t>For Mac:</a:t>
+            </a:r>
+            <a:endParaRPr lang="en-US" sz="1350" b="0" u="none" strike="noStrike">
+              <a:solidFill>
+                <a:srgbClr val="000000"/>
+              </a:solidFill>
+              <a:effectLst/>
+              <a:uFillTx/>
+              <a:latin typeface="Arial"/>
+            </a:endParaRPr>
+          </a:p>
+          <a:p>
+            <a:pPr defTabSz="914400">
+              <a:lnSpc>
+                <a:spcPct val="100000"/>
+              </a:lnSpc>
+              <a:tabLst>
+                <a:tab pos="0" algn="l"/>
+              </a:tabLst>
+            </a:pPr>
+            <a:r>
+              <a:rPr lang="en-US" sz="1350" b="0" u="none" strike="noStrike">
+                <a:solidFill>
+                  <a:srgbClr val="4B5563"/>
+                </a:solidFill>
+                <a:effectLst/>
+                <a:uFillTx/>
+                <a:latin typeface="Aptos"/>
+              </a:rPr>
+              <a:t>Download the macOS Installer (.pkg) for the LTS release. Choose the build matching your Mac: Apple silicon or Intel.</a:t>
+            </a:r>
+            <a:endParaRPr lang="en-US" sz="1350" b="0" u="none" strike="noStrike">
+              <a:solidFill>
+                <a:srgbClr val="000000"/>
+              </a:solidFill>
+              <a:effectLst/>
+              <a:uFillTx/>
+              <a:latin typeface="Arial"/>
+            </a:endParaRPr>
+          </a:p>
+          <a:p>
+            <a:pPr defTabSz="914400">
+              <a:lnSpc>
+                <a:spcPct val="100000"/>
+              </a:lnSpc>
+              <a:tabLst>
+                <a:tab pos="0" algn="l"/>
+              </a:tabLst>
+            </a:pPr>
+            <a:endParaRPr lang="en-US" sz="1350" b="0" u="none" strike="noStrike">
+              <a:solidFill>
+                <a:srgbClr val="000000"/>
+              </a:solidFill>
+              <a:effectLst/>
+              <a:uFillTx/>
+              <a:latin typeface="Arial"/>
+            </a:endParaRPr>
+          </a:p>
+          <a:p>
+            <a:pPr defTabSz="914400">
+              <a:lnSpc>
+                <a:spcPct val="100000"/>
+              </a:lnSpc>
+              <a:tabLst>
+                <a:tab pos="0" algn="l"/>
+              </a:tabLst>
+            </a:pPr>
+            <a:r>
+              <a:rPr lang="en-US" sz="1350" b="0" u="none" strike="noStrike">
+                <a:solidFill>
+                  <a:srgbClr val="4B5563"/>
+                </a:solidFill>
+                <a:effectLst/>
+                <a:uFillTx/>
+                <a:latin typeface="Aptos"/>
+              </a:rPr>
+              <a:t>For Windows:</a:t>
+            </a:r>
+            <a:endParaRPr lang="en-US" sz="1350" b="0" u="none" strike="noStrike">
+              <a:solidFill>
+                <a:srgbClr val="000000"/>
+              </a:solidFill>
+              <a:effectLst/>
+              <a:uFillTx/>
+              <a:latin typeface="Arial"/>
+            </a:endParaRPr>
+          </a:p>
+          <a:p>
+            <a:pPr defTabSz="914400">
+              <a:lnSpc>
+                <a:spcPct val="100000"/>
+              </a:lnSpc>
+              <a:tabLst>
+                <a:tab pos="0" algn="l"/>
+              </a:tabLst>
+            </a:pPr>
+            <a:r>
+              <a:rPr lang="en-US" sz="1350" b="0" u="none" strike="noStrike">
+                <a:solidFill>
+                  <a:srgbClr val="4B5563"/>
+                </a:solidFill>
+                <a:effectLst/>
+                <a:uFillTx/>
+                <a:latin typeface="Aptos"/>
+              </a:rPr>
               <a:t>Choose the Windows Installer (.msi) for the LTS release. </a:t>
             </a:r>
             <a:endParaRPr lang="en-US" sz="1350" b="0" u="none" strike="noStrike">
@@ -3492,35 +3556,6 @@
               <a:latin typeface="Arial"/>
             </a:endParaRPr>
           </a:p>
-          <a:p>
-            <a:pPr defTabSz="914400">
-              <a:lnSpc>
-                <a:spcPct val="100000"/>
-              </a:lnSpc>
-              <a:tabLst>
-                <a:tab pos="0" algn="l"/>
-              </a:tabLst>
-            </a:pPr>
-            <a:r>
-              <a:rPr lang="en-US" sz="1350" b="0" u="none" strike="noStrike">
-                <a:solidFill>
-                  <a:srgbClr val="4B5563"/>
-                </a:solidFill>
-                <a:effectLst/>
-                <a:uFillTx/>
-                <a:latin typeface="Aptos"/>
-              </a:rPr>
-              <a:t>Use x64 on most PCs; choose ARM64 only for Windows-on-ARM devices.</a:t>
-            </a:r>
-            <a:endParaRPr lang="en-US" sz="1350" b="0" u="none" strike="noStrike">
-              <a:solidFill>
-                <a:srgbClr val="000000"/>
-              </a:solidFill>
-              <a:effectLst/>
-              <a:uFillTx/>
-              <a:latin typeface="Arial"/>
-            </a:endParaRPr>
-          </a:p>
         </p:txBody>
       </p:sp>
       <p:sp>
@@ -3532,7 +3567,7 @@
         <p:spPr>
           <a:xfrm>
             <a:off x="6199560" y="1353240"/>
-            <a:ext cx="5394600" cy="4434480"/>
+            <a:ext cx="5394240" cy="4434120"/>
           </a:xfrm>
           <a:prstGeom prst="roundRect">
             <a:avLst>
@@ -3587,7 +3622,7 @@
         <p:spPr>
           <a:xfrm>
             <a:off x="6199560" y="1353240"/>
-            <a:ext cx="82080" cy="4434480"/>
+            <a:ext cx="81720" cy="4434120"/>
           </a:xfrm>
           <a:prstGeom prst="rect">
             <a:avLst/>
@@ -3609,7 +3644,7 @@
           <a:fontRef idx="minor"/>
         </p:style>
         <p:txBody>
-          <a:bodyPr lIns="90000" tIns="45000" rIns="90000" bIns="45000" anchor="t">
+          <a:bodyPr lIns="41040" tIns="45000" rIns="41040" bIns="45000" anchor="t">
             <a:noAutofit/>
           </a:bodyPr>
           <a:p>
@@ -3633,7 +3668,7 @@
         <p:spPr>
           <a:xfrm>
             <a:off x="6455520" y="1536120"/>
-            <a:ext cx="4983120" cy="310680"/>
+            <a:ext cx="4982760" cy="310320"/>
           </a:xfrm>
           <a:prstGeom prst="rect">
             <a:avLst/>
@@ -3693,7 +3728,7 @@
         <p:spPr>
           <a:xfrm>
             <a:off x="6455520" y="1956960"/>
-            <a:ext cx="4955760" cy="3666240"/>
+            <a:ext cx="4955400" cy="3665880"/>
           </a:xfrm>
           <a:prstGeom prst="rect">
             <a:avLst/>
@@ -3731,7 +3766,7 @@
                 <a:uFillTx/>
                 <a:latin typeface="Aptos"/>
               </a:rPr>
-              <a:t>Run the downloaded installer. Accept the defaults, including npm and “Add to PATH.” Then open PowerShell or Command Prompt and verify:</a:t>
+              <a:t>Open the .pkg file and follow the installer. Then open Command Prompt, PowerShell or Terminal and verify Node.js and npm:</a:t>
             </a:r>
             <a:endParaRPr lang="en-US" sz="1350" b="0" u="none" strike="noStrike">
               <a:solidFill>
@@ -3752,8 +3787,8 @@
         </p:nvSpPr>
         <p:spPr>
           <a:xfrm>
-            <a:off x="6537960" y="3127320"/>
-            <a:ext cx="4708800" cy="1298160"/>
+            <a:off x="6537960" y="3090600"/>
+            <a:ext cx="4708440" cy="1297800"/>
           </a:xfrm>
           <a:prstGeom prst="roundRect">
             <a:avLst>
@@ -3800,8 +3835,8 @@
         </p:nvSpPr>
         <p:spPr>
           <a:xfrm>
-            <a:off x="6739200" y="3291840"/>
-            <a:ext cx="4306320" cy="987120"/>
+            <a:off x="6739200" y="3255120"/>
+            <a:ext cx="4305960" cy="986760"/>
           </a:xfrm>
           <a:prstGeom prst="rect">
             <a:avLst/>
@@ -3892,7 +3927,7 @@
         <p:spPr>
           <a:xfrm>
             <a:off x="6565320" y="4745880"/>
-            <a:ext cx="209880" cy="209880"/>
+            <a:ext cx="209520" cy="209520"/>
           </a:xfrm>
           <a:prstGeom prst="ellipse">
             <a:avLst/>
@@ -3938,7 +3973,7 @@
         <p:spPr>
           <a:xfrm>
             <a:off x="6579000" y="4722840"/>
-            <a:ext cx="182520" cy="200880"/>
+            <a:ext cx="182160" cy="200520"/>
           </a:xfrm>
           <a:prstGeom prst="rect">
             <a:avLst/>
@@ -3998,7 +4033,7 @@
         <p:spPr>
           <a:xfrm>
             <a:off x="6876360" y="4727520"/>
-            <a:ext cx="4845960" cy="273960"/>
+            <a:ext cx="4845600" cy="273600"/>
           </a:xfrm>
           <a:prstGeom prst="rect">
             <a:avLst/>
@@ -4058,7 +4093,7 @@
         <p:spPr>
           <a:xfrm>
             <a:off x="777240" y="5925240"/>
-            <a:ext cx="6583320" cy="273960"/>
+            <a:ext cx="7314480" cy="273600"/>
           </a:xfrm>
           <a:prstGeom prst="rect">
             <a:avLst/>
@@ -4096,7 +4131,7 @@
                 <a:uFillTx/>
                 <a:latin typeface="Aptos"/>
               </a:rPr>
-              <a:t>Direct URL included for class handouts: nodejs.org/en/download</a:t>
+              <a:t>Optional for experienced users: install through a version manager such as nvm.</a:t>
             </a:r>
             <a:endParaRPr lang="en-US" sz="1100" b="0" u="none" strike="noStrike">
               <a:solidFill>
@@ -4122,7 +4157,7 @@
         <p:spPr>
           <a:xfrm>
             <a:off x="11841480" y="6473880"/>
-            <a:ext cx="799560" cy="299520"/>
+            <a:ext cx="799200" cy="299160"/>
           </a:xfrm>
           <a:prstGeom prst="rect">
             <a:avLst/>
@@ -4142,6 +4177,9 @@
                 <a:spcPct val="100000"/>
               </a:lnSpc>
               <a:buNone/>
+              <a:tabLst>
+                <a:tab pos="0" algn="l"/>
+              </a:tabLst>
               <a:defRPr lang="en-US" sz="800" b="0" u="none" strike="noStrike">
                 <a:solidFill>
                   <a:srgbClr val="6B7280"/>
@@ -4159,8 +4197,11 @@
                 <a:spcPct val="100000"/>
               </a:lnSpc>
               <a:buNone/>
-            </a:pPr>
-            <a:fld id="{2BD0A08C-4ED0-41E2-9A63-129A04DE12F4}" type="slidenum">
+              <a:tabLst>
+                <a:tab pos="0" algn="l"/>
+              </a:tabLst>
+            </a:pPr>
+            <a:fld id="{B871E934-BFDF-4356-AD5A-0CC1E457DB81}" type="slidenum">
               <a:rPr lang="en-US" sz="800" b="0" u="none" strike="noStrike">
                 <a:solidFill>
                   <a:srgbClr val="6B7280"/>
@@ -4222,7 +4263,7 @@
         <p:spPr>
           <a:xfrm>
             <a:off x="502920" y="384120"/>
-            <a:ext cx="11155320" cy="502560"/>
+            <a:ext cx="11154960" cy="502200"/>
           </a:xfrm>
           <a:prstGeom prst="rect">
             <a:avLst/>
@@ -4261,7 +4302,7 @@
                 <a:latin typeface="Aptos Display"/>
                 <a:ea typeface="Aptos Display"/>
               </a:rPr>
-              <a:t>macOS: Install Node.js</a:t>
+              <a:t>Create the Next.js app</a:t>
             </a:r>
             <a:endParaRPr lang="en-US" sz="2700" b="0" u="none" strike="noStrike">
               <a:solidFill>
@@ -4283,7 +4324,7 @@
         <p:spPr>
           <a:xfrm>
             <a:off x="530280" y="914400"/>
-            <a:ext cx="10972440" cy="310680"/>
+            <a:ext cx="10972080" cy="310320"/>
           </a:xfrm>
           <a:prstGeom prst="rect">
             <a:avLst/>
@@ -4321,7 +4362,7 @@
                 <a:uFillTx/>
                 <a:latin typeface="Aptos"/>
               </a:rPr>
-              <a:t>Recommended classroom option: install the LTS package from Node.js.</a:t>
+              <a:t>Run these commands in PowerShell or Command Prompt.</a:t>
             </a:r>
             <a:endParaRPr lang="en-US" sz="1350" b="0" u="none" strike="noStrike">
               <a:solidFill>
@@ -4342,12 +4383,12 @@
         </p:nvSpPr>
         <p:spPr>
           <a:xfrm>
-            <a:off x="594360" y="1353240"/>
-            <a:ext cx="5303160" cy="4434480"/>
+            <a:off x="640080" y="1371600"/>
+            <a:ext cx="3474000" cy="4525560"/>
           </a:xfrm>
           <a:prstGeom prst="roundRect">
             <a:avLst>
-              <a:gd name="adj" fmla="val 1649"/>
+              <a:gd name="adj" fmla="val 2105"/>
             </a:avLst>
           </a:prstGeom>
           <a:solidFill>
@@ -4397,8 +4438,8 @@
         </p:nvSpPr>
         <p:spPr>
           <a:xfrm>
-            <a:off x="594360" y="1353240"/>
-            <a:ext cx="82080" cy="4434480"/>
+            <a:off x="640080" y="1371600"/>
+            <a:ext cx="81720" cy="4525560"/>
           </a:xfrm>
           <a:prstGeom prst="rect">
             <a:avLst/>
@@ -4420,7 +4461,7 @@
           <a:fontRef idx="minor"/>
         </p:style>
         <p:txBody>
-          <a:bodyPr lIns="90000" tIns="45000" rIns="90000" bIns="45000" anchor="t">
+          <a:bodyPr lIns="41040" tIns="45000" rIns="41040" bIns="45000" anchor="t">
             <a:noAutofit/>
           </a:bodyPr>
           <a:p>
@@ -4443,8 +4484,8 @@
         </p:nvSpPr>
         <p:spPr>
           <a:xfrm>
-            <a:off x="850320" y="1536120"/>
-            <a:ext cx="4891680" cy="310680"/>
+            <a:off x="896040" y="1554480"/>
+            <a:ext cx="3062520" cy="310320"/>
           </a:xfrm>
           <a:prstGeom prst="rect">
             <a:avLst/>
@@ -4482,7 +4523,7 @@
                 <a:uFillTx/>
                 <a:latin typeface="Aptos"/>
               </a:rPr>
-              <a:t>1. Download Node.js</a:t>
+              <a:t>1. Choose a folder</a:t>
             </a:r>
             <a:endParaRPr lang="en-US" sz="1700" b="0" u="none" strike="noStrike">
               <a:solidFill>
@@ -4503,8 +4544,8 @@
         </p:nvSpPr>
         <p:spPr>
           <a:xfrm>
-            <a:off x="850320" y="1956960"/>
-            <a:ext cx="4864320" cy="3666240"/>
+            <a:off x="896040" y="1974960"/>
+            <a:ext cx="3035160" cy="3757320"/>
           </a:xfrm>
           <a:prstGeom prst="rect">
             <a:avLst/>
@@ -4525,16 +4566,24 @@
             <a:noAutofit/>
           </a:bodyPr>
           <a:p>
-            <a:r>
-              <a:rPr lang="en-US" sz="1350" b="1" u="none" strike="noStrike">
-                <a:solidFill>
-                  <a:srgbClr val="111827"/>
+            <a:pPr defTabSz="914400">
+              <a:lnSpc>
+                <a:spcPct val="100000"/>
+              </a:lnSpc>
+              <a:tabLst>
+                <a:tab pos="0" algn="l"/>
+              </a:tabLst>
+            </a:pPr>
+            <a:r>
+              <a:rPr lang="en-US" sz="1350" b="0" u="none" strike="noStrike">
+                <a:solidFill>
+                  <a:srgbClr val="4B5563"/>
                 </a:solidFill>
                 <a:effectLst/>
                 <a:uFillTx/>
                 <a:latin typeface="Aptos"/>
               </a:rPr>
-              <a:t>Open:</a:t>
+              <a:t>Navigate to the folder where you want the project. Example:</a:t>
             </a:r>
             <a:endParaRPr lang="en-US" sz="1350" b="0" u="none" strike="noStrike">
               <a:solidFill>
@@ -4545,66 +4594,6 @@
               <a:latin typeface="Arial"/>
             </a:endParaRPr>
           </a:p>
-          <a:p>
-            <a:pPr defTabSz="914400">
-              <a:lnSpc>
-                <a:spcPct val="100000"/>
-              </a:lnSpc>
-              <a:tabLst>
-                <a:tab pos="0" algn="l"/>
-              </a:tabLst>
-            </a:pPr>
-            <a:r>
-              <a:rPr lang="en-US" sz="1350" b="0" u="sng" strike="noStrike">
-                <a:solidFill>
-                  <a:srgbClr val="2563EB"/>
-                </a:solidFill>
-                <a:effectLst/>
-                <a:uFillTx/>
-                <a:latin typeface="Aptos"/>
-                <a:hlinkClick r:id="rId1"/>
-              </a:rPr>
-              <a:t>https://nodejs.org/en/download
-</a:t>
-            </a:r>
-            <a:endParaRPr lang="en-US" sz="1350" b="0" u="none" strike="noStrike">
-              <a:solidFill>
-                <a:srgbClr val="000000"/>
-              </a:solidFill>
-              <a:effectLst/>
-              <a:uFillTx/>
-              <a:latin typeface="Arial"/>
-            </a:endParaRPr>
-          </a:p>
-          <a:p>
-            <a:pPr defTabSz="914400">
-              <a:lnSpc>
-                <a:spcPct val="100000"/>
-              </a:lnSpc>
-              <a:tabLst>
-                <a:tab pos="0" algn="l"/>
-              </a:tabLst>
-            </a:pPr>
-            <a:r>
-              <a:rPr lang="en-US" sz="1350" b="0" u="none" strike="noStrike">
-                <a:solidFill>
-                  <a:srgbClr val="4B5563"/>
-                </a:solidFill>
-                <a:effectLst/>
-                <a:uFillTx/>
-                <a:latin typeface="Aptos"/>
-              </a:rPr>
-              <a:t>Download the macOS Installer (.pkg) for the LTS release. Choose the build matching your Mac: Apple silicon or Intel.</a:t>
-            </a:r>
-            <a:endParaRPr lang="en-US" sz="1350" b="0" u="none" strike="noStrike">
-              <a:solidFill>
-                <a:srgbClr val="000000"/>
-              </a:solidFill>
-              <a:effectLst/>
-              <a:uFillTx/>
-              <a:latin typeface="Arial"/>
-            </a:endParaRPr>
-          </a:p>
         </p:txBody>
       </p:sp>
       <p:sp>
@@ -4615,12 +4604,181 @@
         </p:nvSpPr>
         <p:spPr>
           <a:xfrm>
-            <a:off x="6199560" y="1353240"/>
-            <a:ext cx="5394600" cy="4434480"/>
+            <a:off x="932760" y="2761560"/>
+            <a:ext cx="2879640" cy="1169640"/>
           </a:xfrm>
           <a:prstGeom prst="roundRect">
             <a:avLst>
-              <a:gd name="adj" fmla="val 1649"/>
+              <a:gd name="adj" fmla="val 4688"/>
+            </a:avLst>
+          </a:prstGeom>
+          <a:solidFill>
+            <a:srgbClr val="0F172A"/>
+          </a:solidFill>
+          <a:ln w="12700">
+            <a:solidFill>
+              <a:srgbClr val="0F172A"/>
+            </a:solidFill>
+            <a:round/>
+          </a:ln>
+        </p:spPr>
+        <p:style>
+          <a:lnRef idx="0"/>
+          <a:fillRef idx="0"/>
+          <a:effectRef idx="0"/>
+          <a:fontRef idx="minor"/>
+        </p:style>
+        <p:txBody>
+          <a:bodyPr lIns="90000" tIns="45000" rIns="90000" bIns="45000" anchor="t">
+            <a:noAutofit/>
+          </a:bodyPr>
+          <a:p>
+            <a:endParaRPr lang="en-US" sz="1800" b="0" u="none" strike="noStrike">
+              <a:solidFill>
+                <a:srgbClr val="FFFFFF"/>
+              </a:solidFill>
+              <a:effectLst/>
+              <a:uFillTx/>
+              <a:latin typeface="Arial"/>
+            </a:endParaRPr>
+          </a:p>
+        </p:txBody>
+      </p:sp>
+      <p:sp>
+        <p:nvSpPr>
+          <p:cNvPr id="54" name="Text 7"/>
+          <p:cNvSpPr/>
+          <p:nvPr/>
+        </p:nvSpPr>
+        <p:spPr>
+          <a:xfrm>
+            <a:off x="1134000" y="2926080"/>
+            <a:ext cx="2477160" cy="858960"/>
+          </a:xfrm>
+          <a:prstGeom prst="rect">
+            <a:avLst/>
+          </a:prstGeom>
+          <a:noFill/>
+          <a:ln w="0">
+            <a:noFill/>
+          </a:ln>
+        </p:spPr>
+        <p:style>
+          <a:lnRef idx="0"/>
+          <a:fillRef idx="0"/>
+          <a:effectRef idx="0"/>
+          <a:fontRef idx="minor"/>
+        </p:style>
+        <p:txBody>
+          <a:bodyPr lIns="360" tIns="360" rIns="360" bIns="360" anchor="ctr">
+            <a:noAutofit/>
+          </a:bodyPr>
+          <a:p>
+            <a:pPr defTabSz="914400">
+              <a:lnSpc>
+                <a:spcPct val="100000"/>
+              </a:lnSpc>
+              <a:tabLst>
+                <a:tab pos="0" algn="l"/>
+              </a:tabLst>
+            </a:pPr>
+            <a:r>
+              <a:rPr lang="en-US" sz="1350" b="0" u="none" strike="noStrike">
+                <a:solidFill>
+                  <a:srgbClr val="E5E7EB"/>
+                </a:solidFill>
+                <a:effectLst/>
+                <a:uFillTx/>
+                <a:latin typeface="Courier New"/>
+                <a:ea typeface="Courier New"/>
+              </a:rPr>
+              <a:t>cd Documents</a:t>
+            </a:r>
+            <a:endParaRPr lang="en-US" sz="1350" b="0" u="none" strike="noStrike">
+              <a:solidFill>
+                <a:srgbClr val="000000"/>
+              </a:solidFill>
+              <a:effectLst/>
+              <a:uFillTx/>
+              <a:latin typeface="Arial"/>
+            </a:endParaRPr>
+          </a:p>
+          <a:p>
+            <a:pPr defTabSz="914400">
+              <a:lnSpc>
+                <a:spcPct val="100000"/>
+              </a:lnSpc>
+              <a:tabLst>
+                <a:tab pos="0" algn="l"/>
+              </a:tabLst>
+            </a:pPr>
+            <a:r>
+              <a:rPr lang="en-US" sz="1350" b="0" u="none" strike="noStrike">
+                <a:solidFill>
+                  <a:srgbClr val="E5E7EB"/>
+                </a:solidFill>
+                <a:effectLst/>
+                <a:uFillTx/>
+                <a:latin typeface="Courier New"/>
+                <a:ea typeface="Courier New"/>
+              </a:rPr>
+              <a:t>mkdir db-project</a:t>
+            </a:r>
+            <a:endParaRPr lang="en-US" sz="1350" b="0" u="none" strike="noStrike">
+              <a:solidFill>
+                <a:srgbClr val="000000"/>
+              </a:solidFill>
+              <a:effectLst/>
+              <a:uFillTx/>
+              <a:latin typeface="Arial"/>
+            </a:endParaRPr>
+          </a:p>
+          <a:p>
+            <a:pPr defTabSz="914400">
+              <a:lnSpc>
+                <a:spcPct val="100000"/>
+              </a:lnSpc>
+              <a:tabLst>
+                <a:tab pos="0" algn="l"/>
+              </a:tabLst>
+            </a:pPr>
+            <a:r>
+              <a:rPr lang="en-US" sz="1350" b="0" u="none" strike="noStrike">
+                <a:solidFill>
+                  <a:srgbClr val="E5E7EB"/>
+                </a:solidFill>
+                <a:effectLst/>
+                <a:uFillTx/>
+                <a:latin typeface="Courier New"/>
+                <a:ea typeface="Courier New"/>
+              </a:rPr>
+              <a:t>cd db-project</a:t>
+            </a:r>
+            <a:endParaRPr lang="en-US" sz="1350" b="0" u="none" strike="noStrike">
+              <a:solidFill>
+                <a:srgbClr val="000000"/>
+              </a:solidFill>
+              <a:effectLst/>
+              <a:uFillTx/>
+              <a:latin typeface="Arial"/>
+            </a:endParaRPr>
+          </a:p>
+        </p:txBody>
+      </p:sp>
+      <p:sp>
+        <p:nvSpPr>
+          <p:cNvPr id="55" name="Shape 8"/>
+          <p:cNvSpPr/>
+          <p:nvPr/>
+        </p:nvSpPr>
+        <p:spPr>
+          <a:xfrm>
+            <a:off x="4370760" y="1371600"/>
+            <a:ext cx="3474000" cy="4525560"/>
+          </a:xfrm>
+          <a:prstGeom prst="roundRect">
+            <a:avLst>
+              <a:gd name="adj" fmla="val 2105"/>
             </a:avLst>
           </a:prstGeom>
           <a:solidFill>
@@ -4664,14 +4822,392 @@
       </p:sp>
       <p:sp>
         <p:nvSpPr>
-          <p:cNvPr id="54" name="Shape 7"/>
-          <p:cNvSpPr/>
-          <p:nvPr/>
-        </p:nvSpPr>
-        <p:spPr>
-          <a:xfrm>
-            <a:off x="6199560" y="1353240"/>
-            <a:ext cx="82080" cy="4434480"/>
+          <p:cNvPr id="56" name="Shape 9"/>
+          <p:cNvSpPr/>
+          <p:nvPr/>
+        </p:nvSpPr>
+        <p:spPr>
+          <a:xfrm>
+            <a:off x="4370760" y="1371600"/>
+            <a:ext cx="81720" cy="4525560"/>
+          </a:xfrm>
+          <a:prstGeom prst="rect">
+            <a:avLst/>
+          </a:prstGeom>
+          <a:solidFill>
+            <a:srgbClr val="7C3AED"/>
+          </a:solidFill>
+          <a:ln w="12700">
+            <a:solidFill>
+              <a:srgbClr val="7C3AED"/>
+            </a:solidFill>
+            <a:round/>
+          </a:ln>
+        </p:spPr>
+        <p:style>
+          <a:lnRef idx="0"/>
+          <a:fillRef idx="0"/>
+          <a:effectRef idx="0"/>
+          <a:fontRef idx="minor"/>
+        </p:style>
+        <p:txBody>
+          <a:bodyPr lIns="41040" tIns="45000" rIns="41040" bIns="45000" anchor="t">
+            <a:noAutofit/>
+          </a:bodyPr>
+          <a:p>
+            <a:endParaRPr lang="en-US" sz="1800" b="0" u="none" strike="noStrike">
+              <a:solidFill>
+                <a:srgbClr val="FFFFFF"/>
+              </a:solidFill>
+              <a:effectLst/>
+              <a:uFillTx/>
+              <a:latin typeface="Arial"/>
+            </a:endParaRPr>
+          </a:p>
+        </p:txBody>
+      </p:sp>
+      <p:sp>
+        <p:nvSpPr>
+          <p:cNvPr id="57" name="Text 10"/>
+          <p:cNvSpPr/>
+          <p:nvPr/>
+        </p:nvSpPr>
+        <p:spPr>
+          <a:xfrm>
+            <a:off x="4626720" y="1554480"/>
+            <a:ext cx="3062520" cy="310320"/>
+          </a:xfrm>
+          <a:prstGeom prst="rect">
+            <a:avLst/>
+          </a:prstGeom>
+          <a:noFill/>
+          <a:ln w="0">
+            <a:noFill/>
+          </a:ln>
+        </p:spPr>
+        <p:style>
+          <a:lnRef idx="0"/>
+          <a:fillRef idx="0"/>
+          <a:effectRef idx="0"/>
+          <a:fontRef idx="minor"/>
+        </p:style>
+        <p:txBody>
+          <a:bodyPr lIns="0" tIns="0" rIns="0" bIns="0" anchor="ctr">
+            <a:noAutofit/>
+          </a:bodyPr>
+          <a:p>
+            <a:pPr defTabSz="914400">
+              <a:lnSpc>
+                <a:spcPct val="100000"/>
+              </a:lnSpc>
+              <a:tabLst>
+                <a:tab pos="0" algn="l"/>
+              </a:tabLst>
+            </a:pPr>
+            <a:r>
+              <a:rPr lang="en-US" sz="1700" b="1" u="none" strike="noStrike">
+                <a:solidFill>
+                  <a:srgbClr val="111827"/>
+                </a:solidFill>
+                <a:effectLst/>
+                <a:uFillTx/>
+                <a:latin typeface="Aptos"/>
+              </a:rPr>
+              <a:t>2. Create the app</a:t>
+            </a:r>
+            <a:endParaRPr lang="en-US" sz="1700" b="0" u="none" strike="noStrike">
+              <a:solidFill>
+                <a:srgbClr val="000000"/>
+              </a:solidFill>
+              <a:effectLst/>
+              <a:uFillTx/>
+              <a:latin typeface="Arial"/>
+            </a:endParaRPr>
+          </a:p>
+        </p:txBody>
+      </p:sp>
+      <p:sp>
+        <p:nvSpPr>
+          <p:cNvPr id="58" name="Text 11"/>
+          <p:cNvSpPr/>
+          <p:nvPr/>
+        </p:nvSpPr>
+        <p:spPr>
+          <a:xfrm>
+            <a:off x="4626720" y="1974960"/>
+            <a:ext cx="3035160" cy="3757320"/>
+          </a:xfrm>
+          <a:prstGeom prst="rect">
+            <a:avLst/>
+          </a:prstGeom>
+          <a:noFill/>
+          <a:ln w="0">
+            <a:noFill/>
+          </a:ln>
+        </p:spPr>
+        <p:style>
+          <a:lnRef idx="0"/>
+          <a:fillRef idx="0"/>
+          <a:effectRef idx="0"/>
+          <a:fontRef idx="minor"/>
+        </p:style>
+        <p:txBody>
+          <a:bodyPr lIns="360" tIns="360" rIns="360" bIns="360" anchor="t">
+            <a:noAutofit/>
+          </a:bodyPr>
+          <a:p>
+            <a:pPr defTabSz="914400">
+              <a:lnSpc>
+                <a:spcPct val="100000"/>
+              </a:lnSpc>
+              <a:tabLst>
+                <a:tab pos="0" algn="l"/>
+              </a:tabLst>
+            </a:pPr>
+            <a:r>
+              <a:rPr lang="en-US" sz="1350" b="0" u="none" strike="noStrike">
+                <a:solidFill>
+                  <a:srgbClr val="4B5563"/>
+                </a:solidFill>
+                <a:effectLst/>
+                <a:uFillTx/>
+                <a:latin typeface="Aptos"/>
+              </a:rPr>
+              <a:t>Create a new project using the official Next.js CLI. Answer the prompts or accept the defaults.</a:t>
+            </a:r>
+            <a:endParaRPr lang="en-US" sz="1350" b="0" u="none" strike="noStrike">
+              <a:solidFill>
+                <a:srgbClr val="000000"/>
+              </a:solidFill>
+              <a:effectLst/>
+              <a:uFillTx/>
+              <a:latin typeface="Arial"/>
+            </a:endParaRPr>
+          </a:p>
+        </p:txBody>
+      </p:sp>
+      <p:sp>
+        <p:nvSpPr>
+          <p:cNvPr id="59" name="Shape 12"/>
+          <p:cNvSpPr/>
+          <p:nvPr/>
+        </p:nvSpPr>
+        <p:spPr>
+          <a:xfrm>
+            <a:off x="4645080" y="2761560"/>
+            <a:ext cx="2907000" cy="1169640"/>
+          </a:xfrm>
+          <a:prstGeom prst="roundRect">
+            <a:avLst>
+              <a:gd name="adj" fmla="val 4688"/>
+            </a:avLst>
+          </a:prstGeom>
+          <a:solidFill>
+            <a:srgbClr val="0F172A"/>
+          </a:solidFill>
+          <a:ln w="12700">
+            <a:solidFill>
+              <a:srgbClr val="0F172A"/>
+            </a:solidFill>
+            <a:round/>
+          </a:ln>
+        </p:spPr>
+        <p:style>
+          <a:lnRef idx="0"/>
+          <a:fillRef idx="0"/>
+          <a:effectRef idx="0"/>
+          <a:fontRef idx="minor"/>
+        </p:style>
+        <p:txBody>
+          <a:bodyPr lIns="90000" tIns="45000" rIns="90000" bIns="45000" anchor="t">
+            <a:noAutofit/>
+          </a:bodyPr>
+          <a:p>
+            <a:endParaRPr lang="en-US" sz="1800" b="0" u="none" strike="noStrike">
+              <a:solidFill>
+                <a:srgbClr val="FFFFFF"/>
+              </a:solidFill>
+              <a:effectLst/>
+              <a:uFillTx/>
+              <a:latin typeface="Arial"/>
+            </a:endParaRPr>
+          </a:p>
+        </p:txBody>
+      </p:sp>
+      <p:sp>
+        <p:nvSpPr>
+          <p:cNvPr id="60" name="Text 13"/>
+          <p:cNvSpPr/>
+          <p:nvPr/>
+        </p:nvSpPr>
+        <p:spPr>
+          <a:xfrm>
+            <a:off x="4846320" y="2926080"/>
+            <a:ext cx="2504880" cy="858960"/>
+          </a:xfrm>
+          <a:prstGeom prst="rect">
+            <a:avLst/>
+          </a:prstGeom>
+          <a:noFill/>
+          <a:ln w="0">
+            <a:noFill/>
+          </a:ln>
+        </p:spPr>
+        <p:style>
+          <a:lnRef idx="0"/>
+          <a:fillRef idx="0"/>
+          <a:effectRef idx="0"/>
+          <a:fontRef idx="minor"/>
+        </p:style>
+        <p:txBody>
+          <a:bodyPr lIns="360" tIns="360" rIns="360" bIns="360" anchor="ctr">
+            <a:noAutofit/>
+          </a:bodyPr>
+          <a:p>
+            <a:pPr defTabSz="914400">
+              <a:lnSpc>
+                <a:spcPct val="100000"/>
+              </a:lnSpc>
+              <a:tabLst>
+                <a:tab pos="0" algn="l"/>
+              </a:tabLst>
+            </a:pPr>
+            <a:r>
+              <a:rPr lang="en-US" sz="1350" b="0" u="none" strike="noStrike">
+                <a:solidFill>
+                  <a:srgbClr val="E5E7EB"/>
+                </a:solidFill>
+                <a:effectLst/>
+                <a:uFillTx/>
+                <a:latin typeface="Courier New"/>
+                <a:ea typeface="Courier New"/>
+              </a:rPr>
+              <a:t>npm create next-app@latest</a:t>
+            </a:r>
+            <a:endParaRPr lang="en-US" sz="1350" b="0" u="none" strike="noStrike">
+              <a:solidFill>
+                <a:srgbClr val="000000"/>
+              </a:solidFill>
+              <a:effectLst/>
+              <a:uFillTx/>
+              <a:latin typeface="Arial"/>
+            </a:endParaRPr>
+          </a:p>
+          <a:p>
+            <a:pPr defTabSz="914400">
+              <a:lnSpc>
+                <a:spcPct val="100000"/>
+              </a:lnSpc>
+              <a:tabLst>
+                <a:tab pos="0" algn="l"/>
+              </a:tabLst>
+            </a:pPr>
+            <a:endParaRPr lang="en-US" sz="1350" b="0" u="none" strike="noStrike">
+              <a:solidFill>
+                <a:srgbClr val="000000"/>
+              </a:solidFill>
+              <a:effectLst/>
+              <a:uFillTx/>
+              <a:latin typeface="Arial"/>
+            </a:endParaRPr>
+          </a:p>
+          <a:p>
+            <a:pPr defTabSz="914400">
+              <a:lnSpc>
+                <a:spcPct val="100000"/>
+              </a:lnSpc>
+              <a:tabLst>
+                <a:tab pos="0" algn="l"/>
+              </a:tabLst>
+            </a:pPr>
+            <a:r>
+              <a:rPr lang="en-US" sz="1350" b="0" u="none" strike="noStrike">
+                <a:solidFill>
+                  <a:srgbClr val="E5E7EB"/>
+                </a:solidFill>
+                <a:effectLst/>
+                <a:uFillTx/>
+                <a:latin typeface="Courier New"/>
+                <a:ea typeface="Courier New"/>
+              </a:rPr>
+              <a:t># Project name: my-app</a:t>
+            </a:r>
+            <a:endParaRPr lang="en-US" sz="1350" b="0" u="none" strike="noStrike">
+              <a:solidFill>
+                <a:srgbClr val="000000"/>
+              </a:solidFill>
+              <a:effectLst/>
+              <a:uFillTx/>
+              <a:latin typeface="Arial"/>
+            </a:endParaRPr>
+          </a:p>
+        </p:txBody>
+      </p:sp>
+      <p:sp>
+        <p:nvSpPr>
+          <p:cNvPr id="61" name="Shape 14"/>
+          <p:cNvSpPr/>
+          <p:nvPr/>
+        </p:nvSpPr>
+        <p:spPr>
+          <a:xfrm>
+            <a:off x="8101440" y="1371600"/>
+            <a:ext cx="3474000" cy="4525560"/>
+          </a:xfrm>
+          <a:prstGeom prst="roundRect">
+            <a:avLst>
+              <a:gd name="adj" fmla="val 2105"/>
+            </a:avLst>
+          </a:prstGeom>
+          <a:solidFill>
+            <a:srgbClr val="FFFFFF"/>
+          </a:solidFill>
+          <a:ln w="12700">
+            <a:solidFill>
+              <a:srgbClr val="D1D5DB"/>
+            </a:solidFill>
+            <a:round/>
+          </a:ln>
+          <a:effectLst>
+            <a:outerShdw algn="bl" dir="0" dist="0" kx="0" ky="0" rotWithShape="0" sx="100000" sy="100000">
+              <a:srgbClr val="000000">
+                <a:alpha val="0"/>
+              </a:srgbClr>
+            </a:outerShdw>
+          </a:effectLst>
+        </p:spPr>
+        <p:style>
+          <a:lnRef idx="0"/>
+          <a:fillRef idx="0"/>
+          <a:effectRef idx="0"/>
+          <a:fontRef idx="minor"/>
+        </p:style>
+        <p:txBody>
+          <a:bodyPr lIns="90000" tIns="45000" rIns="90000" bIns="45000" anchor="t">
+            <a:noAutofit/>
+          </a:bodyPr>
+          <a:p>
+            <a:endParaRPr lang="en-US" sz="1800" b="0" u="none" strike="noStrike">
+              <a:solidFill>
+                <a:srgbClr val="000000"/>
+              </a:solidFill>
+              <a:effectLst/>
+              <a:uFillTx/>
+              <a:latin typeface="Arial"/>
+            </a:endParaRPr>
+          </a:p>
+        </p:txBody>
+      </p:sp>
+      <p:sp>
+        <p:nvSpPr>
+          <p:cNvPr id="62" name="Shape 15"/>
+          <p:cNvSpPr/>
+          <p:nvPr/>
+        </p:nvSpPr>
+        <p:spPr>
+          <a:xfrm>
+            <a:off x="8101440" y="1371600"/>
+            <a:ext cx="81720" cy="4525560"/>
           </a:xfrm>
           <a:prstGeom prst="rect">
             <a:avLst/>
@@ -4693,7 +5229,7 @@
           <a:fontRef idx="minor"/>
         </p:style>
         <p:txBody>
-          <a:bodyPr lIns="90000" tIns="45000" rIns="90000" bIns="45000" anchor="t">
+          <a:bodyPr lIns="41040" tIns="45000" rIns="41040" bIns="45000" anchor="t">
             <a:noAutofit/>
           </a:bodyPr>
           <a:p>
@@ -4710,14 +5246,14 @@
       </p:sp>
       <p:sp>
         <p:nvSpPr>
-          <p:cNvPr id="55" name="Text 8"/>
-          <p:cNvSpPr/>
-          <p:nvPr/>
-        </p:nvSpPr>
-        <p:spPr>
-          <a:xfrm>
-            <a:off x="6455520" y="1536120"/>
-            <a:ext cx="4983120" cy="310680"/>
+          <p:cNvPr id="63" name="Text 16"/>
+          <p:cNvSpPr/>
+          <p:nvPr/>
+        </p:nvSpPr>
+        <p:spPr>
+          <a:xfrm>
+            <a:off x="8357760" y="1554480"/>
+            <a:ext cx="3062520" cy="310320"/>
           </a:xfrm>
           <a:prstGeom prst="rect">
             <a:avLst/>
@@ -4755,7 +5291,7 @@
                 <a:uFillTx/>
                 <a:latin typeface="Aptos"/>
               </a:rPr>
-              <a:t>2. Install and verify</a:t>
+              <a:t>3. Start development</a:t>
             </a:r>
             <a:endParaRPr lang="en-US" sz="1700" b="0" u="none" strike="noStrike">
               <a:solidFill>
@@ -4770,14 +5306,14 @@
       </p:sp>
       <p:sp>
         <p:nvSpPr>
-          <p:cNvPr id="56" name="Text 9"/>
-          <p:cNvSpPr/>
-          <p:nvPr/>
-        </p:nvSpPr>
-        <p:spPr>
-          <a:xfrm>
-            <a:off x="6455520" y="1956960"/>
-            <a:ext cx="4955760" cy="3666240"/>
+          <p:cNvPr id="64" name="Text 17"/>
+          <p:cNvSpPr/>
+          <p:nvPr/>
+        </p:nvSpPr>
+        <p:spPr>
+          <a:xfrm>
+            <a:off x="8357760" y="1974960"/>
+            <a:ext cx="3035160" cy="3757320"/>
           </a:xfrm>
           <a:prstGeom prst="rect">
             <a:avLst/>
@@ -4815,7 +5351,7 @@
                 <a:uFillTx/>
                 <a:latin typeface="Aptos"/>
               </a:rPr>
-              <a:t>Open the .pkg file and follow the installer. Then open Terminal and verify Node.js and npm:</a:t>
+              <a:t>Enter the generated project folder and launch the development server.</a:t>
             </a:r>
             <a:endParaRPr lang="en-US" sz="1350" b="0" u="none" strike="noStrike">
               <a:solidFill>
@@ -4830,18 +5366,18 @@
       </p:sp>
       <p:sp>
         <p:nvSpPr>
-          <p:cNvPr id="57" name="Shape 10"/>
-          <p:cNvSpPr/>
-          <p:nvPr/>
-        </p:nvSpPr>
-        <p:spPr>
-          <a:xfrm>
-            <a:off x="6537960" y="3090600"/>
-            <a:ext cx="4708800" cy="1298160"/>
+          <p:cNvPr id="65" name="Shape 18"/>
+          <p:cNvSpPr/>
+          <p:nvPr/>
+        </p:nvSpPr>
+        <p:spPr>
+          <a:xfrm>
+            <a:off x="8375760" y="2761560"/>
+            <a:ext cx="2907000" cy="1169640"/>
           </a:xfrm>
           <a:prstGeom prst="roundRect">
             <a:avLst>
-              <a:gd name="adj" fmla="val 4225"/>
+              <a:gd name="adj" fmla="val 4688"/>
             </a:avLst>
           </a:prstGeom>
           <a:solidFill>
@@ -4878,14 +5414,14 @@
       </p:sp>
       <p:sp>
         <p:nvSpPr>
-          <p:cNvPr id="58" name="Text 11"/>
-          <p:cNvSpPr/>
-          <p:nvPr/>
-        </p:nvSpPr>
-        <p:spPr>
-          <a:xfrm>
-            <a:off x="6739200" y="3255120"/>
-            <a:ext cx="4306320" cy="987120"/>
+          <p:cNvPr id="66" name="Text 19"/>
+          <p:cNvSpPr/>
+          <p:nvPr/>
+        </p:nvSpPr>
+        <p:spPr>
+          <a:xfrm>
+            <a:off x="8577000" y="2926080"/>
+            <a:ext cx="2504880" cy="858960"/>
           </a:xfrm>
           <a:prstGeom prst="rect">
             <a:avLst/>
@@ -4924,7 +5460,7 @@
                 <a:latin typeface="Courier New"/>
                 <a:ea typeface="Courier New"/>
               </a:rPr>
-              <a:t>node --version</a:t>
+              <a:t>cd my-app</a:t>
             </a:r>
             <a:endParaRPr lang="en-US" sz="1350" b="0" u="none" strike="noStrike">
               <a:solidFill>
@@ -4954,7 +5490,7 @@
                 <a:latin typeface="Courier New"/>
                 <a:ea typeface="Courier New"/>
               </a:rPr>
-              <a:t>npm --version</a:t>
+              <a:t>npm run dev</a:t>
             </a:r>
             <a:endParaRPr lang="en-US" sz="1350" b="0" u="none" strike="noStrike">
               <a:solidFill>
@@ -4969,77 +5505,31 @@
       </p:sp>
       <p:sp>
         <p:nvSpPr>
-          <p:cNvPr id="59" name="Shape 12"/>
-          <p:cNvSpPr/>
-          <p:nvPr/>
-        </p:nvSpPr>
-        <p:spPr>
-          <a:xfrm>
-            <a:off x="6565320" y="4745880"/>
-            <a:ext cx="209880" cy="209880"/>
-          </a:xfrm>
-          <a:prstGeom prst="ellipse">
-            <a:avLst/>
-          </a:prstGeom>
-          <a:solidFill>
-            <a:srgbClr val="16A34A"/>
-          </a:solidFill>
-          <a:ln w="12700">
-            <a:solidFill>
-              <a:srgbClr val="16A34A"/>
-            </a:solidFill>
-            <a:round/>
-          </a:ln>
-        </p:spPr>
-        <p:style>
-          <a:lnRef idx="0"/>
-          <a:fillRef idx="0"/>
-          <a:effectRef idx="0"/>
-          <a:fontRef idx="minor"/>
-        </p:style>
-        <p:txBody>
-          <a:bodyPr lIns="90000" tIns="45000" rIns="90000" bIns="45000" anchor="t">
-            <a:noAutofit/>
-          </a:bodyPr>
-          <a:p>
-            <a:endParaRPr lang="en-US" sz="1800" b="0" u="none" strike="noStrike">
-              <a:solidFill>
-                <a:srgbClr val="FFFFFF"/>
-              </a:solidFill>
-              <a:effectLst/>
-              <a:uFillTx/>
-              <a:latin typeface="Arial"/>
-            </a:endParaRPr>
-          </a:p>
-        </p:txBody>
-      </p:sp>
-      <p:sp>
-        <p:nvSpPr>
-          <p:cNvPr id="60" name="Text 13"/>
-          <p:cNvSpPr/>
-          <p:nvPr/>
-        </p:nvSpPr>
-        <p:spPr>
-          <a:xfrm>
-            <a:off x="6579000" y="4722840"/>
-            <a:ext cx="182520" cy="200880"/>
-          </a:xfrm>
-          <a:prstGeom prst="rect">
-            <a:avLst/>
-          </a:prstGeom>
-          <a:noFill/>
-          <a:ln w="0">
-            <a:noFill/>
-          </a:ln>
-        </p:spPr>
-        <p:style>
-          <a:lnRef idx="0"/>
-          <a:fillRef idx="0"/>
-          <a:effectRef idx="0"/>
-          <a:fontRef idx="minor"/>
-        </p:style>
-        <p:txBody>
-          <a:bodyPr lIns="0" tIns="0" rIns="0" bIns="0" anchor="ctr">
+          <p:cNvPr id="67" name="Text 20"/>
+          <p:cNvSpPr/>
+          <p:nvPr/>
+        </p:nvSpPr>
+        <p:spPr>
+          <a:xfrm>
+            <a:off x="8366760" y="4316040"/>
+            <a:ext cx="2907000" cy="639360"/>
+          </a:xfrm>
+          <a:prstGeom prst="rect">
+            <a:avLst/>
+          </a:prstGeom>
+          <a:noFill/>
+          <a:ln w="0">
+            <a:noFill/>
+          </a:ln>
+        </p:spPr>
+        <p:style>
+          <a:lnRef idx="0"/>
+          <a:fillRef idx="0"/>
+          <a:effectRef idx="0"/>
+          <a:fontRef idx="minor"/>
+        </p:style>
+        <p:txBody>
+          <a:bodyPr lIns="360" tIns="360" rIns="360" bIns="360" anchor="ctr">
             <a:noAutofit/>
           </a:bodyPr>
           <a:p>
@@ -5052,150 +5542,30 @@
               </a:tabLst>
             </a:pPr>
             <a:r>
-              <a:rPr lang="en-US" sz="1200" b="1" u="none" strike="noStrike">
-                <a:solidFill>
-                  <a:srgbClr val="FFFFFF"/>
+              <a:rPr lang="en-US" sz="1400" b="1" u="none" strike="noStrike">
+                <a:solidFill>
+                  <a:srgbClr val="111827"/>
                 </a:solidFill>
                 <a:effectLst/>
                 <a:uFillTx/>
                 <a:latin typeface="Aptos"/>
               </a:rPr>
-              <a:t>✓</a:t>
-            </a:r>
-            <a:endParaRPr lang="en-US" sz="1200" b="0" u="none" strike="noStrike">
-              <a:solidFill>
-                <a:srgbClr val="000000"/>
-              </a:solidFill>
-              <a:effectLst/>
-              <a:uFillTx/>
-              <a:latin typeface="Arial"/>
-            </a:endParaRPr>
-          </a:p>
-        </p:txBody>
-      </p:sp>
-      <p:sp>
-        <p:nvSpPr>
-          <p:cNvPr id="61" name="Text 14"/>
-          <p:cNvSpPr/>
-          <p:nvPr/>
-        </p:nvSpPr>
-        <p:spPr>
-          <a:xfrm>
-            <a:off x="6876360" y="4727520"/>
-            <a:ext cx="4845960" cy="273960"/>
-          </a:xfrm>
-          <a:prstGeom prst="rect">
-            <a:avLst/>
-          </a:prstGeom>
-          <a:noFill/>
-          <a:ln w="0">
-            <a:noFill/>
-          </a:ln>
-        </p:spPr>
-        <p:style>
-          <a:lnRef idx="0"/>
-          <a:fillRef idx="0"/>
-          <a:effectRef idx="0"/>
-          <a:fontRef idx="minor"/>
-        </p:style>
-        <p:txBody>
-          <a:bodyPr lIns="0" tIns="0" rIns="0" bIns="0" anchor="ctr">
-            <a:noAutofit/>
-          </a:bodyPr>
-          <a:p>
-            <a:pPr defTabSz="914400">
-              <a:lnSpc>
-                <a:spcPct val="100000"/>
-              </a:lnSpc>
-              <a:tabLst>
-                <a:tab pos="0" algn="l"/>
-              </a:tabLst>
-            </a:pPr>
-            <a:r>
-              <a:rPr lang="en-US" sz="1350" b="0" u="none" strike="noStrike">
-                <a:solidFill>
-                  <a:srgbClr val="111827"/>
-                </a:solidFill>
-                <a:effectLst/>
-                <a:uFillTx/>
-                <a:latin typeface="Aptos"/>
-              </a:rPr>
-              <a:t>Both commands should print version numbers.</a:t>
-            </a:r>
-            <a:endParaRPr lang="en-US" sz="1350" b="0" u="none" strike="noStrike">
-              <a:solidFill>
-                <a:srgbClr val="000000"/>
-              </a:solidFill>
-              <a:effectLst/>
-              <a:uFillTx/>
-              <a:latin typeface="Arial"/>
-            </a:endParaRPr>
-          </a:p>
-        </p:txBody>
-      </p:sp>
-      <p:sp>
-        <p:nvSpPr>
-          <p:cNvPr id="62" name="Text 15"/>
-          <p:cNvSpPr/>
-          <p:nvPr/>
-        </p:nvSpPr>
-        <p:spPr>
-          <a:xfrm>
-            <a:off x="777240" y="5925240"/>
-            <a:ext cx="7314840" cy="273960"/>
-          </a:xfrm>
-          <a:prstGeom prst="rect">
-            <a:avLst/>
-          </a:prstGeom>
-          <a:noFill/>
-          <a:ln w="0">
-            <a:noFill/>
-          </a:ln>
-        </p:spPr>
-        <p:style>
-          <a:lnRef idx="0"/>
-          <a:fillRef idx="0"/>
-          <a:effectRef idx="0"/>
-          <a:fontRef idx="minor"/>
-        </p:style>
-        <p:txBody>
-          <a:bodyPr lIns="0" tIns="0" rIns="0" bIns="0" anchor="ctr">
-            <a:noAutofit/>
-          </a:bodyPr>
-          <a:p>
-            <a:pPr defTabSz="914400">
-              <a:lnSpc>
-                <a:spcPct val="100000"/>
-              </a:lnSpc>
-              <a:tabLst>
-                <a:tab pos="0" algn="l"/>
-              </a:tabLst>
-            </a:pPr>
-            <a:r>
-              <a:rPr lang="en-US" sz="1100" b="0" i="1" u="none" strike="noStrike">
-                <a:solidFill>
-                  <a:srgbClr val="4B5563"/>
-                </a:solidFill>
-                <a:effectLst/>
-                <a:uFillTx/>
-                <a:latin typeface="Aptos"/>
-              </a:rPr>
-              <a:t>Optional for experienced users: install through a version manager such as nvm.</a:t>
-            </a:r>
-            <a:endParaRPr lang="en-US" sz="1100" b="0" u="none" strike="noStrike">
-              <a:solidFill>
-                <a:srgbClr val="000000"/>
-              </a:solidFill>
-              <a:effectLst/>
-              <a:uFillTx/>
-              <a:latin typeface="Arial"/>
-            </a:endParaRPr>
-          </a:p>
-        </p:txBody>
-      </p:sp>
-      <p:sp>
-        <p:nvSpPr>
-          <p:cNvPr id="63" name="PlaceHolder 1"/>
+              <a:t>Open http://localhost:3000 in your browser.</a:t>
+            </a:r>
+            <a:endParaRPr lang="en-US" sz="1400" b="0" u="none" strike="noStrike">
+              <a:solidFill>
+                <a:srgbClr val="000000"/>
+              </a:solidFill>
+              <a:effectLst/>
+              <a:uFillTx/>
+              <a:latin typeface="Arial"/>
+            </a:endParaRPr>
+          </a:p>
+        </p:txBody>
+      </p:sp>
+      <p:sp>
+        <p:nvSpPr>
+          <p:cNvPr id="68" name="PlaceHolder 1"/>
           <p:cNvSpPr>
             <a:spLocks noGrp="1"/>
           </p:cNvSpPr>
@@ -5206,7 +5576,7 @@
         <p:spPr>
           <a:xfrm>
             <a:off x="11841480" y="6473880"/>
-            <a:ext cx="799560" cy="299520"/>
+            <a:ext cx="799200" cy="299160"/>
           </a:xfrm>
           <a:prstGeom prst="rect">
             <a:avLst/>
@@ -5226,6 +5596,9 @@
                 <a:spcPct val="100000"/>
               </a:lnSpc>
               <a:buNone/>
+              <a:tabLst>
+                <a:tab pos="0" algn="l"/>
+              </a:tabLst>
               <a:defRPr lang="en-US" sz="800" b="0" u="none" strike="noStrike">
                 <a:solidFill>
                   <a:srgbClr val="6B7280"/>
@@ -5243,8 +5616,11 @@
                 <a:spcPct val="100000"/>
               </a:lnSpc>
               <a:buNone/>
-            </a:pPr>
-            <a:fld id="{0602712C-B8BE-49AB-A64A-B191EDA45FC6}" type="slidenum">
+              <a:tabLst>
+                <a:tab pos="0" algn="l"/>
+              </a:tabLst>
+            </a:pPr>
+            <a:fld id="{E3CED893-6761-49DA-A006-0B052281BA8E}" type="slidenum">
               <a:rPr lang="en-US" sz="800" b="0" u="none" strike="noStrike">
                 <a:solidFill>
                   <a:srgbClr val="6B7280"/>
@@ -5263,6 +5639,140 @@
               <a:effectLst/>
               <a:uFillTx/>
               <a:latin typeface="Times New Roman"/>
+            </a:endParaRPr>
+          </a:p>
+        </p:txBody>
+      </p:sp>
+      <p:sp>
+        <p:nvSpPr>
+          <p:cNvPr id="69" name="Shape 25"/>
+          <p:cNvSpPr/>
+          <p:nvPr/>
+        </p:nvSpPr>
+        <p:spPr>
+          <a:xfrm>
+            <a:off x="914400" y="4343400"/>
+            <a:ext cx="2879640" cy="1169640"/>
+          </a:xfrm>
+          <a:prstGeom prst="roundRect">
+            <a:avLst>
+              <a:gd name="adj" fmla="val 4688"/>
+            </a:avLst>
+          </a:prstGeom>
+          <a:solidFill>
+            <a:srgbClr val="0F172A"/>
+          </a:solidFill>
+          <a:ln w="12700">
+            <a:solidFill>
+              <a:srgbClr val="0F172A"/>
+            </a:solidFill>
+            <a:round/>
+          </a:ln>
+        </p:spPr>
+        <p:style>
+          <a:lnRef idx="0"/>
+          <a:fillRef idx="0"/>
+          <a:effectRef idx="0"/>
+          <a:fontRef idx="minor"/>
+        </p:style>
+        <p:txBody>
+          <a:bodyPr lIns="90000" tIns="45000" rIns="90000" bIns="45000" anchor="t">
+            <a:noAutofit/>
+          </a:bodyPr>
+          <a:p>
+            <a:pPr>
+              <a:lnSpc>
+                <a:spcPct val="100000"/>
+              </a:lnSpc>
+            </a:pPr>
+            <a:endParaRPr lang="en-US" sz="1350" b="0" u="none" strike="noStrike">
+              <a:solidFill>
+                <a:srgbClr val="FFFFFF"/>
+              </a:solidFill>
+              <a:effectLst/>
+              <a:uFillTx/>
+              <a:latin typeface="Arial"/>
+            </a:endParaRPr>
+          </a:p>
+          <a:p>
+            <a:pPr>
+              <a:lnSpc>
+                <a:spcPct val="100000"/>
+              </a:lnSpc>
+            </a:pPr>
+            <a:r>
+              <a:rPr lang="en-US" sz="1350" b="0" u="none" strike="noStrike">
+                <a:solidFill>
+                  <a:srgbClr val="E5E7EB"/>
+                </a:solidFill>
+                <a:effectLst/>
+                <a:uFillTx/>
+                <a:latin typeface="Courier New"/>
+                <a:ea typeface="Courier New"/>
+              </a:rPr>
+              <a:t>cd ~/Documents</a:t>
+            </a:r>
+            <a:endParaRPr lang="en-US" sz="1350" b="0" u="none" strike="noStrike">
+              <a:solidFill>
+                <a:srgbClr val="FFFFFF"/>
+              </a:solidFill>
+              <a:effectLst/>
+              <a:uFillTx/>
+              <a:latin typeface="Arial"/>
+            </a:endParaRPr>
+          </a:p>
+          <a:p>
+            <a:pPr>
+              <a:lnSpc>
+                <a:spcPct val="100000"/>
+              </a:lnSpc>
+            </a:pPr>
+            <a:r>
+              <a:rPr lang="en-US" sz="1350" b="0" u="none" strike="noStrike">
+                <a:solidFill>
+                  <a:srgbClr val="E5E7EB"/>
+                </a:solidFill>
+                <a:effectLst/>
+                <a:uFillTx/>
+                <a:latin typeface="Courier New"/>
+                <a:ea typeface="Courier New"/>
+              </a:rPr>
+              <a:t>mkdir db-project</a:t>
+            </a:r>
+            <a:endParaRPr lang="en-US" sz="1350" b="0" u="none" strike="noStrike">
+              <a:solidFill>
+                <a:srgbClr val="FFFFFF"/>
+              </a:solidFill>
+              <a:effectLst/>
+              <a:uFillTx/>
+              <a:latin typeface="Arial"/>
+            </a:endParaRPr>
+          </a:p>
+          <a:p>
+            <a:pPr>
+              <a:lnSpc>
+                <a:spcPct val="100000"/>
+              </a:lnSpc>
+            </a:pPr>
+            <a:r>
+              <a:rPr lang="en-US" sz="1350" b="0" u="none" strike="noStrike">
+                <a:solidFill>
+                  <a:srgbClr val="E5E7EB"/>
+                </a:solidFill>
+                <a:effectLst/>
+                <a:uFillTx/>
+                <a:latin typeface="Courier New"/>
+                <a:ea typeface="Courier New"/>
+              </a:rPr>
+              <a:t>cd db-project</a:t>
+            </a:r>
+            <a:endParaRPr lang="en-US" sz="1350" b="0" u="none" strike="noStrike">
+              <a:solidFill>
+                <a:srgbClr val="FFFFFF"/>
+              </a:solidFill>
+              <a:effectLst/>
+              <a:uFillTx/>
+              <a:latin typeface="Arial"/>
             </a:endParaRPr>
           </a:p>
         </p:txBody>
@@ -5299,14 +5809,14 @@
       </p:grpSpPr>
       <p:sp>
         <p:nvSpPr>
-          <p:cNvPr id="64" name="Text 0"/>
+          <p:cNvPr id="70" name="Text 0"/>
           <p:cNvSpPr/>
           <p:nvPr/>
         </p:nvSpPr>
         <p:spPr>
           <a:xfrm>
             <a:off x="502920" y="384120"/>
-            <a:ext cx="11155320" cy="502560"/>
+            <a:ext cx="11154960" cy="502200"/>
           </a:xfrm>
           <a:prstGeom prst="rect">
             <a:avLst/>
@@ -5345,7 +5855,7 @@
                 <a:latin typeface="Aptos Display"/>
                 <a:ea typeface="Aptos Display"/>
               </a:rPr>
-              <a:t>Windows: Create the Next.js app</a:t>
+              <a:t>Install PostgreSQL support</a:t>
             </a:r>
             <a:endParaRPr lang="en-US" sz="2700" b="0" u="none" strike="noStrike">
               <a:solidFill>
@@ -5360,14 +5870,14 @@
       </p:sp>
       <p:sp>
         <p:nvSpPr>
-          <p:cNvPr id="65" name="Text 1"/>
+          <p:cNvPr id="71" name="Text 1"/>
           <p:cNvSpPr/>
           <p:nvPr/>
         </p:nvSpPr>
         <p:spPr>
           <a:xfrm>
             <a:off x="530280" y="914400"/>
-            <a:ext cx="10972440" cy="310680"/>
+            <a:ext cx="10972080" cy="310320"/>
           </a:xfrm>
           <a:prstGeom prst="rect">
             <a:avLst/>
@@ -5405,7 +5915,7 @@
                 <a:uFillTx/>
                 <a:latin typeface="Aptos"/>
               </a:rPr>
-              <a:t>Run these commands in PowerShell or Command Prompt.</a:t>
+              <a:t>The common Node.js PostgreSQL package is node-postgres, installed as pg.</a:t>
             </a:r>
             <a:endParaRPr lang="en-US" sz="1350" b="0" u="none" strike="noStrike">
               <a:solidFill>
@@ -5420,18 +5930,18 @@
       </p:sp>
       <p:sp>
         <p:nvSpPr>
-          <p:cNvPr id="66" name="Shape 2"/>
-          <p:cNvSpPr/>
-          <p:nvPr/>
-        </p:nvSpPr>
-        <p:spPr>
-          <a:xfrm>
-            <a:off x="640080" y="1371600"/>
-            <a:ext cx="3474360" cy="4525920"/>
+          <p:cNvPr id="72" name="Shape 2"/>
+          <p:cNvSpPr/>
+          <p:nvPr/>
+        </p:nvSpPr>
+        <p:spPr>
+          <a:xfrm>
+            <a:off x="658440" y="1353240"/>
+            <a:ext cx="10771200" cy="4498200"/>
           </a:xfrm>
           <a:prstGeom prst="roundRect">
             <a:avLst>
-              <a:gd name="adj" fmla="val 2105"/>
+              <a:gd name="adj" fmla="val 1975"/>
             </a:avLst>
           </a:prstGeom>
           <a:solidFill>
@@ -5475,24 +5985,24 @@
       </p:sp>
       <p:sp>
         <p:nvSpPr>
-          <p:cNvPr id="67" name="Shape 3"/>
-          <p:cNvSpPr/>
-          <p:nvPr/>
-        </p:nvSpPr>
-        <p:spPr>
-          <a:xfrm>
-            <a:off x="640080" y="1371600"/>
-            <a:ext cx="82080" cy="4525920"/>
+          <p:cNvPr id="73" name="Shape 3"/>
+          <p:cNvSpPr/>
+          <p:nvPr/>
+        </p:nvSpPr>
+        <p:spPr>
+          <a:xfrm>
+            <a:off x="658440" y="1353240"/>
+            <a:ext cx="81720" cy="4498200"/>
           </a:xfrm>
           <a:prstGeom prst="rect">
             <a:avLst/>
           </a:prstGeom>
           <a:solidFill>
-            <a:srgbClr val="2563EB"/>
+            <a:srgbClr val="16A34A"/>
           </a:solidFill>
           <a:ln w="12700">
             <a:solidFill>
-              <a:srgbClr val="2563EB"/>
+              <a:srgbClr val="16A34A"/>
             </a:solidFill>
             <a:round/>
           </a:ln>
@@ -5504,7 +6014,7 @@
           <a:fontRef idx="minor"/>
         </p:style>
         <p:txBody>
-          <a:bodyPr lIns="90000" tIns="45000" rIns="90000" bIns="45000" anchor="t">
+          <a:bodyPr lIns="41040" tIns="45000" rIns="41040" bIns="45000" anchor="t">
             <a:noAutofit/>
           </a:bodyPr>
           <a:p>
@@ -5521,14 +6031,14 @@
       </p:sp>
       <p:sp>
         <p:nvSpPr>
-          <p:cNvPr id="68" name="Text 4"/>
-          <p:cNvSpPr/>
-          <p:nvPr/>
-        </p:nvSpPr>
-        <p:spPr>
-          <a:xfrm>
-            <a:off x="896040" y="1554480"/>
-            <a:ext cx="3062880" cy="310680"/>
+          <p:cNvPr id="74" name="Text 4"/>
+          <p:cNvSpPr/>
+          <p:nvPr/>
+        </p:nvSpPr>
+        <p:spPr>
+          <a:xfrm>
+            <a:off x="914400" y="1536120"/>
+            <a:ext cx="3291120" cy="310320"/>
           </a:xfrm>
           <a:prstGeom prst="rect">
             <a:avLst/>
@@ -5566,7 +6076,7 @@
                 <a:uFillTx/>
                 <a:latin typeface="Aptos"/>
               </a:rPr>
-              <a:t>1. Choose a folder</a:t>
+              <a:t>Install inside the app</a:t>
             </a:r>
             <a:endParaRPr lang="en-US" sz="1700" b="0" u="none" strike="noStrike">
               <a:solidFill>
@@ -5581,14 +6091,14 @@
       </p:sp>
       <p:sp>
         <p:nvSpPr>
-          <p:cNvPr id="69" name="Text 5"/>
-          <p:cNvSpPr/>
-          <p:nvPr/>
-        </p:nvSpPr>
-        <p:spPr>
-          <a:xfrm>
-            <a:off x="896040" y="1974960"/>
-            <a:ext cx="3035520" cy="3757680"/>
+          <p:cNvPr id="75" name="Text 5"/>
+          <p:cNvSpPr/>
+          <p:nvPr/>
+        </p:nvSpPr>
+        <p:spPr>
+          <a:xfrm>
+            <a:off x="914400" y="1956960"/>
+            <a:ext cx="3263760" cy="3729960"/>
           </a:xfrm>
           <a:prstGeom prst="rect">
             <a:avLst/>
@@ -5626,7 +6136,7 @@
                 <a:uFillTx/>
                 <a:latin typeface="Aptos"/>
               </a:rPr>
-              <a:t>Navigate to the folder where you want the project. Example:</a:t>
+              <a:t>Stop the development server with Ctrl+C if needed. From the project folder, install the package:</a:t>
             </a:r>
             <a:endParaRPr lang="en-US" sz="1350" b="0" u="none" strike="noStrike">
               <a:solidFill>
@@ -5641,18 +6151,18 @@
       </p:sp>
       <p:sp>
         <p:nvSpPr>
-          <p:cNvPr id="70" name="Shape 6"/>
-          <p:cNvSpPr/>
-          <p:nvPr/>
-        </p:nvSpPr>
-        <p:spPr>
-          <a:xfrm>
-            <a:off x="932760" y="2761560"/>
-            <a:ext cx="2880000" cy="1170000"/>
+          <p:cNvPr id="76" name="Shape 6"/>
+          <p:cNvSpPr/>
+          <p:nvPr/>
+        </p:nvSpPr>
+        <p:spPr>
+          <a:xfrm>
+            <a:off x="960120" y="2770560"/>
+            <a:ext cx="3089880" cy="932040"/>
           </a:xfrm>
           <a:prstGeom prst="roundRect">
             <a:avLst>
-              <a:gd name="adj" fmla="val 4688"/>
+              <a:gd name="adj" fmla="val 5882"/>
             </a:avLst>
           </a:prstGeom>
           <a:solidFill>
@@ -5689,14 +6199,14 @@
       </p:sp>
       <p:sp>
         <p:nvSpPr>
-          <p:cNvPr id="71" name="Text 7"/>
-          <p:cNvSpPr/>
-          <p:nvPr/>
-        </p:nvSpPr>
-        <p:spPr>
-          <a:xfrm>
-            <a:off x="1134000" y="2926080"/>
-            <a:ext cx="2477520" cy="859320"/>
+          <p:cNvPr id="77" name="Text 7"/>
+          <p:cNvSpPr/>
+          <p:nvPr/>
+        </p:nvSpPr>
+        <p:spPr>
+          <a:xfrm>
+            <a:off x="1161360" y="2935080"/>
+            <a:ext cx="2687760" cy="621000"/>
           </a:xfrm>
           <a:prstGeom prst="rect">
             <a:avLst/>
@@ -5735,7 +6245,7 @@
                 <a:latin typeface="Courier New"/>
                 <a:ea typeface="Courier New"/>
               </a:rPr>
-              <a:t>cd Documents</a:t>
+              <a:t>npm install pg</a:t>
             </a:r>
             <a:endParaRPr lang="en-US" sz="1350" b="0" u="none" strike="noStrike">
               <a:solidFill>
@@ -5746,6 +6256,37 @@
               <a:latin typeface="Arial"/>
             </a:endParaRPr>
           </a:p>
+        </p:txBody>
+      </p:sp>
+      <p:sp>
+        <p:nvSpPr>
+          <p:cNvPr id="78" name="Text 8"/>
+          <p:cNvSpPr/>
+          <p:nvPr/>
+        </p:nvSpPr>
+        <p:spPr>
+          <a:xfrm>
+            <a:off x="960120" y="4041720"/>
+            <a:ext cx="3016800" cy="273600"/>
+          </a:xfrm>
+          <a:prstGeom prst="rect">
+            <a:avLst/>
+          </a:prstGeom>
+          <a:noFill/>
+          <a:ln w="0">
+            <a:noFill/>
+          </a:ln>
+        </p:spPr>
+        <p:style>
+          <a:lnRef idx="0"/>
+          <a:fillRef idx="0"/>
+          <a:effectRef idx="0"/>
+          <a:fontRef idx="minor"/>
+        </p:style>
+        <p:txBody>
+          <a:bodyPr lIns="0" tIns="0" rIns="0" bIns="0" anchor="ctr">
+            <a:noAutofit/>
+          </a:bodyPr>
           <a:p>
             <a:pPr defTabSz="914400">
               <a:lnSpc>
@@ -5756,293 +6297,41 @@
               </a:tabLst>
             </a:pPr>
             <a:r>
-              <a:rPr lang="en-US" sz="1350" b="0" u="none" strike="noStrike">
-                <a:solidFill>
-                  <a:srgbClr val="E5E7EB"/>
-                </a:solidFill>
-                <a:effectLst/>
-                <a:uFillTx/>
-                <a:latin typeface="Courier New"/>
-                <a:ea typeface="Courier New"/>
-              </a:rPr>
-              <a:t>mkdir db-project</a:t>
-            </a:r>
-            <a:endParaRPr lang="en-US" sz="1350" b="0" u="none" strike="noStrike">
-              <a:solidFill>
-                <a:srgbClr val="000000"/>
-              </a:solidFill>
-              <a:effectLst/>
-              <a:uFillTx/>
-              <a:latin typeface="Arial"/>
-            </a:endParaRPr>
-          </a:p>
-          <a:p>
-            <a:pPr defTabSz="914400">
-              <a:lnSpc>
-                <a:spcPct val="100000"/>
-              </a:lnSpc>
-              <a:tabLst>
-                <a:tab pos="0" algn="l"/>
-              </a:tabLst>
-            </a:pPr>
-            <a:r>
-              <a:rPr lang="en-US" sz="1350" b="0" u="none" strike="noStrike">
-                <a:solidFill>
-                  <a:srgbClr val="E5E7EB"/>
-                </a:solidFill>
-                <a:effectLst/>
-                <a:uFillTx/>
-                <a:latin typeface="Courier New"/>
-                <a:ea typeface="Courier New"/>
-              </a:rPr>
-              <a:t>cd db-project</a:t>
-            </a:r>
-            <a:endParaRPr lang="en-US" sz="1350" b="0" u="none" strike="noStrike">
-              <a:solidFill>
-                <a:srgbClr val="000000"/>
-              </a:solidFill>
-              <a:effectLst/>
-              <a:uFillTx/>
-              <a:latin typeface="Arial"/>
-            </a:endParaRPr>
-          </a:p>
-        </p:txBody>
-      </p:sp>
-      <p:sp>
-        <p:nvSpPr>
-          <p:cNvPr id="72" name="Shape 8"/>
-          <p:cNvSpPr/>
-          <p:nvPr/>
-        </p:nvSpPr>
-        <p:spPr>
-          <a:xfrm>
-            <a:off x="4370760" y="1371600"/>
-            <a:ext cx="3474360" cy="4525920"/>
+              <a:rPr lang="en-US" sz="1400" b="1" u="none" strike="noStrike">
+                <a:solidFill>
+                  <a:srgbClr val="111827"/>
+                </a:solidFill>
+                <a:effectLst/>
+                <a:uFillTx/>
+                <a:latin typeface="Aptos"/>
+              </a:rPr>
+              <a:t>Using TypeScript?</a:t>
+            </a:r>
+            <a:endParaRPr lang="en-US" sz="1400" b="0" u="none" strike="noStrike">
+              <a:solidFill>
+                <a:srgbClr val="000000"/>
+              </a:solidFill>
+              <a:effectLst/>
+              <a:uFillTx/>
+              <a:latin typeface="Arial"/>
+            </a:endParaRPr>
+          </a:p>
+        </p:txBody>
+      </p:sp>
+      <p:sp>
+        <p:nvSpPr>
+          <p:cNvPr id="79" name="Shape 9"/>
+          <p:cNvSpPr/>
+          <p:nvPr/>
+        </p:nvSpPr>
+        <p:spPr>
+          <a:xfrm>
+            <a:off x="960120" y="4407480"/>
+            <a:ext cx="3089880" cy="840600"/>
           </a:xfrm>
           <a:prstGeom prst="roundRect">
             <a:avLst>
-              <a:gd name="adj" fmla="val 2105"/>
-            </a:avLst>
-          </a:prstGeom>
-          <a:solidFill>
-            <a:srgbClr val="FFFFFF"/>
-          </a:solidFill>
-          <a:ln w="12700">
-            <a:solidFill>
-              <a:srgbClr val="D1D5DB"/>
-            </a:solidFill>
-            <a:round/>
-          </a:ln>
-          <a:effectLst>
-            <a:outerShdw algn="bl" dir="0" dist="0" kx="0" ky="0" rotWithShape="0" sx="100000" sy="100000">
-              <a:srgbClr val="000000">
-                <a:alpha val="0"/>
-              </a:srgbClr>
-            </a:outerShdw>
-          </a:effectLst>
-        </p:spPr>
-        <p:style>
-          <a:lnRef idx="0"/>
-          <a:fillRef idx="0"/>
-          <a:effectRef idx="0"/>
-          <a:fontRef idx="minor"/>
-        </p:style>
-        <p:txBody>
-          <a:bodyPr lIns="90000" tIns="45000" rIns="90000" bIns="45000" anchor="t">
-            <a:noAutofit/>
-          </a:bodyPr>
-          <a:p>
-            <a:endParaRPr lang="en-US" sz="1800" b="0" u="none" strike="noStrike">
-              <a:solidFill>
-                <a:srgbClr val="000000"/>
-              </a:solidFill>
-              <a:effectLst/>
-              <a:uFillTx/>
-              <a:latin typeface="Arial"/>
-            </a:endParaRPr>
-          </a:p>
-        </p:txBody>
-      </p:sp>
-      <p:sp>
-        <p:nvSpPr>
-          <p:cNvPr id="73" name="Shape 9"/>
-          <p:cNvSpPr/>
-          <p:nvPr/>
-        </p:nvSpPr>
-        <p:spPr>
-          <a:xfrm>
-            <a:off x="4370760" y="1371600"/>
-            <a:ext cx="82080" cy="4525920"/>
-          </a:xfrm>
-          <a:prstGeom prst="rect">
-            <a:avLst/>
-          </a:prstGeom>
-          <a:solidFill>
-            <a:srgbClr val="7C3AED"/>
-          </a:solidFill>
-          <a:ln w="12700">
-            <a:solidFill>
-              <a:srgbClr val="7C3AED"/>
-            </a:solidFill>
-            <a:round/>
-          </a:ln>
-        </p:spPr>
-        <p:style>
-          <a:lnRef idx="0"/>
-          <a:fillRef idx="0"/>
-          <a:effectRef idx="0"/>
-          <a:fontRef idx="minor"/>
-        </p:style>
-        <p:txBody>
-          <a:bodyPr lIns="90000" tIns="45000" rIns="90000" bIns="45000" anchor="t">
-            <a:noAutofit/>
-          </a:bodyPr>
-          <a:p>
-            <a:endParaRPr lang="en-US" sz="1800" b="0" u="none" strike="noStrike">
-              <a:solidFill>
-                <a:srgbClr val="FFFFFF"/>
-              </a:solidFill>
-              <a:effectLst/>
-              <a:uFillTx/>
-              <a:latin typeface="Arial"/>
-            </a:endParaRPr>
-          </a:p>
-        </p:txBody>
-      </p:sp>
-      <p:sp>
-        <p:nvSpPr>
-          <p:cNvPr id="74" name="Text 10"/>
-          <p:cNvSpPr/>
-          <p:nvPr/>
-        </p:nvSpPr>
-        <p:spPr>
-          <a:xfrm>
-            <a:off x="4626720" y="1554480"/>
-            <a:ext cx="3062880" cy="310680"/>
-          </a:xfrm>
-          <a:prstGeom prst="rect">
-            <a:avLst/>
-          </a:prstGeom>
-          <a:noFill/>
-          <a:ln w="0">
-            <a:noFill/>
-          </a:ln>
-        </p:spPr>
-        <p:style>
-          <a:lnRef idx="0"/>
-          <a:fillRef idx="0"/>
-          <a:effectRef idx="0"/>
-          <a:fontRef idx="minor"/>
-        </p:style>
-        <p:txBody>
-          <a:bodyPr lIns="0" tIns="0" rIns="0" bIns="0" anchor="ctr">
-            <a:noAutofit/>
-          </a:bodyPr>
-          <a:p>
-            <a:pPr defTabSz="914400">
-              <a:lnSpc>
-                <a:spcPct val="100000"/>
-              </a:lnSpc>
-              <a:tabLst>
-                <a:tab pos="0" algn="l"/>
-              </a:tabLst>
-            </a:pPr>
-            <a:r>
-              <a:rPr lang="en-US" sz="1700" b="1" u="none" strike="noStrike">
-                <a:solidFill>
-                  <a:srgbClr val="111827"/>
-                </a:solidFill>
-                <a:effectLst/>
-                <a:uFillTx/>
-                <a:latin typeface="Aptos"/>
-              </a:rPr>
-              <a:t>2. Create the app</a:t>
-            </a:r>
-            <a:endParaRPr lang="en-US" sz="1700" b="0" u="none" strike="noStrike">
-              <a:solidFill>
-                <a:srgbClr val="000000"/>
-              </a:solidFill>
-              <a:effectLst/>
-              <a:uFillTx/>
-              <a:latin typeface="Arial"/>
-            </a:endParaRPr>
-          </a:p>
-        </p:txBody>
-      </p:sp>
-      <p:sp>
-        <p:nvSpPr>
-          <p:cNvPr id="75" name="Text 11"/>
-          <p:cNvSpPr/>
-          <p:nvPr/>
-        </p:nvSpPr>
-        <p:spPr>
-          <a:xfrm>
-            <a:off x="4626720" y="1974960"/>
-            <a:ext cx="3035520" cy="3757680"/>
-          </a:xfrm>
-          <a:prstGeom prst="rect">
-            <a:avLst/>
-          </a:prstGeom>
-          <a:noFill/>
-          <a:ln w="0">
-            <a:noFill/>
-          </a:ln>
-        </p:spPr>
-        <p:style>
-          <a:lnRef idx="0"/>
-          <a:fillRef idx="0"/>
-          <a:effectRef idx="0"/>
-          <a:fontRef idx="minor"/>
-        </p:style>
-        <p:txBody>
-          <a:bodyPr lIns="360" tIns="360" rIns="360" bIns="360" anchor="t">
-            <a:noAutofit/>
-          </a:bodyPr>
-          <a:p>
-            <a:pPr defTabSz="914400">
-              <a:lnSpc>
-                <a:spcPct val="100000"/>
-              </a:lnSpc>
-              <a:tabLst>
-                <a:tab pos="0" algn="l"/>
-              </a:tabLst>
-            </a:pPr>
-            <a:r>
-              <a:rPr lang="en-US" sz="1350" b="0" u="none" strike="noStrike">
-                <a:solidFill>
-                  <a:srgbClr val="4B5563"/>
-                </a:solidFill>
-                <a:effectLst/>
-                <a:uFillTx/>
-                <a:latin typeface="Aptos"/>
-              </a:rPr>
-              <a:t>Create a new project using the official Next.js CLI. Answer the prompts or accept the defaults.</a:t>
-            </a:r>
-            <a:endParaRPr lang="en-US" sz="1350" b="0" u="none" strike="noStrike">
-              <a:solidFill>
-                <a:srgbClr val="000000"/>
-              </a:solidFill>
-              <a:effectLst/>
-              <a:uFillTx/>
-              <a:latin typeface="Arial"/>
-            </a:endParaRPr>
-          </a:p>
-        </p:txBody>
-      </p:sp>
-      <p:sp>
-        <p:nvSpPr>
-          <p:cNvPr id="76" name="Shape 12"/>
-          <p:cNvSpPr/>
-          <p:nvPr/>
-        </p:nvSpPr>
-        <p:spPr>
-          <a:xfrm>
-            <a:off x="4645080" y="2761560"/>
-            <a:ext cx="2907360" cy="1170000"/>
-          </a:xfrm>
-          <a:prstGeom prst="roundRect">
-            <a:avLst>
-              <a:gd name="adj" fmla="val 4688"/>
+              <a:gd name="adj" fmla="val 6522"/>
             </a:avLst>
           </a:prstGeom>
           <a:solidFill>
@@ -6079,14 +6368,14 @@
       </p:sp>
       <p:sp>
         <p:nvSpPr>
-          <p:cNvPr id="77" name="Text 13"/>
-          <p:cNvSpPr/>
-          <p:nvPr/>
-        </p:nvSpPr>
-        <p:spPr>
-          <a:xfrm>
-            <a:off x="4846320" y="2926080"/>
-            <a:ext cx="2505240" cy="859320"/>
+          <p:cNvPr id="80" name="Text 10"/>
+          <p:cNvSpPr/>
+          <p:nvPr/>
+        </p:nvSpPr>
+        <p:spPr>
+          <a:xfrm>
+            <a:off x="1161360" y="4572000"/>
+            <a:ext cx="2687760" cy="529560"/>
           </a:xfrm>
           <a:prstGeom prst="rect">
             <a:avLst/>
@@ -6125,7 +6414,7 @@
                 <a:latin typeface="Courier New"/>
                 <a:ea typeface="Courier New"/>
               </a:rPr>
-              <a:t>npm create next-app@latest</a:t>
+              <a:t>npm install -D @types/pg</a:t>
             </a:r>
             <a:endParaRPr lang="en-US" sz="1350" b="0" u="none" strike="noStrike">
               <a:solidFill>
@@ -6136,97 +6425,35 @@
               <a:latin typeface="Arial"/>
             </a:endParaRPr>
           </a:p>
-          <a:p>
-            <a:pPr defTabSz="914400">
-              <a:lnSpc>
-                <a:spcPct val="100000"/>
-              </a:lnSpc>
-              <a:tabLst>
-                <a:tab pos="0" algn="l"/>
-              </a:tabLst>
-            </a:pPr>
-            <a:endParaRPr lang="en-US" sz="1350" b="0" u="none" strike="noStrike">
-              <a:solidFill>
-                <a:srgbClr val="000000"/>
-              </a:solidFill>
-              <a:effectLst/>
-              <a:uFillTx/>
-              <a:latin typeface="Arial"/>
-            </a:endParaRPr>
-          </a:p>
-          <a:p>
-            <a:pPr defTabSz="914400">
-              <a:lnSpc>
-                <a:spcPct val="100000"/>
-              </a:lnSpc>
-              <a:tabLst>
-                <a:tab pos="0" algn="l"/>
-              </a:tabLst>
-            </a:pPr>
-            <a:r>
-              <a:rPr lang="en-US" sz="1350" b="0" u="none" strike="noStrike">
-                <a:solidFill>
-                  <a:srgbClr val="E5E7EB"/>
-                </a:solidFill>
-                <a:effectLst/>
-                <a:uFillTx/>
-                <a:latin typeface="Courier New"/>
-                <a:ea typeface="Courier New"/>
-              </a:rPr>
-              <a:t># Project name: my-app</a:t>
-            </a:r>
-            <a:endParaRPr lang="en-US" sz="1350" b="0" u="none" strike="noStrike">
-              <a:solidFill>
-                <a:srgbClr val="000000"/>
-              </a:solidFill>
-              <a:effectLst/>
-              <a:uFillTx/>
-              <a:latin typeface="Arial"/>
-            </a:endParaRPr>
-          </a:p>
-        </p:txBody>
-      </p:sp>
-      <p:sp>
-        <p:nvSpPr>
-          <p:cNvPr id="78" name="Shape 14"/>
-          <p:cNvSpPr/>
-          <p:nvPr/>
-        </p:nvSpPr>
-        <p:spPr>
-          <a:xfrm>
-            <a:off x="8101440" y="1371600"/>
-            <a:ext cx="3474360" cy="4525920"/>
-          </a:xfrm>
-          <a:prstGeom prst="roundRect">
-            <a:avLst>
-              <a:gd name="adj" fmla="val 2105"/>
-            </a:avLst>
-          </a:prstGeom>
-          <a:solidFill>
-            <a:srgbClr val="FFFFFF"/>
-          </a:solidFill>
-          <a:ln w="12700">
-            <a:solidFill>
-              <a:srgbClr val="D1D5DB"/>
-            </a:solidFill>
-            <a:round/>
-          </a:ln>
-          <a:effectLst>
-            <a:outerShdw algn="bl" dir="0" dist="0" kx="0" ky="0" rotWithShape="0" sx="100000" sy="100000">
-              <a:srgbClr val="000000">
-                <a:alpha val="0"/>
-              </a:srgbClr>
-            </a:outerShdw>
-          </a:effectLst>
-        </p:spPr>
-        <p:style>
-          <a:lnRef idx="0"/>
-          <a:fillRef idx="0"/>
-          <a:effectRef idx="0"/>
-          <a:fontRef idx="minor"/>
-        </p:style>
-        <p:txBody>
-          <a:bodyPr lIns="90000" tIns="45000" rIns="90000" bIns="45000" anchor="t">
+        </p:txBody>
+      </p:sp>
+      <p:sp>
+        <p:nvSpPr>
+          <p:cNvPr id="81" name="Text 16"/>
+          <p:cNvSpPr/>
+          <p:nvPr/>
+        </p:nvSpPr>
+        <p:spPr>
+          <a:xfrm>
+            <a:off x="5120640" y="2670120"/>
+            <a:ext cx="5888160" cy="2230560"/>
+          </a:xfrm>
+          <a:prstGeom prst="rect">
+            <a:avLst/>
+          </a:prstGeom>
+          <a:noFill/>
+          <a:ln w="0">
+            <a:noFill/>
+          </a:ln>
+        </p:spPr>
+        <p:style>
+          <a:lnRef idx="0"/>
+          <a:fillRef idx="0"/>
+          <a:effectRef idx="0"/>
+          <a:fontRef idx="minor"/>
+        </p:style>
+        <p:txBody>
+          <a:bodyPr lIns="360" tIns="360" rIns="360" bIns="360" anchor="ctr">
             <a:noAutofit/>
           </a:bodyPr>
           <a:p>
@@ -6243,372 +6470,48 @@
       </p:sp>
       <p:sp>
         <p:nvSpPr>
-          <p:cNvPr id="79" name="Shape 15"/>
-          <p:cNvSpPr/>
-          <p:nvPr/>
-        </p:nvSpPr>
-        <p:spPr>
-          <a:xfrm>
-            <a:off x="8101440" y="1371600"/>
-            <a:ext cx="82080" cy="4525920"/>
-          </a:xfrm>
-          <a:prstGeom prst="rect">
-            <a:avLst/>
-          </a:prstGeom>
-          <a:solidFill>
-            <a:srgbClr val="16A34A"/>
-          </a:solidFill>
-          <a:ln w="12700">
-            <a:solidFill>
-              <a:srgbClr val="16A34A"/>
-            </a:solidFill>
-            <a:round/>
-          </a:ln>
-        </p:spPr>
-        <p:style>
-          <a:lnRef idx="0"/>
-          <a:fillRef idx="0"/>
-          <a:effectRef idx="0"/>
-          <a:fontRef idx="minor"/>
-        </p:style>
-        <p:txBody>
-          <a:bodyPr lIns="90000" tIns="45000" rIns="90000" bIns="45000" anchor="t">
+          <p:cNvPr id="82" name="Text 18"/>
+          <p:cNvSpPr/>
+          <p:nvPr/>
+        </p:nvSpPr>
+        <p:spPr>
+          <a:xfrm>
+            <a:off x="5870520" y="5212080"/>
+            <a:ext cx="5074200" cy="273600"/>
+          </a:xfrm>
+          <a:prstGeom prst="rect">
+            <a:avLst/>
+          </a:prstGeom>
+          <a:noFill/>
+          <a:ln w="0">
+            <a:noFill/>
+          </a:ln>
+        </p:spPr>
+        <p:style>
+          <a:lnRef idx="0"/>
+          <a:fillRef idx="0"/>
+          <a:effectRef idx="0"/>
+          <a:fontRef idx="minor"/>
+        </p:style>
+        <p:txBody>
+          <a:bodyPr lIns="0" tIns="0" rIns="0" bIns="0" anchor="ctr">
             <a:noAutofit/>
           </a:bodyPr>
           <a:p>
             <a:endParaRPr lang="en-US" sz="1800" b="0" u="none" strike="noStrike">
               <a:solidFill>
-                <a:srgbClr val="FFFFFF"/>
-              </a:solidFill>
-              <a:effectLst/>
-              <a:uFillTx/>
-              <a:latin typeface="Arial"/>
-            </a:endParaRPr>
-          </a:p>
-        </p:txBody>
-      </p:sp>
-      <p:sp>
-        <p:nvSpPr>
-          <p:cNvPr id="80" name="Text 16"/>
-          <p:cNvSpPr/>
-          <p:nvPr/>
-        </p:nvSpPr>
-        <p:spPr>
-          <a:xfrm>
-            <a:off x="8357760" y="1554480"/>
-            <a:ext cx="3062880" cy="310680"/>
-          </a:xfrm>
-          <a:prstGeom prst="rect">
-            <a:avLst/>
-          </a:prstGeom>
-          <a:noFill/>
-          <a:ln w="0">
-            <a:noFill/>
-          </a:ln>
-        </p:spPr>
-        <p:style>
-          <a:lnRef idx="0"/>
-          <a:fillRef idx="0"/>
-          <a:effectRef idx="0"/>
-          <a:fontRef idx="minor"/>
-        </p:style>
-        <p:txBody>
-          <a:bodyPr lIns="0" tIns="0" rIns="0" bIns="0" anchor="ctr">
-            <a:noAutofit/>
-          </a:bodyPr>
-          <a:p>
-            <a:pPr defTabSz="914400">
-              <a:lnSpc>
-                <a:spcPct val="100000"/>
-              </a:lnSpc>
-              <a:tabLst>
-                <a:tab pos="0" algn="l"/>
-              </a:tabLst>
-            </a:pPr>
-            <a:r>
-              <a:rPr lang="en-US" sz="1700" b="1" u="none" strike="noStrike">
-                <a:solidFill>
-                  <a:srgbClr val="111827"/>
-                </a:solidFill>
-                <a:effectLst/>
-                <a:uFillTx/>
-                <a:latin typeface="Aptos"/>
-              </a:rPr>
-              <a:t>3. Start development</a:t>
-            </a:r>
-            <a:endParaRPr lang="en-US" sz="1700" b="0" u="none" strike="noStrike">
-              <a:solidFill>
-                <a:srgbClr val="000000"/>
-              </a:solidFill>
-              <a:effectLst/>
-              <a:uFillTx/>
-              <a:latin typeface="Arial"/>
-            </a:endParaRPr>
-          </a:p>
-        </p:txBody>
-      </p:sp>
-      <p:sp>
-        <p:nvSpPr>
-          <p:cNvPr id="81" name="Text 17"/>
-          <p:cNvSpPr/>
-          <p:nvPr/>
-        </p:nvSpPr>
-        <p:spPr>
-          <a:xfrm>
-            <a:off x="8357760" y="1974960"/>
-            <a:ext cx="3035520" cy="3757680"/>
-          </a:xfrm>
-          <a:prstGeom prst="rect">
-            <a:avLst/>
-          </a:prstGeom>
-          <a:noFill/>
-          <a:ln w="0">
-            <a:noFill/>
-          </a:ln>
-        </p:spPr>
-        <p:style>
-          <a:lnRef idx="0"/>
-          <a:fillRef idx="0"/>
-          <a:effectRef idx="0"/>
-          <a:fontRef idx="minor"/>
-        </p:style>
-        <p:txBody>
-          <a:bodyPr lIns="360" tIns="360" rIns="360" bIns="360" anchor="t">
-            <a:noAutofit/>
-          </a:bodyPr>
-          <a:p>
-            <a:pPr defTabSz="914400">
-              <a:lnSpc>
-                <a:spcPct val="100000"/>
-              </a:lnSpc>
-              <a:tabLst>
-                <a:tab pos="0" algn="l"/>
-              </a:tabLst>
-            </a:pPr>
-            <a:r>
-              <a:rPr lang="en-US" sz="1350" b="0" u="none" strike="noStrike">
-                <a:solidFill>
-                  <a:srgbClr val="4B5563"/>
-                </a:solidFill>
-                <a:effectLst/>
-                <a:uFillTx/>
-                <a:latin typeface="Aptos"/>
-              </a:rPr>
-              <a:t>Enter the generated project folder and launch the development server.</a:t>
-            </a:r>
-            <a:endParaRPr lang="en-US" sz="1350" b="0" u="none" strike="noStrike">
-              <a:solidFill>
-                <a:srgbClr val="000000"/>
-              </a:solidFill>
-              <a:effectLst/>
-              <a:uFillTx/>
-              <a:latin typeface="Arial"/>
-            </a:endParaRPr>
-          </a:p>
-        </p:txBody>
-      </p:sp>
-      <p:sp>
-        <p:nvSpPr>
-          <p:cNvPr id="82" name="Shape 18"/>
-          <p:cNvSpPr/>
-          <p:nvPr/>
-        </p:nvSpPr>
-        <p:spPr>
-          <a:xfrm>
-            <a:off x="8375760" y="2761560"/>
-            <a:ext cx="2907360" cy="1170000"/>
-          </a:xfrm>
-          <a:prstGeom prst="roundRect">
-            <a:avLst>
-              <a:gd name="adj" fmla="val 4688"/>
-            </a:avLst>
-          </a:prstGeom>
-          <a:solidFill>
-            <a:srgbClr val="0F172A"/>
-          </a:solidFill>
-          <a:ln w="12700">
-            <a:solidFill>
-              <a:srgbClr val="0F172A"/>
-            </a:solidFill>
-            <a:round/>
-          </a:ln>
-        </p:spPr>
-        <p:style>
-          <a:lnRef idx="0"/>
-          <a:fillRef idx="0"/>
-          <a:effectRef idx="0"/>
-          <a:fontRef idx="minor"/>
-        </p:style>
-        <p:txBody>
-          <a:bodyPr lIns="90000" tIns="45000" rIns="90000" bIns="45000" anchor="t">
-            <a:noAutofit/>
-          </a:bodyPr>
-          <a:p>
-            <a:endParaRPr lang="en-US" sz="1800" b="0" u="none" strike="noStrike">
-              <a:solidFill>
-                <a:srgbClr val="FFFFFF"/>
-              </a:solidFill>
-              <a:effectLst/>
-              <a:uFillTx/>
-              <a:latin typeface="Arial"/>
-            </a:endParaRPr>
-          </a:p>
-        </p:txBody>
-      </p:sp>
-      <p:sp>
-        <p:nvSpPr>
-          <p:cNvPr id="83" name="Text 19"/>
-          <p:cNvSpPr/>
-          <p:nvPr/>
-        </p:nvSpPr>
-        <p:spPr>
-          <a:xfrm>
-            <a:off x="8577000" y="2926080"/>
-            <a:ext cx="2505240" cy="859320"/>
-          </a:xfrm>
-          <a:prstGeom prst="rect">
-            <a:avLst/>
-          </a:prstGeom>
-          <a:noFill/>
-          <a:ln w="0">
-            <a:noFill/>
-          </a:ln>
-        </p:spPr>
-        <p:style>
-          <a:lnRef idx="0"/>
-          <a:fillRef idx="0"/>
-          <a:effectRef idx="0"/>
-          <a:fontRef idx="minor"/>
-        </p:style>
-        <p:txBody>
-          <a:bodyPr lIns="360" tIns="360" rIns="360" bIns="360" anchor="ctr">
-            <a:noAutofit/>
-          </a:bodyPr>
-          <a:p>
-            <a:pPr defTabSz="914400">
-              <a:lnSpc>
-                <a:spcPct val="100000"/>
-              </a:lnSpc>
-              <a:tabLst>
-                <a:tab pos="0" algn="l"/>
-              </a:tabLst>
-            </a:pPr>
-            <a:r>
-              <a:rPr lang="en-US" sz="1350" b="0" u="none" strike="noStrike">
-                <a:solidFill>
-                  <a:srgbClr val="E5E7EB"/>
-                </a:solidFill>
-                <a:effectLst/>
-                <a:uFillTx/>
-                <a:latin typeface="Courier New"/>
-                <a:ea typeface="Courier New"/>
-              </a:rPr>
-              <a:t>cd my-app</a:t>
-            </a:r>
-            <a:endParaRPr lang="en-US" sz="1350" b="0" u="none" strike="noStrike">
-              <a:solidFill>
-                <a:srgbClr val="000000"/>
-              </a:solidFill>
-              <a:effectLst/>
-              <a:uFillTx/>
-              <a:latin typeface="Arial"/>
-            </a:endParaRPr>
-          </a:p>
-          <a:p>
-            <a:pPr defTabSz="914400">
-              <a:lnSpc>
-                <a:spcPct val="100000"/>
-              </a:lnSpc>
-              <a:tabLst>
-                <a:tab pos="0" algn="l"/>
-              </a:tabLst>
-            </a:pPr>
-            <a:r>
-              <a:rPr lang="en-US" sz="1350" b="0" u="none" strike="noStrike">
-                <a:solidFill>
-                  <a:srgbClr val="E5E7EB"/>
-                </a:solidFill>
-                <a:effectLst/>
-                <a:uFillTx/>
-                <a:latin typeface="Courier New"/>
-                <a:ea typeface="Courier New"/>
-              </a:rPr>
-              <a:t>npm run dev</a:t>
-            </a:r>
-            <a:endParaRPr lang="en-US" sz="1350" b="0" u="none" strike="noStrike">
-              <a:solidFill>
-                <a:srgbClr val="000000"/>
-              </a:solidFill>
-              <a:effectLst/>
-              <a:uFillTx/>
-              <a:latin typeface="Arial"/>
-            </a:endParaRPr>
-          </a:p>
-        </p:txBody>
-      </p:sp>
-      <p:sp>
-        <p:nvSpPr>
-          <p:cNvPr id="84" name="Text 20"/>
-          <p:cNvSpPr/>
-          <p:nvPr/>
-        </p:nvSpPr>
-        <p:spPr>
-          <a:xfrm>
-            <a:off x="8366760" y="4316040"/>
-            <a:ext cx="2907360" cy="639720"/>
-          </a:xfrm>
-          <a:prstGeom prst="rect">
-            <a:avLst/>
-          </a:prstGeom>
-          <a:noFill/>
-          <a:ln w="0">
-            <a:noFill/>
-          </a:ln>
-        </p:spPr>
-        <p:style>
-          <a:lnRef idx="0"/>
-          <a:fillRef idx="0"/>
-          <a:effectRef idx="0"/>
-          <a:fontRef idx="minor"/>
-        </p:style>
-        <p:txBody>
-          <a:bodyPr lIns="360" tIns="360" rIns="360" bIns="360" anchor="ctr">
-            <a:noAutofit/>
-          </a:bodyPr>
-          <a:p>
-            <a:pPr algn="ctr" defTabSz="914400">
-              <a:lnSpc>
-                <a:spcPct val="100000"/>
-              </a:lnSpc>
-              <a:tabLst>
-                <a:tab pos="0" algn="l"/>
-              </a:tabLst>
-            </a:pPr>
-            <a:r>
-              <a:rPr lang="en-US" sz="1400" b="1" u="none" strike="noStrike">
-                <a:solidFill>
-                  <a:srgbClr val="111827"/>
-                </a:solidFill>
-                <a:effectLst/>
-                <a:uFillTx/>
-                <a:latin typeface="Aptos"/>
-              </a:rPr>
-              <a:t>Open http://localhost:3000 in your browser.</a:t>
-            </a:r>
-            <a:endParaRPr lang="en-US" sz="1400" b="0" u="none" strike="noStrike">
-              <a:solidFill>
-                <a:srgbClr val="000000"/>
-              </a:solidFill>
-              <a:effectLst/>
-              <a:uFillTx/>
-              <a:latin typeface="Arial"/>
-            </a:endParaRPr>
-          </a:p>
-        </p:txBody>
-      </p:sp>
-      <p:sp>
-        <p:nvSpPr>
-          <p:cNvPr id="85" name="PlaceHolder 1"/>
+                <a:srgbClr val="000000"/>
+              </a:solidFill>
+              <a:effectLst/>
+              <a:uFillTx/>
+              <a:latin typeface="Arial"/>
+            </a:endParaRPr>
+          </a:p>
+        </p:txBody>
+      </p:sp>
+      <p:sp>
+        <p:nvSpPr>
+          <p:cNvPr id="83" name="PlaceHolder 1"/>
           <p:cNvSpPr>
             <a:spLocks noGrp="1"/>
           </p:cNvSpPr>
@@ -6619,7 +6522,7 @@
         <p:spPr>
           <a:xfrm>
             <a:off x="11841480" y="6473880"/>
-            <a:ext cx="799560" cy="299520"/>
+            <a:ext cx="799200" cy="299160"/>
           </a:xfrm>
           <a:prstGeom prst="rect">
             <a:avLst/>
@@ -6639,6 +6542,9 @@
                 <a:spcPct val="100000"/>
               </a:lnSpc>
               <a:buNone/>
+              <a:tabLst>
+                <a:tab pos="0" algn="l"/>
+              </a:tabLst>
               <a:defRPr lang="en-US" sz="800" b="0" u="none" strike="noStrike">
                 <a:solidFill>
                   <a:srgbClr val="6B7280"/>
@@ -6656,8 +6562,11 @@
                 <a:spcPct val="100000"/>
               </a:lnSpc>
               <a:buNone/>
-            </a:pPr>
-            <a:fld id="{F9DE6F6D-D83E-4E82-91FF-542C69CEBA29}" type="slidenum">
+              <a:tabLst>
+                <a:tab pos="0" algn="l"/>
+              </a:tabLst>
+            </a:pPr>
+            <a:fld id="{564F5746-0405-48B9-B1E9-A2B8380C35DC}" type="slidenum">
               <a:rPr lang="en-US" sz="800" b="0" u="none" strike="noStrike">
                 <a:solidFill>
                   <a:srgbClr val="6B7280"/>
@@ -6682,138 +6591,177 @@
       </p:sp>
       <p:sp>
         <p:nvSpPr>
-          <p:cNvPr id="86" name="Shape 25"/>
-          <p:cNvSpPr/>
-          <p:nvPr/>
-        </p:nvSpPr>
-        <p:spPr>
-          <a:xfrm>
-            <a:off x="914400" y="4343400"/>
-            <a:ext cx="2880000" cy="1170000"/>
-          </a:xfrm>
-          <a:prstGeom prst="roundRect">
-            <a:avLst>
-              <a:gd name="adj" fmla="val 4688"/>
-            </a:avLst>
-          </a:prstGeom>
-          <a:solidFill>
-            <a:srgbClr val="0F172A"/>
-          </a:solidFill>
-          <a:ln w="12700">
-            <a:solidFill>
-              <a:srgbClr val="0F172A"/>
-            </a:solidFill>
-            <a:round/>
-          </a:ln>
-        </p:spPr>
-        <p:style>
-          <a:lnRef idx="0"/>
-          <a:fillRef idx="0"/>
-          <a:effectRef idx="0"/>
-          <a:fontRef idx="minor"/>
-        </p:style>
-        <p:txBody>
-          <a:bodyPr lIns="90000" tIns="45000" rIns="90000" bIns="45000" anchor="t">
-            <a:noAutofit/>
-          </a:bodyPr>
-          <a:p>
-            <a:pPr>
-              <a:lnSpc>
-                <a:spcPct val="100000"/>
-              </a:lnSpc>
-            </a:pPr>
-            <a:endParaRPr lang="en-US" sz="1350" b="0" u="none" strike="noStrike">
-              <a:solidFill>
-                <a:srgbClr val="FFFFFF"/>
-              </a:solidFill>
-              <a:effectLst/>
-              <a:uFillTx/>
-              <a:latin typeface="Arial"/>
-            </a:endParaRPr>
-          </a:p>
-          <a:p>
-            <a:pPr>
-              <a:lnSpc>
-                <a:spcPct val="100000"/>
-              </a:lnSpc>
-            </a:pPr>
-            <a:r>
-              <a:rPr lang="en-US" sz="1350" b="0" u="none" strike="noStrike">
-                <a:solidFill>
-                  <a:srgbClr val="E5E7EB"/>
-                </a:solidFill>
-                <a:effectLst/>
-                <a:uFillTx/>
-                <a:latin typeface="Courier New"/>
-                <a:ea typeface="Courier New"/>
-              </a:rPr>
-              <a:t>cd ~/Documents</a:t>
-            </a:r>
-            <a:endParaRPr lang="en-US" sz="1350" b="0" u="none" strike="noStrike">
-              <a:solidFill>
-                <a:srgbClr val="FFFFFF"/>
-              </a:solidFill>
-              <a:effectLst/>
-              <a:uFillTx/>
-              <a:latin typeface="Arial"/>
-            </a:endParaRPr>
-          </a:p>
-          <a:p>
-            <a:pPr>
-              <a:lnSpc>
-                <a:spcPct val="100000"/>
-              </a:lnSpc>
-            </a:pPr>
-            <a:r>
-              <a:rPr lang="en-US" sz="1350" b="0" u="none" strike="noStrike">
-                <a:solidFill>
-                  <a:srgbClr val="E5E7EB"/>
-                </a:solidFill>
-                <a:effectLst/>
-                <a:uFillTx/>
-                <a:latin typeface="Courier New"/>
-                <a:ea typeface="Courier New"/>
-              </a:rPr>
-              <a:t>mkdir db-project</a:t>
-            </a:r>
-            <a:endParaRPr lang="en-US" sz="1350" b="0" u="none" strike="noStrike">
-              <a:solidFill>
-                <a:srgbClr val="FFFFFF"/>
-              </a:solidFill>
-              <a:effectLst/>
-              <a:uFillTx/>
-              <a:latin typeface="Arial"/>
-            </a:endParaRPr>
-          </a:p>
-          <a:p>
-            <a:pPr>
-              <a:lnSpc>
-                <a:spcPct val="100000"/>
-              </a:lnSpc>
-            </a:pPr>
-            <a:r>
-              <a:rPr lang="en-US" sz="1350" b="0" u="none" strike="noStrike">
-                <a:solidFill>
-                  <a:srgbClr val="E5E7EB"/>
-                </a:solidFill>
-                <a:effectLst/>
-                <a:uFillTx/>
-                <a:latin typeface="Courier New"/>
-                <a:ea typeface="Courier New"/>
-              </a:rPr>
-              <a:t>cd db-project</a:t>
-            </a:r>
-            <a:endParaRPr lang="en-US" sz="1350" b="0" u="none" strike="noStrike">
-              <a:solidFill>
-                <a:srgbClr val="FFFFFF"/>
-              </a:solidFill>
-              <a:effectLst/>
-              <a:uFillTx/>
-              <a:latin typeface="Arial"/>
-            </a:endParaRPr>
-          </a:p>
-        </p:txBody>
-      </p:sp>
+          <p:cNvPr id="84" name="Text 3"/>
+          <p:cNvSpPr/>
+          <p:nvPr/>
+        </p:nvSpPr>
+        <p:spPr>
+          <a:xfrm>
+            <a:off x="914760" y="1536480"/>
+            <a:ext cx="3291120" cy="310320"/>
+          </a:xfrm>
+          <a:prstGeom prst="rect">
+            <a:avLst/>
+          </a:prstGeom>
+          <a:noFill/>
+          <a:ln w="0">
+            <a:noFill/>
+          </a:ln>
+        </p:spPr>
+        <p:style>
+          <a:lnRef idx="0"/>
+          <a:fillRef idx="0"/>
+          <a:effectRef idx="0"/>
+          <a:fontRef idx="minor"/>
+        </p:style>
+        <p:txBody>
+          <a:bodyPr lIns="0" tIns="0" rIns="0" bIns="0" anchor="ctr">
+            <a:noAutofit/>
+          </a:bodyPr>
+          <a:p>
+            <a:pPr defTabSz="914400">
+              <a:lnSpc>
+                <a:spcPct val="100000"/>
+              </a:lnSpc>
+              <a:tabLst>
+                <a:tab pos="0" algn="l"/>
+              </a:tabLst>
+            </a:pPr>
+            <a:r>
+              <a:rPr lang="en-US" sz="1700" b="1" u="none" strike="noStrike">
+                <a:solidFill>
+                  <a:srgbClr val="111827"/>
+                </a:solidFill>
+                <a:effectLst/>
+                <a:uFillTx/>
+                <a:latin typeface="Aptos"/>
+              </a:rPr>
+              <a:t>Install inside the app</a:t>
+            </a:r>
+            <a:endParaRPr lang="en-US" sz="1700" b="0" u="none" strike="noStrike">
+              <a:solidFill>
+                <a:srgbClr val="000000"/>
+              </a:solidFill>
+              <a:effectLst/>
+              <a:uFillTx/>
+              <a:latin typeface="Arial"/>
+            </a:endParaRPr>
+          </a:p>
+        </p:txBody>
+      </p:sp>
+      <p:sp>
+        <p:nvSpPr>
+          <p:cNvPr id="85" name="Text 6"/>
+          <p:cNvSpPr/>
+          <p:nvPr/>
+        </p:nvSpPr>
+        <p:spPr>
+          <a:xfrm>
+            <a:off x="6766920" y="1453680"/>
+            <a:ext cx="4434120" cy="831960"/>
+          </a:xfrm>
+          <a:prstGeom prst="rect">
+            <a:avLst/>
+          </a:prstGeom>
+          <a:noFill/>
+          <a:ln w="0">
+            <a:noFill/>
+          </a:ln>
+        </p:spPr>
+        <p:style>
+          <a:lnRef idx="0"/>
+          <a:fillRef idx="0"/>
+          <a:effectRef idx="0"/>
+          <a:fontRef idx="minor"/>
+        </p:style>
+        <p:txBody>
+          <a:bodyPr lIns="0" tIns="0" rIns="0" bIns="0" anchor="ctr">
+            <a:noAutofit/>
+          </a:bodyPr>
+          <a:p>
+            <a:pPr defTabSz="914400">
+              <a:lnSpc>
+                <a:spcPct val="100000"/>
+              </a:lnSpc>
+              <a:tabLst>
+                <a:tab pos="0" algn="l"/>
+              </a:tabLst>
+            </a:pPr>
+            <a:r>
+              <a:rPr lang="en-US" sz="1700" b="1" u="none" strike="noStrike">
+                <a:solidFill>
+                  <a:srgbClr val="111827"/>
+                </a:solidFill>
+                <a:effectLst/>
+                <a:uFillTx/>
+                <a:latin typeface="Aptos"/>
+              </a:rPr>
+              <a:t>Clone the Demo Repo</a:t>
+            </a:r>
+            <a:endParaRPr lang="en-US" sz="1700" b="0" u="none" strike="noStrike">
+              <a:solidFill>
+                <a:srgbClr val="000000"/>
+              </a:solidFill>
+              <a:effectLst/>
+              <a:uFillTx/>
+              <a:latin typeface="Arial"/>
+            </a:endParaRPr>
+          </a:p>
+          <a:p>
+            <a:pPr defTabSz="914400">
+              <a:lnSpc>
+                <a:spcPct val="100000"/>
+              </a:lnSpc>
+              <a:tabLst>
+                <a:tab pos="0" algn="l"/>
+              </a:tabLst>
+            </a:pPr>
+            <a:r>
+              <a:rPr lang="en-US" sz="1600" b="0" u="none" strike="noStrike">
+                <a:solidFill>
+                  <a:srgbClr val="111827"/>
+                </a:solidFill>
+                <a:effectLst/>
+                <a:uFillTx/>
+                <a:latin typeface="Aptos"/>
+              </a:rPr>
+              <a:t>https://github.com/watswat5/DBToolTalk</a:t>
+            </a:r>
+            <a:endParaRPr lang="en-US" sz="1600" b="0" u="none" strike="noStrike">
+              <a:solidFill>
+                <a:srgbClr val="000000"/>
+              </a:solidFill>
+              <a:effectLst/>
+              <a:uFillTx/>
+              <a:latin typeface="Arial"/>
+            </a:endParaRPr>
+          </a:p>
+        </p:txBody>
+      </p:sp>
+      <p:pic>
+        <p:nvPicPr>
+          <p:cNvPr id="86" name=""/>
+          <p:cNvPicPr/>
+          <p:nvPr/>
+        </p:nvPicPr>
+        <p:blipFill>
+          <a:blip r:embed="rId1"/>
+          <a:stretch/>
+        </p:blipFill>
+        <p:spPr>
+          <a:xfrm>
+            <a:off x="6858000" y="2286000"/>
+            <a:ext cx="3571560" cy="3571560"/>
+          </a:xfrm>
+          <a:prstGeom prst="rect">
+            <a:avLst/>
+          </a:prstGeom>
+          <a:noFill/>
+          <a:ln w="0">
+            <a:noFill/>
+          </a:ln>
+        </p:spPr>
+      </p:pic>
     </p:spTree>
   </p:cSld>
   <mc:AlternateContent>
@@ -6846,14 +6794,14 @@
       </p:grpSpPr>
       <p:sp>
         <p:nvSpPr>
-          <p:cNvPr id="87" name="Text 0"/>
+          <p:cNvPr id="87" name="Text 29"/>
           <p:cNvSpPr/>
           <p:nvPr/>
         </p:nvSpPr>
         <p:spPr>
           <a:xfrm>
             <a:off x="502920" y="384120"/>
-            <a:ext cx="11155320" cy="502560"/>
+            <a:ext cx="11154960" cy="502200"/>
           </a:xfrm>
           <a:prstGeom prst="rect">
             <a:avLst/>
@@ -6892,7 +6840,7 @@
                 <a:latin typeface="Aptos Display"/>
                 <a:ea typeface="Aptos Display"/>
               </a:rPr>
-              <a:t>Install PostgreSQL support</a:t>
+              <a:t>Final check</a:t>
             </a:r>
             <a:endParaRPr lang="en-US" sz="2700" b="0" u="none" strike="noStrike">
               <a:solidFill>
@@ -6907,14 +6855,14 @@
       </p:sp>
       <p:sp>
         <p:nvSpPr>
-          <p:cNvPr id="88" name="Text 1"/>
+          <p:cNvPr id="88" name="Text 30"/>
           <p:cNvSpPr/>
           <p:nvPr/>
         </p:nvSpPr>
         <p:spPr>
           <a:xfrm>
             <a:off x="530280" y="914400"/>
-            <a:ext cx="10972440" cy="310680"/>
+            <a:ext cx="10972080" cy="310320"/>
           </a:xfrm>
           <a:prstGeom prst="rect">
             <a:avLst/>
@@ -6952,7 +6900,7 @@
                 <a:uFillTx/>
                 <a:latin typeface="Aptos"/>
               </a:rPr>
-              <a:t>The common Node.js PostgreSQL package is node-postgres, installed as pg.</a:t>
+              <a:t>Confirm the full toolchain before starting database code.</a:t>
             </a:r>
             <a:endParaRPr lang="en-US" sz="1350" b="0" u="none" strike="noStrike">
               <a:solidFill>
@@ -6967,18 +6915,848 @@
       </p:sp>
       <p:sp>
         <p:nvSpPr>
-          <p:cNvPr id="89" name="Shape 2"/>
-          <p:cNvSpPr/>
-          <p:nvPr/>
-        </p:nvSpPr>
-        <p:spPr>
-          <a:xfrm>
-            <a:off x="658440" y="1353240"/>
-            <a:ext cx="10771560" cy="4498560"/>
+          <p:cNvPr id="89" name="Shape 1"/>
+          <p:cNvSpPr/>
+          <p:nvPr/>
+        </p:nvSpPr>
+        <p:spPr>
+          <a:xfrm>
+            <a:off x="868680" y="1527120"/>
+            <a:ext cx="209520" cy="209520"/>
+          </a:xfrm>
+          <a:prstGeom prst="ellipse">
+            <a:avLst/>
+          </a:prstGeom>
+          <a:solidFill>
+            <a:srgbClr val="16A34A"/>
+          </a:solidFill>
+          <a:ln w="12700">
+            <a:solidFill>
+              <a:srgbClr val="16A34A"/>
+            </a:solidFill>
+            <a:round/>
+          </a:ln>
+        </p:spPr>
+        <p:style>
+          <a:lnRef idx="0"/>
+          <a:fillRef idx="0"/>
+          <a:effectRef idx="0"/>
+          <a:fontRef idx="minor"/>
+        </p:style>
+        <p:txBody>
+          <a:bodyPr lIns="90000" tIns="45000" rIns="90000" bIns="45000" anchor="t">
+            <a:noAutofit/>
+          </a:bodyPr>
+          <a:p>
+            <a:endParaRPr lang="en-US" sz="1800" b="0" u="none" strike="noStrike">
+              <a:solidFill>
+                <a:srgbClr val="FFFFFF"/>
+              </a:solidFill>
+              <a:effectLst/>
+              <a:uFillTx/>
+              <a:latin typeface="Arial"/>
+            </a:endParaRPr>
+          </a:p>
+        </p:txBody>
+      </p:sp>
+      <p:sp>
+        <p:nvSpPr>
+          <p:cNvPr id="90" name="Text 31"/>
+          <p:cNvSpPr/>
+          <p:nvPr/>
+        </p:nvSpPr>
+        <p:spPr>
+          <a:xfrm>
+            <a:off x="882360" y="1504080"/>
+            <a:ext cx="182160" cy="200520"/>
+          </a:xfrm>
+          <a:prstGeom prst="rect">
+            <a:avLst/>
+          </a:prstGeom>
+          <a:noFill/>
+          <a:ln w="0">
+            <a:noFill/>
+          </a:ln>
+        </p:spPr>
+        <p:style>
+          <a:lnRef idx="0"/>
+          <a:fillRef idx="0"/>
+          <a:effectRef idx="0"/>
+          <a:fontRef idx="minor"/>
+        </p:style>
+        <p:txBody>
+          <a:bodyPr lIns="0" tIns="0" rIns="0" bIns="0" anchor="ctr">
+            <a:noAutofit/>
+          </a:bodyPr>
+          <a:p>
+            <a:pPr algn="ctr" defTabSz="914400">
+              <a:lnSpc>
+                <a:spcPct val="100000"/>
+              </a:lnSpc>
+              <a:tabLst>
+                <a:tab pos="0" algn="l"/>
+              </a:tabLst>
+            </a:pPr>
+            <a:r>
+              <a:rPr lang="en-US" sz="1200" b="1" u="none" strike="noStrike">
+                <a:solidFill>
+                  <a:srgbClr val="FFFFFF"/>
+                </a:solidFill>
+                <a:effectLst/>
+                <a:uFillTx/>
+                <a:latin typeface="Aptos"/>
+              </a:rPr>
+              <a:t>✓</a:t>
+            </a:r>
+            <a:endParaRPr lang="en-US" sz="1200" b="0" u="none" strike="noStrike">
+              <a:solidFill>
+                <a:srgbClr val="000000"/>
+              </a:solidFill>
+              <a:effectLst/>
+              <a:uFillTx/>
+              <a:latin typeface="Arial"/>
+            </a:endParaRPr>
+          </a:p>
+        </p:txBody>
+      </p:sp>
+      <p:sp>
+        <p:nvSpPr>
+          <p:cNvPr id="91" name="Text 32"/>
+          <p:cNvSpPr/>
+          <p:nvPr/>
+        </p:nvSpPr>
+        <p:spPr>
+          <a:xfrm>
+            <a:off x="1179720" y="1508760"/>
+            <a:ext cx="4845600" cy="273600"/>
+          </a:xfrm>
+          <a:prstGeom prst="rect">
+            <a:avLst/>
+          </a:prstGeom>
+          <a:noFill/>
+          <a:ln w="0">
+            <a:noFill/>
+          </a:ln>
+        </p:spPr>
+        <p:style>
+          <a:lnRef idx="0"/>
+          <a:fillRef idx="0"/>
+          <a:effectRef idx="0"/>
+          <a:fontRef idx="minor"/>
+        </p:style>
+        <p:txBody>
+          <a:bodyPr lIns="0" tIns="0" rIns="0" bIns="0" anchor="ctr">
+            <a:noAutofit/>
+          </a:bodyPr>
+          <a:p>
+            <a:pPr defTabSz="914400">
+              <a:lnSpc>
+                <a:spcPct val="100000"/>
+              </a:lnSpc>
+              <a:tabLst>
+                <a:tab pos="0" algn="l"/>
+              </a:tabLst>
+            </a:pPr>
+            <a:r>
+              <a:rPr lang="en-US" sz="1350" b="0" u="none" strike="noStrike">
+                <a:solidFill>
+                  <a:srgbClr val="111827"/>
+                </a:solidFill>
+                <a:effectLst/>
+                <a:uFillTx/>
+                <a:latin typeface="Aptos"/>
+              </a:rPr>
+              <a:t>node --version works</a:t>
+            </a:r>
+            <a:endParaRPr lang="en-US" sz="1350" b="0" u="none" strike="noStrike">
+              <a:solidFill>
+                <a:srgbClr val="000000"/>
+              </a:solidFill>
+              <a:effectLst/>
+              <a:uFillTx/>
+              <a:latin typeface="Arial"/>
+            </a:endParaRPr>
+          </a:p>
+        </p:txBody>
+      </p:sp>
+      <p:sp>
+        <p:nvSpPr>
+          <p:cNvPr id="92" name="Shape 4"/>
+          <p:cNvSpPr/>
+          <p:nvPr/>
+        </p:nvSpPr>
+        <p:spPr>
+          <a:xfrm>
+            <a:off x="868680" y="2148840"/>
+            <a:ext cx="209520" cy="209520"/>
+          </a:xfrm>
+          <a:prstGeom prst="ellipse">
+            <a:avLst/>
+          </a:prstGeom>
+          <a:solidFill>
+            <a:srgbClr val="16A34A"/>
+          </a:solidFill>
+          <a:ln w="12700">
+            <a:solidFill>
+              <a:srgbClr val="16A34A"/>
+            </a:solidFill>
+            <a:round/>
+          </a:ln>
+        </p:spPr>
+        <p:style>
+          <a:lnRef idx="0"/>
+          <a:fillRef idx="0"/>
+          <a:effectRef idx="0"/>
+          <a:fontRef idx="minor"/>
+        </p:style>
+        <p:txBody>
+          <a:bodyPr lIns="90000" tIns="45000" rIns="90000" bIns="45000" anchor="t">
+            <a:noAutofit/>
+          </a:bodyPr>
+          <a:p>
+            <a:endParaRPr lang="en-US" sz="1800" b="0" u="none" strike="noStrike">
+              <a:solidFill>
+                <a:srgbClr val="FFFFFF"/>
+              </a:solidFill>
+              <a:effectLst/>
+              <a:uFillTx/>
+              <a:latin typeface="Arial"/>
+            </a:endParaRPr>
+          </a:p>
+        </p:txBody>
+      </p:sp>
+      <p:sp>
+        <p:nvSpPr>
+          <p:cNvPr id="93" name="Text 33"/>
+          <p:cNvSpPr/>
+          <p:nvPr/>
+        </p:nvSpPr>
+        <p:spPr>
+          <a:xfrm>
+            <a:off x="882360" y="2126160"/>
+            <a:ext cx="182160" cy="200520"/>
+          </a:xfrm>
+          <a:prstGeom prst="rect">
+            <a:avLst/>
+          </a:prstGeom>
+          <a:noFill/>
+          <a:ln w="0">
+            <a:noFill/>
+          </a:ln>
+        </p:spPr>
+        <p:style>
+          <a:lnRef idx="0"/>
+          <a:fillRef idx="0"/>
+          <a:effectRef idx="0"/>
+          <a:fontRef idx="minor"/>
+        </p:style>
+        <p:txBody>
+          <a:bodyPr lIns="0" tIns="0" rIns="0" bIns="0" anchor="ctr">
+            <a:noAutofit/>
+          </a:bodyPr>
+          <a:p>
+            <a:pPr algn="ctr" defTabSz="914400">
+              <a:lnSpc>
+                <a:spcPct val="100000"/>
+              </a:lnSpc>
+              <a:tabLst>
+                <a:tab pos="0" algn="l"/>
+              </a:tabLst>
+            </a:pPr>
+            <a:r>
+              <a:rPr lang="en-US" sz="1200" b="1" u="none" strike="noStrike">
+                <a:solidFill>
+                  <a:srgbClr val="FFFFFF"/>
+                </a:solidFill>
+                <a:effectLst/>
+                <a:uFillTx/>
+                <a:latin typeface="Aptos"/>
+              </a:rPr>
+              <a:t>✓</a:t>
+            </a:r>
+            <a:endParaRPr lang="en-US" sz="1200" b="0" u="none" strike="noStrike">
+              <a:solidFill>
+                <a:srgbClr val="000000"/>
+              </a:solidFill>
+              <a:effectLst/>
+              <a:uFillTx/>
+              <a:latin typeface="Arial"/>
+            </a:endParaRPr>
+          </a:p>
+        </p:txBody>
+      </p:sp>
+      <p:sp>
+        <p:nvSpPr>
+          <p:cNvPr id="94" name="Text 34"/>
+          <p:cNvSpPr/>
+          <p:nvPr/>
+        </p:nvSpPr>
+        <p:spPr>
+          <a:xfrm>
+            <a:off x="1179720" y="2130480"/>
+            <a:ext cx="4845600" cy="273600"/>
+          </a:xfrm>
+          <a:prstGeom prst="rect">
+            <a:avLst/>
+          </a:prstGeom>
+          <a:noFill/>
+          <a:ln w="0">
+            <a:noFill/>
+          </a:ln>
+        </p:spPr>
+        <p:style>
+          <a:lnRef idx="0"/>
+          <a:fillRef idx="0"/>
+          <a:effectRef idx="0"/>
+          <a:fontRef idx="minor"/>
+        </p:style>
+        <p:txBody>
+          <a:bodyPr lIns="0" tIns="0" rIns="0" bIns="0" anchor="ctr">
+            <a:noAutofit/>
+          </a:bodyPr>
+          <a:p>
+            <a:pPr defTabSz="914400">
+              <a:lnSpc>
+                <a:spcPct val="100000"/>
+              </a:lnSpc>
+              <a:tabLst>
+                <a:tab pos="0" algn="l"/>
+              </a:tabLst>
+            </a:pPr>
+            <a:r>
+              <a:rPr lang="en-US" sz="1350" b="0" u="none" strike="noStrike">
+                <a:solidFill>
+                  <a:srgbClr val="111827"/>
+                </a:solidFill>
+                <a:effectLst/>
+                <a:uFillTx/>
+                <a:latin typeface="Aptos"/>
+              </a:rPr>
+              <a:t>npm --version works</a:t>
+            </a:r>
+            <a:endParaRPr lang="en-US" sz="1350" b="0" u="none" strike="noStrike">
+              <a:solidFill>
+                <a:srgbClr val="000000"/>
+              </a:solidFill>
+              <a:effectLst/>
+              <a:uFillTx/>
+              <a:latin typeface="Arial"/>
+            </a:endParaRPr>
+          </a:p>
+        </p:txBody>
+      </p:sp>
+      <p:sp>
+        <p:nvSpPr>
+          <p:cNvPr id="95" name="Shape 13"/>
+          <p:cNvSpPr/>
+          <p:nvPr/>
+        </p:nvSpPr>
+        <p:spPr>
+          <a:xfrm>
+            <a:off x="868680" y="2770560"/>
+            <a:ext cx="209520" cy="209520"/>
+          </a:xfrm>
+          <a:prstGeom prst="ellipse">
+            <a:avLst/>
+          </a:prstGeom>
+          <a:solidFill>
+            <a:srgbClr val="16A34A"/>
+          </a:solidFill>
+          <a:ln w="12700">
+            <a:solidFill>
+              <a:srgbClr val="16A34A"/>
+            </a:solidFill>
+            <a:round/>
+          </a:ln>
+        </p:spPr>
+        <p:style>
+          <a:lnRef idx="0"/>
+          <a:fillRef idx="0"/>
+          <a:effectRef idx="0"/>
+          <a:fontRef idx="minor"/>
+        </p:style>
+        <p:txBody>
+          <a:bodyPr lIns="90000" tIns="45000" rIns="90000" bIns="45000" anchor="t">
+            <a:noAutofit/>
+          </a:bodyPr>
+          <a:p>
+            <a:endParaRPr lang="en-US" sz="1800" b="0" u="none" strike="noStrike">
+              <a:solidFill>
+                <a:srgbClr val="FFFFFF"/>
+              </a:solidFill>
+              <a:effectLst/>
+              <a:uFillTx/>
+              <a:latin typeface="Arial"/>
+            </a:endParaRPr>
+          </a:p>
+        </p:txBody>
+      </p:sp>
+      <p:sp>
+        <p:nvSpPr>
+          <p:cNvPr id="96" name="Text 35"/>
+          <p:cNvSpPr/>
+          <p:nvPr/>
+        </p:nvSpPr>
+        <p:spPr>
+          <a:xfrm>
+            <a:off x="882360" y="2747880"/>
+            <a:ext cx="182160" cy="200520"/>
+          </a:xfrm>
+          <a:prstGeom prst="rect">
+            <a:avLst/>
+          </a:prstGeom>
+          <a:noFill/>
+          <a:ln w="0">
+            <a:noFill/>
+          </a:ln>
+        </p:spPr>
+        <p:style>
+          <a:lnRef idx="0"/>
+          <a:fillRef idx="0"/>
+          <a:effectRef idx="0"/>
+          <a:fontRef idx="minor"/>
+        </p:style>
+        <p:txBody>
+          <a:bodyPr lIns="0" tIns="0" rIns="0" bIns="0" anchor="ctr">
+            <a:noAutofit/>
+          </a:bodyPr>
+          <a:p>
+            <a:pPr algn="ctr" defTabSz="914400">
+              <a:lnSpc>
+                <a:spcPct val="100000"/>
+              </a:lnSpc>
+              <a:tabLst>
+                <a:tab pos="0" algn="l"/>
+              </a:tabLst>
+            </a:pPr>
+            <a:r>
+              <a:rPr lang="en-US" sz="1200" b="1" u="none" strike="noStrike">
+                <a:solidFill>
+                  <a:srgbClr val="FFFFFF"/>
+                </a:solidFill>
+                <a:effectLst/>
+                <a:uFillTx/>
+                <a:latin typeface="Aptos"/>
+              </a:rPr>
+              <a:t>✓</a:t>
+            </a:r>
+            <a:endParaRPr lang="en-US" sz="1200" b="0" u="none" strike="noStrike">
+              <a:solidFill>
+                <a:srgbClr val="000000"/>
+              </a:solidFill>
+              <a:effectLst/>
+              <a:uFillTx/>
+              <a:latin typeface="Arial"/>
+            </a:endParaRPr>
+          </a:p>
+        </p:txBody>
+      </p:sp>
+      <p:sp>
+        <p:nvSpPr>
+          <p:cNvPr id="97" name="Text 36"/>
+          <p:cNvSpPr/>
+          <p:nvPr/>
+        </p:nvSpPr>
+        <p:spPr>
+          <a:xfrm>
+            <a:off x="1179720" y="2752200"/>
+            <a:ext cx="4845600" cy="273600"/>
+          </a:xfrm>
+          <a:prstGeom prst="rect">
+            <a:avLst/>
+          </a:prstGeom>
+          <a:noFill/>
+          <a:ln w="0">
+            <a:noFill/>
+          </a:ln>
+        </p:spPr>
+        <p:style>
+          <a:lnRef idx="0"/>
+          <a:fillRef idx="0"/>
+          <a:effectRef idx="0"/>
+          <a:fontRef idx="minor"/>
+        </p:style>
+        <p:txBody>
+          <a:bodyPr lIns="0" tIns="0" rIns="0" bIns="0" anchor="ctr">
+            <a:noAutofit/>
+          </a:bodyPr>
+          <a:p>
+            <a:pPr defTabSz="914400">
+              <a:lnSpc>
+                <a:spcPct val="100000"/>
+              </a:lnSpc>
+              <a:tabLst>
+                <a:tab pos="0" algn="l"/>
+              </a:tabLst>
+            </a:pPr>
+            <a:r>
+              <a:rPr lang="en-US" sz="1350" b="0" u="none" strike="noStrike">
+                <a:solidFill>
+                  <a:srgbClr val="111827"/>
+                </a:solidFill>
+                <a:effectLst/>
+                <a:uFillTx/>
+                <a:latin typeface="Aptos"/>
+              </a:rPr>
+              <a:t>Next.js opens at localhost:3000</a:t>
+            </a:r>
+            <a:endParaRPr lang="en-US" sz="1350" b="0" u="none" strike="noStrike">
+              <a:solidFill>
+                <a:srgbClr val="000000"/>
+              </a:solidFill>
+              <a:effectLst/>
+              <a:uFillTx/>
+              <a:latin typeface="Arial"/>
+            </a:endParaRPr>
+          </a:p>
+        </p:txBody>
+      </p:sp>
+      <p:sp>
+        <p:nvSpPr>
+          <p:cNvPr id="98" name="Shape 16"/>
+          <p:cNvSpPr/>
+          <p:nvPr/>
+        </p:nvSpPr>
+        <p:spPr>
+          <a:xfrm>
+            <a:off x="868680" y="3392280"/>
+            <a:ext cx="209520" cy="209520"/>
+          </a:xfrm>
+          <a:prstGeom prst="ellipse">
+            <a:avLst/>
+          </a:prstGeom>
+          <a:solidFill>
+            <a:srgbClr val="16A34A"/>
+          </a:solidFill>
+          <a:ln w="12700">
+            <a:solidFill>
+              <a:srgbClr val="16A34A"/>
+            </a:solidFill>
+            <a:round/>
+          </a:ln>
+        </p:spPr>
+        <p:style>
+          <a:lnRef idx="0"/>
+          <a:fillRef idx="0"/>
+          <a:effectRef idx="0"/>
+          <a:fontRef idx="minor"/>
+        </p:style>
+        <p:txBody>
+          <a:bodyPr lIns="90000" tIns="45000" rIns="90000" bIns="45000" anchor="t">
+            <a:noAutofit/>
+          </a:bodyPr>
+          <a:p>
+            <a:endParaRPr lang="en-US" sz="1800" b="0" u="none" strike="noStrike">
+              <a:solidFill>
+                <a:srgbClr val="FFFFFF"/>
+              </a:solidFill>
+              <a:effectLst/>
+              <a:uFillTx/>
+              <a:latin typeface="Arial"/>
+            </a:endParaRPr>
+          </a:p>
+        </p:txBody>
+      </p:sp>
+      <p:sp>
+        <p:nvSpPr>
+          <p:cNvPr id="99" name="Text 37"/>
+          <p:cNvSpPr/>
+          <p:nvPr/>
+        </p:nvSpPr>
+        <p:spPr>
+          <a:xfrm>
+            <a:off x="882360" y="3369600"/>
+            <a:ext cx="182160" cy="200520"/>
+          </a:xfrm>
+          <a:prstGeom prst="rect">
+            <a:avLst/>
+          </a:prstGeom>
+          <a:noFill/>
+          <a:ln w="0">
+            <a:noFill/>
+          </a:ln>
+        </p:spPr>
+        <p:style>
+          <a:lnRef idx="0"/>
+          <a:fillRef idx="0"/>
+          <a:effectRef idx="0"/>
+          <a:fontRef idx="minor"/>
+        </p:style>
+        <p:txBody>
+          <a:bodyPr lIns="0" tIns="0" rIns="0" bIns="0" anchor="ctr">
+            <a:noAutofit/>
+          </a:bodyPr>
+          <a:p>
+            <a:pPr algn="ctr" defTabSz="914400">
+              <a:lnSpc>
+                <a:spcPct val="100000"/>
+              </a:lnSpc>
+              <a:tabLst>
+                <a:tab pos="0" algn="l"/>
+              </a:tabLst>
+            </a:pPr>
+            <a:r>
+              <a:rPr lang="en-US" sz="1200" b="1" u="none" strike="noStrike">
+                <a:solidFill>
+                  <a:srgbClr val="FFFFFF"/>
+                </a:solidFill>
+                <a:effectLst/>
+                <a:uFillTx/>
+                <a:latin typeface="Aptos"/>
+              </a:rPr>
+              <a:t>✓</a:t>
+            </a:r>
+            <a:endParaRPr lang="en-US" sz="1200" b="0" u="none" strike="noStrike">
+              <a:solidFill>
+                <a:srgbClr val="000000"/>
+              </a:solidFill>
+              <a:effectLst/>
+              <a:uFillTx/>
+              <a:latin typeface="Arial"/>
+            </a:endParaRPr>
+          </a:p>
+        </p:txBody>
+      </p:sp>
+      <p:sp>
+        <p:nvSpPr>
+          <p:cNvPr id="100" name="Text 38"/>
+          <p:cNvSpPr/>
+          <p:nvPr/>
+        </p:nvSpPr>
+        <p:spPr>
+          <a:xfrm>
+            <a:off x="1179720" y="3374280"/>
+            <a:ext cx="4845600" cy="273600"/>
+          </a:xfrm>
+          <a:prstGeom prst="rect">
+            <a:avLst/>
+          </a:prstGeom>
+          <a:noFill/>
+          <a:ln w="0">
+            <a:noFill/>
+          </a:ln>
+        </p:spPr>
+        <p:style>
+          <a:lnRef idx="0"/>
+          <a:fillRef idx="0"/>
+          <a:effectRef idx="0"/>
+          <a:fontRef idx="minor"/>
+        </p:style>
+        <p:txBody>
+          <a:bodyPr lIns="0" tIns="0" rIns="0" bIns="0" anchor="ctr">
+            <a:noAutofit/>
+          </a:bodyPr>
+          <a:p>
+            <a:pPr defTabSz="914400">
+              <a:lnSpc>
+                <a:spcPct val="100000"/>
+              </a:lnSpc>
+              <a:tabLst>
+                <a:tab pos="0" algn="l"/>
+              </a:tabLst>
+            </a:pPr>
+            <a:r>
+              <a:rPr lang="en-US" sz="1350" b="0" u="none" strike="noStrike">
+                <a:solidFill>
+                  <a:srgbClr val="111827"/>
+                </a:solidFill>
+                <a:effectLst/>
+                <a:uFillTx/>
+                <a:latin typeface="Aptos"/>
+              </a:rPr>
+              <a:t>pg appears in package.json dependencies</a:t>
+            </a:r>
+            <a:endParaRPr lang="en-US" sz="1350" b="0" u="none" strike="noStrike">
+              <a:solidFill>
+                <a:srgbClr val="000000"/>
+              </a:solidFill>
+              <a:effectLst/>
+              <a:uFillTx/>
+              <a:latin typeface="Arial"/>
+            </a:endParaRPr>
+          </a:p>
+        </p:txBody>
+      </p:sp>
+      <p:sp>
+        <p:nvSpPr>
+          <p:cNvPr id="101" name="Shape 19"/>
+          <p:cNvSpPr/>
+          <p:nvPr/>
+        </p:nvSpPr>
+        <p:spPr>
+          <a:xfrm>
+            <a:off x="868680" y="4014360"/>
+            <a:ext cx="209520" cy="209520"/>
+          </a:xfrm>
+          <a:prstGeom prst="ellipse">
+            <a:avLst/>
+          </a:prstGeom>
+          <a:solidFill>
+            <a:srgbClr val="2563EB"/>
+          </a:solidFill>
+          <a:ln w="12700">
+            <a:solidFill>
+              <a:srgbClr val="2563EB"/>
+            </a:solidFill>
+            <a:round/>
+          </a:ln>
+        </p:spPr>
+        <p:style>
+          <a:lnRef idx="0"/>
+          <a:fillRef idx="0"/>
+          <a:effectRef idx="0"/>
+          <a:fontRef idx="minor"/>
+        </p:style>
+        <p:txBody>
+          <a:bodyPr lIns="90000" tIns="45000" rIns="90000" bIns="45000" anchor="t">
+            <a:noAutofit/>
+          </a:bodyPr>
+          <a:p>
+            <a:endParaRPr lang="en-US" sz="1800" b="0" u="none" strike="noStrike">
+              <a:solidFill>
+                <a:srgbClr val="FFFFFF"/>
+              </a:solidFill>
+              <a:effectLst/>
+              <a:uFillTx/>
+              <a:latin typeface="Arial"/>
+            </a:endParaRPr>
+          </a:p>
+        </p:txBody>
+      </p:sp>
+      <p:sp>
+        <p:nvSpPr>
+          <p:cNvPr id="102" name="Text 39"/>
+          <p:cNvSpPr/>
+          <p:nvPr/>
+        </p:nvSpPr>
+        <p:spPr>
+          <a:xfrm>
+            <a:off x="882360" y="3991320"/>
+            <a:ext cx="182160" cy="200520"/>
+          </a:xfrm>
+          <a:prstGeom prst="rect">
+            <a:avLst/>
+          </a:prstGeom>
+          <a:noFill/>
+          <a:ln w="0">
+            <a:noFill/>
+          </a:ln>
+        </p:spPr>
+        <p:style>
+          <a:lnRef idx="0"/>
+          <a:fillRef idx="0"/>
+          <a:effectRef idx="0"/>
+          <a:fontRef idx="minor"/>
+        </p:style>
+        <p:txBody>
+          <a:bodyPr lIns="0" tIns="0" rIns="0" bIns="0" anchor="ctr">
+            <a:noAutofit/>
+          </a:bodyPr>
+          <a:p>
+            <a:pPr algn="ctr" defTabSz="914400">
+              <a:lnSpc>
+                <a:spcPct val="100000"/>
+              </a:lnSpc>
+              <a:tabLst>
+                <a:tab pos="0" algn="l"/>
+              </a:tabLst>
+            </a:pPr>
+            <a:r>
+              <a:rPr lang="en-US" sz="1200" b="1" u="none" strike="noStrike">
+                <a:solidFill>
+                  <a:srgbClr val="FFFFFF"/>
+                </a:solidFill>
+                <a:effectLst/>
+                <a:uFillTx/>
+                <a:latin typeface="Aptos"/>
+              </a:rPr>
+              <a:t>✓</a:t>
+            </a:r>
+            <a:endParaRPr lang="en-US" sz="1200" b="0" u="none" strike="noStrike">
+              <a:solidFill>
+                <a:srgbClr val="000000"/>
+              </a:solidFill>
+              <a:effectLst/>
+              <a:uFillTx/>
+              <a:latin typeface="Arial"/>
+            </a:endParaRPr>
+          </a:p>
+        </p:txBody>
+      </p:sp>
+      <p:sp>
+        <p:nvSpPr>
+          <p:cNvPr id="103" name="Text 40"/>
+          <p:cNvSpPr/>
+          <p:nvPr/>
+        </p:nvSpPr>
+        <p:spPr>
+          <a:xfrm>
+            <a:off x="1179720" y="3996000"/>
+            <a:ext cx="4845600" cy="273600"/>
+          </a:xfrm>
+          <a:prstGeom prst="rect">
+            <a:avLst/>
+          </a:prstGeom>
+          <a:noFill/>
+          <a:ln w="0">
+            <a:noFill/>
+          </a:ln>
+        </p:spPr>
+        <p:style>
+          <a:lnRef idx="0"/>
+          <a:fillRef idx="0"/>
+          <a:effectRef idx="0"/>
+          <a:fontRef idx="minor"/>
+        </p:style>
+        <p:txBody>
+          <a:bodyPr lIns="0" tIns="0" rIns="0" bIns="0" anchor="ctr">
+            <a:noAutofit/>
+          </a:bodyPr>
+          <a:p>
+            <a:pPr defTabSz="914400">
+              <a:lnSpc>
+                <a:spcPct val="100000"/>
+              </a:lnSpc>
+              <a:tabLst>
+                <a:tab pos="0" algn="l"/>
+              </a:tabLst>
+            </a:pPr>
+            <a:r>
+              <a:rPr lang="en-US" sz="1350" b="0" u="none" strike="noStrike">
+                <a:solidFill>
+                  <a:srgbClr val="111827"/>
+                </a:solidFill>
+                <a:effectLst/>
+                <a:uFillTx/>
+                <a:latin typeface="Aptos"/>
+              </a:rPr>
+              <a:t>PostgreSQL server and database credentials are available</a:t>
+            </a:r>
+            <a:endParaRPr lang="en-US" sz="1350" b="0" u="none" strike="noStrike">
+              <a:solidFill>
+                <a:srgbClr val="000000"/>
+              </a:solidFill>
+              <a:effectLst/>
+              <a:uFillTx/>
+              <a:latin typeface="Arial"/>
+            </a:endParaRPr>
+          </a:p>
+        </p:txBody>
+      </p:sp>
+      <p:sp>
+        <p:nvSpPr>
+          <p:cNvPr id="104" name="Shape 20"/>
+          <p:cNvSpPr/>
+          <p:nvPr/>
+        </p:nvSpPr>
+        <p:spPr>
+          <a:xfrm>
+            <a:off x="6446520" y="1325880"/>
+            <a:ext cx="4891320" cy="4479840"/>
           </a:xfrm>
           <a:prstGeom prst="roundRect">
             <a:avLst>
-              <a:gd name="adj" fmla="val 1975"/>
+              <a:gd name="adj" fmla="val 1633"/>
             </a:avLst>
           </a:prstGeom>
           <a:solidFill>
@@ -7022,60 +7800,14 @@
       </p:sp>
       <p:sp>
         <p:nvSpPr>
-          <p:cNvPr id="90" name="Shape 3"/>
-          <p:cNvSpPr/>
-          <p:nvPr/>
-        </p:nvSpPr>
-        <p:spPr>
-          <a:xfrm>
-            <a:off x="658440" y="1353240"/>
-            <a:ext cx="82080" cy="4498560"/>
-          </a:xfrm>
-          <a:prstGeom prst="rect">
-            <a:avLst/>
-          </a:prstGeom>
-          <a:solidFill>
-            <a:srgbClr val="16A34A"/>
-          </a:solidFill>
-          <a:ln w="12700">
-            <a:solidFill>
-              <a:srgbClr val="16A34A"/>
-            </a:solidFill>
-            <a:round/>
-          </a:ln>
-        </p:spPr>
-        <p:style>
-          <a:lnRef idx="0"/>
-          <a:fillRef idx="0"/>
-          <a:effectRef idx="0"/>
-          <a:fontRef idx="minor"/>
-        </p:style>
-        <p:txBody>
-          <a:bodyPr lIns="90000" tIns="45000" rIns="90000" bIns="45000" anchor="t">
-            <a:noAutofit/>
-          </a:bodyPr>
-          <a:p>
-            <a:endParaRPr lang="en-US" sz="1800" b="0" u="none" strike="noStrike">
-              <a:solidFill>
-                <a:srgbClr val="FFFFFF"/>
-              </a:solidFill>
-              <a:effectLst/>
-              <a:uFillTx/>
-              <a:latin typeface="Arial"/>
-            </a:endParaRPr>
-          </a:p>
-        </p:txBody>
-      </p:sp>
-      <p:sp>
-        <p:nvSpPr>
-          <p:cNvPr id="91" name="Text 4"/>
-          <p:cNvSpPr/>
-          <p:nvPr/>
-        </p:nvSpPr>
-        <p:spPr>
-          <a:xfrm>
-            <a:off x="914400" y="1536120"/>
-            <a:ext cx="3291480" cy="310680"/>
+          <p:cNvPr id="105" name="Text 41"/>
+          <p:cNvSpPr/>
+          <p:nvPr/>
+        </p:nvSpPr>
+        <p:spPr>
+          <a:xfrm>
+            <a:off x="6784920" y="1627560"/>
+            <a:ext cx="4159800" cy="365040"/>
           </a:xfrm>
           <a:prstGeom prst="rect">
             <a:avLst/>
@@ -7105,7 +7837,7 @@
               </a:tabLst>
             </a:pPr>
             <a:r>
-              <a:rPr lang="en-US" sz="1700" b="1" u="none" strike="noStrike">
+              <a:rPr lang="en-US" sz="1900" b="1" u="none" strike="noStrike">
                 <a:solidFill>
                   <a:srgbClr val="111827"/>
                 </a:solidFill>
@@ -7113,46 +7845,46 @@
                 <a:uFillTx/>
                 <a:latin typeface="Aptos"/>
               </a:rPr>
-              <a:t>Install inside the app</a:t>
-            </a:r>
-            <a:endParaRPr lang="en-US" sz="1700" b="0" u="none" strike="noStrike">
-              <a:solidFill>
-                <a:srgbClr val="000000"/>
-              </a:solidFill>
-              <a:effectLst/>
-              <a:uFillTx/>
-              <a:latin typeface="Arial"/>
-            </a:endParaRPr>
-          </a:p>
-        </p:txBody>
-      </p:sp>
-      <p:sp>
-        <p:nvSpPr>
-          <p:cNvPr id="92" name="Text 5"/>
-          <p:cNvSpPr/>
-          <p:nvPr/>
-        </p:nvSpPr>
-        <p:spPr>
-          <a:xfrm>
-            <a:off x="914400" y="1956960"/>
-            <a:ext cx="3264120" cy="3730320"/>
-          </a:xfrm>
-          <a:prstGeom prst="rect">
-            <a:avLst/>
-          </a:prstGeom>
-          <a:noFill/>
-          <a:ln w="0">
-            <a:noFill/>
-          </a:ln>
-        </p:spPr>
-        <p:style>
-          <a:lnRef idx="0"/>
-          <a:fillRef idx="0"/>
-          <a:effectRef idx="0"/>
-          <a:fontRef idx="minor"/>
-        </p:style>
-        <p:txBody>
-          <a:bodyPr lIns="360" tIns="360" rIns="360" bIns="360" anchor="t">
+              <a:t>Official references</a:t>
+            </a:r>
+            <a:endParaRPr lang="en-US" sz="1900" b="0" u="none" strike="noStrike">
+              <a:solidFill>
+                <a:srgbClr val="000000"/>
+              </a:solidFill>
+              <a:effectLst/>
+              <a:uFillTx/>
+              <a:latin typeface="Arial"/>
+            </a:endParaRPr>
+          </a:p>
+        </p:txBody>
+      </p:sp>
+      <p:sp>
+        <p:nvSpPr>
+          <p:cNvPr id="106" name="Text 42"/>
+          <p:cNvSpPr/>
+          <p:nvPr/>
+        </p:nvSpPr>
+        <p:spPr>
+          <a:xfrm>
+            <a:off x="6793920" y="2212920"/>
+            <a:ext cx="1599480" cy="255240"/>
+          </a:xfrm>
+          <a:prstGeom prst="rect">
+            <a:avLst/>
+          </a:prstGeom>
+          <a:noFill/>
+          <a:ln w="0">
+            <a:noFill/>
+          </a:ln>
+        </p:spPr>
+        <p:style>
+          <a:lnRef idx="0"/>
+          <a:fillRef idx="0"/>
+          <a:effectRef idx="0"/>
+          <a:fontRef idx="minor"/>
+        </p:style>
+        <p:txBody>
+          <a:bodyPr lIns="0" tIns="0" rIns="0" bIns="0" anchor="ctr">
             <a:noAutofit/>
           </a:bodyPr>
           <a:p>
@@ -7165,103 +7897,57 @@
               </a:tabLst>
             </a:pPr>
             <a:r>
-              <a:rPr lang="en-US" sz="1350" b="0" u="none" strike="noStrike">
-                <a:solidFill>
-                  <a:srgbClr val="4B5563"/>
+              <a:rPr lang="en-US" sz="1300" b="1" u="none" strike="noStrike">
+                <a:solidFill>
+                  <a:srgbClr val="111827"/>
                 </a:solidFill>
                 <a:effectLst/>
                 <a:uFillTx/>
                 <a:latin typeface="Aptos"/>
               </a:rPr>
-              <a:t>Stop the development server with Ctrl+C if needed. From the project folder, install the package:</a:t>
-            </a:r>
-            <a:endParaRPr lang="en-US" sz="1350" b="0" u="none" strike="noStrike">
-              <a:solidFill>
-                <a:srgbClr val="000000"/>
-              </a:solidFill>
-              <a:effectLst/>
-              <a:uFillTx/>
-              <a:latin typeface="Arial"/>
-            </a:endParaRPr>
-          </a:p>
-        </p:txBody>
-      </p:sp>
-      <p:sp>
-        <p:nvSpPr>
-          <p:cNvPr id="93" name="Shape 6"/>
-          <p:cNvSpPr/>
-          <p:nvPr/>
-        </p:nvSpPr>
-        <p:spPr>
-          <a:xfrm>
-            <a:off x="960120" y="2770560"/>
-            <a:ext cx="3090240" cy="932400"/>
-          </a:xfrm>
-          <a:prstGeom prst="roundRect">
-            <a:avLst>
-              <a:gd name="adj" fmla="val 5882"/>
-            </a:avLst>
-          </a:prstGeom>
-          <a:solidFill>
-            <a:srgbClr val="0F172A"/>
-          </a:solidFill>
-          <a:ln w="12700">
-            <a:solidFill>
-              <a:srgbClr val="0F172A"/>
-            </a:solidFill>
-            <a:round/>
-          </a:ln>
-        </p:spPr>
-        <p:style>
-          <a:lnRef idx="0"/>
-          <a:fillRef idx="0"/>
-          <a:effectRef idx="0"/>
-          <a:fontRef idx="minor"/>
-        </p:style>
-        <p:txBody>
-          <a:bodyPr lIns="90000" tIns="45000" rIns="90000" bIns="45000" anchor="t">
-            <a:noAutofit/>
-          </a:bodyPr>
-          <a:p>
-            <a:endParaRPr lang="en-US" sz="1800" b="0" u="none" strike="noStrike">
-              <a:solidFill>
-                <a:srgbClr val="FFFFFF"/>
-              </a:solidFill>
-              <a:effectLst/>
-              <a:uFillTx/>
-              <a:latin typeface="Arial"/>
-            </a:endParaRPr>
-          </a:p>
-        </p:txBody>
-      </p:sp>
-      <p:sp>
-        <p:nvSpPr>
-          <p:cNvPr id="94" name="Text 7"/>
-          <p:cNvSpPr/>
-          <p:nvPr/>
-        </p:nvSpPr>
-        <p:spPr>
-          <a:xfrm>
-            <a:off x="1161360" y="2935080"/>
-            <a:ext cx="2688120" cy="621360"/>
-          </a:xfrm>
-          <a:prstGeom prst="rect">
-            <a:avLst/>
-          </a:prstGeom>
-          <a:noFill/>
-          <a:ln w="0">
-            <a:noFill/>
-          </a:ln>
-        </p:spPr>
-        <p:style>
-          <a:lnRef idx="0"/>
-          <a:fillRef idx="0"/>
-          <a:effectRef idx="0"/>
-          <a:fontRef idx="minor"/>
-        </p:style>
-        <p:txBody>
-          <a:bodyPr lIns="360" tIns="360" rIns="360" bIns="360" anchor="ctr">
-            <a:noAutofit/>
+              <a:t>Node.js downloads</a:t>
+            </a:r>
+            <a:endParaRPr lang="en-US" sz="1300" b="0" u="none" strike="noStrike">
+              <a:solidFill>
+                <a:srgbClr val="000000"/>
+              </a:solidFill>
+              <a:effectLst/>
+              <a:uFillTx/>
+              <a:latin typeface="Arial"/>
+            </a:endParaRPr>
+          </a:p>
+        </p:txBody>
+      </p:sp>
+      <p:sp>
+        <p:nvSpPr>
+          <p:cNvPr id="107" name="Text 43">
+            <a:hlinkClick r:id="rId1"/>
+          </p:cNvPr>
+          <p:cNvSpPr/>
+          <p:nvPr/>
+        </p:nvSpPr>
+        <p:spPr>
+          <a:xfrm>
+            <a:off x="8412480" y="2212920"/>
+            <a:ext cx="2513880" cy="291960"/>
+          </a:xfrm>
+          <a:prstGeom prst="rect">
+            <a:avLst/>
+          </a:prstGeom>
+          <a:noFill/>
+          <a:ln w="0">
+            <a:noFill/>
+          </a:ln>
+        </p:spPr>
+        <p:style>
+          <a:lnRef idx="0"/>
+          <a:fillRef idx="0"/>
+          <a:effectRef idx="0"/>
+          <a:fontRef idx="minor"/>
+        </p:style>
+        <p:txBody>
+          <a:bodyPr lIns="0" tIns="0" rIns="0" bIns="0" anchor="ctr">
+            <a:normAutofit/>
           </a:bodyPr>
           <a:p>
             <a:pPr defTabSz="914400">
@@ -7273,38 +7959,38 @@
               </a:tabLst>
             </a:pPr>
             <a:r>
-              <a:rPr lang="en-US" sz="1350" b="0" u="none" strike="noStrike">
-                <a:solidFill>
-                  <a:srgbClr val="E5E7EB"/>
-                </a:solidFill>
-                <a:effectLst/>
-                <a:uFillTx/>
-                <a:latin typeface="Courier New"/>
-                <a:ea typeface="Courier New"/>
-              </a:rPr>
-              <a:t>npm install pg</a:t>
-            </a:r>
-            <a:endParaRPr lang="en-US" sz="1350" b="0" u="none" strike="noStrike">
-              <a:solidFill>
-                <a:srgbClr val="000000"/>
-              </a:solidFill>
-              <a:effectLst/>
-              <a:uFillTx/>
-              <a:latin typeface="Arial"/>
-            </a:endParaRPr>
-          </a:p>
-        </p:txBody>
-      </p:sp>
-      <p:sp>
-        <p:nvSpPr>
-          <p:cNvPr id="95" name="Text 8"/>
-          <p:cNvSpPr/>
-          <p:nvPr/>
-        </p:nvSpPr>
-        <p:spPr>
-          <a:xfrm>
-            <a:off x="960120" y="4041720"/>
-            <a:ext cx="3017160" cy="273960"/>
+              <a:rPr lang="en-US" sz="1050" b="0" u="sng" strike="noStrike">
+                <a:solidFill>
+                  <a:srgbClr val="0563C1"/>
+                </a:solidFill>
+                <a:effectLst/>
+                <a:uFillTx/>
+                <a:latin typeface="Aptos"/>
+                <a:hlinkClick r:id="rId2"/>
+              </a:rPr>
+              <a:t>https://nodejs.org/en/download</a:t>
+            </a:r>
+            <a:endParaRPr lang="en-US" sz="1050" b="0" u="none" strike="noStrike">
+              <a:solidFill>
+                <a:srgbClr val="000000"/>
+              </a:solidFill>
+              <a:effectLst/>
+              <a:uFillTx/>
+              <a:latin typeface="Arial"/>
+            </a:endParaRPr>
+          </a:p>
+        </p:txBody>
+      </p:sp>
+      <p:sp>
+        <p:nvSpPr>
+          <p:cNvPr id="108" name="Text 44"/>
+          <p:cNvSpPr/>
+          <p:nvPr/>
+        </p:nvSpPr>
+        <p:spPr>
+          <a:xfrm>
+            <a:off x="6793920" y="2825640"/>
+            <a:ext cx="1599480" cy="255240"/>
           </a:xfrm>
           <a:prstGeom prst="rect">
             <a:avLst/>
@@ -7334,7 +8020,7 @@
               </a:tabLst>
             </a:pPr>
             <a:r>
-              <a:rPr lang="en-US" sz="1400" b="1" u="none" strike="noStrike">
+              <a:rPr lang="en-US" sz="1300" b="1" u="none" strike="noStrike">
                 <a:solidFill>
                   <a:srgbClr val="111827"/>
                 </a:solidFill>
@@ -7342,95 +8028,49 @@
                 <a:uFillTx/>
                 <a:latin typeface="Aptos"/>
               </a:rPr>
-              <a:t>Using TypeScript?</a:t>
-            </a:r>
-            <a:endParaRPr lang="en-US" sz="1400" b="0" u="none" strike="noStrike">
-              <a:solidFill>
-                <a:srgbClr val="000000"/>
-              </a:solidFill>
-              <a:effectLst/>
-              <a:uFillTx/>
-              <a:latin typeface="Arial"/>
-            </a:endParaRPr>
-          </a:p>
-        </p:txBody>
-      </p:sp>
-      <p:sp>
-        <p:nvSpPr>
-          <p:cNvPr id="96" name="Shape 9"/>
-          <p:cNvSpPr/>
-          <p:nvPr/>
-        </p:nvSpPr>
-        <p:spPr>
-          <a:xfrm>
-            <a:off x="960120" y="4407480"/>
-            <a:ext cx="3090240" cy="840960"/>
-          </a:xfrm>
-          <a:prstGeom prst="roundRect">
-            <a:avLst>
-              <a:gd name="adj" fmla="val 6522"/>
-            </a:avLst>
-          </a:prstGeom>
-          <a:solidFill>
-            <a:srgbClr val="0F172A"/>
-          </a:solidFill>
-          <a:ln w="12700">
-            <a:solidFill>
-              <a:srgbClr val="0F172A"/>
-            </a:solidFill>
-            <a:round/>
-          </a:ln>
-        </p:spPr>
-        <p:style>
-          <a:lnRef idx="0"/>
-          <a:fillRef idx="0"/>
-          <a:effectRef idx="0"/>
-          <a:fontRef idx="minor"/>
-        </p:style>
-        <p:txBody>
-          <a:bodyPr lIns="90000" tIns="45000" rIns="90000" bIns="45000" anchor="t">
-            <a:noAutofit/>
-          </a:bodyPr>
-          <a:p>
-            <a:endParaRPr lang="en-US" sz="1800" b="0" u="none" strike="noStrike">
-              <a:solidFill>
-                <a:srgbClr val="FFFFFF"/>
-              </a:solidFill>
-              <a:effectLst/>
-              <a:uFillTx/>
-              <a:latin typeface="Arial"/>
-            </a:endParaRPr>
-          </a:p>
-        </p:txBody>
-      </p:sp>
-      <p:sp>
-        <p:nvSpPr>
-          <p:cNvPr id="97" name="Text 10"/>
-          <p:cNvSpPr/>
-          <p:nvPr/>
-        </p:nvSpPr>
-        <p:spPr>
-          <a:xfrm>
-            <a:off x="1161360" y="4572000"/>
-            <a:ext cx="2688120" cy="529920"/>
-          </a:xfrm>
-          <a:prstGeom prst="rect">
-            <a:avLst/>
-          </a:prstGeom>
-          <a:noFill/>
-          <a:ln w="0">
-            <a:noFill/>
-          </a:ln>
-        </p:spPr>
-        <p:style>
-          <a:lnRef idx="0"/>
-          <a:fillRef idx="0"/>
-          <a:effectRef idx="0"/>
-          <a:fontRef idx="minor"/>
-        </p:style>
-        <p:txBody>
-          <a:bodyPr lIns="360" tIns="360" rIns="360" bIns="360" anchor="ctr">
-            <a:noAutofit/>
+              <a:t>Next.js installation</a:t>
+            </a:r>
+            <a:endParaRPr lang="en-US" sz="1300" b="0" u="none" strike="noStrike">
+              <a:solidFill>
+                <a:srgbClr val="000000"/>
+              </a:solidFill>
+              <a:effectLst/>
+              <a:uFillTx/>
+              <a:latin typeface="Arial"/>
+            </a:endParaRPr>
+          </a:p>
+        </p:txBody>
+      </p:sp>
+      <p:sp>
+        <p:nvSpPr>
+          <p:cNvPr id="109" name="Text 45">
+            <a:hlinkClick r:id="rId3"/>
+          </p:cNvPr>
+          <p:cNvSpPr/>
+          <p:nvPr/>
+        </p:nvSpPr>
+        <p:spPr>
+          <a:xfrm>
+            <a:off x="8412480" y="2825640"/>
+            <a:ext cx="2513880" cy="291960"/>
+          </a:xfrm>
+          <a:prstGeom prst="rect">
+            <a:avLst/>
+          </a:prstGeom>
+          <a:noFill/>
+          <a:ln w="0">
+            <a:noFill/>
+          </a:ln>
+        </p:spPr>
+        <p:style>
+          <a:lnRef idx="0"/>
+          <a:fillRef idx="0"/>
+          <a:effectRef idx="0"/>
+          <a:fontRef idx="minor"/>
+        </p:style>
+        <p:txBody>
+          <a:bodyPr lIns="0" tIns="0" rIns="0" bIns="0" anchor="ctr">
+            <a:normAutofit/>
           </a:bodyPr>
           <a:p>
             <a:pPr defTabSz="914400">
@@ -7442,55 +8082,55 @@
               </a:tabLst>
             </a:pPr>
             <a:r>
-              <a:rPr lang="en-US" sz="1350" b="0" u="none" strike="noStrike">
-                <a:solidFill>
-                  <a:srgbClr val="E5E7EB"/>
-                </a:solidFill>
-                <a:effectLst/>
-                <a:uFillTx/>
-                <a:latin typeface="Courier New"/>
-                <a:ea typeface="Courier New"/>
-              </a:rPr>
-              <a:t>npm install -D @types/pg</a:t>
-            </a:r>
-            <a:endParaRPr lang="en-US" sz="1350" b="0" u="none" strike="noStrike">
-              <a:solidFill>
-                <a:srgbClr val="000000"/>
-              </a:solidFill>
-              <a:effectLst/>
-              <a:uFillTx/>
-              <a:latin typeface="Arial"/>
-            </a:endParaRPr>
-          </a:p>
-        </p:txBody>
-      </p:sp>
-      <p:sp>
-        <p:nvSpPr>
-          <p:cNvPr id="98" name="Text 16"/>
-          <p:cNvSpPr/>
-          <p:nvPr/>
-        </p:nvSpPr>
-        <p:spPr>
-          <a:xfrm>
-            <a:off x="5120640" y="2670120"/>
-            <a:ext cx="5888520" cy="2230920"/>
-          </a:xfrm>
-          <a:prstGeom prst="rect">
-            <a:avLst/>
-          </a:prstGeom>
-          <a:noFill/>
-          <a:ln w="0">
-            <a:noFill/>
-          </a:ln>
-        </p:spPr>
-        <p:style>
-          <a:lnRef idx="0"/>
-          <a:fillRef idx="0"/>
-          <a:effectRef idx="0"/>
-          <a:fontRef idx="minor"/>
-        </p:style>
-        <p:txBody>
-          <a:bodyPr lIns="360" tIns="360" rIns="360" bIns="360" anchor="ctr">
+              <a:rPr lang="en-US" sz="1050" b="0" u="sng" strike="noStrike">
+                <a:solidFill>
+                  <a:srgbClr val="0563C1"/>
+                </a:solidFill>
+                <a:effectLst/>
+                <a:uFillTx/>
+                <a:latin typeface="Aptos"/>
+                <a:hlinkClick r:id="rId4"/>
+              </a:rPr>
+              <a:t>https://nextjs.org/docs/app/getting-started/installation</a:t>
+            </a:r>
+            <a:endParaRPr lang="en-US" sz="1050" b="0" u="none" strike="noStrike">
+              <a:solidFill>
+                <a:srgbClr val="000000"/>
+              </a:solidFill>
+              <a:effectLst/>
+              <a:uFillTx/>
+              <a:latin typeface="Arial"/>
+            </a:endParaRPr>
+          </a:p>
+        </p:txBody>
+      </p:sp>
+      <p:sp>
+        <p:nvSpPr>
+          <p:cNvPr id="110" name="Text 46"/>
+          <p:cNvSpPr/>
+          <p:nvPr/>
+        </p:nvSpPr>
+        <p:spPr>
+          <a:xfrm>
+            <a:off x="6793920" y="3438000"/>
+            <a:ext cx="1599480" cy="255240"/>
+          </a:xfrm>
+          <a:prstGeom prst="rect">
+            <a:avLst/>
+          </a:prstGeom>
+          <a:noFill/>
+          <a:ln w="0">
+            <a:noFill/>
+          </a:ln>
+        </p:spPr>
+        <p:style>
+          <a:lnRef idx="0"/>
+          <a:fillRef idx="0"/>
+          <a:effectRef idx="0"/>
+          <a:fontRef idx="minor"/>
+        </p:style>
+        <p:txBody>
+          <a:bodyPr lIns="0" tIns="0" rIns="0" bIns="0" anchor="ctr">
             <a:noAutofit/>
           </a:bodyPr>
           <a:p>
@@ -7498,37 +8138,44 @@
               <a:lnSpc>
                 <a:spcPct val="100000"/>
               </a:lnSpc>
-              <a:spcBef>
-                <a:spcPts val="1191"/>
-              </a:spcBef>
-              <a:spcAft>
-                <a:spcPts val="992"/>
-              </a:spcAft>
-              <a:tabLst>
-                <a:tab pos="0" algn="l"/>
-              </a:tabLst>
-            </a:pPr>
-            <a:endParaRPr lang="en-US" sz="1800" b="0" u="none" strike="noStrike">
-              <a:solidFill>
-                <a:srgbClr val="000000"/>
-              </a:solidFill>
-              <a:effectLst/>
-              <a:uFillTx/>
-              <a:latin typeface="Arial"/>
-            </a:endParaRPr>
-          </a:p>
-        </p:txBody>
-      </p:sp>
-      <p:sp>
-        <p:nvSpPr>
-          <p:cNvPr id="99" name="Text 18"/>
-          <p:cNvSpPr/>
-          <p:nvPr/>
-        </p:nvSpPr>
-        <p:spPr>
-          <a:xfrm>
-            <a:off x="5870520" y="5212080"/>
-            <a:ext cx="5074560" cy="273960"/>
+              <a:tabLst>
+                <a:tab pos="0" algn="l"/>
+              </a:tabLst>
+            </a:pPr>
+            <a:r>
+              <a:rPr lang="en-US" sz="1300" b="1" u="none" strike="noStrike">
+                <a:solidFill>
+                  <a:srgbClr val="111827"/>
+                </a:solidFill>
+                <a:effectLst/>
+                <a:uFillTx/>
+                <a:latin typeface="Aptos"/>
+              </a:rPr>
+              <a:t>create-next-app CLI</a:t>
+            </a:r>
+            <a:endParaRPr lang="en-US" sz="1300" b="0" u="none" strike="noStrike">
+              <a:solidFill>
+                <a:srgbClr val="000000"/>
+              </a:solidFill>
+              <a:effectLst/>
+              <a:uFillTx/>
+              <a:latin typeface="Arial"/>
+            </a:endParaRPr>
+          </a:p>
+        </p:txBody>
+      </p:sp>
+      <p:sp>
+        <p:nvSpPr>
+          <p:cNvPr id="111" name="Text 47">
+            <a:hlinkClick r:id="rId5"/>
+          </p:cNvPr>
+          <p:cNvSpPr/>
+          <p:nvPr/>
+        </p:nvSpPr>
+        <p:spPr>
+          <a:xfrm>
+            <a:off x="8412480" y="3438000"/>
+            <a:ext cx="2513880" cy="291960"/>
           </a:xfrm>
           <a:prstGeom prst="rect">
             <a:avLst/>
@@ -7546,7 +8193,7 @@
         </p:style>
         <p:txBody>
           <a:bodyPr lIns="0" tIns="0" rIns="0" bIns="0" anchor="ctr">
-            <a:noAutofit/>
+            <a:normAutofit/>
           </a:bodyPr>
           <a:p>
             <a:pPr defTabSz="914400">
@@ -7557,20 +8204,278 @@
                 <a:tab pos="0" algn="l"/>
               </a:tabLst>
             </a:pPr>
-            <a:endParaRPr lang="en-US" sz="1800" b="0" u="none" strike="noStrike">
-              <a:solidFill>
-                <a:srgbClr val="000000"/>
-              </a:solidFill>
-              <a:effectLst/>
-              <a:uFillTx/>
-              <a:latin typeface="Arial"/>
-            </a:endParaRPr>
-          </a:p>
-        </p:txBody>
-      </p:sp>
-      <p:sp>
-        <p:nvSpPr>
-          <p:cNvPr id="100" name="PlaceHolder 1"/>
+            <a:r>
+              <a:rPr lang="en-US" sz="1050" b="0" u="sng" strike="noStrike">
+                <a:solidFill>
+                  <a:srgbClr val="0563C1"/>
+                </a:solidFill>
+                <a:effectLst/>
+                <a:uFillTx/>
+                <a:latin typeface="Aptos"/>
+                <a:hlinkClick r:id="rId6"/>
+              </a:rPr>
+              <a:t>https://nextjs.org/docs/app/api-reference/cli/create-next-app</a:t>
+            </a:r>
+            <a:endParaRPr lang="en-US" sz="1050" b="0" u="none" strike="noStrike">
+              <a:solidFill>
+                <a:srgbClr val="000000"/>
+              </a:solidFill>
+              <a:effectLst/>
+              <a:uFillTx/>
+              <a:latin typeface="Arial"/>
+            </a:endParaRPr>
+          </a:p>
+        </p:txBody>
+      </p:sp>
+      <p:sp>
+        <p:nvSpPr>
+          <p:cNvPr id="112" name="Text 48"/>
+          <p:cNvSpPr/>
+          <p:nvPr/>
+        </p:nvSpPr>
+        <p:spPr>
+          <a:xfrm>
+            <a:off x="6793920" y="4050720"/>
+            <a:ext cx="1599480" cy="255240"/>
+          </a:xfrm>
+          <a:prstGeom prst="rect">
+            <a:avLst/>
+          </a:prstGeom>
+          <a:noFill/>
+          <a:ln w="0">
+            <a:noFill/>
+          </a:ln>
+        </p:spPr>
+        <p:style>
+          <a:lnRef idx="0"/>
+          <a:fillRef idx="0"/>
+          <a:effectRef idx="0"/>
+          <a:fontRef idx="minor"/>
+        </p:style>
+        <p:txBody>
+          <a:bodyPr lIns="0" tIns="0" rIns="0" bIns="0" anchor="ctr">
+            <a:noAutofit/>
+          </a:bodyPr>
+          <a:p>
+            <a:pPr defTabSz="914400">
+              <a:lnSpc>
+                <a:spcPct val="100000"/>
+              </a:lnSpc>
+              <a:tabLst>
+                <a:tab pos="0" algn="l"/>
+              </a:tabLst>
+            </a:pPr>
+            <a:r>
+              <a:rPr lang="en-US" sz="1300" b="1" u="none" strike="noStrike">
+                <a:solidFill>
+                  <a:srgbClr val="111827"/>
+                </a:solidFill>
+                <a:effectLst/>
+                <a:uFillTx/>
+                <a:latin typeface="Aptos"/>
+              </a:rPr>
+              <a:t>node-postgres</a:t>
+            </a:r>
+            <a:endParaRPr lang="en-US" sz="1300" b="0" u="none" strike="noStrike">
+              <a:solidFill>
+                <a:srgbClr val="000000"/>
+              </a:solidFill>
+              <a:effectLst/>
+              <a:uFillTx/>
+              <a:latin typeface="Arial"/>
+            </a:endParaRPr>
+          </a:p>
+        </p:txBody>
+      </p:sp>
+      <p:sp>
+        <p:nvSpPr>
+          <p:cNvPr id="113" name="Text 49">
+            <a:hlinkClick r:id="rId7"/>
+          </p:cNvPr>
+          <p:cNvSpPr/>
+          <p:nvPr/>
+        </p:nvSpPr>
+        <p:spPr>
+          <a:xfrm>
+            <a:off x="8412480" y="4050720"/>
+            <a:ext cx="2513880" cy="291960"/>
+          </a:xfrm>
+          <a:prstGeom prst="rect">
+            <a:avLst/>
+          </a:prstGeom>
+          <a:noFill/>
+          <a:ln w="0">
+            <a:noFill/>
+          </a:ln>
+        </p:spPr>
+        <p:style>
+          <a:lnRef idx="0"/>
+          <a:fillRef idx="0"/>
+          <a:effectRef idx="0"/>
+          <a:fontRef idx="minor"/>
+        </p:style>
+        <p:txBody>
+          <a:bodyPr lIns="0" tIns="0" rIns="0" bIns="0" anchor="ctr">
+            <a:normAutofit/>
+          </a:bodyPr>
+          <a:p>
+            <a:pPr defTabSz="914400">
+              <a:lnSpc>
+                <a:spcPct val="100000"/>
+              </a:lnSpc>
+              <a:tabLst>
+                <a:tab pos="0" algn="l"/>
+              </a:tabLst>
+            </a:pPr>
+            <a:r>
+              <a:rPr lang="en-US" sz="1050" b="0" u="sng" strike="noStrike">
+                <a:solidFill>
+                  <a:srgbClr val="0563C1"/>
+                </a:solidFill>
+                <a:effectLst/>
+                <a:uFillTx/>
+                <a:latin typeface="Aptos"/>
+                <a:hlinkClick r:id="rId8"/>
+              </a:rPr>
+              <a:t>https://node-postgres.com/</a:t>
+            </a:r>
+            <a:endParaRPr lang="en-US" sz="1050" b="0" u="none" strike="noStrike">
+              <a:solidFill>
+                <a:srgbClr val="000000"/>
+              </a:solidFill>
+              <a:effectLst/>
+              <a:uFillTx/>
+              <a:latin typeface="Arial"/>
+            </a:endParaRPr>
+          </a:p>
+        </p:txBody>
+      </p:sp>
+      <p:sp>
+        <p:nvSpPr>
+          <p:cNvPr id="114" name="Text 50"/>
+          <p:cNvSpPr/>
+          <p:nvPr/>
+        </p:nvSpPr>
+        <p:spPr>
+          <a:xfrm>
+            <a:off x="6793920" y="4663440"/>
+            <a:ext cx="1599480" cy="255240"/>
+          </a:xfrm>
+          <a:prstGeom prst="rect">
+            <a:avLst/>
+          </a:prstGeom>
+          <a:noFill/>
+          <a:ln w="0">
+            <a:noFill/>
+          </a:ln>
+        </p:spPr>
+        <p:style>
+          <a:lnRef idx="0"/>
+          <a:fillRef idx="0"/>
+          <a:effectRef idx="0"/>
+          <a:fontRef idx="minor"/>
+        </p:style>
+        <p:txBody>
+          <a:bodyPr lIns="0" tIns="0" rIns="0" bIns="0" anchor="ctr">
+            <a:noAutofit/>
+          </a:bodyPr>
+          <a:p>
+            <a:pPr defTabSz="914400">
+              <a:lnSpc>
+                <a:spcPct val="100000"/>
+              </a:lnSpc>
+              <a:tabLst>
+                <a:tab pos="0" algn="l"/>
+              </a:tabLst>
+            </a:pPr>
+            <a:r>
+              <a:rPr lang="en-US" sz="1300" b="1" u="none" strike="noStrike">
+                <a:solidFill>
+                  <a:srgbClr val="111827"/>
+                </a:solidFill>
+                <a:effectLst/>
+                <a:uFillTx/>
+                <a:latin typeface="Aptos"/>
+              </a:rPr>
+              <a:t>Connection setup</a:t>
+            </a:r>
+            <a:endParaRPr lang="en-US" sz="1300" b="0" u="none" strike="noStrike">
+              <a:solidFill>
+                <a:srgbClr val="000000"/>
+              </a:solidFill>
+              <a:effectLst/>
+              <a:uFillTx/>
+              <a:latin typeface="Arial"/>
+            </a:endParaRPr>
+          </a:p>
+        </p:txBody>
+      </p:sp>
+      <p:sp>
+        <p:nvSpPr>
+          <p:cNvPr id="115" name="Text 51">
+            <a:hlinkClick r:id="rId9"/>
+          </p:cNvPr>
+          <p:cNvSpPr/>
+          <p:nvPr/>
+        </p:nvSpPr>
+        <p:spPr>
+          <a:xfrm>
+            <a:off x="8412480" y="4663440"/>
+            <a:ext cx="2513880" cy="291960"/>
+          </a:xfrm>
+          <a:prstGeom prst="rect">
+            <a:avLst/>
+          </a:prstGeom>
+          <a:noFill/>
+          <a:ln w="0">
+            <a:noFill/>
+          </a:ln>
+        </p:spPr>
+        <p:style>
+          <a:lnRef idx="0"/>
+          <a:fillRef idx="0"/>
+          <a:effectRef idx="0"/>
+          <a:fontRef idx="minor"/>
+        </p:style>
+        <p:txBody>
+          <a:bodyPr lIns="0" tIns="0" rIns="0" bIns="0" anchor="ctr">
+            <a:normAutofit/>
+          </a:bodyPr>
+          <a:p>
+            <a:pPr defTabSz="914400">
+              <a:lnSpc>
+                <a:spcPct val="100000"/>
+              </a:lnSpc>
+              <a:tabLst>
+                <a:tab pos="0" algn="l"/>
+              </a:tabLst>
+            </a:pPr>
+            <a:r>
+              <a:rPr lang="en-US" sz="1050" b="0" u="sng" strike="noStrike">
+                <a:solidFill>
+                  <a:srgbClr val="0563C1"/>
+                </a:solidFill>
+                <a:effectLst/>
+                <a:uFillTx/>
+                <a:latin typeface="Aptos"/>
+                <a:hlinkClick r:id="rId10"/>
+              </a:rPr>
+              <a:t>https://node-postgres.com/features/connecting</a:t>
+            </a:r>
+            <a:endParaRPr lang="en-US" sz="1050" b="0" u="none" strike="noStrike">
+              <a:solidFill>
+                <a:srgbClr val="000000"/>
+              </a:solidFill>
+              <a:effectLst/>
+              <a:uFillTx/>
+              <a:latin typeface="Arial"/>
+            </a:endParaRPr>
+          </a:p>
+        </p:txBody>
+      </p:sp>
+      <p:sp>
+        <p:nvSpPr>
+          <p:cNvPr id="116" name="PlaceHolder 1"/>
           <p:cNvSpPr>
             <a:spLocks noGrp="1"/>
           </p:cNvSpPr>
@@ -7581,7 +8486,7 @@
         <p:spPr>
           <a:xfrm>
             <a:off x="11841480" y="6473880"/>
-            <a:ext cx="799560" cy="299520"/>
+            <a:ext cx="799200" cy="299160"/>
           </a:xfrm>
           <a:prstGeom prst="rect">
             <a:avLst/>
@@ -7601,6 +8506,9 @@
                 <a:spcPct val="100000"/>
               </a:lnSpc>
               <a:buNone/>
+              <a:tabLst>
+                <a:tab pos="0" algn="l"/>
+              </a:tabLst>
               <a:defRPr lang="en-US" sz="800" b="0" u="none" strike="noStrike">
                 <a:solidFill>
                   <a:srgbClr val="6B7280"/>
@@ -7618,8 +8526,11 @@
                 <a:spcPct val="100000"/>
               </a:lnSpc>
               <a:buNone/>
-            </a:pPr>
-            <a:fld id="{AFD3011D-79F3-4F3E-8B91-0C90BBCF1B8F}" type="slidenum">
+              <a:tabLst>
+                <a:tab pos="0" algn="l"/>
+              </a:tabLst>
+            </a:pPr>
+            <a:fld id="{6ACA8027-C9F2-4D80-A395-9FDDB824A1DD}" type="slidenum">
               <a:rPr lang="en-US" sz="800" b="0" u="none" strike="noStrike">
                 <a:solidFill>
                   <a:srgbClr val="6B7280"/>
@@ -7629,1965 +8540,7 @@
                 <a:latin typeface="Aptos"/>
                 <a:ea typeface="Aptos"/>
               </a:rPr>
-              <a:t>&lt;number&gt;</a:t>
-            </a:fld>
-            <a:endParaRPr lang="en-US" sz="800" b="0" u="none" strike="noStrike">
-              <a:solidFill>
-                <a:srgbClr val="000000"/>
-              </a:solidFill>
-              <a:effectLst/>
-              <a:uFillTx/>
-              <a:latin typeface="Times New Roman"/>
-            </a:endParaRPr>
-          </a:p>
-        </p:txBody>
-      </p:sp>
-      <p:sp>
-        <p:nvSpPr>
-          <p:cNvPr id="101" name="Text 3"/>
-          <p:cNvSpPr/>
-          <p:nvPr/>
-        </p:nvSpPr>
-        <p:spPr>
-          <a:xfrm>
-            <a:off x="914760" y="1536480"/>
-            <a:ext cx="3291480" cy="310680"/>
-          </a:xfrm>
-          <a:prstGeom prst="rect">
-            <a:avLst/>
-          </a:prstGeom>
-          <a:noFill/>
-          <a:ln w="0">
-            <a:noFill/>
-          </a:ln>
-        </p:spPr>
-        <p:style>
-          <a:lnRef idx="0"/>
-          <a:fillRef idx="0"/>
-          <a:effectRef idx="0"/>
-          <a:fontRef idx="minor"/>
-        </p:style>
-        <p:txBody>
-          <a:bodyPr lIns="0" tIns="0" rIns="0" bIns="0" anchor="ctr">
-            <a:noAutofit/>
-          </a:bodyPr>
-          <a:p>
-            <a:pPr defTabSz="914400">
-              <a:lnSpc>
-                <a:spcPct val="100000"/>
-              </a:lnSpc>
-              <a:tabLst>
-                <a:tab pos="0" algn="l"/>
-              </a:tabLst>
-            </a:pPr>
-            <a:r>
-              <a:rPr lang="en-US" sz="1700" b="1" u="none" strike="noStrike">
-                <a:solidFill>
-                  <a:srgbClr val="111827"/>
-                </a:solidFill>
-                <a:effectLst/>
-                <a:uFillTx/>
-                <a:latin typeface="Aptos"/>
-              </a:rPr>
-              <a:t>Install inside the app</a:t>
-            </a:r>
-            <a:endParaRPr lang="en-US" sz="1700" b="0" u="none" strike="noStrike">
-              <a:solidFill>
-                <a:srgbClr val="000000"/>
-              </a:solidFill>
-              <a:effectLst/>
-              <a:uFillTx/>
-              <a:latin typeface="Arial"/>
-            </a:endParaRPr>
-          </a:p>
-        </p:txBody>
-      </p:sp>
-      <p:sp>
-        <p:nvSpPr>
-          <p:cNvPr id="102" name="Text 6"/>
-          <p:cNvSpPr/>
-          <p:nvPr/>
-        </p:nvSpPr>
-        <p:spPr>
-          <a:xfrm>
-            <a:off x="6766920" y="1453680"/>
-            <a:ext cx="4434480" cy="832320"/>
-          </a:xfrm>
-          <a:prstGeom prst="rect">
-            <a:avLst/>
-          </a:prstGeom>
-          <a:noFill/>
-          <a:ln w="0">
-            <a:noFill/>
-          </a:ln>
-        </p:spPr>
-        <p:style>
-          <a:lnRef idx="0"/>
-          <a:fillRef idx="0"/>
-          <a:effectRef idx="0"/>
-          <a:fontRef idx="minor"/>
-        </p:style>
-        <p:txBody>
-          <a:bodyPr lIns="0" tIns="0" rIns="0" bIns="0" anchor="ctr">
-            <a:noAutofit/>
-          </a:bodyPr>
-          <a:p>
-            <a:pPr defTabSz="914400">
-              <a:lnSpc>
-                <a:spcPct val="100000"/>
-              </a:lnSpc>
-              <a:tabLst>
-                <a:tab pos="0" algn="l"/>
-              </a:tabLst>
-            </a:pPr>
-            <a:r>
-              <a:rPr lang="en-US" sz="1700" b="1" u="none" strike="noStrike">
-                <a:solidFill>
-                  <a:srgbClr val="111827"/>
-                </a:solidFill>
-                <a:effectLst/>
-                <a:uFillTx/>
-                <a:latin typeface="Aptos"/>
-              </a:rPr>
-              <a:t>Or Clone the Demo Repo</a:t>
-            </a:r>
-            <a:endParaRPr lang="en-US" sz="1700" b="0" u="none" strike="noStrike">
-              <a:solidFill>
-                <a:srgbClr val="000000"/>
-              </a:solidFill>
-              <a:effectLst/>
-              <a:uFillTx/>
-              <a:latin typeface="Arial"/>
-            </a:endParaRPr>
-          </a:p>
-          <a:p>
-            <a:pPr defTabSz="914400">
-              <a:lnSpc>
-                <a:spcPct val="100000"/>
-              </a:lnSpc>
-              <a:tabLst>
-                <a:tab pos="0" algn="l"/>
-              </a:tabLst>
-            </a:pPr>
-            <a:r>
-              <a:rPr lang="en-US" sz="1600" b="0" u="none" strike="noStrike">
-                <a:solidFill>
-                  <a:srgbClr val="111827"/>
-                </a:solidFill>
-                <a:effectLst/>
-                <a:uFillTx/>
-                <a:latin typeface="Aptos"/>
-              </a:rPr>
-              <a:t>https://github.com/watswat5/DBToolTalk</a:t>
-            </a:r>
-            <a:endParaRPr lang="en-US" sz="1600" b="0" u="none" strike="noStrike">
-              <a:solidFill>
-                <a:srgbClr val="000000"/>
-              </a:solidFill>
-              <a:effectLst/>
-              <a:uFillTx/>
-              <a:latin typeface="Arial"/>
-            </a:endParaRPr>
-          </a:p>
-        </p:txBody>
-      </p:sp>
-      <p:pic>
-        <p:nvPicPr>
-          <p:cNvPr id="103" name=""/>
-          <p:cNvPicPr/>
-          <p:nvPr/>
-        </p:nvPicPr>
-        <p:blipFill>
-          <a:blip r:embed="rId1"/>
-          <a:stretch/>
-        </p:blipFill>
-        <p:spPr>
-          <a:xfrm>
-            <a:off x="6858000" y="2286000"/>
-            <a:ext cx="3571920" cy="3571920"/>
-          </a:xfrm>
-          <a:prstGeom prst="rect">
-            <a:avLst/>
-          </a:prstGeom>
-          <a:noFill/>
-          <a:ln w="0">
-            <a:noFill/>
-          </a:ln>
-        </p:spPr>
-      </p:pic>
-    </p:spTree>
-  </p:cSld>
-  <mc:AlternateContent>
-    <mc:Choice Requires="p14">
-      <p:transition spd="slow" p14:dur="2000"/>
-    </mc:Choice>
-    <mc:Fallback>
-      <p:transition spd="slow"/>
-    </mc:Fallback>
-  </mc:AlternateContent>
-</p:sld>
-</file>
-
-<file path=ppt/slides/slide6.xml><?xml version="1.0" encoding="utf-8"?>
-<p:sld xmlns:a="http://schemas.openxmlformats.org/drawingml/2006/main" xmlns:p="http://schemas.openxmlformats.org/presentationml/2006/main" xmlns:r="http://schemas.openxmlformats.org/officeDocument/2006/relationships" xmlns:p14="http://schemas.microsoft.com/office/powerpoint/2010/main" xmlns:p15="http://schemas.microsoft.com/office/powerpoint/2012/main" xmlns:mc="http://schemas.openxmlformats.org/markup-compatibility/2006">
-  <p:cSld>
-    <p:spTree>
-      <p:nvGrpSpPr>
-        <p:cNvPr id="1" name=""/>
-        <p:cNvGrpSpPr/>
-        <p:nvPr/>
-      </p:nvGrpSpPr>
-      <p:grpSpPr>
-        <a:xfrm>
-          <a:off x="0" y="0"/>
-          <a:ext cx="0" cy="0"/>
-          <a:chOff x="0" y="0"/>
-          <a:chExt cx="0" cy="0"/>
-        </a:xfrm>
-      </p:grpSpPr>
-      <p:sp>
-        <p:nvSpPr>
-          <p:cNvPr id="104" name="Text 29"/>
-          <p:cNvSpPr/>
-          <p:nvPr/>
-        </p:nvSpPr>
-        <p:spPr>
-          <a:xfrm>
-            <a:off x="502920" y="384120"/>
-            <a:ext cx="11155320" cy="502560"/>
-          </a:xfrm>
-          <a:prstGeom prst="rect">
-            <a:avLst/>
-          </a:prstGeom>
-          <a:noFill/>
-          <a:ln w="0">
-            <a:noFill/>
-          </a:ln>
-        </p:spPr>
-        <p:style>
-          <a:lnRef idx="0"/>
-          <a:fillRef idx="0"/>
-          <a:effectRef idx="0"/>
-          <a:fontRef idx="minor"/>
-        </p:style>
-        <p:txBody>
-          <a:bodyPr lIns="0" tIns="0" rIns="0" bIns="0" anchor="ctr">
-            <a:noAutofit/>
-          </a:bodyPr>
-          <a:p>
-            <a:pPr defTabSz="914400">
-              <a:lnSpc>
-                <a:spcPct val="100000"/>
-              </a:lnSpc>
-              <a:tabLst>
-                <a:tab pos="0" algn="l"/>
-              </a:tabLst>
-            </a:pPr>
-            <a:r>
-              <a:rPr lang="en-US" sz="2700" b="1" u="none" strike="noStrike">
-                <a:solidFill>
-                  <a:srgbClr val="111827"/>
-                </a:solidFill>
-                <a:effectLst/>
-                <a:uFillTx/>
-                <a:latin typeface="Aptos Display"/>
-                <a:ea typeface="Aptos Display"/>
-              </a:rPr>
-              <a:t>Final check</a:t>
-            </a:r>
-            <a:endParaRPr lang="en-US" sz="2700" b="0" u="none" strike="noStrike">
-              <a:solidFill>
-                <a:srgbClr val="000000"/>
-              </a:solidFill>
-              <a:effectLst/>
-              <a:uFillTx/>
-              <a:latin typeface="Arial"/>
-            </a:endParaRPr>
-          </a:p>
-        </p:txBody>
-      </p:sp>
-      <p:sp>
-        <p:nvSpPr>
-          <p:cNvPr id="105" name="Text 30"/>
-          <p:cNvSpPr/>
-          <p:nvPr/>
-        </p:nvSpPr>
-        <p:spPr>
-          <a:xfrm>
-            <a:off x="530280" y="914400"/>
-            <a:ext cx="10972440" cy="310680"/>
-          </a:xfrm>
-          <a:prstGeom prst="rect">
-            <a:avLst/>
-          </a:prstGeom>
-          <a:noFill/>
-          <a:ln w="0">
-            <a:noFill/>
-          </a:ln>
-        </p:spPr>
-        <p:style>
-          <a:lnRef idx="0"/>
-          <a:fillRef idx="0"/>
-          <a:effectRef idx="0"/>
-          <a:fontRef idx="minor"/>
-        </p:style>
-        <p:txBody>
-          <a:bodyPr lIns="0" tIns="0" rIns="0" bIns="0" anchor="ctr">
-            <a:noAutofit/>
-          </a:bodyPr>
-          <a:p>
-            <a:pPr defTabSz="914400">
-              <a:lnSpc>
-                <a:spcPct val="100000"/>
-              </a:lnSpc>
-              <a:tabLst>
-                <a:tab pos="0" algn="l"/>
-              </a:tabLst>
-            </a:pPr>
-            <a:r>
-              <a:rPr lang="en-US" sz="1350" b="0" u="none" strike="noStrike">
-                <a:solidFill>
-                  <a:srgbClr val="4B5563"/>
-                </a:solidFill>
-                <a:effectLst/>
-                <a:uFillTx/>
-                <a:latin typeface="Aptos"/>
-              </a:rPr>
-              <a:t>Confirm the full toolchain before starting database code.</a:t>
-            </a:r>
-            <a:endParaRPr lang="en-US" sz="1350" b="0" u="none" strike="noStrike">
-              <a:solidFill>
-                <a:srgbClr val="000000"/>
-              </a:solidFill>
-              <a:effectLst/>
-              <a:uFillTx/>
-              <a:latin typeface="Arial"/>
-            </a:endParaRPr>
-          </a:p>
-        </p:txBody>
-      </p:sp>
-      <p:sp>
-        <p:nvSpPr>
-          <p:cNvPr id="106" name="Shape 1"/>
-          <p:cNvSpPr/>
-          <p:nvPr/>
-        </p:nvSpPr>
-        <p:spPr>
-          <a:xfrm>
-            <a:off x="868680" y="1527120"/>
-            <a:ext cx="209880" cy="209880"/>
-          </a:xfrm>
-          <a:prstGeom prst="ellipse">
-            <a:avLst/>
-          </a:prstGeom>
-          <a:solidFill>
-            <a:srgbClr val="16A34A"/>
-          </a:solidFill>
-          <a:ln w="12700">
-            <a:solidFill>
-              <a:srgbClr val="16A34A"/>
-            </a:solidFill>
-            <a:round/>
-          </a:ln>
-        </p:spPr>
-        <p:style>
-          <a:lnRef idx="0"/>
-          <a:fillRef idx="0"/>
-          <a:effectRef idx="0"/>
-          <a:fontRef idx="minor"/>
-        </p:style>
-        <p:txBody>
-          <a:bodyPr lIns="90000" tIns="45000" rIns="90000" bIns="45000" anchor="t">
-            <a:noAutofit/>
-          </a:bodyPr>
-          <a:p>
-            <a:endParaRPr lang="en-US" sz="1800" b="0" u="none" strike="noStrike">
-              <a:solidFill>
-                <a:srgbClr val="FFFFFF"/>
-              </a:solidFill>
-              <a:effectLst/>
-              <a:uFillTx/>
-              <a:latin typeface="Arial"/>
-            </a:endParaRPr>
-          </a:p>
-        </p:txBody>
-      </p:sp>
-      <p:sp>
-        <p:nvSpPr>
-          <p:cNvPr id="107" name="Text 31"/>
-          <p:cNvSpPr/>
-          <p:nvPr/>
-        </p:nvSpPr>
-        <p:spPr>
-          <a:xfrm>
-            <a:off x="882360" y="1504080"/>
-            <a:ext cx="182520" cy="200880"/>
-          </a:xfrm>
-          <a:prstGeom prst="rect">
-            <a:avLst/>
-          </a:prstGeom>
-          <a:noFill/>
-          <a:ln w="0">
-            <a:noFill/>
-          </a:ln>
-        </p:spPr>
-        <p:style>
-          <a:lnRef idx="0"/>
-          <a:fillRef idx="0"/>
-          <a:effectRef idx="0"/>
-          <a:fontRef idx="minor"/>
-        </p:style>
-        <p:txBody>
-          <a:bodyPr lIns="0" tIns="0" rIns="0" bIns="0" anchor="ctr">
-            <a:noAutofit/>
-          </a:bodyPr>
-          <a:p>
-            <a:pPr algn="ctr" defTabSz="914400">
-              <a:lnSpc>
-                <a:spcPct val="100000"/>
-              </a:lnSpc>
-              <a:tabLst>
-                <a:tab pos="0" algn="l"/>
-              </a:tabLst>
-            </a:pPr>
-            <a:r>
-              <a:rPr lang="en-US" sz="1200" b="1" u="none" strike="noStrike">
-                <a:solidFill>
-                  <a:srgbClr val="FFFFFF"/>
-                </a:solidFill>
-                <a:effectLst/>
-                <a:uFillTx/>
-                <a:latin typeface="Aptos"/>
-              </a:rPr>
-              <a:t>✓</a:t>
-            </a:r>
-            <a:endParaRPr lang="en-US" sz="1200" b="0" u="none" strike="noStrike">
-              <a:solidFill>
-                <a:srgbClr val="000000"/>
-              </a:solidFill>
-              <a:effectLst/>
-              <a:uFillTx/>
-              <a:latin typeface="Arial"/>
-            </a:endParaRPr>
-          </a:p>
-        </p:txBody>
-      </p:sp>
-      <p:sp>
-        <p:nvSpPr>
-          <p:cNvPr id="108" name="Text 32"/>
-          <p:cNvSpPr/>
-          <p:nvPr/>
-        </p:nvSpPr>
-        <p:spPr>
-          <a:xfrm>
-            <a:off x="1179720" y="1508760"/>
-            <a:ext cx="4845960" cy="273960"/>
-          </a:xfrm>
-          <a:prstGeom prst="rect">
-            <a:avLst/>
-          </a:prstGeom>
-          <a:noFill/>
-          <a:ln w="0">
-            <a:noFill/>
-          </a:ln>
-        </p:spPr>
-        <p:style>
-          <a:lnRef idx="0"/>
-          <a:fillRef idx="0"/>
-          <a:effectRef idx="0"/>
-          <a:fontRef idx="minor"/>
-        </p:style>
-        <p:txBody>
-          <a:bodyPr lIns="0" tIns="0" rIns="0" bIns="0" anchor="ctr">
-            <a:noAutofit/>
-          </a:bodyPr>
-          <a:p>
-            <a:pPr defTabSz="914400">
-              <a:lnSpc>
-                <a:spcPct val="100000"/>
-              </a:lnSpc>
-              <a:tabLst>
-                <a:tab pos="0" algn="l"/>
-              </a:tabLst>
-            </a:pPr>
-            <a:r>
-              <a:rPr lang="en-US" sz="1350" b="0" u="none" strike="noStrike">
-                <a:solidFill>
-                  <a:srgbClr val="111827"/>
-                </a:solidFill>
-                <a:effectLst/>
-                <a:uFillTx/>
-                <a:latin typeface="Aptos"/>
-              </a:rPr>
-              <a:t>node --version works</a:t>
-            </a:r>
-            <a:endParaRPr lang="en-US" sz="1350" b="0" u="none" strike="noStrike">
-              <a:solidFill>
-                <a:srgbClr val="000000"/>
-              </a:solidFill>
-              <a:effectLst/>
-              <a:uFillTx/>
-              <a:latin typeface="Arial"/>
-            </a:endParaRPr>
-          </a:p>
-        </p:txBody>
-      </p:sp>
-      <p:sp>
-        <p:nvSpPr>
-          <p:cNvPr id="109" name="Shape 4"/>
-          <p:cNvSpPr/>
-          <p:nvPr/>
-        </p:nvSpPr>
-        <p:spPr>
-          <a:xfrm>
-            <a:off x="868680" y="2148840"/>
-            <a:ext cx="209880" cy="209880"/>
-          </a:xfrm>
-          <a:prstGeom prst="ellipse">
-            <a:avLst/>
-          </a:prstGeom>
-          <a:solidFill>
-            <a:srgbClr val="16A34A"/>
-          </a:solidFill>
-          <a:ln w="12700">
-            <a:solidFill>
-              <a:srgbClr val="16A34A"/>
-            </a:solidFill>
-            <a:round/>
-          </a:ln>
-        </p:spPr>
-        <p:style>
-          <a:lnRef idx="0"/>
-          <a:fillRef idx="0"/>
-          <a:effectRef idx="0"/>
-          <a:fontRef idx="minor"/>
-        </p:style>
-        <p:txBody>
-          <a:bodyPr lIns="90000" tIns="45000" rIns="90000" bIns="45000" anchor="t">
-            <a:noAutofit/>
-          </a:bodyPr>
-          <a:p>
-            <a:endParaRPr lang="en-US" sz="1800" b="0" u="none" strike="noStrike">
-              <a:solidFill>
-                <a:srgbClr val="FFFFFF"/>
-              </a:solidFill>
-              <a:effectLst/>
-              <a:uFillTx/>
-              <a:latin typeface="Arial"/>
-            </a:endParaRPr>
-          </a:p>
-        </p:txBody>
-      </p:sp>
-      <p:sp>
-        <p:nvSpPr>
-          <p:cNvPr id="110" name="Text 33"/>
-          <p:cNvSpPr/>
-          <p:nvPr/>
-        </p:nvSpPr>
-        <p:spPr>
-          <a:xfrm>
-            <a:off x="882360" y="2126160"/>
-            <a:ext cx="182520" cy="200880"/>
-          </a:xfrm>
-          <a:prstGeom prst="rect">
-            <a:avLst/>
-          </a:prstGeom>
-          <a:noFill/>
-          <a:ln w="0">
-            <a:noFill/>
-          </a:ln>
-        </p:spPr>
-        <p:style>
-          <a:lnRef idx="0"/>
-          <a:fillRef idx="0"/>
-          <a:effectRef idx="0"/>
-          <a:fontRef idx="minor"/>
-        </p:style>
-        <p:txBody>
-          <a:bodyPr lIns="0" tIns="0" rIns="0" bIns="0" anchor="ctr">
-            <a:noAutofit/>
-          </a:bodyPr>
-          <a:p>
-            <a:pPr algn="ctr" defTabSz="914400">
-              <a:lnSpc>
-                <a:spcPct val="100000"/>
-              </a:lnSpc>
-              <a:tabLst>
-                <a:tab pos="0" algn="l"/>
-              </a:tabLst>
-            </a:pPr>
-            <a:r>
-              <a:rPr lang="en-US" sz="1200" b="1" u="none" strike="noStrike">
-                <a:solidFill>
-                  <a:srgbClr val="FFFFFF"/>
-                </a:solidFill>
-                <a:effectLst/>
-                <a:uFillTx/>
-                <a:latin typeface="Aptos"/>
-              </a:rPr>
-              <a:t>✓</a:t>
-            </a:r>
-            <a:endParaRPr lang="en-US" sz="1200" b="0" u="none" strike="noStrike">
-              <a:solidFill>
-                <a:srgbClr val="000000"/>
-              </a:solidFill>
-              <a:effectLst/>
-              <a:uFillTx/>
-              <a:latin typeface="Arial"/>
-            </a:endParaRPr>
-          </a:p>
-        </p:txBody>
-      </p:sp>
-      <p:sp>
-        <p:nvSpPr>
-          <p:cNvPr id="111" name="Text 34"/>
-          <p:cNvSpPr/>
-          <p:nvPr/>
-        </p:nvSpPr>
-        <p:spPr>
-          <a:xfrm>
-            <a:off x="1179720" y="2130480"/>
-            <a:ext cx="4845960" cy="273960"/>
-          </a:xfrm>
-          <a:prstGeom prst="rect">
-            <a:avLst/>
-          </a:prstGeom>
-          <a:noFill/>
-          <a:ln w="0">
-            <a:noFill/>
-          </a:ln>
-        </p:spPr>
-        <p:style>
-          <a:lnRef idx="0"/>
-          <a:fillRef idx="0"/>
-          <a:effectRef idx="0"/>
-          <a:fontRef idx="minor"/>
-        </p:style>
-        <p:txBody>
-          <a:bodyPr lIns="0" tIns="0" rIns="0" bIns="0" anchor="ctr">
-            <a:noAutofit/>
-          </a:bodyPr>
-          <a:p>
-            <a:pPr defTabSz="914400">
-              <a:lnSpc>
-                <a:spcPct val="100000"/>
-              </a:lnSpc>
-              <a:tabLst>
-                <a:tab pos="0" algn="l"/>
-              </a:tabLst>
-            </a:pPr>
-            <a:r>
-              <a:rPr lang="en-US" sz="1350" b="0" u="none" strike="noStrike">
-                <a:solidFill>
-                  <a:srgbClr val="111827"/>
-                </a:solidFill>
-                <a:effectLst/>
-                <a:uFillTx/>
-                <a:latin typeface="Aptos"/>
-              </a:rPr>
-              <a:t>npm --version works</a:t>
-            </a:r>
-            <a:endParaRPr lang="en-US" sz="1350" b="0" u="none" strike="noStrike">
-              <a:solidFill>
-                <a:srgbClr val="000000"/>
-              </a:solidFill>
-              <a:effectLst/>
-              <a:uFillTx/>
-              <a:latin typeface="Arial"/>
-            </a:endParaRPr>
-          </a:p>
-        </p:txBody>
-      </p:sp>
-      <p:sp>
-        <p:nvSpPr>
-          <p:cNvPr id="112" name="Shape 13"/>
-          <p:cNvSpPr/>
-          <p:nvPr/>
-        </p:nvSpPr>
-        <p:spPr>
-          <a:xfrm>
-            <a:off x="868680" y="2770560"/>
-            <a:ext cx="209880" cy="209880"/>
-          </a:xfrm>
-          <a:prstGeom prst="ellipse">
-            <a:avLst/>
-          </a:prstGeom>
-          <a:solidFill>
-            <a:srgbClr val="16A34A"/>
-          </a:solidFill>
-          <a:ln w="12700">
-            <a:solidFill>
-              <a:srgbClr val="16A34A"/>
-            </a:solidFill>
-            <a:round/>
-          </a:ln>
-        </p:spPr>
-        <p:style>
-          <a:lnRef idx="0"/>
-          <a:fillRef idx="0"/>
-          <a:effectRef idx="0"/>
-          <a:fontRef idx="minor"/>
-        </p:style>
-        <p:txBody>
-          <a:bodyPr lIns="90000" tIns="45000" rIns="90000" bIns="45000" anchor="t">
-            <a:noAutofit/>
-          </a:bodyPr>
-          <a:p>
-            <a:endParaRPr lang="en-US" sz="1800" b="0" u="none" strike="noStrike">
-              <a:solidFill>
-                <a:srgbClr val="FFFFFF"/>
-              </a:solidFill>
-              <a:effectLst/>
-              <a:uFillTx/>
-              <a:latin typeface="Arial"/>
-            </a:endParaRPr>
-          </a:p>
-        </p:txBody>
-      </p:sp>
-      <p:sp>
-        <p:nvSpPr>
-          <p:cNvPr id="113" name="Text 35"/>
-          <p:cNvSpPr/>
-          <p:nvPr/>
-        </p:nvSpPr>
-        <p:spPr>
-          <a:xfrm>
-            <a:off x="882360" y="2747880"/>
-            <a:ext cx="182520" cy="200880"/>
-          </a:xfrm>
-          <a:prstGeom prst="rect">
-            <a:avLst/>
-          </a:prstGeom>
-          <a:noFill/>
-          <a:ln w="0">
-            <a:noFill/>
-          </a:ln>
-        </p:spPr>
-        <p:style>
-          <a:lnRef idx="0"/>
-          <a:fillRef idx="0"/>
-          <a:effectRef idx="0"/>
-          <a:fontRef idx="minor"/>
-        </p:style>
-        <p:txBody>
-          <a:bodyPr lIns="0" tIns="0" rIns="0" bIns="0" anchor="ctr">
-            <a:noAutofit/>
-          </a:bodyPr>
-          <a:p>
-            <a:pPr algn="ctr" defTabSz="914400">
-              <a:lnSpc>
-                <a:spcPct val="100000"/>
-              </a:lnSpc>
-              <a:tabLst>
-                <a:tab pos="0" algn="l"/>
-              </a:tabLst>
-            </a:pPr>
-            <a:r>
-              <a:rPr lang="en-US" sz="1200" b="1" u="none" strike="noStrike">
-                <a:solidFill>
-                  <a:srgbClr val="FFFFFF"/>
-                </a:solidFill>
-                <a:effectLst/>
-                <a:uFillTx/>
-                <a:latin typeface="Aptos"/>
-              </a:rPr>
-              <a:t>✓</a:t>
-            </a:r>
-            <a:endParaRPr lang="en-US" sz="1200" b="0" u="none" strike="noStrike">
-              <a:solidFill>
-                <a:srgbClr val="000000"/>
-              </a:solidFill>
-              <a:effectLst/>
-              <a:uFillTx/>
-              <a:latin typeface="Arial"/>
-            </a:endParaRPr>
-          </a:p>
-        </p:txBody>
-      </p:sp>
-      <p:sp>
-        <p:nvSpPr>
-          <p:cNvPr id="114" name="Text 36"/>
-          <p:cNvSpPr/>
-          <p:nvPr/>
-        </p:nvSpPr>
-        <p:spPr>
-          <a:xfrm>
-            <a:off x="1179720" y="2752200"/>
-            <a:ext cx="4845960" cy="273960"/>
-          </a:xfrm>
-          <a:prstGeom prst="rect">
-            <a:avLst/>
-          </a:prstGeom>
-          <a:noFill/>
-          <a:ln w="0">
-            <a:noFill/>
-          </a:ln>
-        </p:spPr>
-        <p:style>
-          <a:lnRef idx="0"/>
-          <a:fillRef idx="0"/>
-          <a:effectRef idx="0"/>
-          <a:fontRef idx="minor"/>
-        </p:style>
-        <p:txBody>
-          <a:bodyPr lIns="0" tIns="0" rIns="0" bIns="0" anchor="ctr">
-            <a:noAutofit/>
-          </a:bodyPr>
-          <a:p>
-            <a:pPr defTabSz="914400">
-              <a:lnSpc>
-                <a:spcPct val="100000"/>
-              </a:lnSpc>
-              <a:tabLst>
-                <a:tab pos="0" algn="l"/>
-              </a:tabLst>
-            </a:pPr>
-            <a:r>
-              <a:rPr lang="en-US" sz="1350" b="0" u="none" strike="noStrike">
-                <a:solidFill>
-                  <a:srgbClr val="111827"/>
-                </a:solidFill>
-                <a:effectLst/>
-                <a:uFillTx/>
-                <a:latin typeface="Aptos"/>
-              </a:rPr>
-              <a:t>Next.js opens at localhost:3000</a:t>
-            </a:r>
-            <a:endParaRPr lang="en-US" sz="1350" b="0" u="none" strike="noStrike">
-              <a:solidFill>
-                <a:srgbClr val="000000"/>
-              </a:solidFill>
-              <a:effectLst/>
-              <a:uFillTx/>
-              <a:latin typeface="Arial"/>
-            </a:endParaRPr>
-          </a:p>
-        </p:txBody>
-      </p:sp>
-      <p:sp>
-        <p:nvSpPr>
-          <p:cNvPr id="115" name="Shape 16"/>
-          <p:cNvSpPr/>
-          <p:nvPr/>
-        </p:nvSpPr>
-        <p:spPr>
-          <a:xfrm>
-            <a:off x="868680" y="3392280"/>
-            <a:ext cx="209880" cy="209880"/>
-          </a:xfrm>
-          <a:prstGeom prst="ellipse">
-            <a:avLst/>
-          </a:prstGeom>
-          <a:solidFill>
-            <a:srgbClr val="16A34A"/>
-          </a:solidFill>
-          <a:ln w="12700">
-            <a:solidFill>
-              <a:srgbClr val="16A34A"/>
-            </a:solidFill>
-            <a:round/>
-          </a:ln>
-        </p:spPr>
-        <p:style>
-          <a:lnRef idx="0"/>
-          <a:fillRef idx="0"/>
-          <a:effectRef idx="0"/>
-          <a:fontRef idx="minor"/>
-        </p:style>
-        <p:txBody>
-          <a:bodyPr lIns="90000" tIns="45000" rIns="90000" bIns="45000" anchor="t">
-            <a:noAutofit/>
-          </a:bodyPr>
-          <a:p>
-            <a:endParaRPr lang="en-US" sz="1800" b="0" u="none" strike="noStrike">
-              <a:solidFill>
-                <a:srgbClr val="FFFFFF"/>
-              </a:solidFill>
-              <a:effectLst/>
-              <a:uFillTx/>
-              <a:latin typeface="Arial"/>
-            </a:endParaRPr>
-          </a:p>
-        </p:txBody>
-      </p:sp>
-      <p:sp>
-        <p:nvSpPr>
-          <p:cNvPr id="116" name="Text 37"/>
-          <p:cNvSpPr/>
-          <p:nvPr/>
-        </p:nvSpPr>
-        <p:spPr>
-          <a:xfrm>
-            <a:off x="882360" y="3369600"/>
-            <a:ext cx="182520" cy="200880"/>
-          </a:xfrm>
-          <a:prstGeom prst="rect">
-            <a:avLst/>
-          </a:prstGeom>
-          <a:noFill/>
-          <a:ln w="0">
-            <a:noFill/>
-          </a:ln>
-        </p:spPr>
-        <p:style>
-          <a:lnRef idx="0"/>
-          <a:fillRef idx="0"/>
-          <a:effectRef idx="0"/>
-          <a:fontRef idx="minor"/>
-        </p:style>
-        <p:txBody>
-          <a:bodyPr lIns="0" tIns="0" rIns="0" bIns="0" anchor="ctr">
-            <a:noAutofit/>
-          </a:bodyPr>
-          <a:p>
-            <a:pPr algn="ctr" defTabSz="914400">
-              <a:lnSpc>
-                <a:spcPct val="100000"/>
-              </a:lnSpc>
-              <a:tabLst>
-                <a:tab pos="0" algn="l"/>
-              </a:tabLst>
-            </a:pPr>
-            <a:r>
-              <a:rPr lang="en-US" sz="1200" b="1" u="none" strike="noStrike">
-                <a:solidFill>
-                  <a:srgbClr val="FFFFFF"/>
-                </a:solidFill>
-                <a:effectLst/>
-                <a:uFillTx/>
-                <a:latin typeface="Aptos"/>
-              </a:rPr>
-              <a:t>✓</a:t>
-            </a:r>
-            <a:endParaRPr lang="en-US" sz="1200" b="0" u="none" strike="noStrike">
-              <a:solidFill>
-                <a:srgbClr val="000000"/>
-              </a:solidFill>
-              <a:effectLst/>
-              <a:uFillTx/>
-              <a:latin typeface="Arial"/>
-            </a:endParaRPr>
-          </a:p>
-        </p:txBody>
-      </p:sp>
-      <p:sp>
-        <p:nvSpPr>
-          <p:cNvPr id="117" name="Text 38"/>
-          <p:cNvSpPr/>
-          <p:nvPr/>
-        </p:nvSpPr>
-        <p:spPr>
-          <a:xfrm>
-            <a:off x="1179720" y="3374280"/>
-            <a:ext cx="4845960" cy="273960"/>
-          </a:xfrm>
-          <a:prstGeom prst="rect">
-            <a:avLst/>
-          </a:prstGeom>
-          <a:noFill/>
-          <a:ln w="0">
-            <a:noFill/>
-          </a:ln>
-        </p:spPr>
-        <p:style>
-          <a:lnRef idx="0"/>
-          <a:fillRef idx="0"/>
-          <a:effectRef idx="0"/>
-          <a:fontRef idx="minor"/>
-        </p:style>
-        <p:txBody>
-          <a:bodyPr lIns="0" tIns="0" rIns="0" bIns="0" anchor="ctr">
-            <a:noAutofit/>
-          </a:bodyPr>
-          <a:p>
-            <a:pPr defTabSz="914400">
-              <a:lnSpc>
-                <a:spcPct val="100000"/>
-              </a:lnSpc>
-              <a:tabLst>
-                <a:tab pos="0" algn="l"/>
-              </a:tabLst>
-            </a:pPr>
-            <a:r>
-              <a:rPr lang="en-US" sz="1350" b="0" u="none" strike="noStrike">
-                <a:solidFill>
-                  <a:srgbClr val="111827"/>
-                </a:solidFill>
-                <a:effectLst/>
-                <a:uFillTx/>
-                <a:latin typeface="Aptos"/>
-              </a:rPr>
-              <a:t>pg appears in package.json dependencies</a:t>
-            </a:r>
-            <a:endParaRPr lang="en-US" sz="1350" b="0" u="none" strike="noStrike">
-              <a:solidFill>
-                <a:srgbClr val="000000"/>
-              </a:solidFill>
-              <a:effectLst/>
-              <a:uFillTx/>
-              <a:latin typeface="Arial"/>
-            </a:endParaRPr>
-          </a:p>
-        </p:txBody>
-      </p:sp>
-      <p:sp>
-        <p:nvSpPr>
-          <p:cNvPr id="118" name="Shape 19"/>
-          <p:cNvSpPr/>
-          <p:nvPr/>
-        </p:nvSpPr>
-        <p:spPr>
-          <a:xfrm>
-            <a:off x="868680" y="4014360"/>
-            <a:ext cx="209880" cy="209880"/>
-          </a:xfrm>
-          <a:prstGeom prst="ellipse">
-            <a:avLst/>
-          </a:prstGeom>
-          <a:solidFill>
-            <a:srgbClr val="2563EB"/>
-          </a:solidFill>
-          <a:ln w="12700">
-            <a:solidFill>
-              <a:srgbClr val="2563EB"/>
-            </a:solidFill>
-            <a:round/>
-          </a:ln>
-        </p:spPr>
-        <p:style>
-          <a:lnRef idx="0"/>
-          <a:fillRef idx="0"/>
-          <a:effectRef idx="0"/>
-          <a:fontRef idx="minor"/>
-        </p:style>
-        <p:txBody>
-          <a:bodyPr lIns="90000" tIns="45000" rIns="90000" bIns="45000" anchor="t">
-            <a:noAutofit/>
-          </a:bodyPr>
-          <a:p>
-            <a:endParaRPr lang="en-US" sz="1800" b="0" u="none" strike="noStrike">
-              <a:solidFill>
-                <a:srgbClr val="FFFFFF"/>
-              </a:solidFill>
-              <a:effectLst/>
-              <a:uFillTx/>
-              <a:latin typeface="Arial"/>
-            </a:endParaRPr>
-          </a:p>
-        </p:txBody>
-      </p:sp>
-      <p:sp>
-        <p:nvSpPr>
-          <p:cNvPr id="119" name="Text 39"/>
-          <p:cNvSpPr/>
-          <p:nvPr/>
-        </p:nvSpPr>
-        <p:spPr>
-          <a:xfrm>
-            <a:off x="882360" y="3991320"/>
-            <a:ext cx="182520" cy="200880"/>
-          </a:xfrm>
-          <a:prstGeom prst="rect">
-            <a:avLst/>
-          </a:prstGeom>
-          <a:noFill/>
-          <a:ln w="0">
-            <a:noFill/>
-          </a:ln>
-        </p:spPr>
-        <p:style>
-          <a:lnRef idx="0"/>
-          <a:fillRef idx="0"/>
-          <a:effectRef idx="0"/>
-          <a:fontRef idx="minor"/>
-        </p:style>
-        <p:txBody>
-          <a:bodyPr lIns="0" tIns="0" rIns="0" bIns="0" anchor="ctr">
-            <a:noAutofit/>
-          </a:bodyPr>
-          <a:p>
-            <a:pPr algn="ctr" defTabSz="914400">
-              <a:lnSpc>
-                <a:spcPct val="100000"/>
-              </a:lnSpc>
-              <a:tabLst>
-                <a:tab pos="0" algn="l"/>
-              </a:tabLst>
-            </a:pPr>
-            <a:r>
-              <a:rPr lang="en-US" sz="1200" b="1" u="none" strike="noStrike">
-                <a:solidFill>
-                  <a:srgbClr val="FFFFFF"/>
-                </a:solidFill>
-                <a:effectLst/>
-                <a:uFillTx/>
-                <a:latin typeface="Aptos"/>
-              </a:rPr>
-              <a:t>✓</a:t>
-            </a:r>
-            <a:endParaRPr lang="en-US" sz="1200" b="0" u="none" strike="noStrike">
-              <a:solidFill>
-                <a:srgbClr val="000000"/>
-              </a:solidFill>
-              <a:effectLst/>
-              <a:uFillTx/>
-              <a:latin typeface="Arial"/>
-            </a:endParaRPr>
-          </a:p>
-        </p:txBody>
-      </p:sp>
-      <p:sp>
-        <p:nvSpPr>
-          <p:cNvPr id="120" name="Text 40"/>
-          <p:cNvSpPr/>
-          <p:nvPr/>
-        </p:nvSpPr>
-        <p:spPr>
-          <a:xfrm>
-            <a:off x="1179720" y="3996000"/>
-            <a:ext cx="4845960" cy="273960"/>
-          </a:xfrm>
-          <a:prstGeom prst="rect">
-            <a:avLst/>
-          </a:prstGeom>
-          <a:noFill/>
-          <a:ln w="0">
-            <a:noFill/>
-          </a:ln>
-        </p:spPr>
-        <p:style>
-          <a:lnRef idx="0"/>
-          <a:fillRef idx="0"/>
-          <a:effectRef idx="0"/>
-          <a:fontRef idx="minor"/>
-        </p:style>
-        <p:txBody>
-          <a:bodyPr lIns="0" tIns="0" rIns="0" bIns="0" anchor="ctr">
-            <a:noAutofit/>
-          </a:bodyPr>
-          <a:p>
-            <a:pPr defTabSz="914400">
-              <a:lnSpc>
-                <a:spcPct val="100000"/>
-              </a:lnSpc>
-              <a:tabLst>
-                <a:tab pos="0" algn="l"/>
-              </a:tabLst>
-            </a:pPr>
-            <a:r>
-              <a:rPr lang="en-US" sz="1350" b="0" u="none" strike="noStrike">
-                <a:solidFill>
-                  <a:srgbClr val="111827"/>
-                </a:solidFill>
-                <a:effectLst/>
-                <a:uFillTx/>
-                <a:latin typeface="Aptos"/>
-              </a:rPr>
-              <a:t>PostgreSQL server and database credentials are available</a:t>
-            </a:r>
-            <a:endParaRPr lang="en-US" sz="1350" b="0" u="none" strike="noStrike">
-              <a:solidFill>
-                <a:srgbClr val="000000"/>
-              </a:solidFill>
-              <a:effectLst/>
-              <a:uFillTx/>
-              <a:latin typeface="Arial"/>
-            </a:endParaRPr>
-          </a:p>
-        </p:txBody>
-      </p:sp>
-      <p:sp>
-        <p:nvSpPr>
-          <p:cNvPr id="121" name="Shape 20"/>
-          <p:cNvSpPr/>
-          <p:nvPr/>
-        </p:nvSpPr>
-        <p:spPr>
-          <a:xfrm>
-            <a:off x="6446520" y="1325880"/>
-            <a:ext cx="4891680" cy="4480200"/>
-          </a:xfrm>
-          <a:prstGeom prst="roundRect">
-            <a:avLst>
-              <a:gd name="adj" fmla="val 1633"/>
-            </a:avLst>
-          </a:prstGeom>
-          <a:solidFill>
-            <a:srgbClr val="FFFFFF"/>
-          </a:solidFill>
-          <a:ln w="12700">
-            <a:solidFill>
-              <a:srgbClr val="D1D5DB"/>
-            </a:solidFill>
-            <a:round/>
-          </a:ln>
-          <a:effectLst>
-            <a:outerShdw algn="bl" dir="0" dist="0" kx="0" ky="0" rotWithShape="0" sx="100000" sy="100000">
-              <a:srgbClr val="000000">
-                <a:alpha val="0"/>
-              </a:srgbClr>
-            </a:outerShdw>
-          </a:effectLst>
-        </p:spPr>
-        <p:style>
-          <a:lnRef idx="0"/>
-          <a:fillRef idx="0"/>
-          <a:effectRef idx="0"/>
-          <a:fontRef idx="minor"/>
-        </p:style>
-        <p:txBody>
-          <a:bodyPr lIns="90000" tIns="45000" rIns="90000" bIns="45000" anchor="t">
-            <a:noAutofit/>
-          </a:bodyPr>
-          <a:p>
-            <a:endParaRPr lang="en-US" sz="1800" b="0" u="none" strike="noStrike">
-              <a:solidFill>
-                <a:srgbClr val="000000"/>
-              </a:solidFill>
-              <a:effectLst/>
-              <a:uFillTx/>
-              <a:latin typeface="Arial"/>
-            </a:endParaRPr>
-          </a:p>
-        </p:txBody>
-      </p:sp>
-      <p:sp>
-        <p:nvSpPr>
-          <p:cNvPr id="122" name="Text 41"/>
-          <p:cNvSpPr/>
-          <p:nvPr/>
-        </p:nvSpPr>
-        <p:spPr>
-          <a:xfrm>
-            <a:off x="6784920" y="1627560"/>
-            <a:ext cx="4160160" cy="365400"/>
-          </a:xfrm>
-          <a:prstGeom prst="rect">
-            <a:avLst/>
-          </a:prstGeom>
-          <a:noFill/>
-          <a:ln w="0">
-            <a:noFill/>
-          </a:ln>
-        </p:spPr>
-        <p:style>
-          <a:lnRef idx="0"/>
-          <a:fillRef idx="0"/>
-          <a:effectRef idx="0"/>
-          <a:fontRef idx="minor"/>
-        </p:style>
-        <p:txBody>
-          <a:bodyPr lIns="0" tIns="0" rIns="0" bIns="0" anchor="ctr">
-            <a:noAutofit/>
-          </a:bodyPr>
-          <a:p>
-            <a:pPr defTabSz="914400">
-              <a:lnSpc>
-                <a:spcPct val="100000"/>
-              </a:lnSpc>
-              <a:tabLst>
-                <a:tab pos="0" algn="l"/>
-              </a:tabLst>
-            </a:pPr>
-            <a:r>
-              <a:rPr lang="en-US" sz="1900" b="1" u="none" strike="noStrike">
-                <a:solidFill>
-                  <a:srgbClr val="111827"/>
-                </a:solidFill>
-                <a:effectLst/>
-                <a:uFillTx/>
-                <a:latin typeface="Aptos"/>
-              </a:rPr>
-              <a:t>Official references</a:t>
-            </a:r>
-            <a:endParaRPr lang="en-US" sz="1900" b="0" u="none" strike="noStrike">
-              <a:solidFill>
-                <a:srgbClr val="000000"/>
-              </a:solidFill>
-              <a:effectLst/>
-              <a:uFillTx/>
-              <a:latin typeface="Arial"/>
-            </a:endParaRPr>
-          </a:p>
-        </p:txBody>
-      </p:sp>
-      <p:sp>
-        <p:nvSpPr>
-          <p:cNvPr id="123" name="Text 42"/>
-          <p:cNvSpPr/>
-          <p:nvPr/>
-        </p:nvSpPr>
-        <p:spPr>
-          <a:xfrm>
-            <a:off x="6793920" y="2212920"/>
-            <a:ext cx="1599840" cy="255600"/>
-          </a:xfrm>
-          <a:prstGeom prst="rect">
-            <a:avLst/>
-          </a:prstGeom>
-          <a:noFill/>
-          <a:ln w="0">
-            <a:noFill/>
-          </a:ln>
-        </p:spPr>
-        <p:style>
-          <a:lnRef idx="0"/>
-          <a:fillRef idx="0"/>
-          <a:effectRef idx="0"/>
-          <a:fontRef idx="minor"/>
-        </p:style>
-        <p:txBody>
-          <a:bodyPr lIns="0" tIns="0" rIns="0" bIns="0" anchor="ctr">
-            <a:noAutofit/>
-          </a:bodyPr>
-          <a:p>
-            <a:pPr defTabSz="914400">
-              <a:lnSpc>
-                <a:spcPct val="100000"/>
-              </a:lnSpc>
-              <a:tabLst>
-                <a:tab pos="0" algn="l"/>
-              </a:tabLst>
-            </a:pPr>
-            <a:r>
-              <a:rPr lang="en-US" sz="1300" b="1" u="none" strike="noStrike">
-                <a:solidFill>
-                  <a:srgbClr val="111827"/>
-                </a:solidFill>
-                <a:effectLst/>
-                <a:uFillTx/>
-                <a:latin typeface="Aptos"/>
-              </a:rPr>
-              <a:t>Node.js downloads</a:t>
-            </a:r>
-            <a:endParaRPr lang="en-US" sz="1300" b="0" u="none" strike="noStrike">
-              <a:solidFill>
-                <a:srgbClr val="000000"/>
-              </a:solidFill>
-              <a:effectLst/>
-              <a:uFillTx/>
-              <a:latin typeface="Arial"/>
-            </a:endParaRPr>
-          </a:p>
-        </p:txBody>
-      </p:sp>
-      <p:sp>
-        <p:nvSpPr>
-          <p:cNvPr id="124" name="Text 43">
-            <a:hlinkClick r:id="rId1"/>
-          </p:cNvPr>
-          <p:cNvSpPr/>
-          <p:nvPr/>
-        </p:nvSpPr>
-        <p:spPr>
-          <a:xfrm>
-            <a:off x="8412480" y="2212920"/>
-            <a:ext cx="2514240" cy="292320"/>
-          </a:xfrm>
-          <a:prstGeom prst="rect">
-            <a:avLst/>
-          </a:prstGeom>
-          <a:noFill/>
-          <a:ln w="0">
-            <a:noFill/>
-          </a:ln>
-        </p:spPr>
-        <p:style>
-          <a:lnRef idx="0"/>
-          <a:fillRef idx="0"/>
-          <a:effectRef idx="0"/>
-          <a:fontRef idx="minor"/>
-        </p:style>
-        <p:txBody>
-          <a:bodyPr lIns="0" tIns="0" rIns="0" bIns="0" anchor="ctr">
-            <a:normAutofit/>
-          </a:bodyPr>
-          <a:p>
-            <a:pPr defTabSz="914400">
-              <a:lnSpc>
-                <a:spcPct val="100000"/>
-              </a:lnSpc>
-              <a:tabLst>
-                <a:tab pos="0" algn="l"/>
-              </a:tabLst>
-            </a:pPr>
-            <a:r>
-              <a:rPr lang="en-US" sz="1050" b="0" u="sng" strike="noStrike">
-                <a:solidFill>
-                  <a:srgbClr val="2563EB"/>
-                </a:solidFill>
-                <a:effectLst/>
-                <a:uFillTx/>
-                <a:latin typeface="Aptos"/>
-                <a:hlinkClick r:id="rId2"/>
-              </a:rPr>
-              <a:t>https://nodejs.org/en/download</a:t>
-            </a:r>
-            <a:endParaRPr lang="en-US" sz="1050" b="0" u="none" strike="noStrike">
-              <a:solidFill>
-                <a:srgbClr val="000000"/>
-              </a:solidFill>
-              <a:effectLst/>
-              <a:uFillTx/>
-              <a:latin typeface="Arial"/>
-            </a:endParaRPr>
-          </a:p>
-        </p:txBody>
-      </p:sp>
-      <p:sp>
-        <p:nvSpPr>
-          <p:cNvPr id="125" name="Text 44"/>
-          <p:cNvSpPr/>
-          <p:nvPr/>
-        </p:nvSpPr>
-        <p:spPr>
-          <a:xfrm>
-            <a:off x="6793920" y="2825640"/>
-            <a:ext cx="1599840" cy="255600"/>
-          </a:xfrm>
-          <a:prstGeom prst="rect">
-            <a:avLst/>
-          </a:prstGeom>
-          <a:noFill/>
-          <a:ln w="0">
-            <a:noFill/>
-          </a:ln>
-        </p:spPr>
-        <p:style>
-          <a:lnRef idx="0"/>
-          <a:fillRef idx="0"/>
-          <a:effectRef idx="0"/>
-          <a:fontRef idx="minor"/>
-        </p:style>
-        <p:txBody>
-          <a:bodyPr lIns="0" tIns="0" rIns="0" bIns="0" anchor="ctr">
-            <a:noAutofit/>
-          </a:bodyPr>
-          <a:p>
-            <a:pPr defTabSz="914400">
-              <a:lnSpc>
-                <a:spcPct val="100000"/>
-              </a:lnSpc>
-              <a:tabLst>
-                <a:tab pos="0" algn="l"/>
-              </a:tabLst>
-            </a:pPr>
-            <a:r>
-              <a:rPr lang="en-US" sz="1300" b="1" u="none" strike="noStrike">
-                <a:solidFill>
-                  <a:srgbClr val="111827"/>
-                </a:solidFill>
-                <a:effectLst/>
-                <a:uFillTx/>
-                <a:latin typeface="Aptos"/>
-              </a:rPr>
-              <a:t>Next.js installation</a:t>
-            </a:r>
-            <a:endParaRPr lang="en-US" sz="1300" b="0" u="none" strike="noStrike">
-              <a:solidFill>
-                <a:srgbClr val="000000"/>
-              </a:solidFill>
-              <a:effectLst/>
-              <a:uFillTx/>
-              <a:latin typeface="Arial"/>
-            </a:endParaRPr>
-          </a:p>
-        </p:txBody>
-      </p:sp>
-      <p:sp>
-        <p:nvSpPr>
-          <p:cNvPr id="126" name="Text 45">
-            <a:hlinkClick r:id="rId3"/>
-          </p:cNvPr>
-          <p:cNvSpPr/>
-          <p:nvPr/>
-        </p:nvSpPr>
-        <p:spPr>
-          <a:xfrm>
-            <a:off x="8412480" y="2825640"/>
-            <a:ext cx="2514240" cy="292320"/>
-          </a:xfrm>
-          <a:prstGeom prst="rect">
-            <a:avLst/>
-          </a:prstGeom>
-          <a:noFill/>
-          <a:ln w="0">
-            <a:noFill/>
-          </a:ln>
-        </p:spPr>
-        <p:style>
-          <a:lnRef idx="0"/>
-          <a:fillRef idx="0"/>
-          <a:effectRef idx="0"/>
-          <a:fontRef idx="minor"/>
-        </p:style>
-        <p:txBody>
-          <a:bodyPr lIns="0" tIns="0" rIns="0" bIns="0" anchor="ctr">
-            <a:normAutofit/>
-          </a:bodyPr>
-          <a:p>
-            <a:pPr defTabSz="914400">
-              <a:lnSpc>
-                <a:spcPct val="100000"/>
-              </a:lnSpc>
-              <a:tabLst>
-                <a:tab pos="0" algn="l"/>
-              </a:tabLst>
-            </a:pPr>
-            <a:r>
-              <a:rPr lang="en-US" sz="1050" b="0" u="sng" strike="noStrike">
-                <a:solidFill>
-                  <a:srgbClr val="2563EB"/>
-                </a:solidFill>
-                <a:effectLst/>
-                <a:uFillTx/>
-                <a:latin typeface="Aptos"/>
-                <a:hlinkClick r:id="rId4"/>
-              </a:rPr>
-              <a:t>https://nextjs.org/docs/app/getting-started/installation</a:t>
-            </a:r>
-            <a:endParaRPr lang="en-US" sz="1050" b="0" u="none" strike="noStrike">
-              <a:solidFill>
-                <a:srgbClr val="000000"/>
-              </a:solidFill>
-              <a:effectLst/>
-              <a:uFillTx/>
-              <a:latin typeface="Arial"/>
-            </a:endParaRPr>
-          </a:p>
-        </p:txBody>
-      </p:sp>
-      <p:sp>
-        <p:nvSpPr>
-          <p:cNvPr id="127" name="Text 46"/>
-          <p:cNvSpPr/>
-          <p:nvPr/>
-        </p:nvSpPr>
-        <p:spPr>
-          <a:xfrm>
-            <a:off x="6793920" y="3438000"/>
-            <a:ext cx="1599840" cy="255600"/>
-          </a:xfrm>
-          <a:prstGeom prst="rect">
-            <a:avLst/>
-          </a:prstGeom>
-          <a:noFill/>
-          <a:ln w="0">
-            <a:noFill/>
-          </a:ln>
-        </p:spPr>
-        <p:style>
-          <a:lnRef idx="0"/>
-          <a:fillRef idx="0"/>
-          <a:effectRef idx="0"/>
-          <a:fontRef idx="minor"/>
-        </p:style>
-        <p:txBody>
-          <a:bodyPr lIns="0" tIns="0" rIns="0" bIns="0" anchor="ctr">
-            <a:noAutofit/>
-          </a:bodyPr>
-          <a:p>
-            <a:pPr defTabSz="914400">
-              <a:lnSpc>
-                <a:spcPct val="100000"/>
-              </a:lnSpc>
-              <a:tabLst>
-                <a:tab pos="0" algn="l"/>
-              </a:tabLst>
-            </a:pPr>
-            <a:r>
-              <a:rPr lang="en-US" sz="1300" b="1" u="none" strike="noStrike">
-                <a:solidFill>
-                  <a:srgbClr val="111827"/>
-                </a:solidFill>
-                <a:effectLst/>
-                <a:uFillTx/>
-                <a:latin typeface="Aptos"/>
-              </a:rPr>
-              <a:t>create-next-app CLI</a:t>
-            </a:r>
-            <a:endParaRPr lang="en-US" sz="1300" b="0" u="none" strike="noStrike">
-              <a:solidFill>
-                <a:srgbClr val="000000"/>
-              </a:solidFill>
-              <a:effectLst/>
-              <a:uFillTx/>
-              <a:latin typeface="Arial"/>
-            </a:endParaRPr>
-          </a:p>
-        </p:txBody>
-      </p:sp>
-      <p:sp>
-        <p:nvSpPr>
-          <p:cNvPr id="128" name="Text 47">
-            <a:hlinkClick r:id="rId5"/>
-          </p:cNvPr>
-          <p:cNvSpPr/>
-          <p:nvPr/>
-        </p:nvSpPr>
-        <p:spPr>
-          <a:xfrm>
-            <a:off x="8412480" y="3438000"/>
-            <a:ext cx="2514240" cy="292320"/>
-          </a:xfrm>
-          <a:prstGeom prst="rect">
-            <a:avLst/>
-          </a:prstGeom>
-          <a:noFill/>
-          <a:ln w="0">
-            <a:noFill/>
-          </a:ln>
-        </p:spPr>
-        <p:style>
-          <a:lnRef idx="0"/>
-          <a:fillRef idx="0"/>
-          <a:effectRef idx="0"/>
-          <a:fontRef idx="minor"/>
-        </p:style>
-        <p:txBody>
-          <a:bodyPr lIns="0" tIns="0" rIns="0" bIns="0" anchor="ctr">
-            <a:normAutofit/>
-          </a:bodyPr>
-          <a:p>
-            <a:pPr defTabSz="914400">
-              <a:lnSpc>
-                <a:spcPct val="100000"/>
-              </a:lnSpc>
-              <a:tabLst>
-                <a:tab pos="0" algn="l"/>
-              </a:tabLst>
-            </a:pPr>
-            <a:r>
-              <a:rPr lang="en-US" sz="1050" b="0" u="sng" strike="noStrike">
-                <a:solidFill>
-                  <a:srgbClr val="2563EB"/>
-                </a:solidFill>
-                <a:effectLst/>
-                <a:uFillTx/>
-                <a:latin typeface="Aptos"/>
-                <a:hlinkClick r:id="rId6"/>
-              </a:rPr>
-              <a:t>https://nextjs.org/docs/app/api-reference/cli/create-next-app</a:t>
-            </a:r>
-            <a:endParaRPr lang="en-US" sz="1050" b="0" u="none" strike="noStrike">
-              <a:solidFill>
-                <a:srgbClr val="000000"/>
-              </a:solidFill>
-              <a:effectLst/>
-              <a:uFillTx/>
-              <a:latin typeface="Arial"/>
-            </a:endParaRPr>
-          </a:p>
-        </p:txBody>
-      </p:sp>
-      <p:sp>
-        <p:nvSpPr>
-          <p:cNvPr id="129" name="Text 48"/>
-          <p:cNvSpPr/>
-          <p:nvPr/>
-        </p:nvSpPr>
-        <p:spPr>
-          <a:xfrm>
-            <a:off x="6793920" y="4050720"/>
-            <a:ext cx="1599840" cy="255600"/>
-          </a:xfrm>
-          <a:prstGeom prst="rect">
-            <a:avLst/>
-          </a:prstGeom>
-          <a:noFill/>
-          <a:ln w="0">
-            <a:noFill/>
-          </a:ln>
-        </p:spPr>
-        <p:style>
-          <a:lnRef idx="0"/>
-          <a:fillRef idx="0"/>
-          <a:effectRef idx="0"/>
-          <a:fontRef idx="minor"/>
-        </p:style>
-        <p:txBody>
-          <a:bodyPr lIns="0" tIns="0" rIns="0" bIns="0" anchor="ctr">
-            <a:noAutofit/>
-          </a:bodyPr>
-          <a:p>
-            <a:pPr defTabSz="914400">
-              <a:lnSpc>
-                <a:spcPct val="100000"/>
-              </a:lnSpc>
-              <a:tabLst>
-                <a:tab pos="0" algn="l"/>
-              </a:tabLst>
-            </a:pPr>
-            <a:r>
-              <a:rPr lang="en-US" sz="1300" b="1" u="none" strike="noStrike">
-                <a:solidFill>
-                  <a:srgbClr val="111827"/>
-                </a:solidFill>
-                <a:effectLst/>
-                <a:uFillTx/>
-                <a:latin typeface="Aptos"/>
-              </a:rPr>
-              <a:t>node-postgres</a:t>
-            </a:r>
-            <a:endParaRPr lang="en-US" sz="1300" b="0" u="none" strike="noStrike">
-              <a:solidFill>
-                <a:srgbClr val="000000"/>
-              </a:solidFill>
-              <a:effectLst/>
-              <a:uFillTx/>
-              <a:latin typeface="Arial"/>
-            </a:endParaRPr>
-          </a:p>
-        </p:txBody>
-      </p:sp>
-      <p:sp>
-        <p:nvSpPr>
-          <p:cNvPr id="130" name="Text 49">
-            <a:hlinkClick r:id="rId7"/>
-          </p:cNvPr>
-          <p:cNvSpPr/>
-          <p:nvPr/>
-        </p:nvSpPr>
-        <p:spPr>
-          <a:xfrm>
-            <a:off x="8412480" y="4050720"/>
-            <a:ext cx="2514240" cy="292320"/>
-          </a:xfrm>
-          <a:prstGeom prst="rect">
-            <a:avLst/>
-          </a:prstGeom>
-          <a:noFill/>
-          <a:ln w="0">
-            <a:noFill/>
-          </a:ln>
-        </p:spPr>
-        <p:style>
-          <a:lnRef idx="0"/>
-          <a:fillRef idx="0"/>
-          <a:effectRef idx="0"/>
-          <a:fontRef idx="minor"/>
-        </p:style>
-        <p:txBody>
-          <a:bodyPr lIns="0" tIns="0" rIns="0" bIns="0" anchor="ctr">
-            <a:normAutofit/>
-          </a:bodyPr>
-          <a:p>
-            <a:pPr defTabSz="914400">
-              <a:lnSpc>
-                <a:spcPct val="100000"/>
-              </a:lnSpc>
-              <a:tabLst>
-                <a:tab pos="0" algn="l"/>
-              </a:tabLst>
-            </a:pPr>
-            <a:r>
-              <a:rPr lang="en-US" sz="1050" b="0" u="sng" strike="noStrike">
-                <a:solidFill>
-                  <a:srgbClr val="2563EB"/>
-                </a:solidFill>
-                <a:effectLst/>
-                <a:uFillTx/>
-                <a:latin typeface="Aptos"/>
-                <a:hlinkClick r:id="rId8"/>
-              </a:rPr>
-              <a:t>https://node-postgres.com/</a:t>
-            </a:r>
-            <a:endParaRPr lang="en-US" sz="1050" b="0" u="none" strike="noStrike">
-              <a:solidFill>
-                <a:srgbClr val="000000"/>
-              </a:solidFill>
-              <a:effectLst/>
-              <a:uFillTx/>
-              <a:latin typeface="Arial"/>
-            </a:endParaRPr>
-          </a:p>
-        </p:txBody>
-      </p:sp>
-      <p:sp>
-        <p:nvSpPr>
-          <p:cNvPr id="131" name="Text 50"/>
-          <p:cNvSpPr/>
-          <p:nvPr/>
-        </p:nvSpPr>
-        <p:spPr>
-          <a:xfrm>
-            <a:off x="6793920" y="4663440"/>
-            <a:ext cx="1599840" cy="255600"/>
-          </a:xfrm>
-          <a:prstGeom prst="rect">
-            <a:avLst/>
-          </a:prstGeom>
-          <a:noFill/>
-          <a:ln w="0">
-            <a:noFill/>
-          </a:ln>
-        </p:spPr>
-        <p:style>
-          <a:lnRef idx="0"/>
-          <a:fillRef idx="0"/>
-          <a:effectRef idx="0"/>
-          <a:fontRef idx="minor"/>
-        </p:style>
-        <p:txBody>
-          <a:bodyPr lIns="0" tIns="0" rIns="0" bIns="0" anchor="ctr">
-            <a:noAutofit/>
-          </a:bodyPr>
-          <a:p>
-            <a:pPr defTabSz="914400">
-              <a:lnSpc>
-                <a:spcPct val="100000"/>
-              </a:lnSpc>
-              <a:tabLst>
-                <a:tab pos="0" algn="l"/>
-              </a:tabLst>
-            </a:pPr>
-            <a:r>
-              <a:rPr lang="en-US" sz="1300" b="1" u="none" strike="noStrike">
-                <a:solidFill>
-                  <a:srgbClr val="111827"/>
-                </a:solidFill>
-                <a:effectLst/>
-                <a:uFillTx/>
-                <a:latin typeface="Aptos"/>
-              </a:rPr>
-              <a:t>Connection setup</a:t>
-            </a:r>
-            <a:endParaRPr lang="en-US" sz="1300" b="0" u="none" strike="noStrike">
-              <a:solidFill>
-                <a:srgbClr val="000000"/>
-              </a:solidFill>
-              <a:effectLst/>
-              <a:uFillTx/>
-              <a:latin typeface="Arial"/>
-            </a:endParaRPr>
-          </a:p>
-        </p:txBody>
-      </p:sp>
-      <p:sp>
-        <p:nvSpPr>
-          <p:cNvPr id="132" name="Text 51">
-            <a:hlinkClick r:id="rId9"/>
-          </p:cNvPr>
-          <p:cNvSpPr/>
-          <p:nvPr/>
-        </p:nvSpPr>
-        <p:spPr>
-          <a:xfrm>
-            <a:off x="8412480" y="4663440"/>
-            <a:ext cx="2514240" cy="292320"/>
-          </a:xfrm>
-          <a:prstGeom prst="rect">
-            <a:avLst/>
-          </a:prstGeom>
-          <a:noFill/>
-          <a:ln w="0">
-            <a:noFill/>
-          </a:ln>
-        </p:spPr>
-        <p:style>
-          <a:lnRef idx="0"/>
-          <a:fillRef idx="0"/>
-          <a:effectRef idx="0"/>
-          <a:fontRef idx="minor"/>
-        </p:style>
-        <p:txBody>
-          <a:bodyPr lIns="0" tIns="0" rIns="0" bIns="0" anchor="ctr">
-            <a:normAutofit/>
-          </a:bodyPr>
-          <a:p>
-            <a:pPr defTabSz="914400">
-              <a:lnSpc>
-                <a:spcPct val="100000"/>
-              </a:lnSpc>
-              <a:tabLst>
-                <a:tab pos="0" algn="l"/>
-              </a:tabLst>
-            </a:pPr>
-            <a:r>
-              <a:rPr lang="en-US" sz="1050" b="0" u="sng" strike="noStrike">
-                <a:solidFill>
-                  <a:srgbClr val="2563EB"/>
-                </a:solidFill>
-                <a:effectLst/>
-                <a:uFillTx/>
-                <a:latin typeface="Aptos"/>
-                <a:hlinkClick r:id="rId10"/>
-              </a:rPr>
-              <a:t>https://node-postgres.com/features/connecting</a:t>
-            </a:r>
-            <a:endParaRPr lang="en-US" sz="1050" b="0" u="none" strike="noStrike">
-              <a:solidFill>
-                <a:srgbClr val="000000"/>
-              </a:solidFill>
-              <a:effectLst/>
-              <a:uFillTx/>
-              <a:latin typeface="Arial"/>
-            </a:endParaRPr>
-          </a:p>
-        </p:txBody>
-      </p:sp>
-      <p:sp>
-        <p:nvSpPr>
-          <p:cNvPr id="133" name="PlaceHolder 1"/>
-          <p:cNvSpPr>
-            <a:spLocks noGrp="1"/>
-          </p:cNvSpPr>
-          <p:nvPr>
-            <p:ph type="sldNum" idx="10"/>
-          </p:nvPr>
-        </p:nvSpPr>
-        <p:spPr>
-          <a:xfrm>
-            <a:off x="11841480" y="6473880"/>
-            <a:ext cx="799560" cy="299520"/>
-          </a:xfrm>
-          <a:prstGeom prst="rect">
-            <a:avLst/>
-          </a:prstGeom>
-          <a:noFill/>
-          <a:ln w="0">
-            <a:noFill/>
-          </a:ln>
-        </p:spPr>
-        <p:txBody>
-          <a:bodyPr lIns="90000" tIns="45000" rIns="90000" bIns="45000" anchor="t">
-            <a:noAutofit/>
-          </a:bodyPr>
-          <a:lstStyle>
-            <a:lvl1pPr indent="0" algn="l" defTabSz="914400">
-              <a:lnSpc>
-                <a:spcPct val="100000"/>
-              </a:lnSpc>
-              <a:buNone/>
-              <a:defRPr lang="en-US" sz="800" b="0" u="none" strike="noStrike">
-                <a:solidFill>
-                  <a:srgbClr val="6B7280"/>
-                </a:solidFill>
-                <a:effectLst/>
-                <a:uFillTx/>
-                <a:latin typeface="Aptos"/>
-                <a:ea typeface="Aptos"/>
-              </a:defRPr>
-            </a:lvl1pPr>
-          </a:lstStyle>
-          <a:p>
-            <a:pPr indent="0" algn="l" defTabSz="914400">
-              <a:lnSpc>
-                <a:spcPct val="100000"/>
-              </a:lnSpc>
-              <a:buNone/>
-            </a:pPr>
-            <a:fld id="{AA08F856-9D4A-4DDE-A065-7F0F3377E563}" type="slidenum">
-              <a:rPr lang="en-US" sz="800" b="0" u="none" strike="noStrike">
-                <a:solidFill>
-                  <a:srgbClr val="6B7280"/>
-                </a:solidFill>
-                <a:effectLst/>
-                <a:uFillTx/>
-                <a:latin typeface="Aptos"/>
-                <a:ea typeface="Aptos"/>
-              </a:rPr>
-              <a:t>6</a:t>
+              <a:t>5</a:t>
             </a:fld>
             <a:endParaRPr lang="en-US" sz="800" b="0" u="none" strike="noStrike">
               <a:solidFill>

--- a/nextjs_postgresql_setup_updated.pptx
+++ b/nextjs_postgresql_setup_updated.pptx
@@ -1,26 +1,559 @@
 
 <file path=ppt/presentation.xml><?xml version="1.0" encoding="utf-8"?>
-<p:presentation xmlns:a="http://schemas.openxmlformats.org/drawingml/2006/main" xmlns:p="http://schemas.openxmlformats.org/presentationml/2006/main" xmlns:r="http://schemas.openxmlformats.org/officeDocument/2006/relationships" xmlns:p14="http://schemas.microsoft.com/office/powerpoint/2010/main" xmlns:p15="http://schemas.microsoft.com/office/powerpoint/2012/main" xmlns:mc="http://schemas.openxmlformats.org/markup-compatibility/2006">
+<p:presentation xmlns:a="http://schemas.openxmlformats.org/drawingml/2006/main" xmlns:r="http://schemas.openxmlformats.org/officeDocument/2006/relationships" xmlns:p="http://schemas.openxmlformats.org/presentationml/2006/main">
   <p:sldMasterIdLst>
-    <p:sldMasterId id="2147483648" r:id="rId2"/>
+    <p:sldMasterId id="2147483648" r:id="rId1"/>
   </p:sldMasterIdLst>
   <p:notesMasterIdLst>
-    <p:notesMasterId r:id="rId3"/>
+    <p:notesMasterId r:id="rId8"/>
   </p:notesMasterIdLst>
   <p:sldIdLst>
-    <p:sldId id="256" r:id="rId4"/>
-    <p:sldId id="257" r:id="rId5"/>
-    <p:sldId id="258" r:id="rId6"/>
-    <p:sldId id="259" r:id="rId7"/>
-    <p:sldId id="260" r:id="rId8"/>
+    <p:sldId id="261" r:id="rId2"/>
+    <p:sldId id="256" r:id="rId3"/>
+    <p:sldId id="257" r:id="rId4"/>
+    <p:sldId id="258" r:id="rId5"/>
+    <p:sldId id="259" r:id="rId6"/>
+    <p:sldId id="260" r:id="rId7"/>
   </p:sldIdLst>
   <p:sldSz cx="12192000" cy="6858000"/>
   <p:notesSz cx="6858000" cy="12192000"/>
+  <p:defaultTextStyle>
+    <a:defPPr>
+      <a:defRPr lang="en-US"/>
+    </a:defPPr>
+    <a:lvl1pPr marL="0" algn="l" defTabSz="914400" rtl="0" eaLnBrk="1" latinLnBrk="0" hangingPunct="1">
+      <a:defRPr sz="1800" kern="1200">
+        <a:solidFill>
+          <a:schemeClr val="tx1"/>
+        </a:solidFill>
+        <a:latin typeface="+mn-lt"/>
+        <a:ea typeface="+mn-ea"/>
+        <a:cs typeface="+mn-cs"/>
+      </a:defRPr>
+    </a:lvl1pPr>
+    <a:lvl2pPr marL="457200" algn="l" defTabSz="914400" rtl="0" eaLnBrk="1" latinLnBrk="0" hangingPunct="1">
+      <a:defRPr sz="1800" kern="1200">
+        <a:solidFill>
+          <a:schemeClr val="tx1"/>
+        </a:solidFill>
+        <a:latin typeface="+mn-lt"/>
+        <a:ea typeface="+mn-ea"/>
+        <a:cs typeface="+mn-cs"/>
+      </a:defRPr>
+    </a:lvl2pPr>
+    <a:lvl3pPr marL="914400" algn="l" defTabSz="914400" rtl="0" eaLnBrk="1" latinLnBrk="0" hangingPunct="1">
+      <a:defRPr sz="1800" kern="1200">
+        <a:solidFill>
+          <a:schemeClr val="tx1"/>
+        </a:solidFill>
+        <a:latin typeface="+mn-lt"/>
+        <a:ea typeface="+mn-ea"/>
+        <a:cs typeface="+mn-cs"/>
+      </a:defRPr>
+    </a:lvl3pPr>
+    <a:lvl4pPr marL="1371600" algn="l" defTabSz="914400" rtl="0" eaLnBrk="1" latinLnBrk="0" hangingPunct="1">
+      <a:defRPr sz="1800" kern="1200">
+        <a:solidFill>
+          <a:schemeClr val="tx1"/>
+        </a:solidFill>
+        <a:latin typeface="+mn-lt"/>
+        <a:ea typeface="+mn-ea"/>
+        <a:cs typeface="+mn-cs"/>
+      </a:defRPr>
+    </a:lvl4pPr>
+    <a:lvl5pPr marL="1828800" algn="l" defTabSz="914400" rtl="0" eaLnBrk="1" latinLnBrk="0" hangingPunct="1">
+      <a:defRPr sz="1800" kern="1200">
+        <a:solidFill>
+          <a:schemeClr val="tx1"/>
+        </a:solidFill>
+        <a:latin typeface="+mn-lt"/>
+        <a:ea typeface="+mn-ea"/>
+        <a:cs typeface="+mn-cs"/>
+      </a:defRPr>
+    </a:lvl5pPr>
+    <a:lvl6pPr marL="2286000" algn="l" defTabSz="914400" rtl="0" eaLnBrk="1" latinLnBrk="0" hangingPunct="1">
+      <a:defRPr sz="1800" kern="1200">
+        <a:solidFill>
+          <a:schemeClr val="tx1"/>
+        </a:solidFill>
+        <a:latin typeface="+mn-lt"/>
+        <a:ea typeface="+mn-ea"/>
+        <a:cs typeface="+mn-cs"/>
+      </a:defRPr>
+    </a:lvl6pPr>
+    <a:lvl7pPr marL="2743200" algn="l" defTabSz="914400" rtl="0" eaLnBrk="1" latinLnBrk="0" hangingPunct="1">
+      <a:defRPr sz="1800" kern="1200">
+        <a:solidFill>
+          <a:schemeClr val="tx1"/>
+        </a:solidFill>
+        <a:latin typeface="+mn-lt"/>
+        <a:ea typeface="+mn-ea"/>
+        <a:cs typeface="+mn-cs"/>
+      </a:defRPr>
+    </a:lvl7pPr>
+    <a:lvl8pPr marL="3200400" algn="l" defTabSz="914400" rtl="0" eaLnBrk="1" latinLnBrk="0" hangingPunct="1">
+      <a:defRPr sz="1800" kern="1200">
+        <a:solidFill>
+          <a:schemeClr val="tx1"/>
+        </a:solidFill>
+        <a:latin typeface="+mn-lt"/>
+        <a:ea typeface="+mn-ea"/>
+        <a:cs typeface="+mn-cs"/>
+      </a:defRPr>
+    </a:lvl8pPr>
+    <a:lvl9pPr marL="3657600" algn="l" defTabSz="914400" rtl="0" eaLnBrk="1" latinLnBrk="0" hangingPunct="1">
+      <a:defRPr sz="1800" kern="1200">
+        <a:solidFill>
+          <a:schemeClr val="tx1"/>
+        </a:solidFill>
+        <a:latin typeface="+mn-lt"/>
+        <a:ea typeface="+mn-ea"/>
+        <a:cs typeface="+mn-cs"/>
+      </a:defRPr>
+    </a:lvl9pPr>
+  </p:defaultTextStyle>
 </p:presentation>
 </file>
 
 <file path=ppt/notesMasters/notesMaster1.xml><?xml version="1.0" encoding="utf-8"?>
-<p:notesMaster xmlns:a="http://schemas.openxmlformats.org/drawingml/2006/main" xmlns:p="http://schemas.openxmlformats.org/presentationml/2006/main" xmlns:r="http://schemas.openxmlformats.org/officeDocument/2006/relationships" xmlns:p14="http://schemas.microsoft.com/office/powerpoint/2010/main" xmlns:p15="http://schemas.microsoft.com/office/powerpoint/2012/main" xmlns:mc="http://schemas.openxmlformats.org/markup-compatibility/2006">
+<p:notesMaster xmlns:a="http://schemas.openxmlformats.org/drawingml/2006/main" xmlns:r="http://schemas.openxmlformats.org/officeDocument/2006/relationships" xmlns:p="http://schemas.openxmlformats.org/presentationml/2006/main">
+  <p:cSld>
+    <p:bg>
+      <p:bgRef idx="1001">
+        <a:schemeClr val="bg1"/>
+      </p:bgRef>
+    </p:bg>
+    <p:spTree>
+      <p:nvGrpSpPr>
+        <p:cNvPr id="1" name=""/>
+        <p:cNvGrpSpPr/>
+        <p:nvPr/>
+      </p:nvGrpSpPr>
+      <p:grpSpPr>
+        <a:xfrm>
+          <a:off x="0" y="0"/>
+          <a:ext cx="0" cy="0"/>
+          <a:chOff x="0" y="0"/>
+          <a:chExt cx="0" cy="0"/>
+        </a:xfrm>
+      </p:grpSpPr>
+      <p:sp>
+        <p:nvSpPr>
+          <p:cNvPr id="8" name="PlaceHolder 1"/>
+          <p:cNvSpPr>
+            <a:spLocks noGrp="1" noRot="1" noChangeAspect="1"/>
+          </p:cNvSpPr>
+          <p:nvPr>
+            <p:ph type="sldImg"/>
+          </p:nvPr>
+        </p:nvSpPr>
+        <p:spPr>
+          <a:xfrm>
+            <a:off x="0" y="764280"/>
+            <a:ext cx="0" cy="0"/>
+          </a:xfrm>
+          <a:prstGeom prst="rect">
+            <a:avLst/>
+          </a:prstGeom>
+          <a:noFill/>
+          <a:ln w="0">
+            <a:noFill/>
+          </a:ln>
+        </p:spPr>
+        <p:txBody>
+          <a:bodyPr lIns="0" tIns="0" rIns="0" bIns="0" anchor="ctr">
+            <a:noAutofit/>
+          </a:bodyPr>
+          <a:lstStyle/>
+          <a:p>
+            <a:r>
+              <a:rPr lang="en-US" sz="1800" b="0" u="none" strike="noStrike">
+                <a:solidFill>
+                  <a:schemeClr val="dk1"/>
+                </a:solidFill>
+                <a:effectLst/>
+                <a:uFillTx/>
+                <a:latin typeface="Aptos"/>
+              </a:rPr>
+              <a:t>Click to move the slide</a:t>
+            </a:r>
+          </a:p>
+        </p:txBody>
+      </p:sp>
+      <p:sp>
+        <p:nvSpPr>
+          <p:cNvPr id="9" name="PlaceHolder 2"/>
+          <p:cNvSpPr>
+            <a:spLocks noGrp="1"/>
+          </p:cNvSpPr>
+          <p:nvPr>
+            <p:ph type="body"/>
+          </p:nvPr>
+        </p:nvSpPr>
+        <p:spPr>
+          <a:xfrm>
+            <a:off x="777240" y="4777560"/>
+            <a:ext cx="6217560" cy="4525920"/>
+          </a:xfrm>
+          <a:prstGeom prst="rect">
+            <a:avLst/>
+          </a:prstGeom>
+          <a:noFill/>
+          <a:ln w="0">
+            <a:noFill/>
+          </a:ln>
+        </p:spPr>
+        <p:txBody>
+          <a:bodyPr lIns="0" tIns="0" rIns="0" bIns="0" anchor="t">
+            <a:noAutofit/>
+          </a:bodyPr>
+          <a:lstStyle/>
+          <a:p>
+            <a:pPr indent="0" algn="l">
+              <a:buNone/>
+            </a:pPr>
+            <a:r>
+              <a:rPr lang="en-US" sz="2000" b="0" u="none" strike="noStrike">
+                <a:solidFill>
+                  <a:srgbClr val="000000"/>
+                </a:solidFill>
+                <a:effectLst/>
+                <a:uFillTx/>
+                <a:latin typeface="Arial"/>
+              </a:rPr>
+              <a:t>Click to edit the notes format</a:t>
+            </a:r>
+          </a:p>
+        </p:txBody>
+      </p:sp>
+      <p:sp>
+        <p:nvSpPr>
+          <p:cNvPr id="10" name="PlaceHolder 3"/>
+          <p:cNvSpPr>
+            <a:spLocks noGrp="1"/>
+          </p:cNvSpPr>
+          <p:nvPr>
+            <p:ph type="hdr"/>
+          </p:nvPr>
+        </p:nvSpPr>
+        <p:spPr>
+          <a:xfrm>
+            <a:off x="0" y="0"/>
+            <a:ext cx="3372840" cy="502560"/>
+          </a:xfrm>
+          <a:prstGeom prst="rect">
+            <a:avLst/>
+          </a:prstGeom>
+          <a:noFill/>
+          <a:ln w="0">
+            <a:noFill/>
+          </a:ln>
+        </p:spPr>
+        <p:txBody>
+          <a:bodyPr lIns="0" tIns="0" rIns="0" bIns="0" anchor="t">
+            <a:noAutofit/>
+          </a:bodyPr>
+          <a:lstStyle/>
+          <a:p>
+            <a:pPr indent="0" algn="l">
+              <a:buNone/>
+            </a:pPr>
+            <a:r>
+              <a:rPr lang="en-US" sz="1400" b="0" u="none" strike="noStrike">
+                <a:solidFill>
+                  <a:srgbClr val="000000"/>
+                </a:solidFill>
+                <a:effectLst/>
+                <a:uFillTx/>
+                <a:latin typeface="Times New Roman"/>
+              </a:rPr>
+              <a:t>&lt;header&gt;</a:t>
+            </a:r>
+          </a:p>
+        </p:txBody>
+      </p:sp>
+      <p:sp>
+        <p:nvSpPr>
+          <p:cNvPr id="11" name="PlaceHolder 4"/>
+          <p:cNvSpPr>
+            <a:spLocks noGrp="1"/>
+          </p:cNvSpPr>
+          <p:nvPr>
+            <p:ph type="dt" idx="2"/>
+          </p:nvPr>
+        </p:nvSpPr>
+        <p:spPr>
+          <a:xfrm>
+            <a:off x="4399200" y="0"/>
+            <a:ext cx="3372840" cy="502560"/>
+          </a:xfrm>
+          <a:prstGeom prst="rect">
+            <a:avLst/>
+          </a:prstGeom>
+          <a:noFill/>
+          <a:ln w="0">
+            <a:noFill/>
+          </a:ln>
+        </p:spPr>
+        <p:txBody>
+          <a:bodyPr lIns="0" tIns="0" rIns="0" bIns="0" anchor="t">
+            <a:noAutofit/>
+          </a:bodyPr>
+          <a:lstStyle>
+            <a:lvl1pPr indent="0" algn="r">
+              <a:buNone/>
+              <a:defRPr lang="en-US" sz="1400" b="0" u="none" strike="noStrike">
+                <a:solidFill>
+                  <a:srgbClr val="000000"/>
+                </a:solidFill>
+                <a:effectLst/>
+                <a:uFillTx/>
+                <a:latin typeface="Times New Roman"/>
+              </a:defRPr>
+            </a:lvl1pPr>
+          </a:lstStyle>
+          <a:p>
+            <a:pPr indent="0" algn="r">
+              <a:buNone/>
+            </a:pPr>
+            <a:r>
+              <a:rPr lang="en-US" sz="1400" b="0" u="none" strike="noStrike">
+                <a:solidFill>
+                  <a:srgbClr val="000000"/>
+                </a:solidFill>
+                <a:effectLst/>
+                <a:uFillTx/>
+                <a:latin typeface="Times New Roman"/>
+              </a:rPr>
+              <a:t>&lt;date/time&gt;</a:t>
+            </a:r>
+          </a:p>
+        </p:txBody>
+      </p:sp>
+      <p:sp>
+        <p:nvSpPr>
+          <p:cNvPr id="12" name="PlaceHolder 5"/>
+          <p:cNvSpPr>
+            <a:spLocks noGrp="1"/>
+          </p:cNvSpPr>
+          <p:nvPr>
+            <p:ph type="ftr" idx="3"/>
+          </p:nvPr>
+        </p:nvSpPr>
+        <p:spPr>
+          <a:xfrm>
+            <a:off x="0" y="9555480"/>
+            <a:ext cx="3372840" cy="502560"/>
+          </a:xfrm>
+          <a:prstGeom prst="rect">
+            <a:avLst/>
+          </a:prstGeom>
+          <a:noFill/>
+          <a:ln w="0">
+            <a:noFill/>
+          </a:ln>
+        </p:spPr>
+        <p:txBody>
+          <a:bodyPr lIns="0" tIns="0" rIns="0" bIns="0" anchor="b">
+            <a:noAutofit/>
+          </a:bodyPr>
+          <a:lstStyle>
+            <a:lvl1pPr indent="0" algn="l">
+              <a:buNone/>
+              <a:defRPr lang="en-US" sz="1400" b="0" u="none" strike="noStrike">
+                <a:solidFill>
+                  <a:srgbClr val="000000"/>
+                </a:solidFill>
+                <a:effectLst/>
+                <a:uFillTx/>
+                <a:latin typeface="Times New Roman"/>
+              </a:defRPr>
+            </a:lvl1pPr>
+          </a:lstStyle>
+          <a:p>
+            <a:pPr indent="0" algn="l">
+              <a:buNone/>
+            </a:pPr>
+            <a:r>
+              <a:rPr lang="en-US" sz="1400" b="0" u="none" strike="noStrike">
+                <a:solidFill>
+                  <a:srgbClr val="000000"/>
+                </a:solidFill>
+                <a:effectLst/>
+                <a:uFillTx/>
+                <a:latin typeface="Times New Roman"/>
+              </a:rPr>
+              <a:t>&lt;footer&gt;</a:t>
+            </a:r>
+          </a:p>
+        </p:txBody>
+      </p:sp>
+      <p:sp>
+        <p:nvSpPr>
+          <p:cNvPr id="13" name="PlaceHolder 6"/>
+          <p:cNvSpPr>
+            <a:spLocks noGrp="1"/>
+          </p:cNvSpPr>
+          <p:nvPr>
+            <p:ph type="sldNum" idx="4"/>
+          </p:nvPr>
+        </p:nvSpPr>
+        <p:spPr>
+          <a:xfrm>
+            <a:off x="4399200" y="9555480"/>
+            <a:ext cx="3372840" cy="502560"/>
+          </a:xfrm>
+          <a:prstGeom prst="rect">
+            <a:avLst/>
+          </a:prstGeom>
+          <a:noFill/>
+          <a:ln w="0">
+            <a:noFill/>
+          </a:ln>
+        </p:spPr>
+        <p:txBody>
+          <a:bodyPr lIns="0" tIns="0" rIns="0" bIns="0" anchor="b">
+            <a:noAutofit/>
+          </a:bodyPr>
+          <a:lstStyle>
+            <a:lvl1pPr indent="0" algn="r">
+              <a:buNone/>
+              <a:defRPr lang="en-US" sz="1400" b="0" u="none" strike="noStrike">
+                <a:solidFill>
+                  <a:srgbClr val="000000"/>
+                </a:solidFill>
+                <a:effectLst/>
+                <a:uFillTx/>
+                <a:latin typeface="Times New Roman"/>
+              </a:defRPr>
+            </a:lvl1pPr>
+          </a:lstStyle>
+          <a:p>
+            <a:pPr indent="0" algn="r">
+              <a:buNone/>
+            </a:pPr>
+            <a:fld id="{603F1CCA-C452-4371-A9DD-04DC4C66A3B2}" type="slidenum">
+              <a:rPr lang="en-US" sz="1400" b="0" u="none" strike="noStrike">
+                <a:solidFill>
+                  <a:srgbClr val="000000"/>
+                </a:solidFill>
+                <a:effectLst/>
+                <a:uFillTx/>
+                <a:latin typeface="Times New Roman"/>
+              </a:rPr>
+              <a:t>‹#›</a:t>
+            </a:fld>
+            <a:endParaRPr lang="en-US" sz="1400" b="0" u="none" strike="noStrike">
+              <a:solidFill>
+                <a:srgbClr val="000000"/>
+              </a:solidFill>
+              <a:effectLst/>
+              <a:uFillTx/>
+              <a:latin typeface="Times New Roman"/>
+            </a:endParaRPr>
+          </a:p>
+        </p:txBody>
+      </p:sp>
+    </p:spTree>
+  </p:cSld>
+  <p:clrMap bg1="lt1" tx1="dk1" bg2="lt2" tx2="dk2" accent1="accent1" accent2="accent2" accent3="accent3" accent4="accent4" accent5="accent5" accent6="accent6" hlink="hlink" folHlink="folHlink"/>
+  <p:notesStyle>
+    <a:lvl1pPr marL="0" algn="l" defTabSz="914400" rtl="0" eaLnBrk="1" latinLnBrk="0" hangingPunct="1">
+      <a:defRPr sz="1200" kern="1200">
+        <a:solidFill>
+          <a:schemeClr val="tx1"/>
+        </a:solidFill>
+        <a:latin typeface="+mn-lt"/>
+        <a:ea typeface="+mn-ea"/>
+        <a:cs typeface="+mn-cs"/>
+      </a:defRPr>
+    </a:lvl1pPr>
+    <a:lvl2pPr marL="457200" algn="l" defTabSz="914400" rtl="0" eaLnBrk="1" latinLnBrk="0" hangingPunct="1">
+      <a:defRPr sz="1200" kern="1200">
+        <a:solidFill>
+          <a:schemeClr val="tx1"/>
+        </a:solidFill>
+        <a:latin typeface="+mn-lt"/>
+        <a:ea typeface="+mn-ea"/>
+        <a:cs typeface="+mn-cs"/>
+      </a:defRPr>
+    </a:lvl2pPr>
+    <a:lvl3pPr marL="914400" algn="l" defTabSz="914400" rtl="0" eaLnBrk="1" latinLnBrk="0" hangingPunct="1">
+      <a:defRPr sz="1200" kern="1200">
+        <a:solidFill>
+          <a:schemeClr val="tx1"/>
+        </a:solidFill>
+        <a:latin typeface="+mn-lt"/>
+        <a:ea typeface="+mn-ea"/>
+        <a:cs typeface="+mn-cs"/>
+      </a:defRPr>
+    </a:lvl3pPr>
+    <a:lvl4pPr marL="1371600" algn="l" defTabSz="914400" rtl="0" eaLnBrk="1" latinLnBrk="0" hangingPunct="1">
+      <a:defRPr sz="1200" kern="1200">
+        <a:solidFill>
+          <a:schemeClr val="tx1"/>
+        </a:solidFill>
+        <a:latin typeface="+mn-lt"/>
+        <a:ea typeface="+mn-ea"/>
+        <a:cs typeface="+mn-cs"/>
+      </a:defRPr>
+    </a:lvl4pPr>
+    <a:lvl5pPr marL="1828800" algn="l" defTabSz="914400" rtl="0" eaLnBrk="1" latinLnBrk="0" hangingPunct="1">
+      <a:defRPr sz="1200" kern="1200">
+        <a:solidFill>
+          <a:schemeClr val="tx1"/>
+        </a:solidFill>
+        <a:latin typeface="+mn-lt"/>
+        <a:ea typeface="+mn-ea"/>
+        <a:cs typeface="+mn-cs"/>
+      </a:defRPr>
+    </a:lvl5pPr>
+    <a:lvl6pPr marL="2286000" algn="l" defTabSz="914400" rtl="0" eaLnBrk="1" latinLnBrk="0" hangingPunct="1">
+      <a:defRPr sz="1200" kern="1200">
+        <a:solidFill>
+          <a:schemeClr val="tx1"/>
+        </a:solidFill>
+        <a:latin typeface="+mn-lt"/>
+        <a:ea typeface="+mn-ea"/>
+        <a:cs typeface="+mn-cs"/>
+      </a:defRPr>
+    </a:lvl6pPr>
+    <a:lvl7pPr marL="2743200" algn="l" defTabSz="914400" rtl="0" eaLnBrk="1" latinLnBrk="0" hangingPunct="1">
+      <a:defRPr sz="1200" kern="1200">
+        <a:solidFill>
+          <a:schemeClr val="tx1"/>
+        </a:solidFill>
+        <a:latin typeface="+mn-lt"/>
+        <a:ea typeface="+mn-ea"/>
+        <a:cs typeface="+mn-cs"/>
+      </a:defRPr>
+    </a:lvl7pPr>
+    <a:lvl8pPr marL="3200400" algn="l" defTabSz="914400" rtl="0" eaLnBrk="1" latinLnBrk="0" hangingPunct="1">
+      <a:defRPr sz="1200" kern="1200">
+        <a:solidFill>
+          <a:schemeClr val="tx1"/>
+        </a:solidFill>
+        <a:latin typeface="+mn-lt"/>
+        <a:ea typeface="+mn-ea"/>
+        <a:cs typeface="+mn-cs"/>
+      </a:defRPr>
+    </a:lvl8pPr>
+    <a:lvl9pPr marL="3657600" algn="l" defTabSz="914400" rtl="0" eaLnBrk="1" latinLnBrk="0" hangingPunct="1">
+      <a:defRPr sz="1200" kern="1200">
+        <a:solidFill>
+          <a:schemeClr val="tx1"/>
+        </a:solidFill>
+        <a:latin typeface="+mn-lt"/>
+        <a:ea typeface="+mn-ea"/>
+        <a:cs typeface="+mn-cs"/>
+      </a:defRPr>
+    </a:lvl9pPr>
+  </p:notesStyle>
+</p:notesMaster>
+</file>
+
+<file path=ppt/notesSlides/notesSlide1.xml><?xml version="1.0" encoding="utf-8"?>
+<p:notes xmlns:a="http://schemas.openxmlformats.org/drawingml/2006/main" xmlns:r="http://schemas.openxmlformats.org/officeDocument/2006/relationships" xmlns:p="http://schemas.openxmlformats.org/presentationml/2006/main">
   <p:cSld>
     <p:spTree>
       <p:nvGrpSpPr>
@@ -38,9 +571,9 @@
       </p:grpSpPr>
       <p:sp>
         <p:nvSpPr>
-          <p:cNvPr id="8" name="PlaceHolder 1"/>
+          <p:cNvPr id="117" name="PlaceHolder 1"/>
           <p:cNvSpPr>
-            <a:spLocks noGrp="1"/>
+            <a:spLocks noGrp="1" noRot="1" noChangeAspect="1"/>
           </p:cNvSpPr>
           <p:nvPr>
             <p:ph type="sldImg"/>
@@ -48,47 +581,20 @@
         </p:nvSpPr>
         <p:spPr>
           <a:xfrm>
-            <a:off x="0" y="764280"/>
-            <a:ext cx="0" cy="0"/>
-          </a:xfrm>
-          <a:prstGeom prst="rect">
-            <a:avLst/>
-          </a:prstGeom>
-          <a:noFill/>
+            <a:off x="685800" y="1143000"/>
+            <a:ext cx="5486400" cy="3086100"/>
+          </a:xfrm>
+          <a:prstGeom prst="rect">
+            <a:avLst/>
+          </a:prstGeom>
           <a:ln w="0">
             <a:noFill/>
           </a:ln>
         </p:spPr>
-        <p:txBody>
-          <a:bodyPr lIns="0" tIns="0" rIns="0" bIns="0" anchor="ctr">
-            <a:noAutofit/>
-          </a:bodyPr>
-          <a:p>
-            <a:r>
-              <a:rPr lang="en-US" sz="1800" b="0" u="none" strike="noStrike">
-                <a:solidFill>
-                  <a:schemeClr val="dk1"/>
-                </a:solidFill>
-                <a:effectLst/>
-                <a:uFillTx/>
-                <a:latin typeface="Aptos"/>
-              </a:rPr>
-              <a:t>Click to move the slide</a:t>
-            </a:r>
-            <a:endParaRPr lang="en-US" sz="1800" b="0" u="none" strike="noStrike">
-              <a:solidFill>
-                <a:schemeClr val="dk1"/>
-              </a:solidFill>
-              <a:effectLst/>
-              <a:uFillTx/>
-              <a:latin typeface="Aptos"/>
-            </a:endParaRPr>
-          </a:p>
-        </p:txBody>
-      </p:sp>
-      <p:sp>
-        <p:nvSpPr>
-          <p:cNvPr id="9" name="PlaceHolder 2"/>
+      </p:sp>
+      <p:sp>
+        <p:nvSpPr>
+          <p:cNvPr id="118" name="PlaceHolder 2"/>
           <p:cNvSpPr>
             <a:spLocks noGrp="1"/>
           </p:cNvSpPr>
@@ -98,8 +604,8 @@
         </p:nvSpPr>
         <p:spPr>
           <a:xfrm>
-            <a:off x="777240" y="4777560"/>
-            <a:ext cx="6217560" cy="4525920"/>
+            <a:off x="685800" y="4400640"/>
+            <a:ext cx="5485680" cy="3599640"/>
           </a:xfrm>
           <a:prstGeom prst="rect">
             <a:avLst/>
@@ -110,49 +616,39 @@
           </a:ln>
         </p:spPr>
         <p:txBody>
-          <a:bodyPr lIns="0" tIns="0" rIns="0" bIns="0" anchor="t">
-            <a:noAutofit/>
-          </a:bodyPr>
+          <a:bodyPr lIns="91440" tIns="45720" rIns="91440" bIns="45720" anchor="t">
+            <a:noAutofit/>
+          </a:bodyPr>
+          <a:lstStyle/>
           <a:p>
             <a:pPr indent="0" algn="l">
               <a:buNone/>
             </a:pPr>
-            <a:r>
-              <a:rPr lang="en-US" sz="2000" b="0" u="none" strike="noStrike">
-                <a:solidFill>
-                  <a:srgbClr val="000000"/>
-                </a:solidFill>
-                <a:effectLst/>
-                <a:uFillTx/>
-                <a:latin typeface="Arial"/>
-              </a:rPr>
-              <a:t>Click to edit the notes format</a:t>
-            </a:r>
-            <a:endParaRPr lang="en-US" sz="2000" b="0" u="none" strike="noStrike">
-              <a:solidFill>
-                <a:srgbClr val="000000"/>
-              </a:solidFill>
-              <a:effectLst/>
-              <a:uFillTx/>
-              <a:latin typeface="Arial"/>
-            </a:endParaRPr>
-          </a:p>
-        </p:txBody>
-      </p:sp>
-      <p:sp>
-        <p:nvSpPr>
-          <p:cNvPr id="10" name="PlaceHolder 3"/>
+            <a:endParaRPr lang="en-US" sz="1800" b="0" u="none" strike="noStrike">
+              <a:solidFill>
+                <a:srgbClr val="000000"/>
+              </a:solidFill>
+              <a:effectLst/>
+              <a:uFillTx/>
+              <a:latin typeface="Arial"/>
+            </a:endParaRPr>
+          </a:p>
+        </p:txBody>
+      </p:sp>
+      <p:sp>
+        <p:nvSpPr>
+          <p:cNvPr id="119" name="PlaceHolder 3"/>
           <p:cNvSpPr>
             <a:spLocks noGrp="1"/>
           </p:cNvSpPr>
           <p:nvPr>
-            <p:ph type="hdr"/>
+            <p:ph type="sldNum" idx="10"/>
           </p:nvPr>
         </p:nvSpPr>
         <p:spPr>
           <a:xfrm>
-            <a:off x="0" y="0"/>
-            <a:ext cx="3372840" cy="502560"/>
+            <a:off x="3884760" y="8685360"/>
+            <a:ext cx="2971080" cy="457920"/>
           </a:xfrm>
           <a:prstGeom prst="rect">
             <a:avLst/>
@@ -163,223 +659,52 @@
           </a:ln>
         </p:spPr>
         <p:txBody>
-          <a:bodyPr lIns="0" tIns="0" rIns="0" bIns="0" anchor="t">
-            <a:noAutofit/>
-          </a:bodyPr>
-          <a:p>
-            <a:pPr indent="0" algn="l">
+          <a:bodyPr lIns="91440" tIns="45720" rIns="91440" bIns="45720" anchor="b">
+            <a:noAutofit/>
+          </a:bodyPr>
+          <a:lstStyle>
+            <a:lvl1pPr indent="0" algn="r" defTabSz="914400">
+              <a:lnSpc>
+                <a:spcPct val="100000"/>
+              </a:lnSpc>
               <a:buNone/>
-            </a:pPr>
-            <a:r>
-              <a:rPr lang="en-US" sz="1400" b="0" u="none" strike="noStrike">
-                <a:solidFill>
-                  <a:srgbClr val="000000"/>
-                </a:solidFill>
-                <a:effectLst/>
-                <a:uFillTx/>
-                <a:latin typeface="Times New Roman"/>
-              </a:rPr>
-              <a:t>&lt;header&gt;</a:t>
-            </a:r>
-            <a:endParaRPr lang="en-US" sz="1400" b="0" u="none" strike="noStrike">
-              <a:solidFill>
-                <a:srgbClr val="000000"/>
-              </a:solidFill>
-              <a:effectLst/>
-              <a:uFillTx/>
-              <a:latin typeface="Times New Roman"/>
-            </a:endParaRPr>
-          </a:p>
-        </p:txBody>
-      </p:sp>
-      <p:sp>
-        <p:nvSpPr>
-          <p:cNvPr id="11" name="PlaceHolder 4"/>
-          <p:cNvSpPr>
-            <a:spLocks noGrp="1"/>
-          </p:cNvSpPr>
-          <p:nvPr>
-            <p:ph type="dt" idx="2"/>
-          </p:nvPr>
-        </p:nvSpPr>
-        <p:spPr>
-          <a:xfrm>
-            <a:off x="4399200" y="0"/>
-            <a:ext cx="3372840" cy="502560"/>
-          </a:xfrm>
-          <a:prstGeom prst="rect">
-            <a:avLst/>
-          </a:prstGeom>
-          <a:noFill/>
-          <a:ln w="0">
-            <a:noFill/>
-          </a:ln>
-        </p:spPr>
-        <p:txBody>
-          <a:bodyPr lIns="0" tIns="0" rIns="0" bIns="0" anchor="t">
-            <a:noAutofit/>
-          </a:bodyPr>
-          <a:lstStyle>
-            <a:lvl1pPr indent="0" algn="r">
-              <a:buNone/>
-              <a:defRPr lang="en-US" sz="1400" b="0" u="none" strike="noStrike">
-                <a:solidFill>
-                  <a:srgbClr val="000000"/>
-                </a:solidFill>
-                <a:effectLst/>
-                <a:uFillTx/>
-                <a:latin typeface="Times New Roman"/>
+              <a:tabLst>
+                <a:tab pos="0" algn="l"/>
+              </a:tabLst>
+              <a:defRPr lang="en-US" sz="1200" b="0" u="none" strike="noStrike">
+                <a:solidFill>
+                  <a:schemeClr val="dk1"/>
+                </a:solidFill>
+                <a:effectLst/>
+                <a:uFillTx/>
+                <a:latin typeface="+mn-lt"/>
+                <a:ea typeface="+mn-ea"/>
               </a:defRPr>
             </a:lvl1pPr>
           </a:lstStyle>
           <a:p>
-            <a:pPr indent="0" algn="r">
+            <a:pPr indent="0" algn="r" defTabSz="914400">
+              <a:lnSpc>
+                <a:spcPct val="100000"/>
+              </a:lnSpc>
               <a:buNone/>
-            </a:pPr>
-            <a:r>
-              <a:rPr lang="en-US" sz="1400" b="0" u="none" strike="noStrike">
-                <a:solidFill>
-                  <a:srgbClr val="000000"/>
-                </a:solidFill>
-                <a:effectLst/>
-                <a:uFillTx/>
-                <a:latin typeface="Times New Roman"/>
-              </a:rPr>
-              <a:t>&lt;date/time&gt;</a:t>
-            </a:r>
-            <a:endParaRPr lang="en-US" sz="1400" b="0" u="none" strike="noStrike">
-              <a:solidFill>
-                <a:srgbClr val="000000"/>
-              </a:solidFill>
-              <a:effectLst/>
-              <a:uFillTx/>
-              <a:latin typeface="Times New Roman"/>
-            </a:endParaRPr>
-          </a:p>
-        </p:txBody>
-      </p:sp>
-      <p:sp>
-        <p:nvSpPr>
-          <p:cNvPr id="12" name="PlaceHolder 5"/>
-          <p:cNvSpPr>
-            <a:spLocks noGrp="1"/>
-          </p:cNvSpPr>
-          <p:nvPr>
-            <p:ph type="ftr" idx="3"/>
-          </p:nvPr>
-        </p:nvSpPr>
-        <p:spPr>
-          <a:xfrm>
-            <a:off x="0" y="9555480"/>
-            <a:ext cx="3372840" cy="502560"/>
-          </a:xfrm>
-          <a:prstGeom prst="rect">
-            <a:avLst/>
-          </a:prstGeom>
-          <a:noFill/>
-          <a:ln w="0">
-            <a:noFill/>
-          </a:ln>
-        </p:spPr>
-        <p:txBody>
-          <a:bodyPr lIns="0" tIns="0" rIns="0" bIns="0" anchor="b">
-            <a:noAutofit/>
-          </a:bodyPr>
-          <a:lstStyle>
-            <a:lvl1pPr indent="0" algn="l">
-              <a:buNone/>
-              <a:defRPr lang="en-US" sz="1400" b="0" u="none" strike="noStrike">
-                <a:solidFill>
-                  <a:srgbClr val="000000"/>
-                </a:solidFill>
-                <a:effectLst/>
-                <a:uFillTx/>
-                <a:latin typeface="Times New Roman"/>
-              </a:defRPr>
-            </a:lvl1pPr>
-          </a:lstStyle>
-          <a:p>
-            <a:pPr indent="0" algn="l">
-              <a:buNone/>
-            </a:pPr>
-            <a:r>
-              <a:rPr lang="en-US" sz="1400" b="0" u="none" strike="noStrike">
-                <a:solidFill>
-                  <a:srgbClr val="000000"/>
-                </a:solidFill>
-                <a:effectLst/>
-                <a:uFillTx/>
-                <a:latin typeface="Times New Roman"/>
-              </a:rPr>
-              <a:t>&lt;footer&gt;</a:t>
-            </a:r>
-            <a:endParaRPr lang="en-US" sz="1400" b="0" u="none" strike="noStrike">
-              <a:solidFill>
-                <a:srgbClr val="000000"/>
-              </a:solidFill>
-              <a:effectLst/>
-              <a:uFillTx/>
-              <a:latin typeface="Times New Roman"/>
-            </a:endParaRPr>
-          </a:p>
-        </p:txBody>
-      </p:sp>
-      <p:sp>
-        <p:nvSpPr>
-          <p:cNvPr id="13" name="PlaceHolder 6"/>
-          <p:cNvSpPr>
-            <a:spLocks noGrp="1"/>
-          </p:cNvSpPr>
-          <p:nvPr>
-            <p:ph type="sldNum" idx="4"/>
-          </p:nvPr>
-        </p:nvSpPr>
-        <p:spPr>
-          <a:xfrm>
-            <a:off x="4399200" y="9555480"/>
-            <a:ext cx="3372840" cy="502560"/>
-          </a:xfrm>
-          <a:prstGeom prst="rect">
-            <a:avLst/>
-          </a:prstGeom>
-          <a:noFill/>
-          <a:ln w="0">
-            <a:noFill/>
-          </a:ln>
-        </p:spPr>
-        <p:txBody>
-          <a:bodyPr lIns="0" tIns="0" rIns="0" bIns="0" anchor="b">
-            <a:noAutofit/>
-          </a:bodyPr>
-          <a:lstStyle>
-            <a:lvl1pPr indent="0" algn="r">
-              <a:buNone/>
-              <a:defRPr lang="en-US" sz="1400" b="0" u="none" strike="noStrike">
-                <a:solidFill>
-                  <a:srgbClr val="000000"/>
-                </a:solidFill>
-                <a:effectLst/>
-                <a:uFillTx/>
-                <a:latin typeface="Times New Roman"/>
-              </a:defRPr>
-            </a:lvl1pPr>
-          </a:lstStyle>
-          <a:p>
-            <a:pPr indent="0" algn="r">
-              <a:buNone/>
-            </a:pPr>
-            <a:fld id="{603F1CCA-C452-4371-A9DD-04DC4C66A3B2}" type="slidenum">
-              <a:rPr lang="en-US" sz="1400" b="0" u="none" strike="noStrike">
-                <a:solidFill>
-                  <a:srgbClr val="000000"/>
-                </a:solidFill>
-                <a:effectLst/>
-                <a:uFillTx/>
-                <a:latin typeface="Times New Roman"/>
-              </a:rPr>
-              <a:t>&lt;number&gt;</a:t>
+              <a:tabLst>
+                <a:tab pos="0" algn="l"/>
+              </a:tabLst>
+            </a:pPr>
+            <a:fld id="{B7287DB5-89CF-4E46-9F08-1955891A5CC0}" type="slidenum">
+              <a:rPr lang="en-US" sz="1200" b="0" u="none" strike="noStrike">
+                <a:solidFill>
+                  <a:schemeClr val="dk1"/>
+                </a:solidFill>
+                <a:effectLst/>
+                <a:uFillTx/>
+                <a:latin typeface="+mn-lt"/>
+                <a:ea typeface="+mn-ea"/>
+              </a:rPr>
+              <a:t>2</a:t>
             </a:fld>
-            <a:endParaRPr lang="en-US" sz="1400" b="0" u="none" strike="noStrike">
+            <a:endParaRPr lang="en-US" sz="1200" b="0" u="none" strike="noStrike">
               <a:solidFill>
                 <a:srgbClr val="000000"/>
               </a:solidFill>
@@ -392,12 +717,14 @@
       </p:sp>
     </p:spTree>
   </p:cSld>
-  <p:clrMap bg1="lt1" bg2="lt2" tx1="dk1" tx2="dk2" accent1="accent1" accent2="accent2" accent3="accent3" accent4="accent4" accent5="accent5" accent6="accent6" hlink="hlink" folHlink="folHlink"/>
-</p:notesMaster>
+  <p:clrMapOvr>
+    <a:masterClrMapping/>
+  </p:clrMapOvr>
+</p:notes>
 </file>
 
-<file path=ppt/notesSlides/notesSlide1.xml><?xml version="1.0" encoding="utf-8"?>
-<p:notes xmlns:a="http://schemas.openxmlformats.org/drawingml/2006/main" xmlns:p="http://schemas.openxmlformats.org/presentationml/2006/main" xmlns:r="http://schemas.openxmlformats.org/officeDocument/2006/relationships" xmlns:p14="http://schemas.microsoft.com/office/powerpoint/2010/main" xmlns:p15="http://schemas.microsoft.com/office/powerpoint/2012/main" xmlns:mc="http://schemas.openxmlformats.org/markup-compatibility/2006">
+<file path=ppt/notesSlides/notesSlide2.xml><?xml version="1.0" encoding="utf-8"?>
+<p:notes xmlns:a="http://schemas.openxmlformats.org/drawingml/2006/main" xmlns:r="http://schemas.openxmlformats.org/officeDocument/2006/relationships" xmlns:p="http://schemas.openxmlformats.org/presentationml/2006/main">
   <p:cSld>
     <p:spTree>
       <p:nvGrpSpPr>
@@ -415,9 +742,9 @@
       </p:grpSpPr>
       <p:sp>
         <p:nvSpPr>
-          <p:cNvPr id="117" name="PlaceHolder 1"/>
+          <p:cNvPr id="120" name="PlaceHolder 1"/>
           <p:cNvSpPr>
-            <a:spLocks noGrp="1"/>
+            <a:spLocks noGrp="1" noRot="1" noChangeAspect="1"/>
           </p:cNvSpPr>
           <p:nvPr>
             <p:ph type="sldImg"/>
@@ -426,7 +753,7 @@
         <p:spPr>
           <a:xfrm>
             <a:off x="685800" y="1143000"/>
-            <a:ext cx="5485680" cy="3085560"/>
+            <a:ext cx="5486400" cy="3086100"/>
           </a:xfrm>
           <a:prstGeom prst="rect">
             <a:avLst/>
@@ -438,7 +765,7 @@
       </p:sp>
       <p:sp>
         <p:nvSpPr>
-          <p:cNvPr id="118" name="PlaceHolder 2"/>
+          <p:cNvPr id="121" name="PlaceHolder 2"/>
           <p:cNvSpPr>
             <a:spLocks noGrp="1"/>
           </p:cNvSpPr>
@@ -463,6 +790,7 @@
           <a:bodyPr lIns="91440" tIns="45720" rIns="91440" bIns="45720" anchor="t">
             <a:noAutofit/>
           </a:bodyPr>
+          <a:lstStyle/>
           <a:p>
             <a:pPr indent="0" algn="l">
               <a:buNone/>
@@ -480,12 +808,12 @@
       </p:sp>
       <p:sp>
         <p:nvSpPr>
-          <p:cNvPr id="119" name="PlaceHolder 3"/>
+          <p:cNvPr id="122" name="PlaceHolder 3"/>
           <p:cNvSpPr>
             <a:spLocks noGrp="1"/>
           </p:cNvSpPr>
           <p:nvPr>
-            <p:ph type="sldNum" idx="10"/>
+            <p:ph type="sldNum" idx="11"/>
           </p:nvPr>
         </p:nvSpPr>
         <p:spPr>
@@ -535,7 +863,7 @@
                 <a:tab pos="0" algn="l"/>
               </a:tabLst>
             </a:pPr>
-            <a:fld id="{B7287DB5-89CF-4E46-9F08-1955891A5CC0}" type="slidenum">
+            <a:fld id="{CC69E251-1572-423F-9433-1BAD2002B627}" type="slidenum">
               <a:rPr lang="en-US" sz="1200" b="0" u="none" strike="noStrike">
                 <a:solidFill>
                   <a:schemeClr val="dk1"/>
@@ -545,7 +873,7 @@
                 <a:latin typeface="+mn-lt"/>
                 <a:ea typeface="+mn-ea"/>
               </a:rPr>
-              <a:t>5</a:t>
+              <a:t>3</a:t>
             </a:fld>
             <a:endParaRPr lang="en-US" sz="1200" b="0" u="none" strike="noStrike">
               <a:solidFill>
@@ -560,11 +888,14 @@
       </p:sp>
     </p:spTree>
   </p:cSld>
+  <p:clrMapOvr>
+    <a:masterClrMapping/>
+  </p:clrMapOvr>
 </p:notes>
 </file>
 
-<file path=ppt/notesSlides/notesSlide2.xml><?xml version="1.0" encoding="utf-8"?>
-<p:notes xmlns:a="http://schemas.openxmlformats.org/drawingml/2006/main" xmlns:p="http://schemas.openxmlformats.org/presentationml/2006/main" xmlns:r="http://schemas.openxmlformats.org/officeDocument/2006/relationships" xmlns:p14="http://schemas.microsoft.com/office/powerpoint/2010/main" xmlns:p15="http://schemas.microsoft.com/office/powerpoint/2012/main" xmlns:mc="http://schemas.openxmlformats.org/markup-compatibility/2006">
+<file path=ppt/notesSlides/notesSlide3.xml><?xml version="1.0" encoding="utf-8"?>
+<p:notes xmlns:a="http://schemas.openxmlformats.org/drawingml/2006/main" xmlns:r="http://schemas.openxmlformats.org/officeDocument/2006/relationships" xmlns:p="http://schemas.openxmlformats.org/presentationml/2006/main">
   <p:cSld>
     <p:spTree>
       <p:nvGrpSpPr>
@@ -582,9 +913,9 @@
       </p:grpSpPr>
       <p:sp>
         <p:nvSpPr>
-          <p:cNvPr id="120" name="PlaceHolder 1"/>
+          <p:cNvPr id="123" name="PlaceHolder 1"/>
           <p:cNvSpPr>
-            <a:spLocks noGrp="1"/>
+            <a:spLocks noGrp="1" noRot="1" noChangeAspect="1"/>
           </p:cNvSpPr>
           <p:nvPr>
             <p:ph type="sldImg"/>
@@ -593,7 +924,7 @@
         <p:spPr>
           <a:xfrm>
             <a:off x="685800" y="1143000"/>
-            <a:ext cx="5485680" cy="3085560"/>
+            <a:ext cx="5486400" cy="3086100"/>
           </a:xfrm>
           <a:prstGeom prst="rect">
             <a:avLst/>
@@ -605,7 +936,7 @@
       </p:sp>
       <p:sp>
         <p:nvSpPr>
-          <p:cNvPr id="121" name="PlaceHolder 2"/>
+          <p:cNvPr id="124" name="PlaceHolder 2"/>
           <p:cNvSpPr>
             <a:spLocks noGrp="1"/>
           </p:cNvSpPr>
@@ -630,6 +961,7 @@
           <a:bodyPr lIns="91440" tIns="45720" rIns="91440" bIns="45720" anchor="t">
             <a:noAutofit/>
           </a:bodyPr>
+          <a:lstStyle/>
           <a:p>
             <a:pPr indent="0" algn="l">
               <a:buNone/>
@@ -647,12 +979,12 @@
       </p:sp>
       <p:sp>
         <p:nvSpPr>
-          <p:cNvPr id="122" name="PlaceHolder 3"/>
+          <p:cNvPr id="125" name="PlaceHolder 3"/>
           <p:cNvSpPr>
             <a:spLocks noGrp="1"/>
           </p:cNvSpPr>
           <p:nvPr>
-            <p:ph type="sldNum" idx="11"/>
+            <p:ph type="sldNum" idx="12"/>
           </p:nvPr>
         </p:nvSpPr>
         <p:spPr>
@@ -702,7 +1034,7 @@
                 <a:tab pos="0" algn="l"/>
               </a:tabLst>
             </a:pPr>
-            <a:fld id="{CC69E251-1572-423F-9433-1BAD2002B627}" type="slidenum">
+            <a:fld id="{CCA2D217-C4CD-4FDB-BE6A-1653B34655FB}" type="slidenum">
               <a:rPr lang="en-US" sz="1200" b="0" u="none" strike="noStrike">
                 <a:solidFill>
                   <a:schemeClr val="dk1"/>
@@ -712,7 +1044,7 @@
                 <a:latin typeface="+mn-lt"/>
                 <a:ea typeface="+mn-ea"/>
               </a:rPr>
-              <a:t>5</a:t>
+              <a:t>4</a:t>
             </a:fld>
             <a:endParaRPr lang="en-US" sz="1200" b="0" u="none" strike="noStrike">
               <a:solidFill>
@@ -727,11 +1059,14 @@
       </p:sp>
     </p:spTree>
   </p:cSld>
+  <p:clrMapOvr>
+    <a:masterClrMapping/>
+  </p:clrMapOvr>
 </p:notes>
 </file>
 
-<file path=ppt/notesSlides/notesSlide3.xml><?xml version="1.0" encoding="utf-8"?>
-<p:notes xmlns:a="http://schemas.openxmlformats.org/drawingml/2006/main" xmlns:p="http://schemas.openxmlformats.org/presentationml/2006/main" xmlns:r="http://schemas.openxmlformats.org/officeDocument/2006/relationships" xmlns:p14="http://schemas.microsoft.com/office/powerpoint/2010/main" xmlns:p15="http://schemas.microsoft.com/office/powerpoint/2012/main" xmlns:mc="http://schemas.openxmlformats.org/markup-compatibility/2006">
+<file path=ppt/notesSlides/notesSlide4.xml><?xml version="1.0" encoding="utf-8"?>
+<p:notes xmlns:a="http://schemas.openxmlformats.org/drawingml/2006/main" xmlns:r="http://schemas.openxmlformats.org/officeDocument/2006/relationships" xmlns:p="http://schemas.openxmlformats.org/presentationml/2006/main">
   <p:cSld>
     <p:spTree>
       <p:nvGrpSpPr>
@@ -749,9 +1084,9 @@
       </p:grpSpPr>
       <p:sp>
         <p:nvSpPr>
-          <p:cNvPr id="123" name="PlaceHolder 1"/>
+          <p:cNvPr id="126" name="PlaceHolder 1"/>
           <p:cNvSpPr>
-            <a:spLocks noGrp="1"/>
+            <a:spLocks noGrp="1" noRot="1" noChangeAspect="1"/>
           </p:cNvSpPr>
           <p:nvPr>
             <p:ph type="sldImg"/>
@@ -760,7 +1095,7 @@
         <p:spPr>
           <a:xfrm>
             <a:off x="685800" y="1143000"/>
-            <a:ext cx="5485680" cy="3085560"/>
+            <a:ext cx="5486400" cy="3086100"/>
           </a:xfrm>
           <a:prstGeom prst="rect">
             <a:avLst/>
@@ -772,7 +1107,7 @@
       </p:sp>
       <p:sp>
         <p:nvSpPr>
-          <p:cNvPr id="124" name="PlaceHolder 2"/>
+          <p:cNvPr id="127" name="PlaceHolder 2"/>
           <p:cNvSpPr>
             <a:spLocks noGrp="1"/>
           </p:cNvSpPr>
@@ -797,6 +1132,7 @@
           <a:bodyPr lIns="91440" tIns="45720" rIns="91440" bIns="45720" anchor="t">
             <a:noAutofit/>
           </a:bodyPr>
+          <a:lstStyle/>
           <a:p>
             <a:pPr indent="0" algn="l">
               <a:buNone/>
@@ -814,12 +1150,12 @@
       </p:sp>
       <p:sp>
         <p:nvSpPr>
-          <p:cNvPr id="125" name="PlaceHolder 3"/>
+          <p:cNvPr id="128" name="PlaceHolder 3"/>
           <p:cNvSpPr>
             <a:spLocks noGrp="1"/>
           </p:cNvSpPr>
           <p:nvPr>
-            <p:ph type="sldNum" idx="12"/>
+            <p:ph type="sldNum" idx="13"/>
           </p:nvPr>
         </p:nvSpPr>
         <p:spPr>
@@ -869,7 +1205,7 @@
                 <a:tab pos="0" algn="l"/>
               </a:tabLst>
             </a:pPr>
-            <a:fld id="{CCA2D217-C4CD-4FDB-BE6A-1653B34655FB}" type="slidenum">
+            <a:fld id="{A63E76AD-FB3F-4EB6-A2AA-C6CF69DF2EEE}" type="slidenum">
               <a:rPr lang="en-US" sz="1200" b="0" u="none" strike="noStrike">
                 <a:solidFill>
                   <a:schemeClr val="dk1"/>
@@ -894,11 +1230,14 @@
       </p:sp>
     </p:spTree>
   </p:cSld>
+  <p:clrMapOvr>
+    <a:masterClrMapping/>
+  </p:clrMapOvr>
 </p:notes>
 </file>
 
-<file path=ppt/notesSlides/notesSlide4.xml><?xml version="1.0" encoding="utf-8"?>
-<p:notes xmlns:a="http://schemas.openxmlformats.org/drawingml/2006/main" xmlns:p="http://schemas.openxmlformats.org/presentationml/2006/main" xmlns:r="http://schemas.openxmlformats.org/officeDocument/2006/relationships" xmlns:p14="http://schemas.microsoft.com/office/powerpoint/2010/main" xmlns:p15="http://schemas.microsoft.com/office/powerpoint/2012/main" xmlns:mc="http://schemas.openxmlformats.org/markup-compatibility/2006">
+<file path=ppt/notesSlides/notesSlide5.xml><?xml version="1.0" encoding="utf-8"?>
+<p:notes xmlns:a="http://schemas.openxmlformats.org/drawingml/2006/main" xmlns:r="http://schemas.openxmlformats.org/officeDocument/2006/relationships" xmlns:p="http://schemas.openxmlformats.org/presentationml/2006/main">
   <p:cSld>
     <p:spTree>
       <p:nvGrpSpPr>
@@ -916,9 +1255,9 @@
       </p:grpSpPr>
       <p:sp>
         <p:nvSpPr>
-          <p:cNvPr id="126" name="PlaceHolder 1"/>
+          <p:cNvPr id="129" name="PlaceHolder 1"/>
           <p:cNvSpPr>
-            <a:spLocks noGrp="1"/>
+            <a:spLocks noGrp="1" noRot="1" noChangeAspect="1"/>
           </p:cNvSpPr>
           <p:nvPr>
             <p:ph type="sldImg"/>
@@ -927,174 +1266,7 @@
         <p:spPr>
           <a:xfrm>
             <a:off x="685800" y="1143000"/>
-            <a:ext cx="5485680" cy="3085560"/>
-          </a:xfrm>
-          <a:prstGeom prst="rect">
-            <a:avLst/>
-          </a:prstGeom>
-          <a:ln w="0">
-            <a:noFill/>
-          </a:ln>
-        </p:spPr>
-      </p:sp>
-      <p:sp>
-        <p:nvSpPr>
-          <p:cNvPr id="127" name="PlaceHolder 2"/>
-          <p:cNvSpPr>
-            <a:spLocks noGrp="1"/>
-          </p:cNvSpPr>
-          <p:nvPr>
-            <p:ph type="body"/>
-          </p:nvPr>
-        </p:nvSpPr>
-        <p:spPr>
-          <a:xfrm>
-            <a:off x="685800" y="4400640"/>
-            <a:ext cx="5485680" cy="3599640"/>
-          </a:xfrm>
-          <a:prstGeom prst="rect">
-            <a:avLst/>
-          </a:prstGeom>
-          <a:noFill/>
-          <a:ln w="0">
-            <a:noFill/>
-          </a:ln>
-        </p:spPr>
-        <p:txBody>
-          <a:bodyPr lIns="91440" tIns="45720" rIns="91440" bIns="45720" anchor="t">
-            <a:noAutofit/>
-          </a:bodyPr>
-          <a:p>
-            <a:pPr indent="0" algn="l">
-              <a:buNone/>
-            </a:pPr>
-            <a:endParaRPr lang="en-US" sz="1800" b="0" u="none" strike="noStrike">
-              <a:solidFill>
-                <a:srgbClr val="000000"/>
-              </a:solidFill>
-              <a:effectLst/>
-              <a:uFillTx/>
-              <a:latin typeface="Arial"/>
-            </a:endParaRPr>
-          </a:p>
-        </p:txBody>
-      </p:sp>
-      <p:sp>
-        <p:nvSpPr>
-          <p:cNvPr id="128" name="PlaceHolder 3"/>
-          <p:cNvSpPr>
-            <a:spLocks noGrp="1"/>
-          </p:cNvSpPr>
-          <p:nvPr>
-            <p:ph type="sldNum" idx="13"/>
-          </p:nvPr>
-        </p:nvSpPr>
-        <p:spPr>
-          <a:xfrm>
-            <a:off x="3884760" y="8685360"/>
-            <a:ext cx="2971080" cy="457920"/>
-          </a:xfrm>
-          <a:prstGeom prst="rect">
-            <a:avLst/>
-          </a:prstGeom>
-          <a:noFill/>
-          <a:ln w="0">
-            <a:noFill/>
-          </a:ln>
-        </p:spPr>
-        <p:txBody>
-          <a:bodyPr lIns="91440" tIns="45720" rIns="91440" bIns="45720" anchor="b">
-            <a:noAutofit/>
-          </a:bodyPr>
-          <a:lstStyle>
-            <a:lvl1pPr indent="0" algn="r" defTabSz="914400">
-              <a:lnSpc>
-                <a:spcPct val="100000"/>
-              </a:lnSpc>
-              <a:buNone/>
-              <a:tabLst>
-                <a:tab pos="0" algn="l"/>
-              </a:tabLst>
-              <a:defRPr lang="en-US" sz="1200" b="0" u="none" strike="noStrike">
-                <a:solidFill>
-                  <a:schemeClr val="dk1"/>
-                </a:solidFill>
-                <a:effectLst/>
-                <a:uFillTx/>
-                <a:latin typeface="+mn-lt"/>
-                <a:ea typeface="+mn-ea"/>
-              </a:defRPr>
-            </a:lvl1pPr>
-          </a:lstStyle>
-          <a:p>
-            <a:pPr indent="0" algn="r" defTabSz="914400">
-              <a:lnSpc>
-                <a:spcPct val="100000"/>
-              </a:lnSpc>
-              <a:buNone/>
-              <a:tabLst>
-                <a:tab pos="0" algn="l"/>
-              </a:tabLst>
-            </a:pPr>
-            <a:fld id="{A63E76AD-FB3F-4EB6-A2AA-C6CF69DF2EEE}" type="slidenum">
-              <a:rPr lang="en-US" sz="1200" b="0" u="none" strike="noStrike">
-                <a:solidFill>
-                  <a:schemeClr val="dk1"/>
-                </a:solidFill>
-                <a:effectLst/>
-                <a:uFillTx/>
-                <a:latin typeface="+mn-lt"/>
-                <a:ea typeface="+mn-ea"/>
-              </a:rPr>
-              <a:t>5</a:t>
-            </a:fld>
-            <a:endParaRPr lang="en-US" sz="1200" b="0" u="none" strike="noStrike">
-              <a:solidFill>
-                <a:srgbClr val="000000"/>
-              </a:solidFill>
-              <a:effectLst/>
-              <a:uFillTx/>
-              <a:latin typeface="Times New Roman"/>
-            </a:endParaRPr>
-          </a:p>
-        </p:txBody>
-      </p:sp>
-    </p:spTree>
-  </p:cSld>
-</p:notes>
-</file>
-
-<file path=ppt/notesSlides/notesSlide5.xml><?xml version="1.0" encoding="utf-8"?>
-<p:notes xmlns:a="http://schemas.openxmlformats.org/drawingml/2006/main" xmlns:p="http://schemas.openxmlformats.org/presentationml/2006/main" xmlns:r="http://schemas.openxmlformats.org/officeDocument/2006/relationships" xmlns:p14="http://schemas.microsoft.com/office/powerpoint/2010/main" xmlns:p15="http://schemas.microsoft.com/office/powerpoint/2012/main" xmlns:mc="http://schemas.openxmlformats.org/markup-compatibility/2006">
-  <p:cSld>
-    <p:spTree>
-      <p:nvGrpSpPr>
-        <p:cNvPr id="1" name=""/>
-        <p:cNvGrpSpPr/>
-        <p:nvPr/>
-      </p:nvGrpSpPr>
-      <p:grpSpPr>
-        <a:xfrm>
-          <a:off x="0" y="0"/>
-          <a:ext cx="0" cy="0"/>
-          <a:chOff x="0" y="0"/>
-          <a:chExt cx="0" cy="0"/>
-        </a:xfrm>
-      </p:grpSpPr>
-      <p:sp>
-        <p:nvSpPr>
-          <p:cNvPr id="129" name="PlaceHolder 1"/>
-          <p:cNvSpPr>
-            <a:spLocks noGrp="1"/>
-          </p:cNvSpPr>
-          <p:nvPr>
-            <p:ph type="sldImg"/>
-          </p:nvPr>
-        </p:nvSpPr>
-        <p:spPr>
-          <a:xfrm>
-            <a:off x="685800" y="1143000"/>
-            <a:ext cx="5485680" cy="3085560"/>
+            <a:ext cx="5486400" cy="3086100"/>
           </a:xfrm>
           <a:prstGeom prst="rect">
             <a:avLst/>
@@ -1131,6 +1303,7 @@
           <a:bodyPr lIns="91440" tIns="45720" rIns="91440" bIns="45720" anchor="t">
             <a:noAutofit/>
           </a:bodyPr>
+          <a:lstStyle/>
           <a:p>
             <a:pPr indent="0" algn="l">
               <a:buNone/>
@@ -1213,7 +1386,7 @@
                 <a:latin typeface="+mn-lt"/>
                 <a:ea typeface="+mn-ea"/>
               </a:rPr>
-              <a:t>5</a:t>
+              <a:t>6</a:t>
             </a:fld>
             <a:endParaRPr lang="en-US" sz="1200" b="0" u="none" strike="noStrike">
               <a:solidFill>
@@ -1228,17 +1401,21 @@
       </p:sp>
     </p:spTree>
   </p:cSld>
+  <p:clrMapOvr>
+    <a:masterClrMapping/>
+  </p:clrMapOvr>
 </p:notes>
 </file>
 
 <file path=ppt/slideLayouts/slideLayout1.xml><?xml version="1.0" encoding="utf-8"?>
-<p:sldLayout xmlns:a="http://schemas.openxmlformats.org/drawingml/2006/main" xmlns:p="http://schemas.openxmlformats.org/presentationml/2006/main" xmlns:r="http://schemas.openxmlformats.org/officeDocument/2006/relationships" xmlns:p14="http://schemas.microsoft.com/office/powerpoint/2010/main" xmlns:p15="http://schemas.microsoft.com/office/powerpoint/2012/main" xmlns:mc="http://schemas.openxmlformats.org/markup-compatibility/2006" type="blank" preserve="1">
+<p:sldLayout xmlns:a="http://schemas.openxmlformats.org/drawingml/2006/main" xmlns:r="http://schemas.openxmlformats.org/officeDocument/2006/relationships" xmlns:p="http://schemas.openxmlformats.org/presentationml/2006/main" type="blank" preserve="1">
   <p:cSld name="DEFAULT">
     <p:bg>
       <p:bgPr>
         <a:solidFill>
           <a:srgbClr val="FFFFFF"/>
         </a:solidFill>
+        <a:effectLst/>
       </p:bgPr>
     </p:bg>
     <p:spTree>
@@ -1257,17 +1434,21 @@
       </p:grpSpPr>
     </p:spTree>
   </p:cSld>
+  <p:clrMapOvr>
+    <a:masterClrMapping/>
+  </p:clrMapOvr>
 </p:sldLayout>
 </file>
 
 <file path=ppt/slideLayouts/slideLayout2.xml><?xml version="1.0" encoding="utf-8"?>
-<p:sldLayout xmlns:a="http://schemas.openxmlformats.org/drawingml/2006/main" xmlns:p="http://schemas.openxmlformats.org/presentationml/2006/main" xmlns:r="http://schemas.openxmlformats.org/officeDocument/2006/relationships" xmlns:p14="http://schemas.microsoft.com/office/powerpoint/2010/main" xmlns:p15="http://schemas.microsoft.com/office/powerpoint/2012/main" xmlns:mc="http://schemas.openxmlformats.org/markup-compatibility/2006" type="blank" preserve="1">
+<p:sldLayout xmlns:a="http://schemas.openxmlformats.org/drawingml/2006/main" xmlns:r="http://schemas.openxmlformats.org/officeDocument/2006/relationships" xmlns:p="http://schemas.openxmlformats.org/presentationml/2006/main" type="blank" preserve="1">
   <p:cSld name="MASTER">
     <p:bg>
       <p:bgPr>
         <a:solidFill>
           <a:srgbClr val="F7F8FA"/>
         </a:solidFill>
+        <a:effectLst/>
       </p:bgPr>
     </p:bg>
     <p:spTree>
@@ -1309,15 +1490,22 @@
           </a:ln>
         </p:spPr>
         <p:style>
-          <a:lnRef idx="0"/>
-          <a:fillRef idx="0"/>
-          <a:effectRef idx="0"/>
+          <a:lnRef idx="0">
+            <a:scrgbClr r="0" g="0" b="0"/>
+          </a:lnRef>
+          <a:fillRef idx="0">
+            <a:scrgbClr r="0" g="0" b="0"/>
+          </a:fillRef>
+          <a:effectRef idx="0">
+            <a:scrgbClr r="0" g="0" b="0"/>
+          </a:effectRef>
           <a:fontRef idx="minor"/>
         </p:style>
         <p:txBody>
           <a:bodyPr lIns="90000" tIns="45000" rIns="90000" bIns="45000" anchor="t">
             <a:noAutofit/>
           </a:bodyPr>
+          <a:lstStyle/>
           <a:p>
             <a:endParaRPr lang="en-US" sz="1800" b="0" u="none" strike="noStrike">
               <a:solidFill>
@@ -1350,15 +1538,22 @@
           </a:ln>
         </p:spPr>
         <p:style>
-          <a:lnRef idx="0"/>
-          <a:fillRef idx="0"/>
-          <a:effectRef idx="0"/>
+          <a:lnRef idx="0">
+            <a:scrgbClr r="0" g="0" b="0"/>
+          </a:lnRef>
+          <a:fillRef idx="0">
+            <a:scrgbClr r="0" g="0" b="0"/>
+          </a:fillRef>
+          <a:effectRef idx="0">
+            <a:scrgbClr r="0" g="0" b="0"/>
+          </a:effectRef>
           <a:fontRef idx="minor"/>
         </p:style>
         <p:txBody>
           <a:bodyPr lIns="0" tIns="0" rIns="0" bIns="0" anchor="ctr">
             <a:noAutofit/>
           </a:bodyPr>
+          <a:lstStyle/>
           <a:p>
             <a:pPr defTabSz="914400">
               <a:lnSpc>
@@ -1411,15 +1606,22 @@
           </a:ln>
         </p:spPr>
         <p:style>
-          <a:lnRef idx="0"/>
-          <a:fillRef idx="0"/>
-          <a:effectRef idx="0"/>
+          <a:lnRef idx="0">
+            <a:scrgbClr r="0" g="0" b="0"/>
+          </a:lnRef>
+          <a:fillRef idx="0">
+            <a:scrgbClr r="0" g="0" b="0"/>
+          </a:fillRef>
+          <a:effectRef idx="0">
+            <a:scrgbClr r="0" g="0" b="0"/>
+          </a:effectRef>
           <a:fontRef idx="minor"/>
         </p:style>
         <p:txBody>
           <a:bodyPr lIns="0" tIns="0" rIns="0" bIns="0" anchor="ctr">
             <a:noAutofit/>
           </a:bodyPr>
+          <a:lstStyle/>
           <a:p>
             <a:pPr algn="r" defTabSz="914400">
               <a:lnSpc>
@@ -1519,7 +1721,7 @@
                 <a:latin typeface="Aptos"/>
                 <a:ea typeface="Aptos"/>
               </a:rPr>
-              <a:t>&lt;number&gt;</a:t>
+              <a:t>‹#›</a:t>
             </a:fld>
             <a:endParaRPr lang="en-US" sz="800" b="0" u="none" strike="noStrike">
               <a:solidFill>
@@ -1599,14 +1801,6 @@
               </a:rPr>
               <a:t>Click to edit the title text format</a:t>
             </a:r>
-            <a:endParaRPr lang="en-US" sz="1800" b="0" u="none" strike="noStrike">
-              <a:solidFill>
-                <a:schemeClr val="dk1"/>
-              </a:solidFill>
-              <a:effectLst/>
-              <a:uFillTx/>
-              <a:latin typeface="Aptos"/>
-            </a:endParaRPr>
           </a:p>
         </p:txBody>
       </p:sp>
@@ -1819,14 +2013,6 @@
               </a:rPr>
               <a:t>Click to edit the outline text format</a:t>
             </a:r>
-            <a:endParaRPr lang="en-US" sz="3200" b="0" u="none" strike="noStrike">
-              <a:solidFill>
-                <a:schemeClr val="dk1"/>
-              </a:solidFill>
-              <a:effectLst/>
-              <a:uFillTx/>
-              <a:latin typeface="Aptos"/>
-            </a:endParaRPr>
           </a:p>
           <a:p>
             <a:pPr marL="864000" lvl="1" indent="-324000" algn="l">
@@ -1854,14 +2040,6 @@
               </a:rPr>
               <a:t>Second Outline Level</a:t>
             </a:r>
-            <a:endParaRPr lang="en-US" sz="2400" b="0" u="none" strike="noStrike">
-              <a:solidFill>
-                <a:schemeClr val="dk1"/>
-              </a:solidFill>
-              <a:effectLst/>
-              <a:uFillTx/>
-              <a:latin typeface="Aptos"/>
-            </a:endParaRPr>
           </a:p>
           <a:p>
             <a:pPr marL="1296000" lvl="2" indent="-288000" algn="l">
@@ -1889,14 +2067,6 @@
               </a:rPr>
               <a:t>Third Outline Level</a:t>
             </a:r>
-            <a:endParaRPr lang="en-US" sz="2000" b="0" u="none" strike="noStrike">
-              <a:solidFill>
-                <a:schemeClr val="dk1"/>
-              </a:solidFill>
-              <a:effectLst/>
-              <a:uFillTx/>
-              <a:latin typeface="Aptos"/>
-            </a:endParaRPr>
           </a:p>
           <a:p>
             <a:pPr marL="1728000" lvl="3" indent="-216000" algn="l">
@@ -1924,14 +2094,6 @@
               </a:rPr>
               <a:t>Fourth Outline Level</a:t>
             </a:r>
-            <a:endParaRPr lang="en-US" sz="2000" b="0" u="none" strike="noStrike">
-              <a:solidFill>
-                <a:schemeClr val="dk1"/>
-              </a:solidFill>
-              <a:effectLst/>
-              <a:uFillTx/>
-              <a:latin typeface="Aptos"/>
-            </a:endParaRPr>
           </a:p>
           <a:p>
             <a:pPr marL="2160000" lvl="4" indent="-216000" algn="l">
@@ -1959,14 +2121,6 @@
               </a:rPr>
               <a:t>Fifth Outline Level</a:t>
             </a:r>
-            <a:endParaRPr lang="en-US" sz="2000" b="0" u="none" strike="noStrike">
-              <a:solidFill>
-                <a:schemeClr val="dk1"/>
-              </a:solidFill>
-              <a:effectLst/>
-              <a:uFillTx/>
-              <a:latin typeface="Aptos"/>
-            </a:endParaRPr>
           </a:p>
           <a:p>
             <a:pPr marL="2592000" lvl="5" indent="-216000" algn="l">
@@ -1994,14 +2148,6 @@
               </a:rPr>
               <a:t>Sixth Outline Level</a:t>
             </a:r>
-            <a:endParaRPr lang="en-US" sz="2000" b="0" u="none" strike="noStrike">
-              <a:solidFill>
-                <a:schemeClr val="dk1"/>
-              </a:solidFill>
-              <a:effectLst/>
-              <a:uFillTx/>
-              <a:latin typeface="Aptos"/>
-            </a:endParaRPr>
           </a:p>
           <a:p>
             <a:pPr marL="3024000" lvl="6" indent="-216000" algn="l">
@@ -2029,25 +2175,25 @@
               </a:rPr>
               <a:t>Seventh Outline Level</a:t>
             </a:r>
-            <a:endParaRPr lang="en-US" sz="2000" b="0" u="none" strike="noStrike">
-              <a:solidFill>
-                <a:schemeClr val="dk1"/>
-              </a:solidFill>
-              <a:effectLst/>
-              <a:uFillTx/>
-              <a:latin typeface="Aptos"/>
-            </a:endParaRPr>
           </a:p>
         </p:txBody>
       </p:sp>
     </p:spTree>
   </p:cSld>
+  <p:clrMapOvr>
+    <a:masterClrMapping/>
+  </p:clrMapOvr>
 </p:sldLayout>
 </file>
 
 <file path=ppt/slideMasters/slideMaster1.xml><?xml version="1.0" encoding="utf-8"?>
-<p:sldMaster xmlns:a="http://schemas.openxmlformats.org/drawingml/2006/main" xmlns:p="http://schemas.openxmlformats.org/presentationml/2006/main" xmlns:r="http://schemas.openxmlformats.org/officeDocument/2006/relationships" xmlns:p14="http://schemas.microsoft.com/office/powerpoint/2010/main" xmlns:p15="http://schemas.microsoft.com/office/powerpoint/2012/main" xmlns:mc="http://schemas.openxmlformats.org/markup-compatibility/2006">
+<p:sldMaster xmlns:a="http://schemas.openxmlformats.org/drawingml/2006/main" xmlns:r="http://schemas.openxmlformats.org/officeDocument/2006/relationships" xmlns:p="http://schemas.openxmlformats.org/presentationml/2006/main">
   <p:cSld>
+    <p:bg>
+      <p:bgRef idx="1001">
+        <a:schemeClr val="bg1"/>
+      </p:bgRef>
+    </p:bg>
     <p:spTree>
       <p:nvGrpSpPr>
         <p:cNvPr id="1" name=""/>
@@ -2066,20 +2212,1200 @@
   </p:cSld>
   <p:clrMap bg1="lt1" tx1="dk1" bg2="lt2" tx2="dk2" accent1="accent1" accent2="accent2" accent3="accent3" accent4="accent4" accent5="accent5" accent6="accent6" hlink="hlink" folHlink="folHlink"/>
   <p:sldLayoutIdLst>
-    <p:sldLayoutId id="2147483649" r:id="rId2"/>
-    <p:sldLayoutId id="2147483650" r:id="rId3"/>
+    <p:sldLayoutId id="2147483649" r:id="rId1"/>
+    <p:sldLayoutId id="2147483650" r:id="rId2"/>
   </p:sldLayoutIdLst>
+  <p:txStyles>
+    <p:titleStyle>
+      <a:lvl1pPr algn="l" defTabSz="914400" rtl="0" eaLnBrk="1" latinLnBrk="0" hangingPunct="1">
+        <a:lnSpc>
+          <a:spcPct val="90000"/>
+        </a:lnSpc>
+        <a:spcBef>
+          <a:spcPct val="0"/>
+        </a:spcBef>
+        <a:buNone/>
+        <a:defRPr sz="4400" kern="1200">
+          <a:solidFill>
+            <a:schemeClr val="tx1"/>
+          </a:solidFill>
+          <a:latin typeface="+mj-lt"/>
+          <a:ea typeface="+mj-ea"/>
+          <a:cs typeface="+mj-cs"/>
+        </a:defRPr>
+      </a:lvl1pPr>
+    </p:titleStyle>
+    <p:bodyStyle>
+      <a:lvl1pPr marL="228600" indent="-228600" algn="l" defTabSz="914400" rtl="0" eaLnBrk="1" latinLnBrk="0" hangingPunct="1">
+        <a:lnSpc>
+          <a:spcPct val="90000"/>
+        </a:lnSpc>
+        <a:spcBef>
+          <a:spcPts val="1000"/>
+        </a:spcBef>
+        <a:buFont typeface="Arial" panose="020B0604020202020204" pitchFamily="34" charset="0"/>
+        <a:buChar char="•"/>
+        <a:defRPr sz="2800" kern="1200">
+          <a:solidFill>
+            <a:schemeClr val="tx1"/>
+          </a:solidFill>
+          <a:latin typeface="+mn-lt"/>
+          <a:ea typeface="+mn-ea"/>
+          <a:cs typeface="+mn-cs"/>
+        </a:defRPr>
+      </a:lvl1pPr>
+      <a:lvl2pPr marL="685800" indent="-228600" algn="l" defTabSz="914400" rtl="0" eaLnBrk="1" latinLnBrk="0" hangingPunct="1">
+        <a:lnSpc>
+          <a:spcPct val="90000"/>
+        </a:lnSpc>
+        <a:spcBef>
+          <a:spcPts val="500"/>
+        </a:spcBef>
+        <a:buFont typeface="Arial" panose="020B0604020202020204" pitchFamily="34" charset="0"/>
+        <a:buChar char="•"/>
+        <a:defRPr sz="2400" kern="1200">
+          <a:solidFill>
+            <a:schemeClr val="tx1"/>
+          </a:solidFill>
+          <a:latin typeface="+mn-lt"/>
+          <a:ea typeface="+mn-ea"/>
+          <a:cs typeface="+mn-cs"/>
+        </a:defRPr>
+      </a:lvl2pPr>
+      <a:lvl3pPr marL="1143000" indent="-228600" algn="l" defTabSz="914400" rtl="0" eaLnBrk="1" latinLnBrk="0" hangingPunct="1">
+        <a:lnSpc>
+          <a:spcPct val="90000"/>
+        </a:lnSpc>
+        <a:spcBef>
+          <a:spcPts val="500"/>
+        </a:spcBef>
+        <a:buFont typeface="Arial" panose="020B0604020202020204" pitchFamily="34" charset="0"/>
+        <a:buChar char="•"/>
+        <a:defRPr sz="2000" kern="1200">
+          <a:solidFill>
+            <a:schemeClr val="tx1"/>
+          </a:solidFill>
+          <a:latin typeface="+mn-lt"/>
+          <a:ea typeface="+mn-ea"/>
+          <a:cs typeface="+mn-cs"/>
+        </a:defRPr>
+      </a:lvl3pPr>
+      <a:lvl4pPr marL="1600200" indent="-228600" algn="l" defTabSz="914400" rtl="0" eaLnBrk="1" latinLnBrk="0" hangingPunct="1">
+        <a:lnSpc>
+          <a:spcPct val="90000"/>
+        </a:lnSpc>
+        <a:spcBef>
+          <a:spcPts val="500"/>
+        </a:spcBef>
+        <a:buFont typeface="Arial" panose="020B0604020202020204" pitchFamily="34" charset="0"/>
+        <a:buChar char="•"/>
+        <a:defRPr sz="1800" kern="1200">
+          <a:solidFill>
+            <a:schemeClr val="tx1"/>
+          </a:solidFill>
+          <a:latin typeface="+mn-lt"/>
+          <a:ea typeface="+mn-ea"/>
+          <a:cs typeface="+mn-cs"/>
+        </a:defRPr>
+      </a:lvl4pPr>
+      <a:lvl5pPr marL="2057400" indent="-228600" algn="l" defTabSz="914400" rtl="0" eaLnBrk="1" latinLnBrk="0" hangingPunct="1">
+        <a:lnSpc>
+          <a:spcPct val="90000"/>
+        </a:lnSpc>
+        <a:spcBef>
+          <a:spcPts val="500"/>
+        </a:spcBef>
+        <a:buFont typeface="Arial" panose="020B0604020202020204" pitchFamily="34" charset="0"/>
+        <a:buChar char="•"/>
+        <a:defRPr sz="1800" kern="1200">
+          <a:solidFill>
+            <a:schemeClr val="tx1"/>
+          </a:solidFill>
+          <a:latin typeface="+mn-lt"/>
+          <a:ea typeface="+mn-ea"/>
+          <a:cs typeface="+mn-cs"/>
+        </a:defRPr>
+      </a:lvl5pPr>
+      <a:lvl6pPr marL="2514600" indent="-228600" algn="l" defTabSz="914400" rtl="0" eaLnBrk="1" latinLnBrk="0" hangingPunct="1">
+        <a:lnSpc>
+          <a:spcPct val="90000"/>
+        </a:lnSpc>
+        <a:spcBef>
+          <a:spcPts val="500"/>
+        </a:spcBef>
+        <a:buFont typeface="Arial" panose="020B0604020202020204" pitchFamily="34" charset="0"/>
+        <a:buChar char="•"/>
+        <a:defRPr sz="1800" kern="1200">
+          <a:solidFill>
+            <a:schemeClr val="tx1"/>
+          </a:solidFill>
+          <a:latin typeface="+mn-lt"/>
+          <a:ea typeface="+mn-ea"/>
+          <a:cs typeface="+mn-cs"/>
+        </a:defRPr>
+      </a:lvl6pPr>
+      <a:lvl7pPr marL="2971800" indent="-228600" algn="l" defTabSz="914400" rtl="0" eaLnBrk="1" latinLnBrk="0" hangingPunct="1">
+        <a:lnSpc>
+          <a:spcPct val="90000"/>
+        </a:lnSpc>
+        <a:spcBef>
+          <a:spcPts val="500"/>
+        </a:spcBef>
+        <a:buFont typeface="Arial" panose="020B0604020202020204" pitchFamily="34" charset="0"/>
+        <a:buChar char="•"/>
+        <a:defRPr sz="1800" kern="1200">
+          <a:solidFill>
+            <a:schemeClr val="tx1"/>
+          </a:solidFill>
+          <a:latin typeface="+mn-lt"/>
+          <a:ea typeface="+mn-ea"/>
+          <a:cs typeface="+mn-cs"/>
+        </a:defRPr>
+      </a:lvl7pPr>
+      <a:lvl8pPr marL="3429000" indent="-228600" algn="l" defTabSz="914400" rtl="0" eaLnBrk="1" latinLnBrk="0" hangingPunct="1">
+        <a:lnSpc>
+          <a:spcPct val="90000"/>
+        </a:lnSpc>
+        <a:spcBef>
+          <a:spcPts val="500"/>
+        </a:spcBef>
+        <a:buFont typeface="Arial" panose="020B0604020202020204" pitchFamily="34" charset="0"/>
+        <a:buChar char="•"/>
+        <a:defRPr sz="1800" kern="1200">
+          <a:solidFill>
+            <a:schemeClr val="tx1"/>
+          </a:solidFill>
+          <a:latin typeface="+mn-lt"/>
+          <a:ea typeface="+mn-ea"/>
+          <a:cs typeface="+mn-cs"/>
+        </a:defRPr>
+      </a:lvl8pPr>
+      <a:lvl9pPr marL="3886200" indent="-228600" algn="l" defTabSz="914400" rtl="0" eaLnBrk="1" latinLnBrk="0" hangingPunct="1">
+        <a:lnSpc>
+          <a:spcPct val="90000"/>
+        </a:lnSpc>
+        <a:spcBef>
+          <a:spcPts val="500"/>
+        </a:spcBef>
+        <a:buFont typeface="Arial" panose="020B0604020202020204" pitchFamily="34" charset="0"/>
+        <a:buChar char="•"/>
+        <a:defRPr sz="1800" kern="1200">
+          <a:solidFill>
+            <a:schemeClr val="tx1"/>
+          </a:solidFill>
+          <a:latin typeface="+mn-lt"/>
+          <a:ea typeface="+mn-ea"/>
+          <a:cs typeface="+mn-cs"/>
+        </a:defRPr>
+      </a:lvl9pPr>
+    </p:bodyStyle>
+    <p:otherStyle>
+      <a:defPPr>
+        <a:defRPr lang="en-US"/>
+      </a:defPPr>
+      <a:lvl1pPr marL="0" algn="l" defTabSz="914400" rtl="0" eaLnBrk="1" latinLnBrk="0" hangingPunct="1">
+        <a:defRPr sz="1800" kern="1200">
+          <a:solidFill>
+            <a:schemeClr val="tx1"/>
+          </a:solidFill>
+          <a:latin typeface="+mn-lt"/>
+          <a:ea typeface="+mn-ea"/>
+          <a:cs typeface="+mn-cs"/>
+        </a:defRPr>
+      </a:lvl1pPr>
+      <a:lvl2pPr marL="457200" algn="l" defTabSz="914400" rtl="0" eaLnBrk="1" latinLnBrk="0" hangingPunct="1">
+        <a:defRPr sz="1800" kern="1200">
+          <a:solidFill>
+            <a:schemeClr val="tx1"/>
+          </a:solidFill>
+          <a:latin typeface="+mn-lt"/>
+          <a:ea typeface="+mn-ea"/>
+          <a:cs typeface="+mn-cs"/>
+        </a:defRPr>
+      </a:lvl2pPr>
+      <a:lvl3pPr marL="914400" algn="l" defTabSz="914400" rtl="0" eaLnBrk="1" latinLnBrk="0" hangingPunct="1">
+        <a:defRPr sz="1800" kern="1200">
+          <a:solidFill>
+            <a:schemeClr val="tx1"/>
+          </a:solidFill>
+          <a:latin typeface="+mn-lt"/>
+          <a:ea typeface="+mn-ea"/>
+          <a:cs typeface="+mn-cs"/>
+        </a:defRPr>
+      </a:lvl3pPr>
+      <a:lvl4pPr marL="1371600" algn="l" defTabSz="914400" rtl="0" eaLnBrk="1" latinLnBrk="0" hangingPunct="1">
+        <a:defRPr sz="1800" kern="1200">
+          <a:solidFill>
+            <a:schemeClr val="tx1"/>
+          </a:solidFill>
+          <a:latin typeface="+mn-lt"/>
+          <a:ea typeface="+mn-ea"/>
+          <a:cs typeface="+mn-cs"/>
+        </a:defRPr>
+      </a:lvl4pPr>
+      <a:lvl5pPr marL="1828800" algn="l" defTabSz="914400" rtl="0" eaLnBrk="1" latinLnBrk="0" hangingPunct="1">
+        <a:defRPr sz="1800" kern="1200">
+          <a:solidFill>
+            <a:schemeClr val="tx1"/>
+          </a:solidFill>
+          <a:latin typeface="+mn-lt"/>
+          <a:ea typeface="+mn-ea"/>
+          <a:cs typeface="+mn-cs"/>
+        </a:defRPr>
+      </a:lvl5pPr>
+      <a:lvl6pPr marL="2286000" algn="l" defTabSz="914400" rtl="0" eaLnBrk="1" latinLnBrk="0" hangingPunct="1">
+        <a:defRPr sz="1800" kern="1200">
+          <a:solidFill>
+            <a:schemeClr val="tx1"/>
+          </a:solidFill>
+          <a:latin typeface="+mn-lt"/>
+          <a:ea typeface="+mn-ea"/>
+          <a:cs typeface="+mn-cs"/>
+        </a:defRPr>
+      </a:lvl6pPr>
+      <a:lvl7pPr marL="2743200" algn="l" defTabSz="914400" rtl="0" eaLnBrk="1" latinLnBrk="0" hangingPunct="1">
+        <a:defRPr sz="1800" kern="1200">
+          <a:solidFill>
+            <a:schemeClr val="tx1"/>
+          </a:solidFill>
+          <a:latin typeface="+mn-lt"/>
+          <a:ea typeface="+mn-ea"/>
+          <a:cs typeface="+mn-cs"/>
+        </a:defRPr>
+      </a:lvl7pPr>
+      <a:lvl8pPr marL="3200400" algn="l" defTabSz="914400" rtl="0" eaLnBrk="1" latinLnBrk="0" hangingPunct="1">
+        <a:defRPr sz="1800" kern="1200">
+          <a:solidFill>
+            <a:schemeClr val="tx1"/>
+          </a:solidFill>
+          <a:latin typeface="+mn-lt"/>
+          <a:ea typeface="+mn-ea"/>
+          <a:cs typeface="+mn-cs"/>
+        </a:defRPr>
+      </a:lvl8pPr>
+      <a:lvl9pPr marL="3657600" algn="l" defTabSz="914400" rtl="0" eaLnBrk="1" latinLnBrk="0" hangingPunct="1">
+        <a:defRPr sz="1800" kern="1200">
+          <a:solidFill>
+            <a:schemeClr val="tx1"/>
+          </a:solidFill>
+          <a:latin typeface="+mn-lt"/>
+          <a:ea typeface="+mn-ea"/>
+          <a:cs typeface="+mn-cs"/>
+        </a:defRPr>
+      </a:lvl9pPr>
+    </p:otherStyle>
+  </p:txStyles>
 </p:sldMaster>
 </file>
 
 <file path=ppt/slides/slide1.xml><?xml version="1.0" encoding="utf-8"?>
-<p:sld xmlns:a="http://schemas.openxmlformats.org/drawingml/2006/main" xmlns:p="http://schemas.openxmlformats.org/presentationml/2006/main" xmlns:r="http://schemas.openxmlformats.org/officeDocument/2006/relationships" xmlns:p14="http://schemas.microsoft.com/office/powerpoint/2010/main" xmlns:p15="http://schemas.microsoft.com/office/powerpoint/2012/main" xmlns:mc="http://schemas.openxmlformats.org/markup-compatibility/2006">
+<p:sld xmlns:a="http://schemas.openxmlformats.org/drawingml/2006/main" xmlns:r="http://schemas.openxmlformats.org/officeDocument/2006/relationships" xmlns:p="http://schemas.openxmlformats.org/presentationml/2006/main">
+  <p:cSld>
+    <p:spTree>
+      <p:nvGrpSpPr>
+        <p:cNvPr id="1" name=""/>
+        <p:cNvGrpSpPr/>
+        <p:nvPr/>
+      </p:nvGrpSpPr>
+      <p:grpSpPr>
+        <a:xfrm>
+          <a:off x="0" y="0"/>
+          <a:ext cx="0" cy="0"/>
+          <a:chOff x="0" y="0"/>
+          <a:chExt cx="0" cy="0"/>
+        </a:xfrm>
+      </p:grpSpPr>
+      <p:sp>
+        <p:nvSpPr>
+          <p:cNvPr id="30" name="Text 0"/>
+          <p:cNvSpPr/>
+          <p:nvPr/>
+        </p:nvSpPr>
+        <p:spPr>
+          <a:xfrm>
+            <a:off x="502920" y="384120"/>
+            <a:ext cx="11154960" cy="502200"/>
+          </a:xfrm>
+          <a:prstGeom prst="rect">
+            <a:avLst/>
+          </a:prstGeom>
+          <a:noFill/>
+          <a:ln w="0">
+            <a:noFill/>
+          </a:ln>
+        </p:spPr>
+        <p:style>
+          <a:lnRef idx="0">
+            <a:scrgbClr r="0" g="0" b="0"/>
+          </a:lnRef>
+          <a:fillRef idx="0">
+            <a:scrgbClr r="0" g="0" b="0"/>
+          </a:fillRef>
+          <a:effectRef idx="0">
+            <a:scrgbClr r="0" g="0" b="0"/>
+          </a:effectRef>
+          <a:fontRef idx="minor"/>
+        </p:style>
+        <p:txBody>
+          <a:bodyPr lIns="0" tIns="0" rIns="0" bIns="0" anchor="ctr">
+            <a:noAutofit/>
+          </a:bodyPr>
+          <a:lstStyle/>
+          <a:p>
+            <a:pPr defTabSz="914400">
+              <a:lnSpc>
+                <a:spcPct val="100000"/>
+              </a:lnSpc>
+              <a:tabLst>
+                <a:tab pos="0" algn="l"/>
+              </a:tabLst>
+            </a:pPr>
+            <a:r>
+              <a:rPr lang="en-US" sz="2700" b="1" u="none" strike="noStrike">
+                <a:solidFill>
+                  <a:srgbClr val="111827"/>
+                </a:solidFill>
+                <a:effectLst/>
+                <a:uFillTx/>
+                <a:latin typeface="Aptos Display"/>
+                <a:ea typeface="Aptos Display"/>
+              </a:rPr>
+              <a:t>What is Next.js?</a:t>
+            </a:r>
+            <a:endParaRPr lang="en-US" sz="2700" b="0" u="none" strike="noStrike">
+              <a:solidFill>
+                <a:srgbClr val="000000"/>
+              </a:solidFill>
+              <a:effectLst/>
+              <a:uFillTx/>
+              <a:latin typeface="Arial"/>
+            </a:endParaRPr>
+          </a:p>
+        </p:txBody>
+      </p:sp>
+      <p:sp>
+        <p:nvSpPr>
+          <p:cNvPr id="31" name="Text 1"/>
+          <p:cNvSpPr/>
+          <p:nvPr/>
+        </p:nvSpPr>
+        <p:spPr>
+          <a:xfrm>
+            <a:off x="530280" y="914400"/>
+            <a:ext cx="10972080" cy="310320"/>
+          </a:xfrm>
+          <a:prstGeom prst="rect">
+            <a:avLst/>
+          </a:prstGeom>
+          <a:noFill/>
+          <a:ln w="0">
+            <a:noFill/>
+          </a:ln>
+        </p:spPr>
+        <p:style>
+          <a:lnRef idx="0">
+            <a:scrgbClr r="0" g="0" b="0"/>
+          </a:lnRef>
+          <a:fillRef idx="0">
+            <a:scrgbClr r="0" g="0" b="0"/>
+          </a:fillRef>
+          <a:effectRef idx="0">
+            <a:scrgbClr r="0" g="0" b="0"/>
+          </a:effectRef>
+          <a:fontRef idx="minor"/>
+        </p:style>
+        <p:txBody>
+          <a:bodyPr lIns="0" tIns="0" rIns="0" bIns="0" anchor="ctr">
+            <a:noAutofit/>
+          </a:bodyPr>
+          <a:lstStyle/>
+          <a:p>
+            <a:pPr defTabSz="914400">
+              <a:lnSpc>
+                <a:spcPct val="100000"/>
+              </a:lnSpc>
+              <a:tabLst>
+                <a:tab pos="0" algn="l"/>
+              </a:tabLst>
+            </a:pPr>
+            <a:r>
+              <a:rPr lang="en-US" sz="1350" b="0" u="none" strike="noStrike">
+                <a:solidFill>
+                  <a:srgbClr val="4B5563"/>
+                </a:solidFill>
+                <a:effectLst/>
+                <a:uFillTx/>
+                <a:latin typeface="Aptos"/>
+              </a:rPr>
+              <a:t>A quick primer before you install anything.</a:t>
+            </a:r>
+            <a:endParaRPr lang="en-US" sz="1350" b="0" u="none" strike="noStrike">
+              <a:solidFill>
+                <a:srgbClr val="000000"/>
+              </a:solidFill>
+              <a:effectLst/>
+              <a:uFillTx/>
+              <a:latin typeface="Arial"/>
+            </a:endParaRPr>
+          </a:p>
+        </p:txBody>
+      </p:sp>
+      <p:sp>
+        <p:nvSpPr>
+          <p:cNvPr id="32" name="Shape 2"/>
+          <p:cNvSpPr/>
+          <p:nvPr/>
+        </p:nvSpPr>
+        <p:spPr>
+          <a:xfrm>
+            <a:off x="594360" y="1353240"/>
+            <a:ext cx="5302800" cy="4434120"/>
+          </a:xfrm>
+          <a:prstGeom prst="roundRect">
+            <a:avLst>
+              <a:gd name="adj" fmla="val 1649"/>
+            </a:avLst>
+          </a:prstGeom>
+          <a:solidFill>
+            <a:srgbClr val="FFFFFF"/>
+          </a:solidFill>
+          <a:ln w="12700">
+            <a:solidFill>
+              <a:srgbClr val="D1D5DB"/>
+            </a:solidFill>
+            <a:round/>
+          </a:ln>
+          <a:effectLst>
+            <a:outerShdw algn="bl" rotWithShape="0">
+              <a:srgbClr val="000000">
+                <a:alpha val="0"/>
+              </a:srgbClr>
+            </a:outerShdw>
+          </a:effectLst>
+        </p:spPr>
+        <p:style>
+          <a:lnRef idx="0">
+            <a:scrgbClr r="0" g="0" b="0"/>
+          </a:lnRef>
+          <a:fillRef idx="0">
+            <a:scrgbClr r="0" g="0" b="0"/>
+          </a:fillRef>
+          <a:effectRef idx="0">
+            <a:scrgbClr r="0" g="0" b="0"/>
+          </a:effectRef>
+          <a:fontRef idx="minor"/>
+        </p:style>
+        <p:txBody>
+          <a:bodyPr lIns="90000" tIns="45000" rIns="90000" bIns="45000" anchor="t">
+            <a:noAutofit/>
+          </a:bodyPr>
+          <a:lstStyle/>
+          <a:p>
+            <a:endParaRPr lang="en-US" sz="1800" b="0" u="none" strike="noStrike">
+              <a:solidFill>
+                <a:srgbClr val="000000"/>
+              </a:solidFill>
+              <a:effectLst/>
+              <a:uFillTx/>
+              <a:latin typeface="Arial"/>
+            </a:endParaRPr>
+          </a:p>
+        </p:txBody>
+      </p:sp>
+      <p:sp>
+        <p:nvSpPr>
+          <p:cNvPr id="33" name="Shape 3"/>
+          <p:cNvSpPr/>
+          <p:nvPr/>
+        </p:nvSpPr>
+        <p:spPr>
+          <a:xfrm>
+            <a:off x="594360" y="1353240"/>
+            <a:ext cx="81720" cy="4434120"/>
+          </a:xfrm>
+          <a:prstGeom prst="rect">
+            <a:avLst/>
+          </a:prstGeom>
+          <a:solidFill>
+            <a:srgbClr val="2563EB"/>
+          </a:solidFill>
+          <a:ln w="12700">
+            <a:solidFill>
+              <a:srgbClr val="2563EB"/>
+            </a:solidFill>
+            <a:round/>
+          </a:ln>
+        </p:spPr>
+        <p:style>
+          <a:lnRef idx="0">
+            <a:scrgbClr r="0" g="0" b="0"/>
+          </a:lnRef>
+          <a:fillRef idx="0">
+            <a:scrgbClr r="0" g="0" b="0"/>
+          </a:fillRef>
+          <a:effectRef idx="0">
+            <a:scrgbClr r="0" g="0" b="0"/>
+          </a:effectRef>
+          <a:fontRef idx="minor"/>
+        </p:style>
+        <p:txBody>
+          <a:bodyPr lIns="41040" tIns="45000" rIns="41040" bIns="45000" anchor="t">
+            <a:noAutofit/>
+          </a:bodyPr>
+          <a:lstStyle/>
+          <a:p>
+            <a:endParaRPr lang="en-US" sz="1800" b="0" u="none" strike="noStrike">
+              <a:solidFill>
+                <a:srgbClr val="FFFFFF"/>
+              </a:solidFill>
+              <a:effectLst/>
+              <a:uFillTx/>
+              <a:latin typeface="Arial"/>
+            </a:endParaRPr>
+          </a:p>
+        </p:txBody>
+      </p:sp>
+      <p:sp>
+        <p:nvSpPr>
+          <p:cNvPr id="34" name="Text 4"/>
+          <p:cNvSpPr/>
+          <p:nvPr/>
+        </p:nvSpPr>
+        <p:spPr>
+          <a:xfrm>
+            <a:off x="850320" y="1536120"/>
+            <a:ext cx="4891320" cy="310320"/>
+          </a:xfrm>
+          <a:prstGeom prst="rect">
+            <a:avLst/>
+          </a:prstGeom>
+          <a:noFill/>
+          <a:ln w="0">
+            <a:noFill/>
+          </a:ln>
+        </p:spPr>
+        <p:style>
+          <a:lnRef idx="0">
+            <a:scrgbClr r="0" g="0" b="0"/>
+          </a:lnRef>
+          <a:fillRef idx="0">
+            <a:scrgbClr r="0" g="0" b="0"/>
+          </a:fillRef>
+          <a:effectRef idx="0">
+            <a:scrgbClr r="0" g="0" b="0"/>
+          </a:effectRef>
+          <a:fontRef idx="minor"/>
+        </p:style>
+        <p:txBody>
+          <a:bodyPr lIns="0" tIns="0" rIns="0" bIns="0" anchor="ctr">
+            <a:noAutofit/>
+          </a:bodyPr>
+          <a:lstStyle/>
+          <a:p>
+            <a:pPr defTabSz="914400">
+              <a:lnSpc>
+                <a:spcPct val="100000"/>
+              </a:lnSpc>
+              <a:tabLst>
+                <a:tab pos="0" algn="l"/>
+              </a:tabLst>
+            </a:pPr>
+            <a:r>
+              <a:rPr lang="en-US" sz="1700" b="1" u="none" strike="noStrike">
+                <a:solidFill>
+                  <a:srgbClr val="111827"/>
+                </a:solidFill>
+                <a:effectLst/>
+                <a:uFillTx/>
+                <a:latin typeface="Aptos"/>
+              </a:rPr>
+              <a:t>1. A React Framework</a:t>
+            </a:r>
+            <a:endParaRPr lang="en-US" sz="1700" b="0" u="none" strike="noStrike">
+              <a:solidFill>
+                <a:srgbClr val="000000"/>
+              </a:solidFill>
+              <a:effectLst/>
+              <a:uFillTx/>
+              <a:latin typeface="Arial"/>
+            </a:endParaRPr>
+          </a:p>
+        </p:txBody>
+      </p:sp>
+      <p:sp>
+        <p:nvSpPr>
+          <p:cNvPr id="35" name="Text 5"/>
+          <p:cNvSpPr/>
+          <p:nvPr/>
+        </p:nvSpPr>
+        <p:spPr>
+          <a:xfrm>
+            <a:off x="850320" y="1956960"/>
+            <a:ext cx="4863960" cy="3665880"/>
+          </a:xfrm>
+          <a:prstGeom prst="rect">
+            <a:avLst/>
+          </a:prstGeom>
+          <a:noFill/>
+          <a:ln w="0">
+            <a:noFill/>
+          </a:ln>
+        </p:spPr>
+        <p:style>
+          <a:lnRef idx="0">
+            <a:scrgbClr r="0" g="0" b="0"/>
+          </a:lnRef>
+          <a:fillRef idx="0">
+            <a:scrgbClr r="0" g="0" b="0"/>
+          </a:fillRef>
+          <a:effectRef idx="0">
+            <a:scrgbClr r="0" g="0" b="0"/>
+          </a:effectRef>
+          <a:fontRef idx="minor"/>
+        </p:style>
+        <p:txBody>
+          <a:bodyPr lIns="360" tIns="360" rIns="360" bIns="360" anchor="t">
+            <a:noAutofit/>
+          </a:bodyPr>
+          <a:lstStyle/>
+          <a:p>
+            <a:pPr defTabSz="914400">
+              <a:lnSpc>
+                <a:spcPct val="130000"/>
+              </a:lnSpc>
+              <a:tabLst>
+                <a:tab pos="0" algn="l"/>
+              </a:tabLst>
+            </a:pPr>
+            <a:r>
+              <a:rPr lang="en-US" sz="1350" b="0" u="none" strike="noStrike" dirty="0">
+                <a:solidFill>
+                  <a:srgbClr val="4B5563"/>
+                </a:solidFill>
+                <a:effectLst/>
+                <a:uFillTx/>
+                <a:latin typeface="Aptos"/>
+              </a:rPr>
+              <a:t>Next.js is built on top of React, the widely used JavaScript library for building user interfaces.</a:t>
+            </a:r>
+            <a:endParaRPr lang="en-US" sz="1350" b="0" u="none" strike="noStrike" dirty="0">
+              <a:solidFill>
+                <a:srgbClr val="000000"/>
+              </a:solidFill>
+              <a:effectLst/>
+              <a:uFillTx/>
+              <a:latin typeface="Arial"/>
+            </a:endParaRPr>
+          </a:p>
+          <a:p>
+            <a:pPr defTabSz="914400">
+              <a:lnSpc>
+                <a:spcPct val="130000"/>
+              </a:lnSpc>
+              <a:tabLst>
+                <a:tab pos="0" algn="l"/>
+              </a:tabLst>
+            </a:pPr>
+            <a:endParaRPr lang="en-US" sz="1350" b="0" u="none" strike="noStrike" dirty="0">
+              <a:solidFill>
+                <a:srgbClr val="000000"/>
+              </a:solidFill>
+              <a:effectLst/>
+              <a:uFillTx/>
+              <a:latin typeface="Arial"/>
+            </a:endParaRPr>
+          </a:p>
+          <a:p>
+            <a:pPr defTabSz="914400">
+              <a:lnSpc>
+                <a:spcPct val="130000"/>
+              </a:lnSpc>
+              <a:tabLst>
+                <a:tab pos="0" algn="l"/>
+              </a:tabLst>
+            </a:pPr>
+            <a:r>
+              <a:rPr lang="en-US" sz="1350" b="0" u="none" strike="noStrike" dirty="0">
+                <a:solidFill>
+                  <a:srgbClr val="4B5563"/>
+                </a:solidFill>
+                <a:effectLst/>
+                <a:uFillTx/>
+                <a:latin typeface="Aptos"/>
+              </a:rPr>
+              <a:t>It adds the project structure, routing, and build tooling most React apps need, so you write components, not configuration.</a:t>
+            </a:r>
+            <a:endParaRPr lang="en-US" sz="1350" b="0" u="none" strike="noStrike" dirty="0">
+              <a:solidFill>
+                <a:srgbClr val="000000"/>
+              </a:solidFill>
+              <a:effectLst/>
+              <a:uFillTx/>
+              <a:latin typeface="Arial"/>
+            </a:endParaRPr>
+          </a:p>
+        </p:txBody>
+      </p:sp>
+      <p:sp>
+        <p:nvSpPr>
+          <p:cNvPr id="36" name="Shape 6"/>
+          <p:cNvSpPr/>
+          <p:nvPr/>
+        </p:nvSpPr>
+        <p:spPr>
+          <a:xfrm>
+            <a:off x="6199560" y="1353240"/>
+            <a:ext cx="5394240" cy="4434120"/>
+          </a:xfrm>
+          <a:prstGeom prst="roundRect">
+            <a:avLst>
+              <a:gd name="adj" fmla="val 1649"/>
+            </a:avLst>
+          </a:prstGeom>
+          <a:solidFill>
+            <a:srgbClr val="FFFFFF"/>
+          </a:solidFill>
+          <a:ln w="12700">
+            <a:solidFill>
+              <a:srgbClr val="D1D5DB"/>
+            </a:solidFill>
+            <a:round/>
+          </a:ln>
+          <a:effectLst>
+            <a:outerShdw algn="bl" rotWithShape="0">
+              <a:srgbClr val="000000">
+                <a:alpha val="0"/>
+              </a:srgbClr>
+            </a:outerShdw>
+          </a:effectLst>
+        </p:spPr>
+        <p:style>
+          <a:lnRef idx="0">
+            <a:scrgbClr r="0" g="0" b="0"/>
+          </a:lnRef>
+          <a:fillRef idx="0">
+            <a:scrgbClr r="0" g="0" b="0"/>
+          </a:fillRef>
+          <a:effectRef idx="0">
+            <a:scrgbClr r="0" g="0" b="0"/>
+          </a:effectRef>
+          <a:fontRef idx="minor"/>
+        </p:style>
+        <p:txBody>
+          <a:bodyPr lIns="90000" tIns="45000" rIns="90000" bIns="45000" anchor="t">
+            <a:noAutofit/>
+          </a:bodyPr>
+          <a:lstStyle/>
+          <a:p>
+            <a:endParaRPr lang="en-US" sz="1800" b="0" u="none" strike="noStrike">
+              <a:solidFill>
+                <a:srgbClr val="000000"/>
+              </a:solidFill>
+              <a:effectLst/>
+              <a:uFillTx/>
+              <a:latin typeface="Arial"/>
+            </a:endParaRPr>
+          </a:p>
+        </p:txBody>
+      </p:sp>
+      <p:sp>
+        <p:nvSpPr>
+          <p:cNvPr id="37" name="Shape 7"/>
+          <p:cNvSpPr/>
+          <p:nvPr/>
+        </p:nvSpPr>
+        <p:spPr>
+          <a:xfrm>
+            <a:off x="6199560" y="1353240"/>
+            <a:ext cx="81720" cy="4434120"/>
+          </a:xfrm>
+          <a:prstGeom prst="rect">
+            <a:avLst/>
+          </a:prstGeom>
+          <a:solidFill>
+            <a:srgbClr val="16A34A"/>
+          </a:solidFill>
+          <a:ln w="12700">
+            <a:solidFill>
+              <a:srgbClr val="16A34A"/>
+            </a:solidFill>
+            <a:round/>
+          </a:ln>
+        </p:spPr>
+        <p:style>
+          <a:lnRef idx="0">
+            <a:scrgbClr r="0" g="0" b="0"/>
+          </a:lnRef>
+          <a:fillRef idx="0">
+            <a:scrgbClr r="0" g="0" b="0"/>
+          </a:fillRef>
+          <a:effectRef idx="0">
+            <a:scrgbClr r="0" g="0" b="0"/>
+          </a:effectRef>
+          <a:fontRef idx="minor"/>
+        </p:style>
+        <p:txBody>
+          <a:bodyPr lIns="41040" tIns="45000" rIns="41040" bIns="45000" anchor="t">
+            <a:noAutofit/>
+          </a:bodyPr>
+          <a:lstStyle/>
+          <a:p>
+            <a:endParaRPr lang="en-US" sz="1800" b="0" u="none" strike="noStrike">
+              <a:solidFill>
+                <a:srgbClr val="FFFFFF"/>
+              </a:solidFill>
+              <a:effectLst/>
+              <a:uFillTx/>
+              <a:latin typeface="Arial"/>
+            </a:endParaRPr>
+          </a:p>
+        </p:txBody>
+      </p:sp>
+      <p:sp>
+        <p:nvSpPr>
+          <p:cNvPr id="38" name="Text 8"/>
+          <p:cNvSpPr/>
+          <p:nvPr/>
+        </p:nvSpPr>
+        <p:spPr>
+          <a:xfrm>
+            <a:off x="6455520" y="1536120"/>
+            <a:ext cx="4982760" cy="310320"/>
+          </a:xfrm>
+          <a:prstGeom prst="rect">
+            <a:avLst/>
+          </a:prstGeom>
+          <a:noFill/>
+          <a:ln w="0">
+            <a:noFill/>
+          </a:ln>
+        </p:spPr>
+        <p:style>
+          <a:lnRef idx="0">
+            <a:scrgbClr r="0" g="0" b="0"/>
+          </a:lnRef>
+          <a:fillRef idx="0">
+            <a:scrgbClr r="0" g="0" b="0"/>
+          </a:fillRef>
+          <a:effectRef idx="0">
+            <a:scrgbClr r="0" g="0" b="0"/>
+          </a:effectRef>
+          <a:fontRef idx="minor"/>
+        </p:style>
+        <p:txBody>
+          <a:bodyPr lIns="0" tIns="0" rIns="0" bIns="0" anchor="ctr">
+            <a:noAutofit/>
+          </a:bodyPr>
+          <a:lstStyle/>
+          <a:p>
+            <a:pPr defTabSz="914400">
+              <a:lnSpc>
+                <a:spcPct val="100000"/>
+              </a:lnSpc>
+              <a:tabLst>
+                <a:tab pos="0" algn="l"/>
+              </a:tabLst>
+            </a:pPr>
+            <a:r>
+              <a:rPr lang="en-US" sz="1700" b="1" u="none" strike="noStrike">
+                <a:solidFill>
+                  <a:srgbClr val="111827"/>
+                </a:solidFill>
+                <a:effectLst/>
+                <a:uFillTx/>
+                <a:latin typeface="Aptos"/>
+              </a:rPr>
+              <a:t>2. Full-Stack, Not Just Frontend</a:t>
+            </a:r>
+            <a:endParaRPr lang="en-US" sz="1700" b="0" u="none" strike="noStrike">
+              <a:solidFill>
+                <a:srgbClr val="000000"/>
+              </a:solidFill>
+              <a:effectLst/>
+              <a:uFillTx/>
+              <a:latin typeface="Arial"/>
+            </a:endParaRPr>
+          </a:p>
+        </p:txBody>
+      </p:sp>
+      <p:sp>
+        <p:nvSpPr>
+          <p:cNvPr id="39" name="Text 9"/>
+          <p:cNvSpPr/>
+          <p:nvPr/>
+        </p:nvSpPr>
+        <p:spPr>
+          <a:xfrm>
+            <a:off x="6455520" y="1956960"/>
+            <a:ext cx="4955400" cy="3665880"/>
+          </a:xfrm>
+          <a:prstGeom prst="rect">
+            <a:avLst/>
+          </a:prstGeom>
+          <a:noFill/>
+          <a:ln w="0">
+            <a:noFill/>
+          </a:ln>
+        </p:spPr>
+        <p:style>
+          <a:lnRef idx="0">
+            <a:scrgbClr r="0" g="0" b="0"/>
+          </a:lnRef>
+          <a:fillRef idx="0">
+            <a:scrgbClr r="0" g="0" b="0"/>
+          </a:fillRef>
+          <a:effectRef idx="0">
+            <a:scrgbClr r="0" g="0" b="0"/>
+          </a:effectRef>
+          <a:fontRef idx="minor"/>
+        </p:style>
+        <p:txBody>
+          <a:bodyPr lIns="360" tIns="360" rIns="360" bIns="360" anchor="t">
+            <a:noAutofit/>
+          </a:bodyPr>
+          <a:lstStyle/>
+          <a:p>
+            <a:pPr defTabSz="914400">
+              <a:lnSpc>
+                <a:spcPct val="130000"/>
+              </a:lnSpc>
+              <a:tabLst>
+                <a:tab pos="0" algn="l"/>
+              </a:tabLst>
+            </a:pPr>
+            <a:r>
+              <a:rPr lang="en-US" sz="1350" b="0" u="none" strike="noStrike" dirty="0">
+                <a:solidFill>
+                  <a:srgbClr val="4B5563"/>
+                </a:solidFill>
+                <a:effectLst/>
+                <a:uFillTx/>
+                <a:latin typeface="Aptos"/>
+              </a:rPr>
+              <a:t>Pages can render on the server, fetch data before they load, and expose their own API routes, all inside one project.</a:t>
+            </a:r>
+            <a:endParaRPr lang="en-US" sz="1350" b="0" u="none" strike="noStrike" dirty="0">
+              <a:solidFill>
+                <a:srgbClr val="000000"/>
+              </a:solidFill>
+              <a:effectLst/>
+              <a:uFillTx/>
+              <a:latin typeface="Arial"/>
+            </a:endParaRPr>
+          </a:p>
+          <a:p>
+            <a:pPr defTabSz="914400">
+              <a:lnSpc>
+                <a:spcPct val="130000"/>
+              </a:lnSpc>
+              <a:tabLst>
+                <a:tab pos="0" algn="l"/>
+              </a:tabLst>
+            </a:pPr>
+            <a:endParaRPr lang="en-US" sz="1350" b="0" u="none" strike="noStrike" dirty="0">
+              <a:solidFill>
+                <a:srgbClr val="000000"/>
+              </a:solidFill>
+              <a:effectLst/>
+              <a:uFillTx/>
+              <a:latin typeface="Arial"/>
+            </a:endParaRPr>
+          </a:p>
+          <a:p>
+            <a:pPr defTabSz="914400">
+              <a:lnSpc>
+                <a:spcPct val="130000"/>
+              </a:lnSpc>
+              <a:tabLst>
+                <a:tab pos="0" algn="l"/>
+              </a:tabLst>
+            </a:pPr>
+            <a:r>
+              <a:rPr lang="en-US" sz="1350" b="0" u="none" strike="noStrike" dirty="0">
+                <a:solidFill>
+                  <a:srgbClr val="4B5563"/>
+                </a:solidFill>
+                <a:effectLst/>
+                <a:uFillTx/>
+                <a:latin typeface="Aptos"/>
+              </a:rPr>
+              <a:t>That server-side piece is what lets a Next.js app talk directly to a database like PostgreSQL.</a:t>
+            </a:r>
+            <a:endParaRPr lang="en-US" sz="1350" b="0" u="none" strike="noStrike" dirty="0">
+              <a:solidFill>
+                <a:srgbClr val="000000"/>
+              </a:solidFill>
+              <a:effectLst/>
+              <a:uFillTx/>
+              <a:latin typeface="Arial"/>
+            </a:endParaRPr>
+          </a:p>
+        </p:txBody>
+      </p:sp>
+      <p:sp>
+        <p:nvSpPr>
+          <p:cNvPr id="45" name="Text 15"/>
+          <p:cNvSpPr/>
+          <p:nvPr/>
+        </p:nvSpPr>
+        <p:spPr>
+          <a:xfrm>
+            <a:off x="594360" y="5925240"/>
+            <a:ext cx="10999920" cy="273600"/>
+          </a:xfrm>
+          <a:prstGeom prst="rect">
+            <a:avLst/>
+          </a:prstGeom>
+          <a:noFill/>
+          <a:ln w="0">
+            <a:noFill/>
+          </a:ln>
+        </p:spPr>
+        <p:style>
+          <a:lnRef idx="0">
+            <a:scrgbClr r="0" g="0" b="0"/>
+          </a:lnRef>
+          <a:fillRef idx="0">
+            <a:scrgbClr r="0" g="0" b="0"/>
+          </a:fillRef>
+          <a:effectRef idx="0">
+            <a:scrgbClr r="0" g="0" b="0"/>
+          </a:effectRef>
+          <a:fontRef idx="minor"/>
+        </p:style>
+        <p:txBody>
+          <a:bodyPr lIns="0" tIns="0" rIns="0" bIns="0" anchor="ctr">
+            <a:noAutofit/>
+          </a:bodyPr>
+          <a:lstStyle/>
+          <a:p>
+            <a:pPr defTabSz="914400">
+              <a:lnSpc>
+                <a:spcPct val="100000"/>
+              </a:lnSpc>
+              <a:tabLst>
+                <a:tab pos="0" algn="l"/>
+              </a:tabLst>
+            </a:pPr>
+            <a:r>
+              <a:rPr lang="en-US" sz="1100" b="0" i="1" u="none" strike="noStrike">
+                <a:solidFill>
+                  <a:srgbClr val="4B5563"/>
+                </a:solidFill>
+                <a:effectLst/>
+                <a:uFillTx/>
+                <a:latin typeface="Aptos"/>
+              </a:rPr>
+              <a:t>This is the app layer. The rest of this deck sets up the database it talks to.</a:t>
+            </a:r>
+            <a:endParaRPr lang="en-US" sz="1100" b="0" u="none" strike="noStrike">
+              <a:solidFill>
+                <a:srgbClr val="000000"/>
+              </a:solidFill>
+              <a:effectLst/>
+              <a:uFillTx/>
+              <a:latin typeface="Arial"/>
+            </a:endParaRPr>
+          </a:p>
+        </p:txBody>
+      </p:sp>
+      <p:sp>
+        <p:nvSpPr>
+          <p:cNvPr id="46" name="PlaceHolder 1"/>
+          <p:cNvSpPr>
+            <a:spLocks noGrp="1"/>
+          </p:cNvSpPr>
+          <p:nvPr>
+            <p:ph type="sldNum" idx="6"/>
+          </p:nvPr>
+        </p:nvSpPr>
+        <p:spPr>
+          <a:xfrm>
+            <a:off x="11841480" y="6473880"/>
+            <a:ext cx="799200" cy="299160"/>
+          </a:xfrm>
+          <a:prstGeom prst="rect">
+            <a:avLst/>
+          </a:prstGeom>
+          <a:noFill/>
+          <a:ln w="0">
+            <a:noFill/>
+          </a:ln>
+        </p:spPr>
+        <p:txBody>
+          <a:bodyPr lIns="90000" tIns="45000" rIns="90000" bIns="45000" anchor="t">
+            <a:noAutofit/>
+          </a:bodyPr>
+          <a:lstStyle>
+            <a:lvl1pPr indent="0" algn="l" defTabSz="914400">
+              <a:lnSpc>
+                <a:spcPct val="100000"/>
+              </a:lnSpc>
+              <a:buNone/>
+              <a:tabLst>
+                <a:tab pos="0" algn="l"/>
+              </a:tabLst>
+              <a:defRPr lang="en-US" sz="800" b="0" u="none" strike="noStrike">
+                <a:solidFill>
+                  <a:srgbClr val="6B7280"/>
+                </a:solidFill>
+                <a:effectLst/>
+                <a:uFillTx/>
+                <a:latin typeface="Aptos"/>
+                <a:ea typeface="Aptos"/>
+              </a:defRPr>
+            </a:lvl1pPr>
+          </a:lstStyle>
+          <a:p>
+            <a:pPr indent="0" algn="l" defTabSz="914400">
+              <a:lnSpc>
+                <a:spcPct val="100000"/>
+              </a:lnSpc>
+              <a:buNone/>
+              <a:tabLst>
+                <a:tab pos="0" algn="l"/>
+              </a:tabLst>
+            </a:pPr>
+            <a:fld id="{B871E934-BFDF-4356-AD5A-0CC1E457DB81}" type="slidenum">
+              <a:rPr lang="en-US" sz="800" b="0" u="none" strike="noStrike">
+                <a:solidFill>
+                  <a:srgbClr val="6B7280"/>
+                </a:solidFill>
+                <a:effectLst/>
+                <a:uFillTx/>
+                <a:latin typeface="Aptos"/>
+                <a:ea typeface="Aptos"/>
+              </a:rPr>
+              <a:t>1</a:t>
+            </a:fld>
+            <a:endParaRPr lang="en-US" sz="800" b="0" u="none" strike="noStrike">
+              <a:solidFill>
+                <a:srgbClr val="000000"/>
+              </a:solidFill>
+              <a:effectLst/>
+              <a:uFillTx/>
+              <a:latin typeface="Times New Roman"/>
+            </a:endParaRPr>
+          </a:p>
+        </p:txBody>
+      </p:sp>
+    </p:spTree>
+  </p:cSld>
+  <p:clrMapOvr>
+    <a:masterClrMapping/>
+  </p:clrMapOvr>
+</p:sld>
+</file>
+
+<file path=ppt/slides/slide2.xml><?xml version="1.0" encoding="utf-8"?>
+<p:sld xmlns:a="http://schemas.openxmlformats.org/drawingml/2006/main" xmlns:r="http://schemas.openxmlformats.org/officeDocument/2006/relationships" xmlns:p="http://schemas.openxmlformats.org/presentationml/2006/main">
   <p:cSld>
     <p:bg>
       <p:bgPr>
         <a:solidFill>
           <a:srgbClr val="F7F8FA"/>
         </a:solidFill>
+        <a:effectLst/>
       </p:bgPr>
     </p:bg>
     <p:spTree>
@@ -2122,7 +3448,7 @@
             <a:round/>
           </a:ln>
           <a:effectLst>
-            <a:outerShdw algn="bl" blurRad="25560" dir="2700000" dist="12218" kx="0" ky="0" rotWithShape="0" sx="100000" sy="100000">
+            <a:outerShdw blurRad="25560" dist="12218" dir="2700000" algn="bl" rotWithShape="0">
               <a:srgbClr val="000000">
                 <a:alpha val="14000"/>
               </a:srgbClr>
@@ -2130,15 +3456,22 @@
           </a:effectLst>
         </p:spPr>
         <p:style>
-          <a:lnRef idx="0"/>
-          <a:fillRef idx="0"/>
-          <a:effectRef idx="0"/>
+          <a:lnRef idx="0">
+            <a:scrgbClr r="0" g="0" b="0"/>
+          </a:lnRef>
+          <a:fillRef idx="0">
+            <a:scrgbClr r="0" g="0" b="0"/>
+          </a:fillRef>
+          <a:effectRef idx="0">
+            <a:scrgbClr r="0" g="0" b="0"/>
+          </a:effectRef>
           <a:fontRef idx="minor"/>
         </p:style>
         <p:txBody>
           <a:bodyPr lIns="90000" tIns="45000" rIns="90000" bIns="45000" anchor="t">
             <a:noAutofit/>
           </a:bodyPr>
+          <a:lstStyle/>
           <a:p>
             <a:endParaRPr lang="en-US" sz="1800" b="0" u="none" strike="noStrike">
               <a:solidFill>
@@ -2171,15 +3504,22 @@
           </a:ln>
         </p:spPr>
         <p:style>
-          <a:lnRef idx="0"/>
-          <a:fillRef idx="0"/>
-          <a:effectRef idx="0"/>
+          <a:lnRef idx="0">
+            <a:scrgbClr r="0" g="0" b="0"/>
+          </a:lnRef>
+          <a:fillRef idx="0">
+            <a:scrgbClr r="0" g="0" b="0"/>
+          </a:fillRef>
+          <a:effectRef idx="0">
+            <a:scrgbClr r="0" g="0" b="0"/>
+          </a:effectRef>
           <a:fontRef idx="minor"/>
         </p:style>
         <p:txBody>
           <a:bodyPr lIns="0" tIns="0" rIns="0" bIns="0" anchor="ctr">
             <a:noAutofit/>
           </a:bodyPr>
+          <a:lstStyle/>
           <a:p>
             <a:pPr algn="ctr" defTabSz="914400">
               <a:lnSpc>
@@ -2232,15 +3572,22 @@
           </a:ln>
         </p:spPr>
         <p:style>
-          <a:lnRef idx="0"/>
-          <a:fillRef idx="0"/>
-          <a:effectRef idx="0"/>
+          <a:lnRef idx="0">
+            <a:scrgbClr r="0" g="0" b="0"/>
+          </a:lnRef>
+          <a:fillRef idx="0">
+            <a:scrgbClr r="0" g="0" b="0"/>
+          </a:fillRef>
+          <a:effectRef idx="0">
+            <a:scrgbClr r="0" g="0" b="0"/>
+          </a:effectRef>
           <a:fontRef idx="minor"/>
         </p:style>
         <p:txBody>
           <a:bodyPr lIns="0" tIns="0" rIns="0" bIns="0" anchor="ctr">
             <a:noAutofit/>
           </a:bodyPr>
+          <a:lstStyle/>
           <a:p>
             <a:pPr algn="ctr" defTabSz="914400">
               <a:lnSpc>
@@ -2297,15 +3644,22 @@
           </a:ln>
         </p:spPr>
         <p:style>
-          <a:lnRef idx="0"/>
-          <a:fillRef idx="0"/>
-          <a:effectRef idx="0"/>
+          <a:lnRef idx="0">
+            <a:scrgbClr r="0" g="0" b="0"/>
+          </a:lnRef>
+          <a:fillRef idx="0">
+            <a:scrgbClr r="0" g="0" b="0"/>
+          </a:fillRef>
+          <a:effectRef idx="0">
+            <a:scrgbClr r="0" g="0" b="0"/>
+          </a:effectRef>
           <a:fontRef idx="minor"/>
         </p:style>
         <p:txBody>
           <a:bodyPr lIns="90000" tIns="45000" rIns="90000" bIns="45000" anchor="t">
             <a:noAutofit/>
           </a:bodyPr>
+          <a:lstStyle/>
           <a:p>
             <a:endParaRPr lang="en-US" sz="1800" b="0" u="none" strike="noStrike">
               <a:solidFill>
@@ -2338,15 +3692,22 @@
           </a:ln>
         </p:spPr>
         <p:style>
-          <a:lnRef idx="0"/>
-          <a:fillRef idx="0"/>
-          <a:effectRef idx="0"/>
+          <a:lnRef idx="0">
+            <a:scrgbClr r="0" g="0" b="0"/>
+          </a:lnRef>
+          <a:fillRef idx="0">
+            <a:scrgbClr r="0" g="0" b="0"/>
+          </a:fillRef>
+          <a:effectRef idx="0">
+            <a:scrgbClr r="0" g="0" b="0"/>
+          </a:effectRef>
           <a:fontRef idx="minor"/>
         </p:style>
         <p:txBody>
           <a:bodyPr lIns="0" tIns="0" rIns="0" bIns="0" anchor="ctr">
             <a:noAutofit/>
           </a:bodyPr>
+          <a:lstStyle/>
           <a:p>
             <a:pPr algn="ctr" defTabSz="914400">
               <a:lnSpc>
@@ -2398,15 +3759,22 @@
           </a:ln>
         </p:spPr>
         <p:style>
-          <a:lnRef idx="0"/>
-          <a:fillRef idx="0"/>
-          <a:effectRef idx="0"/>
+          <a:lnRef idx="0">
+            <a:scrgbClr r="0" g="0" b="0"/>
+          </a:lnRef>
+          <a:fillRef idx="0">
+            <a:scrgbClr r="0" g="0" b="0"/>
+          </a:fillRef>
+          <a:effectRef idx="0">
+            <a:scrgbClr r="0" g="0" b="0"/>
+          </a:effectRef>
           <a:fontRef idx="minor"/>
         </p:style>
         <p:txBody>
           <a:bodyPr lIns="360" tIns="360" rIns="360" bIns="360" anchor="ctr">
             <a:noAutofit/>
           </a:bodyPr>
+          <a:lstStyle/>
           <a:p>
             <a:pPr algn="ctr" defTabSz="914400">
               <a:lnSpc>
@@ -2465,15 +3833,22 @@
           </a:ln>
         </p:spPr>
         <p:style>
-          <a:lnRef idx="0"/>
-          <a:fillRef idx="0"/>
-          <a:effectRef idx="0"/>
+          <a:lnRef idx="0">
+            <a:scrgbClr r="0" g="0" b="0"/>
+          </a:lnRef>
+          <a:fillRef idx="0">
+            <a:scrgbClr r="0" g="0" b="0"/>
+          </a:fillRef>
+          <a:effectRef idx="0">
+            <a:scrgbClr r="0" g="0" b="0"/>
+          </a:effectRef>
           <a:fontRef idx="minor"/>
         </p:style>
         <p:txBody>
           <a:bodyPr lIns="90000" tIns="45000" rIns="90000" bIns="45000" anchor="t">
             <a:noAutofit/>
           </a:bodyPr>
+          <a:lstStyle/>
           <a:p>
             <a:endParaRPr lang="en-US" sz="1800" b="0" u="none" strike="noStrike">
               <a:solidFill>
@@ -2511,15 +3886,22 @@
           </a:ln>
         </p:spPr>
         <p:style>
-          <a:lnRef idx="0"/>
-          <a:fillRef idx="0"/>
-          <a:effectRef idx="0"/>
+          <a:lnRef idx="0">
+            <a:scrgbClr r="0" g="0" b="0"/>
+          </a:lnRef>
+          <a:fillRef idx="0">
+            <a:scrgbClr r="0" g="0" b="0"/>
+          </a:fillRef>
+          <a:effectRef idx="0">
+            <a:scrgbClr r="0" g="0" b="0"/>
+          </a:effectRef>
           <a:fontRef idx="minor"/>
         </p:style>
         <p:txBody>
           <a:bodyPr lIns="90000" tIns="45000" rIns="90000" bIns="45000" anchor="t">
             <a:noAutofit/>
           </a:bodyPr>
+          <a:lstStyle/>
           <a:p>
             <a:endParaRPr lang="en-US" sz="1800" b="0" u="none" strike="noStrike">
               <a:solidFill>
@@ -2552,15 +3934,22 @@
           </a:ln>
         </p:spPr>
         <p:style>
-          <a:lnRef idx="0"/>
-          <a:fillRef idx="0"/>
-          <a:effectRef idx="0"/>
+          <a:lnRef idx="0">
+            <a:scrgbClr r="0" g="0" b="0"/>
+          </a:lnRef>
+          <a:fillRef idx="0">
+            <a:scrgbClr r="0" g="0" b="0"/>
+          </a:fillRef>
+          <a:effectRef idx="0">
+            <a:scrgbClr r="0" g="0" b="0"/>
+          </a:effectRef>
           <a:fontRef idx="minor"/>
         </p:style>
         <p:txBody>
           <a:bodyPr lIns="0" tIns="0" rIns="0" bIns="0" anchor="ctr">
             <a:noAutofit/>
           </a:bodyPr>
+          <a:lstStyle/>
           <a:p>
             <a:pPr algn="ctr" defTabSz="914400">
               <a:lnSpc>
@@ -2612,15 +4001,22 @@
           </a:ln>
         </p:spPr>
         <p:style>
-          <a:lnRef idx="0"/>
-          <a:fillRef idx="0"/>
-          <a:effectRef idx="0"/>
+          <a:lnRef idx="0">
+            <a:scrgbClr r="0" g="0" b="0"/>
+          </a:lnRef>
+          <a:fillRef idx="0">
+            <a:scrgbClr r="0" g="0" b="0"/>
+          </a:fillRef>
+          <a:effectRef idx="0">
+            <a:scrgbClr r="0" g="0" b="0"/>
+          </a:effectRef>
           <a:fontRef idx="minor"/>
         </p:style>
         <p:txBody>
           <a:bodyPr lIns="360" tIns="360" rIns="360" bIns="360" anchor="ctr">
             <a:noAutofit/>
           </a:bodyPr>
+          <a:lstStyle/>
           <a:p>
             <a:pPr algn="ctr" defTabSz="914400">
               <a:lnSpc>
@@ -2679,15 +4075,22 @@
           </a:ln>
         </p:spPr>
         <p:style>
-          <a:lnRef idx="0"/>
-          <a:fillRef idx="0"/>
-          <a:effectRef idx="0"/>
+          <a:lnRef idx="0">
+            <a:scrgbClr r="0" g="0" b="0"/>
+          </a:lnRef>
+          <a:fillRef idx="0">
+            <a:scrgbClr r="0" g="0" b="0"/>
+          </a:fillRef>
+          <a:effectRef idx="0">
+            <a:scrgbClr r="0" g="0" b="0"/>
+          </a:effectRef>
           <a:fontRef idx="minor"/>
         </p:style>
         <p:txBody>
           <a:bodyPr lIns="90000" tIns="45000" rIns="90000" bIns="45000" anchor="t">
             <a:noAutofit/>
           </a:bodyPr>
+          <a:lstStyle/>
           <a:p>
             <a:endParaRPr lang="en-US" sz="1800" b="0" u="none" strike="noStrike">
               <a:solidFill>
@@ -2725,15 +4128,22 @@
           </a:ln>
         </p:spPr>
         <p:style>
-          <a:lnRef idx="0"/>
-          <a:fillRef idx="0"/>
-          <a:effectRef idx="0"/>
+          <a:lnRef idx="0">
+            <a:scrgbClr r="0" g="0" b="0"/>
+          </a:lnRef>
+          <a:fillRef idx="0">
+            <a:scrgbClr r="0" g="0" b="0"/>
+          </a:fillRef>
+          <a:effectRef idx="0">
+            <a:scrgbClr r="0" g="0" b="0"/>
+          </a:effectRef>
           <a:fontRef idx="minor"/>
         </p:style>
         <p:txBody>
           <a:bodyPr lIns="90000" tIns="45000" rIns="90000" bIns="45000" anchor="t">
             <a:noAutofit/>
           </a:bodyPr>
+          <a:lstStyle/>
           <a:p>
             <a:endParaRPr lang="en-US" sz="1800" b="0" u="none" strike="noStrike">
               <a:solidFill>
@@ -2766,15 +4176,22 @@
           </a:ln>
         </p:spPr>
         <p:style>
-          <a:lnRef idx="0"/>
-          <a:fillRef idx="0"/>
-          <a:effectRef idx="0"/>
+          <a:lnRef idx="0">
+            <a:scrgbClr r="0" g="0" b="0"/>
+          </a:lnRef>
+          <a:fillRef idx="0">
+            <a:scrgbClr r="0" g="0" b="0"/>
+          </a:fillRef>
+          <a:effectRef idx="0">
+            <a:scrgbClr r="0" g="0" b="0"/>
+          </a:effectRef>
           <a:fontRef idx="minor"/>
         </p:style>
         <p:txBody>
           <a:bodyPr lIns="0" tIns="0" rIns="0" bIns="0" anchor="ctr">
             <a:noAutofit/>
           </a:bodyPr>
+          <a:lstStyle/>
           <a:p>
             <a:pPr algn="ctr" defTabSz="914400">
               <a:lnSpc>
@@ -2826,15 +4243,22 @@
           </a:ln>
         </p:spPr>
         <p:style>
-          <a:lnRef idx="0"/>
-          <a:fillRef idx="0"/>
-          <a:effectRef idx="0"/>
+          <a:lnRef idx="0">
+            <a:scrgbClr r="0" g="0" b="0"/>
+          </a:lnRef>
+          <a:fillRef idx="0">
+            <a:scrgbClr r="0" g="0" b="0"/>
+          </a:fillRef>
+          <a:effectRef idx="0">
+            <a:scrgbClr r="0" g="0" b="0"/>
+          </a:effectRef>
           <a:fontRef idx="minor"/>
         </p:style>
         <p:txBody>
           <a:bodyPr lIns="360" tIns="360" rIns="360" bIns="360" anchor="ctr">
             <a:noAutofit/>
           </a:bodyPr>
+          <a:lstStyle/>
           <a:p>
             <a:pPr algn="ctr" defTabSz="914400">
               <a:lnSpc>
@@ -2886,15 +4310,22 @@
           </a:ln>
         </p:spPr>
         <p:style>
-          <a:lnRef idx="0"/>
-          <a:fillRef idx="0"/>
-          <a:effectRef idx="0"/>
+          <a:lnRef idx="0">
+            <a:scrgbClr r="0" g="0" b="0"/>
+          </a:lnRef>
+          <a:fillRef idx="0">
+            <a:scrgbClr r="0" g="0" b="0"/>
+          </a:fillRef>
+          <a:effectRef idx="0">
+            <a:scrgbClr r="0" g="0" b="0"/>
+          </a:effectRef>
           <a:fontRef idx="minor"/>
         </p:style>
         <p:txBody>
           <a:bodyPr lIns="0" tIns="0" rIns="0" bIns="0" anchor="ctr">
             <a:noAutofit/>
           </a:bodyPr>
+          <a:lstStyle/>
           <a:p>
             <a:pPr algn="ctr" defTabSz="914400">
               <a:lnSpc>
@@ -2993,7 +4424,7 @@
                 <a:latin typeface="Aptos"/>
                 <a:ea typeface="Aptos"/>
               </a:rPr>
-              <a:t>&lt;number&gt;</a:t>
+              <a:t>2</a:t>
             </a:fld>
             <a:endParaRPr lang="en-US" sz="800" b="0" u="none" strike="noStrike">
               <a:solidFill>
@@ -3008,19 +4439,14 @@
       </p:sp>
     </p:spTree>
   </p:cSld>
-  <mc:AlternateContent>
-    <mc:Choice Requires="p14">
-      <p:transition spd="slow" p14:dur="2000"/>
-    </mc:Choice>
-    <mc:Fallback>
-      <p:transition spd="slow"/>
-    </mc:Fallback>
-  </mc:AlternateContent>
+  <p:clrMapOvr>
+    <a:masterClrMapping/>
+  </p:clrMapOvr>
 </p:sld>
 </file>
 
-<file path=ppt/slides/slide2.xml><?xml version="1.0" encoding="utf-8"?>
-<p:sld xmlns:a="http://schemas.openxmlformats.org/drawingml/2006/main" xmlns:p="http://schemas.openxmlformats.org/presentationml/2006/main" xmlns:r="http://schemas.openxmlformats.org/officeDocument/2006/relationships" xmlns:p14="http://schemas.microsoft.com/office/powerpoint/2010/main" xmlns:p15="http://schemas.microsoft.com/office/powerpoint/2012/main" xmlns:mc="http://schemas.openxmlformats.org/markup-compatibility/2006">
+<file path=ppt/slides/slide3.xml><?xml version="1.0" encoding="utf-8"?>
+<p:sld xmlns:a="http://schemas.openxmlformats.org/drawingml/2006/main" xmlns:r="http://schemas.openxmlformats.org/officeDocument/2006/relationships" xmlns:p="http://schemas.openxmlformats.org/presentationml/2006/main">
   <p:cSld>
     <p:spTree>
       <p:nvGrpSpPr>
@@ -3056,15 +4482,22 @@
           </a:ln>
         </p:spPr>
         <p:style>
-          <a:lnRef idx="0"/>
-          <a:fillRef idx="0"/>
-          <a:effectRef idx="0"/>
+          <a:lnRef idx="0">
+            <a:scrgbClr r="0" g="0" b="0"/>
+          </a:lnRef>
+          <a:fillRef idx="0">
+            <a:scrgbClr r="0" g="0" b="0"/>
+          </a:fillRef>
+          <a:effectRef idx="0">
+            <a:scrgbClr r="0" g="0" b="0"/>
+          </a:effectRef>
           <a:fontRef idx="minor"/>
         </p:style>
         <p:txBody>
           <a:bodyPr lIns="0" tIns="0" rIns="0" bIns="0" anchor="ctr">
             <a:noAutofit/>
           </a:bodyPr>
+          <a:lstStyle/>
           <a:p>
             <a:pPr defTabSz="914400">
               <a:lnSpc>
@@ -3117,15 +4550,22 @@
           </a:ln>
         </p:spPr>
         <p:style>
-          <a:lnRef idx="0"/>
-          <a:fillRef idx="0"/>
-          <a:effectRef idx="0"/>
+          <a:lnRef idx="0">
+            <a:scrgbClr r="0" g="0" b="0"/>
+          </a:lnRef>
+          <a:fillRef idx="0">
+            <a:scrgbClr r="0" g="0" b="0"/>
+          </a:fillRef>
+          <a:effectRef idx="0">
+            <a:scrgbClr r="0" g="0" b="0"/>
+          </a:effectRef>
           <a:fontRef idx="minor"/>
         </p:style>
         <p:txBody>
           <a:bodyPr lIns="0" tIns="0" rIns="0" bIns="0" anchor="ctr">
             <a:noAutofit/>
           </a:bodyPr>
+          <a:lstStyle/>
           <a:p>
             <a:pPr defTabSz="914400">
               <a:lnSpc>
@@ -3183,7 +4623,7 @@
             <a:round/>
           </a:ln>
           <a:effectLst>
-            <a:outerShdw algn="bl" dir="0" dist="0" kx="0" ky="0" rotWithShape="0" sx="100000" sy="100000">
+            <a:outerShdw algn="bl" rotWithShape="0">
               <a:srgbClr val="000000">
                 <a:alpha val="0"/>
               </a:srgbClr>
@@ -3191,15 +4631,22 @@
           </a:effectLst>
         </p:spPr>
         <p:style>
-          <a:lnRef idx="0"/>
-          <a:fillRef idx="0"/>
-          <a:effectRef idx="0"/>
+          <a:lnRef idx="0">
+            <a:scrgbClr r="0" g="0" b="0"/>
+          </a:lnRef>
+          <a:fillRef idx="0">
+            <a:scrgbClr r="0" g="0" b="0"/>
+          </a:fillRef>
+          <a:effectRef idx="0">
+            <a:scrgbClr r="0" g="0" b="0"/>
+          </a:effectRef>
           <a:fontRef idx="minor"/>
         </p:style>
         <p:txBody>
           <a:bodyPr lIns="90000" tIns="45000" rIns="90000" bIns="45000" anchor="t">
             <a:noAutofit/>
           </a:bodyPr>
+          <a:lstStyle/>
           <a:p>
             <a:endParaRPr lang="en-US" sz="1800" b="0" u="none" strike="noStrike">
               <a:solidFill>
@@ -3237,15 +4684,22 @@
           </a:ln>
         </p:spPr>
         <p:style>
-          <a:lnRef idx="0"/>
-          <a:fillRef idx="0"/>
-          <a:effectRef idx="0"/>
+          <a:lnRef idx="0">
+            <a:scrgbClr r="0" g="0" b="0"/>
+          </a:lnRef>
+          <a:fillRef idx="0">
+            <a:scrgbClr r="0" g="0" b="0"/>
+          </a:fillRef>
+          <a:effectRef idx="0">
+            <a:scrgbClr r="0" g="0" b="0"/>
+          </a:effectRef>
           <a:fontRef idx="minor"/>
         </p:style>
         <p:txBody>
           <a:bodyPr lIns="41040" tIns="45000" rIns="41040" bIns="45000" anchor="t">
             <a:noAutofit/>
           </a:bodyPr>
+          <a:lstStyle/>
           <a:p>
             <a:endParaRPr lang="en-US" sz="1800" b="0" u="none" strike="noStrike">
               <a:solidFill>
@@ -3278,15 +4732,22 @@
           </a:ln>
         </p:spPr>
         <p:style>
-          <a:lnRef idx="0"/>
-          <a:fillRef idx="0"/>
-          <a:effectRef idx="0"/>
+          <a:lnRef idx="0">
+            <a:scrgbClr r="0" g="0" b="0"/>
+          </a:lnRef>
+          <a:fillRef idx="0">
+            <a:scrgbClr r="0" g="0" b="0"/>
+          </a:fillRef>
+          <a:effectRef idx="0">
+            <a:scrgbClr r="0" g="0" b="0"/>
+          </a:effectRef>
           <a:fontRef idx="minor"/>
         </p:style>
         <p:txBody>
           <a:bodyPr lIns="0" tIns="0" rIns="0" bIns="0" anchor="ctr">
             <a:noAutofit/>
           </a:bodyPr>
+          <a:lstStyle/>
           <a:p>
             <a:pPr defTabSz="914400">
               <a:lnSpc>
@@ -3338,15 +4799,22 @@
           </a:ln>
         </p:spPr>
         <p:style>
-          <a:lnRef idx="0"/>
-          <a:fillRef idx="0"/>
-          <a:effectRef idx="0"/>
+          <a:lnRef idx="0">
+            <a:scrgbClr r="0" g="0" b="0"/>
+          </a:lnRef>
+          <a:fillRef idx="0">
+            <a:scrgbClr r="0" g="0" b="0"/>
+          </a:fillRef>
+          <a:effectRef idx="0">
+            <a:scrgbClr r="0" g="0" b="0"/>
+          </a:effectRef>
           <a:fontRef idx="minor"/>
         </p:style>
         <p:txBody>
           <a:bodyPr lIns="360" tIns="360" rIns="360" bIns="360" anchor="t">
             <a:noAutofit/>
           </a:bodyPr>
+          <a:lstStyle/>
           <a:p>
             <a:pPr>
               <a:lnSpc>
@@ -3390,7 +4858,7 @@
                 <a:effectLst/>
                 <a:uFillTx/>
                 <a:latin typeface="Aptos"/>
-                <a:hlinkClick r:id="rId1"/>
+                <a:hlinkClick r:id="rId3"/>
               </a:rPr>
               <a:t>https://nodejs.org/en/download
 </a:t>
@@ -3584,7 +5052,7 @@
             <a:round/>
           </a:ln>
           <a:effectLst>
-            <a:outerShdw algn="bl" dir="0" dist="0" kx="0" ky="0" rotWithShape="0" sx="100000" sy="100000">
+            <a:outerShdw algn="bl" rotWithShape="0">
               <a:srgbClr val="000000">
                 <a:alpha val="0"/>
               </a:srgbClr>
@@ -3592,15 +5060,22 @@
           </a:effectLst>
         </p:spPr>
         <p:style>
-          <a:lnRef idx="0"/>
-          <a:fillRef idx="0"/>
-          <a:effectRef idx="0"/>
+          <a:lnRef idx="0">
+            <a:scrgbClr r="0" g="0" b="0"/>
+          </a:lnRef>
+          <a:fillRef idx="0">
+            <a:scrgbClr r="0" g="0" b="0"/>
+          </a:fillRef>
+          <a:effectRef idx="0">
+            <a:scrgbClr r="0" g="0" b="0"/>
+          </a:effectRef>
           <a:fontRef idx="minor"/>
         </p:style>
         <p:txBody>
           <a:bodyPr lIns="90000" tIns="45000" rIns="90000" bIns="45000" anchor="t">
             <a:noAutofit/>
           </a:bodyPr>
+          <a:lstStyle/>
           <a:p>
             <a:endParaRPr lang="en-US" sz="1800" b="0" u="none" strike="noStrike">
               <a:solidFill>
@@ -3638,15 +5113,22 @@
           </a:ln>
         </p:spPr>
         <p:style>
-          <a:lnRef idx="0"/>
-          <a:fillRef idx="0"/>
-          <a:effectRef idx="0"/>
+          <a:lnRef idx="0">
+            <a:scrgbClr r="0" g="0" b="0"/>
+          </a:lnRef>
+          <a:fillRef idx="0">
+            <a:scrgbClr r="0" g="0" b="0"/>
+          </a:fillRef>
+          <a:effectRef idx="0">
+            <a:scrgbClr r="0" g="0" b="0"/>
+          </a:effectRef>
           <a:fontRef idx="minor"/>
         </p:style>
         <p:txBody>
           <a:bodyPr lIns="41040" tIns="45000" rIns="41040" bIns="45000" anchor="t">
             <a:noAutofit/>
           </a:bodyPr>
+          <a:lstStyle/>
           <a:p>
             <a:endParaRPr lang="en-US" sz="1800" b="0" u="none" strike="noStrike">
               <a:solidFill>
@@ -3679,15 +5161,22 @@
           </a:ln>
         </p:spPr>
         <p:style>
-          <a:lnRef idx="0"/>
-          <a:fillRef idx="0"/>
-          <a:effectRef idx="0"/>
+          <a:lnRef idx="0">
+            <a:scrgbClr r="0" g="0" b="0"/>
+          </a:lnRef>
+          <a:fillRef idx="0">
+            <a:scrgbClr r="0" g="0" b="0"/>
+          </a:fillRef>
+          <a:effectRef idx="0">
+            <a:scrgbClr r="0" g="0" b="0"/>
+          </a:effectRef>
           <a:fontRef idx="minor"/>
         </p:style>
         <p:txBody>
           <a:bodyPr lIns="0" tIns="0" rIns="0" bIns="0" anchor="ctr">
             <a:noAutofit/>
           </a:bodyPr>
+          <a:lstStyle/>
           <a:p>
             <a:pPr defTabSz="914400">
               <a:lnSpc>
@@ -3739,15 +5228,22 @@
           </a:ln>
         </p:spPr>
         <p:style>
-          <a:lnRef idx="0"/>
-          <a:fillRef idx="0"/>
-          <a:effectRef idx="0"/>
+          <a:lnRef idx="0">
+            <a:scrgbClr r="0" g="0" b="0"/>
+          </a:lnRef>
+          <a:fillRef idx="0">
+            <a:scrgbClr r="0" g="0" b="0"/>
+          </a:fillRef>
+          <a:effectRef idx="0">
+            <a:scrgbClr r="0" g="0" b="0"/>
+          </a:effectRef>
           <a:fontRef idx="minor"/>
         </p:style>
         <p:txBody>
           <a:bodyPr lIns="360" tIns="360" rIns="360" bIns="360" anchor="t">
             <a:noAutofit/>
           </a:bodyPr>
+          <a:lstStyle/>
           <a:p>
             <a:pPr defTabSz="914400">
               <a:lnSpc>
@@ -3806,15 +5302,22 @@
           </a:ln>
         </p:spPr>
         <p:style>
-          <a:lnRef idx="0"/>
-          <a:fillRef idx="0"/>
-          <a:effectRef idx="0"/>
+          <a:lnRef idx="0">
+            <a:scrgbClr r="0" g="0" b="0"/>
+          </a:lnRef>
+          <a:fillRef idx="0">
+            <a:scrgbClr r="0" g="0" b="0"/>
+          </a:fillRef>
+          <a:effectRef idx="0">
+            <a:scrgbClr r="0" g="0" b="0"/>
+          </a:effectRef>
           <a:fontRef idx="minor"/>
         </p:style>
         <p:txBody>
           <a:bodyPr lIns="90000" tIns="45000" rIns="90000" bIns="45000" anchor="t">
             <a:noAutofit/>
           </a:bodyPr>
+          <a:lstStyle/>
           <a:p>
             <a:endParaRPr lang="en-US" sz="1800" b="0" u="none" strike="noStrike">
               <a:solidFill>
@@ -3847,15 +5350,22 @@
           </a:ln>
         </p:spPr>
         <p:style>
-          <a:lnRef idx="0"/>
-          <a:fillRef idx="0"/>
-          <a:effectRef idx="0"/>
+          <a:lnRef idx="0">
+            <a:scrgbClr r="0" g="0" b="0"/>
+          </a:lnRef>
+          <a:fillRef idx="0">
+            <a:scrgbClr r="0" g="0" b="0"/>
+          </a:fillRef>
+          <a:effectRef idx="0">
+            <a:scrgbClr r="0" g="0" b="0"/>
+          </a:effectRef>
           <a:fontRef idx="minor"/>
         </p:style>
         <p:txBody>
           <a:bodyPr lIns="360" tIns="360" rIns="360" bIns="360" anchor="ctr">
             <a:noAutofit/>
           </a:bodyPr>
+          <a:lstStyle/>
           <a:p>
             <a:pPr defTabSz="914400">
               <a:lnSpc>
@@ -3943,15 +5453,22 @@
           </a:ln>
         </p:spPr>
         <p:style>
-          <a:lnRef idx="0"/>
-          <a:fillRef idx="0"/>
-          <a:effectRef idx="0"/>
+          <a:lnRef idx="0">
+            <a:scrgbClr r="0" g="0" b="0"/>
+          </a:lnRef>
+          <a:fillRef idx="0">
+            <a:scrgbClr r="0" g="0" b="0"/>
+          </a:fillRef>
+          <a:effectRef idx="0">
+            <a:scrgbClr r="0" g="0" b="0"/>
+          </a:effectRef>
           <a:fontRef idx="minor"/>
         </p:style>
         <p:txBody>
           <a:bodyPr lIns="90000" tIns="45000" rIns="90000" bIns="45000" anchor="t">
             <a:noAutofit/>
           </a:bodyPr>
+          <a:lstStyle/>
           <a:p>
             <a:endParaRPr lang="en-US" sz="1800" b="0" u="none" strike="noStrike">
               <a:solidFill>
@@ -3984,15 +5501,22 @@
           </a:ln>
         </p:spPr>
         <p:style>
-          <a:lnRef idx="0"/>
-          <a:fillRef idx="0"/>
-          <a:effectRef idx="0"/>
+          <a:lnRef idx="0">
+            <a:scrgbClr r="0" g="0" b="0"/>
+          </a:lnRef>
+          <a:fillRef idx="0">
+            <a:scrgbClr r="0" g="0" b="0"/>
+          </a:fillRef>
+          <a:effectRef idx="0">
+            <a:scrgbClr r="0" g="0" b="0"/>
+          </a:effectRef>
           <a:fontRef idx="minor"/>
         </p:style>
         <p:txBody>
           <a:bodyPr lIns="0" tIns="0" rIns="0" bIns="0" anchor="ctr">
             <a:noAutofit/>
           </a:bodyPr>
+          <a:lstStyle/>
           <a:p>
             <a:pPr algn="ctr" defTabSz="914400">
               <a:lnSpc>
@@ -4044,15 +5568,22 @@
           </a:ln>
         </p:spPr>
         <p:style>
-          <a:lnRef idx="0"/>
-          <a:fillRef idx="0"/>
-          <a:effectRef idx="0"/>
+          <a:lnRef idx="0">
+            <a:scrgbClr r="0" g="0" b="0"/>
+          </a:lnRef>
+          <a:fillRef idx="0">
+            <a:scrgbClr r="0" g="0" b="0"/>
+          </a:fillRef>
+          <a:effectRef idx="0">
+            <a:scrgbClr r="0" g="0" b="0"/>
+          </a:effectRef>
           <a:fontRef idx="minor"/>
         </p:style>
         <p:txBody>
           <a:bodyPr lIns="0" tIns="0" rIns="0" bIns="0" anchor="ctr">
             <a:noAutofit/>
           </a:bodyPr>
+          <a:lstStyle/>
           <a:p>
             <a:pPr defTabSz="914400">
               <a:lnSpc>
@@ -4104,15 +5635,22 @@
           </a:ln>
         </p:spPr>
         <p:style>
-          <a:lnRef idx="0"/>
-          <a:fillRef idx="0"/>
-          <a:effectRef idx="0"/>
+          <a:lnRef idx="0">
+            <a:scrgbClr r="0" g="0" b="0"/>
+          </a:lnRef>
+          <a:fillRef idx="0">
+            <a:scrgbClr r="0" g="0" b="0"/>
+          </a:fillRef>
+          <a:effectRef idx="0">
+            <a:scrgbClr r="0" g="0" b="0"/>
+          </a:effectRef>
           <a:fontRef idx="minor"/>
         </p:style>
         <p:txBody>
           <a:bodyPr lIns="0" tIns="0" rIns="0" bIns="0" anchor="ctr">
             <a:noAutofit/>
           </a:bodyPr>
+          <a:lstStyle/>
           <a:p>
             <a:pPr defTabSz="914400">
               <a:lnSpc>
@@ -4211,7 +5749,7 @@
                 <a:latin typeface="Aptos"/>
                 <a:ea typeface="Aptos"/>
               </a:rPr>
-              <a:t>&lt;number&gt;</a:t>
+              <a:t>3</a:t>
             </a:fld>
             <a:endParaRPr lang="en-US" sz="800" b="0" u="none" strike="noStrike">
               <a:solidFill>
@@ -4226,19 +5764,14 @@
       </p:sp>
     </p:spTree>
   </p:cSld>
-  <mc:AlternateContent>
-    <mc:Choice Requires="p14">
-      <p:transition spd="slow" p14:dur="2000"/>
-    </mc:Choice>
-    <mc:Fallback>
-      <p:transition spd="slow"/>
-    </mc:Fallback>
-  </mc:AlternateContent>
+  <p:clrMapOvr>
+    <a:masterClrMapping/>
+  </p:clrMapOvr>
 </p:sld>
 </file>
 
-<file path=ppt/slides/slide3.xml><?xml version="1.0" encoding="utf-8"?>
-<p:sld xmlns:a="http://schemas.openxmlformats.org/drawingml/2006/main" xmlns:p="http://schemas.openxmlformats.org/presentationml/2006/main" xmlns:r="http://schemas.openxmlformats.org/officeDocument/2006/relationships" xmlns:p14="http://schemas.microsoft.com/office/powerpoint/2010/main" xmlns:p15="http://schemas.microsoft.com/office/powerpoint/2012/main" xmlns:mc="http://schemas.openxmlformats.org/markup-compatibility/2006">
+<file path=ppt/slides/slide4.xml><?xml version="1.0" encoding="utf-8"?>
+<p:sld xmlns:a="http://schemas.openxmlformats.org/drawingml/2006/main" xmlns:r="http://schemas.openxmlformats.org/officeDocument/2006/relationships" xmlns:p="http://schemas.openxmlformats.org/presentationml/2006/main">
   <p:cSld>
     <p:spTree>
       <p:nvGrpSpPr>
@@ -4274,15 +5807,22 @@
           </a:ln>
         </p:spPr>
         <p:style>
-          <a:lnRef idx="0"/>
-          <a:fillRef idx="0"/>
-          <a:effectRef idx="0"/>
+          <a:lnRef idx="0">
+            <a:scrgbClr r="0" g="0" b="0"/>
+          </a:lnRef>
+          <a:fillRef idx="0">
+            <a:scrgbClr r="0" g="0" b="0"/>
+          </a:fillRef>
+          <a:effectRef idx="0">
+            <a:scrgbClr r="0" g="0" b="0"/>
+          </a:effectRef>
           <a:fontRef idx="minor"/>
         </p:style>
         <p:txBody>
           <a:bodyPr lIns="0" tIns="0" rIns="0" bIns="0" anchor="ctr">
             <a:noAutofit/>
           </a:bodyPr>
+          <a:lstStyle/>
           <a:p>
             <a:pPr defTabSz="914400">
               <a:lnSpc>
@@ -4335,15 +5875,22 @@
           </a:ln>
         </p:spPr>
         <p:style>
-          <a:lnRef idx="0"/>
-          <a:fillRef idx="0"/>
-          <a:effectRef idx="0"/>
+          <a:lnRef idx="0">
+            <a:scrgbClr r="0" g="0" b="0"/>
+          </a:lnRef>
+          <a:fillRef idx="0">
+            <a:scrgbClr r="0" g="0" b="0"/>
+          </a:fillRef>
+          <a:effectRef idx="0">
+            <a:scrgbClr r="0" g="0" b="0"/>
+          </a:effectRef>
           <a:fontRef idx="minor"/>
         </p:style>
         <p:txBody>
           <a:bodyPr lIns="0" tIns="0" rIns="0" bIns="0" anchor="ctr">
             <a:noAutofit/>
           </a:bodyPr>
+          <a:lstStyle/>
           <a:p>
             <a:pPr defTabSz="914400">
               <a:lnSpc>
@@ -4401,7 +5948,7 @@
             <a:round/>
           </a:ln>
           <a:effectLst>
-            <a:outerShdw algn="bl" dir="0" dist="0" kx="0" ky="0" rotWithShape="0" sx="100000" sy="100000">
+            <a:outerShdw algn="bl" rotWithShape="0">
               <a:srgbClr val="000000">
                 <a:alpha val="0"/>
               </a:srgbClr>
@@ -4409,15 +5956,22 @@
           </a:effectLst>
         </p:spPr>
         <p:style>
-          <a:lnRef idx="0"/>
-          <a:fillRef idx="0"/>
-          <a:effectRef idx="0"/>
+          <a:lnRef idx="0">
+            <a:scrgbClr r="0" g="0" b="0"/>
+          </a:lnRef>
+          <a:fillRef idx="0">
+            <a:scrgbClr r="0" g="0" b="0"/>
+          </a:fillRef>
+          <a:effectRef idx="0">
+            <a:scrgbClr r="0" g="0" b="0"/>
+          </a:effectRef>
           <a:fontRef idx="minor"/>
         </p:style>
         <p:txBody>
           <a:bodyPr lIns="90000" tIns="45000" rIns="90000" bIns="45000" anchor="t">
             <a:noAutofit/>
           </a:bodyPr>
+          <a:lstStyle/>
           <a:p>
             <a:endParaRPr lang="en-US" sz="1800" b="0" u="none" strike="noStrike">
               <a:solidFill>
@@ -4455,15 +6009,22 @@
           </a:ln>
         </p:spPr>
         <p:style>
-          <a:lnRef idx="0"/>
-          <a:fillRef idx="0"/>
-          <a:effectRef idx="0"/>
+          <a:lnRef idx="0">
+            <a:scrgbClr r="0" g="0" b="0"/>
+          </a:lnRef>
+          <a:fillRef idx="0">
+            <a:scrgbClr r="0" g="0" b="0"/>
+          </a:fillRef>
+          <a:effectRef idx="0">
+            <a:scrgbClr r="0" g="0" b="0"/>
+          </a:effectRef>
           <a:fontRef idx="minor"/>
         </p:style>
         <p:txBody>
           <a:bodyPr lIns="41040" tIns="45000" rIns="41040" bIns="45000" anchor="t">
             <a:noAutofit/>
           </a:bodyPr>
+          <a:lstStyle/>
           <a:p>
             <a:endParaRPr lang="en-US" sz="1800" b="0" u="none" strike="noStrike">
               <a:solidFill>
@@ -4496,15 +6057,22 @@
           </a:ln>
         </p:spPr>
         <p:style>
-          <a:lnRef idx="0"/>
-          <a:fillRef idx="0"/>
-          <a:effectRef idx="0"/>
+          <a:lnRef idx="0">
+            <a:scrgbClr r="0" g="0" b="0"/>
+          </a:lnRef>
+          <a:fillRef idx="0">
+            <a:scrgbClr r="0" g="0" b="0"/>
+          </a:fillRef>
+          <a:effectRef idx="0">
+            <a:scrgbClr r="0" g="0" b="0"/>
+          </a:effectRef>
           <a:fontRef idx="minor"/>
         </p:style>
         <p:txBody>
           <a:bodyPr lIns="0" tIns="0" rIns="0" bIns="0" anchor="ctr">
             <a:noAutofit/>
           </a:bodyPr>
+          <a:lstStyle/>
           <a:p>
             <a:pPr defTabSz="914400">
               <a:lnSpc>
@@ -4556,15 +6124,22 @@
           </a:ln>
         </p:spPr>
         <p:style>
-          <a:lnRef idx="0"/>
-          <a:fillRef idx="0"/>
-          <a:effectRef idx="0"/>
+          <a:lnRef idx="0">
+            <a:scrgbClr r="0" g="0" b="0"/>
+          </a:lnRef>
+          <a:fillRef idx="0">
+            <a:scrgbClr r="0" g="0" b="0"/>
+          </a:fillRef>
+          <a:effectRef idx="0">
+            <a:scrgbClr r="0" g="0" b="0"/>
+          </a:effectRef>
           <a:fontRef idx="minor"/>
         </p:style>
         <p:txBody>
           <a:bodyPr lIns="360" tIns="360" rIns="360" bIns="360" anchor="t">
             <a:noAutofit/>
           </a:bodyPr>
+          <a:lstStyle/>
           <a:p>
             <a:pPr defTabSz="914400">
               <a:lnSpc>
@@ -4623,15 +6198,22 @@
           </a:ln>
         </p:spPr>
         <p:style>
-          <a:lnRef idx="0"/>
-          <a:fillRef idx="0"/>
-          <a:effectRef idx="0"/>
+          <a:lnRef idx="0">
+            <a:scrgbClr r="0" g="0" b="0"/>
+          </a:lnRef>
+          <a:fillRef idx="0">
+            <a:scrgbClr r="0" g="0" b="0"/>
+          </a:fillRef>
+          <a:effectRef idx="0">
+            <a:scrgbClr r="0" g="0" b="0"/>
+          </a:effectRef>
           <a:fontRef idx="minor"/>
         </p:style>
         <p:txBody>
           <a:bodyPr lIns="90000" tIns="45000" rIns="90000" bIns="45000" anchor="t">
             <a:noAutofit/>
           </a:bodyPr>
+          <a:lstStyle/>
           <a:p>
             <a:endParaRPr lang="en-US" sz="1800" b="0" u="none" strike="noStrike">
               <a:solidFill>
@@ -4664,15 +6246,22 @@
           </a:ln>
         </p:spPr>
         <p:style>
-          <a:lnRef idx="0"/>
-          <a:fillRef idx="0"/>
-          <a:effectRef idx="0"/>
+          <a:lnRef idx="0">
+            <a:scrgbClr r="0" g="0" b="0"/>
+          </a:lnRef>
+          <a:fillRef idx="0">
+            <a:scrgbClr r="0" g="0" b="0"/>
+          </a:fillRef>
+          <a:effectRef idx="0">
+            <a:scrgbClr r="0" g="0" b="0"/>
+          </a:effectRef>
           <a:fontRef idx="minor"/>
         </p:style>
         <p:txBody>
           <a:bodyPr lIns="360" tIns="360" rIns="360" bIns="360" anchor="ctr">
             <a:noAutofit/>
           </a:bodyPr>
+          <a:lstStyle/>
           <a:p>
             <a:pPr defTabSz="914400">
               <a:lnSpc>
@@ -4791,7 +6380,7 @@
             <a:round/>
           </a:ln>
           <a:effectLst>
-            <a:outerShdw algn="bl" dir="0" dist="0" kx="0" ky="0" rotWithShape="0" sx="100000" sy="100000">
+            <a:outerShdw algn="bl" rotWithShape="0">
               <a:srgbClr val="000000">
                 <a:alpha val="0"/>
               </a:srgbClr>
@@ -4799,15 +6388,22 @@
           </a:effectLst>
         </p:spPr>
         <p:style>
-          <a:lnRef idx="0"/>
-          <a:fillRef idx="0"/>
-          <a:effectRef idx="0"/>
+          <a:lnRef idx="0">
+            <a:scrgbClr r="0" g="0" b="0"/>
+          </a:lnRef>
+          <a:fillRef idx="0">
+            <a:scrgbClr r="0" g="0" b="0"/>
+          </a:fillRef>
+          <a:effectRef idx="0">
+            <a:scrgbClr r="0" g="0" b="0"/>
+          </a:effectRef>
           <a:fontRef idx="minor"/>
         </p:style>
         <p:txBody>
           <a:bodyPr lIns="90000" tIns="45000" rIns="90000" bIns="45000" anchor="t">
             <a:noAutofit/>
           </a:bodyPr>
+          <a:lstStyle/>
           <a:p>
             <a:endParaRPr lang="en-US" sz="1800" b="0" u="none" strike="noStrike">
               <a:solidFill>
@@ -4845,15 +6441,22 @@
           </a:ln>
         </p:spPr>
         <p:style>
-          <a:lnRef idx="0"/>
-          <a:fillRef idx="0"/>
-          <a:effectRef idx="0"/>
+          <a:lnRef idx="0">
+            <a:scrgbClr r="0" g="0" b="0"/>
+          </a:lnRef>
+          <a:fillRef idx="0">
+            <a:scrgbClr r="0" g="0" b="0"/>
+          </a:fillRef>
+          <a:effectRef idx="0">
+            <a:scrgbClr r="0" g="0" b="0"/>
+          </a:effectRef>
           <a:fontRef idx="minor"/>
         </p:style>
         <p:txBody>
           <a:bodyPr lIns="41040" tIns="45000" rIns="41040" bIns="45000" anchor="t">
             <a:noAutofit/>
           </a:bodyPr>
+          <a:lstStyle/>
           <a:p>
             <a:endParaRPr lang="en-US" sz="1800" b="0" u="none" strike="noStrike">
               <a:solidFill>
@@ -4886,15 +6489,22 @@
           </a:ln>
         </p:spPr>
         <p:style>
-          <a:lnRef idx="0"/>
-          <a:fillRef idx="0"/>
-          <a:effectRef idx="0"/>
+          <a:lnRef idx="0">
+            <a:scrgbClr r="0" g="0" b="0"/>
+          </a:lnRef>
+          <a:fillRef idx="0">
+            <a:scrgbClr r="0" g="0" b="0"/>
+          </a:fillRef>
+          <a:effectRef idx="0">
+            <a:scrgbClr r="0" g="0" b="0"/>
+          </a:effectRef>
           <a:fontRef idx="minor"/>
         </p:style>
         <p:txBody>
           <a:bodyPr lIns="0" tIns="0" rIns="0" bIns="0" anchor="ctr">
             <a:noAutofit/>
           </a:bodyPr>
+          <a:lstStyle/>
           <a:p>
             <a:pPr defTabSz="914400">
               <a:lnSpc>
@@ -4946,15 +6556,22 @@
           </a:ln>
         </p:spPr>
         <p:style>
-          <a:lnRef idx="0"/>
-          <a:fillRef idx="0"/>
-          <a:effectRef idx="0"/>
+          <a:lnRef idx="0">
+            <a:scrgbClr r="0" g="0" b="0"/>
+          </a:lnRef>
+          <a:fillRef idx="0">
+            <a:scrgbClr r="0" g="0" b="0"/>
+          </a:fillRef>
+          <a:effectRef idx="0">
+            <a:scrgbClr r="0" g="0" b="0"/>
+          </a:effectRef>
           <a:fontRef idx="minor"/>
         </p:style>
         <p:txBody>
           <a:bodyPr lIns="360" tIns="360" rIns="360" bIns="360" anchor="t">
             <a:noAutofit/>
           </a:bodyPr>
+          <a:lstStyle/>
           <a:p>
             <a:pPr defTabSz="914400">
               <a:lnSpc>
@@ -5013,15 +6630,22 @@
           </a:ln>
         </p:spPr>
         <p:style>
-          <a:lnRef idx="0"/>
-          <a:fillRef idx="0"/>
-          <a:effectRef idx="0"/>
+          <a:lnRef idx="0">
+            <a:scrgbClr r="0" g="0" b="0"/>
+          </a:lnRef>
+          <a:fillRef idx="0">
+            <a:scrgbClr r="0" g="0" b="0"/>
+          </a:fillRef>
+          <a:effectRef idx="0">
+            <a:scrgbClr r="0" g="0" b="0"/>
+          </a:effectRef>
           <a:fontRef idx="minor"/>
         </p:style>
         <p:txBody>
           <a:bodyPr lIns="90000" tIns="45000" rIns="90000" bIns="45000" anchor="t">
             <a:noAutofit/>
           </a:bodyPr>
+          <a:lstStyle/>
           <a:p>
             <a:endParaRPr lang="en-US" sz="1800" b="0" u="none" strike="noStrike">
               <a:solidFill>
@@ -5054,15 +6678,22 @@
           </a:ln>
         </p:spPr>
         <p:style>
-          <a:lnRef idx="0"/>
-          <a:fillRef idx="0"/>
-          <a:effectRef idx="0"/>
+          <a:lnRef idx="0">
+            <a:scrgbClr r="0" g="0" b="0"/>
+          </a:lnRef>
+          <a:fillRef idx="0">
+            <a:scrgbClr r="0" g="0" b="0"/>
+          </a:fillRef>
+          <a:effectRef idx="0">
+            <a:scrgbClr r="0" g="0" b="0"/>
+          </a:effectRef>
           <a:fontRef idx="minor"/>
         </p:style>
         <p:txBody>
           <a:bodyPr lIns="360" tIns="360" rIns="360" bIns="360" anchor="ctr">
             <a:noAutofit/>
           </a:bodyPr>
+          <a:lstStyle/>
           <a:p>
             <a:pPr defTabSz="914400">
               <a:lnSpc>
@@ -5169,7 +6800,7 @@
             <a:round/>
           </a:ln>
           <a:effectLst>
-            <a:outerShdw algn="bl" dir="0" dist="0" kx="0" ky="0" rotWithShape="0" sx="100000" sy="100000">
+            <a:outerShdw algn="bl" rotWithShape="0">
               <a:srgbClr val="000000">
                 <a:alpha val="0"/>
               </a:srgbClr>
@@ -5177,15 +6808,22 @@
           </a:effectLst>
         </p:spPr>
         <p:style>
-          <a:lnRef idx="0"/>
-          <a:fillRef idx="0"/>
-          <a:effectRef idx="0"/>
+          <a:lnRef idx="0">
+            <a:scrgbClr r="0" g="0" b="0"/>
+          </a:lnRef>
+          <a:fillRef idx="0">
+            <a:scrgbClr r="0" g="0" b="0"/>
+          </a:fillRef>
+          <a:effectRef idx="0">
+            <a:scrgbClr r="0" g="0" b="0"/>
+          </a:effectRef>
           <a:fontRef idx="minor"/>
         </p:style>
         <p:txBody>
           <a:bodyPr lIns="90000" tIns="45000" rIns="90000" bIns="45000" anchor="t">
             <a:noAutofit/>
           </a:bodyPr>
+          <a:lstStyle/>
           <a:p>
             <a:endParaRPr lang="en-US" sz="1800" b="0" u="none" strike="noStrike">
               <a:solidFill>
@@ -5223,15 +6861,22 @@
           </a:ln>
         </p:spPr>
         <p:style>
-          <a:lnRef idx="0"/>
-          <a:fillRef idx="0"/>
-          <a:effectRef idx="0"/>
+          <a:lnRef idx="0">
+            <a:scrgbClr r="0" g="0" b="0"/>
+          </a:lnRef>
+          <a:fillRef idx="0">
+            <a:scrgbClr r="0" g="0" b="0"/>
+          </a:fillRef>
+          <a:effectRef idx="0">
+            <a:scrgbClr r="0" g="0" b="0"/>
+          </a:effectRef>
           <a:fontRef idx="minor"/>
         </p:style>
         <p:txBody>
           <a:bodyPr lIns="41040" tIns="45000" rIns="41040" bIns="45000" anchor="t">
             <a:noAutofit/>
           </a:bodyPr>
+          <a:lstStyle/>
           <a:p>
             <a:endParaRPr lang="en-US" sz="1800" b="0" u="none" strike="noStrike">
               <a:solidFill>
@@ -5264,15 +6909,22 @@
           </a:ln>
         </p:spPr>
         <p:style>
-          <a:lnRef idx="0"/>
-          <a:fillRef idx="0"/>
-          <a:effectRef idx="0"/>
+          <a:lnRef idx="0">
+            <a:scrgbClr r="0" g="0" b="0"/>
+          </a:lnRef>
+          <a:fillRef idx="0">
+            <a:scrgbClr r="0" g="0" b="0"/>
+          </a:fillRef>
+          <a:effectRef idx="0">
+            <a:scrgbClr r="0" g="0" b="0"/>
+          </a:effectRef>
           <a:fontRef idx="minor"/>
         </p:style>
         <p:txBody>
           <a:bodyPr lIns="0" tIns="0" rIns="0" bIns="0" anchor="ctr">
             <a:noAutofit/>
           </a:bodyPr>
+          <a:lstStyle/>
           <a:p>
             <a:pPr defTabSz="914400">
               <a:lnSpc>
@@ -5324,15 +6976,22 @@
           </a:ln>
         </p:spPr>
         <p:style>
-          <a:lnRef idx="0"/>
-          <a:fillRef idx="0"/>
-          <a:effectRef idx="0"/>
+          <a:lnRef idx="0">
+            <a:scrgbClr r="0" g="0" b="0"/>
+          </a:lnRef>
+          <a:fillRef idx="0">
+            <a:scrgbClr r="0" g="0" b="0"/>
+          </a:fillRef>
+          <a:effectRef idx="0">
+            <a:scrgbClr r="0" g="0" b="0"/>
+          </a:effectRef>
           <a:fontRef idx="minor"/>
         </p:style>
         <p:txBody>
           <a:bodyPr lIns="360" tIns="360" rIns="360" bIns="360" anchor="t">
             <a:noAutofit/>
           </a:bodyPr>
+          <a:lstStyle/>
           <a:p>
             <a:pPr defTabSz="914400">
               <a:lnSpc>
@@ -5391,15 +7050,22 @@
           </a:ln>
         </p:spPr>
         <p:style>
-          <a:lnRef idx="0"/>
-          <a:fillRef idx="0"/>
-          <a:effectRef idx="0"/>
+          <a:lnRef idx="0">
+            <a:scrgbClr r="0" g="0" b="0"/>
+          </a:lnRef>
+          <a:fillRef idx="0">
+            <a:scrgbClr r="0" g="0" b="0"/>
+          </a:fillRef>
+          <a:effectRef idx="0">
+            <a:scrgbClr r="0" g="0" b="0"/>
+          </a:effectRef>
           <a:fontRef idx="minor"/>
         </p:style>
         <p:txBody>
           <a:bodyPr lIns="90000" tIns="45000" rIns="90000" bIns="45000" anchor="t">
             <a:noAutofit/>
           </a:bodyPr>
+          <a:lstStyle/>
           <a:p>
             <a:endParaRPr lang="en-US" sz="1800" b="0" u="none" strike="noStrike">
               <a:solidFill>
@@ -5432,15 +7098,22 @@
           </a:ln>
         </p:spPr>
         <p:style>
-          <a:lnRef idx="0"/>
-          <a:fillRef idx="0"/>
-          <a:effectRef idx="0"/>
+          <a:lnRef idx="0">
+            <a:scrgbClr r="0" g="0" b="0"/>
+          </a:lnRef>
+          <a:fillRef idx="0">
+            <a:scrgbClr r="0" g="0" b="0"/>
+          </a:fillRef>
+          <a:effectRef idx="0">
+            <a:scrgbClr r="0" g="0" b="0"/>
+          </a:effectRef>
           <a:fontRef idx="minor"/>
         </p:style>
         <p:txBody>
           <a:bodyPr lIns="360" tIns="360" rIns="360" bIns="360" anchor="ctr">
             <a:noAutofit/>
           </a:bodyPr>
+          <a:lstStyle/>
           <a:p>
             <a:pPr defTabSz="914400">
               <a:lnSpc>
@@ -5523,15 +7196,22 @@
           </a:ln>
         </p:spPr>
         <p:style>
-          <a:lnRef idx="0"/>
-          <a:fillRef idx="0"/>
-          <a:effectRef idx="0"/>
+          <a:lnRef idx="0">
+            <a:scrgbClr r="0" g="0" b="0"/>
+          </a:lnRef>
+          <a:fillRef idx="0">
+            <a:scrgbClr r="0" g="0" b="0"/>
+          </a:fillRef>
+          <a:effectRef idx="0">
+            <a:scrgbClr r="0" g="0" b="0"/>
+          </a:effectRef>
           <a:fontRef idx="minor"/>
         </p:style>
         <p:txBody>
           <a:bodyPr lIns="360" tIns="360" rIns="360" bIns="360" anchor="ctr">
             <a:noAutofit/>
           </a:bodyPr>
+          <a:lstStyle/>
           <a:p>
             <a:pPr algn="ctr" defTabSz="914400">
               <a:lnSpc>
@@ -5630,7 +7310,7 @@
                 <a:latin typeface="Aptos"/>
                 <a:ea typeface="Aptos"/>
               </a:rPr>
-              <a:t>&lt;number&gt;</a:t>
+              <a:t>4</a:t>
             </a:fld>
             <a:endParaRPr lang="en-US" sz="800" b="0" u="none" strike="noStrike">
               <a:solidFill>
@@ -5670,15 +7350,22 @@
           </a:ln>
         </p:spPr>
         <p:style>
-          <a:lnRef idx="0"/>
-          <a:fillRef idx="0"/>
-          <a:effectRef idx="0"/>
+          <a:lnRef idx="0">
+            <a:scrgbClr r="0" g="0" b="0"/>
+          </a:lnRef>
+          <a:fillRef idx="0">
+            <a:scrgbClr r="0" g="0" b="0"/>
+          </a:fillRef>
+          <a:effectRef idx="0">
+            <a:scrgbClr r="0" g="0" b="0"/>
+          </a:effectRef>
           <a:fontRef idx="minor"/>
         </p:style>
         <p:txBody>
           <a:bodyPr lIns="90000" tIns="45000" rIns="90000" bIns="45000" anchor="t">
             <a:noAutofit/>
           </a:bodyPr>
+          <a:lstStyle/>
           <a:p>
             <a:pPr>
               <a:lnSpc>
@@ -5779,19 +7466,14 @@
       </p:sp>
     </p:spTree>
   </p:cSld>
-  <mc:AlternateContent>
-    <mc:Choice Requires="p14">
-      <p:transition spd="slow" p14:dur="2000"/>
-    </mc:Choice>
-    <mc:Fallback>
-      <p:transition spd="slow"/>
-    </mc:Fallback>
-  </mc:AlternateContent>
+  <p:clrMapOvr>
+    <a:masterClrMapping/>
+  </p:clrMapOvr>
 </p:sld>
 </file>
 
-<file path=ppt/slides/slide4.xml><?xml version="1.0" encoding="utf-8"?>
-<p:sld xmlns:a="http://schemas.openxmlformats.org/drawingml/2006/main" xmlns:p="http://schemas.openxmlformats.org/presentationml/2006/main" xmlns:r="http://schemas.openxmlformats.org/officeDocument/2006/relationships" xmlns:p14="http://schemas.microsoft.com/office/powerpoint/2010/main" xmlns:p15="http://schemas.microsoft.com/office/powerpoint/2012/main" xmlns:mc="http://schemas.openxmlformats.org/markup-compatibility/2006">
+<file path=ppt/slides/slide5.xml><?xml version="1.0" encoding="utf-8"?>
+<p:sld xmlns:a="http://schemas.openxmlformats.org/drawingml/2006/main" xmlns:r="http://schemas.openxmlformats.org/officeDocument/2006/relationships" xmlns:p="http://schemas.openxmlformats.org/presentationml/2006/main">
   <p:cSld>
     <p:spTree>
       <p:nvGrpSpPr>
@@ -5827,15 +7509,22 @@
           </a:ln>
         </p:spPr>
         <p:style>
-          <a:lnRef idx="0"/>
-          <a:fillRef idx="0"/>
-          <a:effectRef idx="0"/>
+          <a:lnRef idx="0">
+            <a:scrgbClr r="0" g="0" b="0"/>
+          </a:lnRef>
+          <a:fillRef idx="0">
+            <a:scrgbClr r="0" g="0" b="0"/>
+          </a:fillRef>
+          <a:effectRef idx="0">
+            <a:scrgbClr r="0" g="0" b="0"/>
+          </a:effectRef>
           <a:fontRef idx="minor"/>
         </p:style>
         <p:txBody>
           <a:bodyPr lIns="0" tIns="0" rIns="0" bIns="0" anchor="ctr">
             <a:noAutofit/>
           </a:bodyPr>
+          <a:lstStyle/>
           <a:p>
             <a:pPr defTabSz="914400">
               <a:lnSpc>
@@ -5888,15 +7577,22 @@
           </a:ln>
         </p:spPr>
         <p:style>
-          <a:lnRef idx="0"/>
-          <a:fillRef idx="0"/>
-          <a:effectRef idx="0"/>
+          <a:lnRef idx="0">
+            <a:scrgbClr r="0" g="0" b="0"/>
+          </a:lnRef>
+          <a:fillRef idx="0">
+            <a:scrgbClr r="0" g="0" b="0"/>
+          </a:fillRef>
+          <a:effectRef idx="0">
+            <a:scrgbClr r="0" g="0" b="0"/>
+          </a:effectRef>
           <a:fontRef idx="minor"/>
         </p:style>
         <p:txBody>
           <a:bodyPr lIns="0" tIns="0" rIns="0" bIns="0" anchor="ctr">
             <a:noAutofit/>
           </a:bodyPr>
+          <a:lstStyle/>
           <a:p>
             <a:pPr defTabSz="914400">
               <a:lnSpc>
@@ -5954,7 +7650,7 @@
             <a:round/>
           </a:ln>
           <a:effectLst>
-            <a:outerShdw algn="bl" dir="0" dist="0" kx="0" ky="0" rotWithShape="0" sx="100000" sy="100000">
+            <a:outerShdw algn="bl" rotWithShape="0">
               <a:srgbClr val="000000">
                 <a:alpha val="0"/>
               </a:srgbClr>
@@ -5962,15 +7658,22 @@
           </a:effectLst>
         </p:spPr>
         <p:style>
-          <a:lnRef idx="0"/>
-          <a:fillRef idx="0"/>
-          <a:effectRef idx="0"/>
+          <a:lnRef idx="0">
+            <a:scrgbClr r="0" g="0" b="0"/>
+          </a:lnRef>
+          <a:fillRef idx="0">
+            <a:scrgbClr r="0" g="0" b="0"/>
+          </a:fillRef>
+          <a:effectRef idx="0">
+            <a:scrgbClr r="0" g="0" b="0"/>
+          </a:effectRef>
           <a:fontRef idx="minor"/>
         </p:style>
         <p:txBody>
           <a:bodyPr lIns="90000" tIns="45000" rIns="90000" bIns="45000" anchor="t">
             <a:noAutofit/>
           </a:bodyPr>
+          <a:lstStyle/>
           <a:p>
             <a:endParaRPr lang="en-US" sz="1800" b="0" u="none" strike="noStrike">
               <a:solidFill>
@@ -6008,15 +7711,22 @@
           </a:ln>
         </p:spPr>
         <p:style>
-          <a:lnRef idx="0"/>
-          <a:fillRef idx="0"/>
-          <a:effectRef idx="0"/>
+          <a:lnRef idx="0">
+            <a:scrgbClr r="0" g="0" b="0"/>
+          </a:lnRef>
+          <a:fillRef idx="0">
+            <a:scrgbClr r="0" g="0" b="0"/>
+          </a:fillRef>
+          <a:effectRef idx="0">
+            <a:scrgbClr r="0" g="0" b="0"/>
+          </a:effectRef>
           <a:fontRef idx="minor"/>
         </p:style>
         <p:txBody>
           <a:bodyPr lIns="41040" tIns="45000" rIns="41040" bIns="45000" anchor="t">
             <a:noAutofit/>
           </a:bodyPr>
+          <a:lstStyle/>
           <a:p>
             <a:endParaRPr lang="en-US" sz="1800" b="0" u="none" strike="noStrike">
               <a:solidFill>
@@ -6049,15 +7759,22 @@
           </a:ln>
         </p:spPr>
         <p:style>
-          <a:lnRef idx="0"/>
-          <a:fillRef idx="0"/>
-          <a:effectRef idx="0"/>
+          <a:lnRef idx="0">
+            <a:scrgbClr r="0" g="0" b="0"/>
+          </a:lnRef>
+          <a:fillRef idx="0">
+            <a:scrgbClr r="0" g="0" b="0"/>
+          </a:fillRef>
+          <a:effectRef idx="0">
+            <a:scrgbClr r="0" g="0" b="0"/>
+          </a:effectRef>
           <a:fontRef idx="minor"/>
         </p:style>
         <p:txBody>
           <a:bodyPr lIns="0" tIns="0" rIns="0" bIns="0" anchor="ctr">
             <a:noAutofit/>
           </a:bodyPr>
+          <a:lstStyle/>
           <a:p>
             <a:pPr defTabSz="914400">
               <a:lnSpc>
@@ -6109,15 +7826,22 @@
           </a:ln>
         </p:spPr>
         <p:style>
-          <a:lnRef idx="0"/>
-          <a:fillRef idx="0"/>
-          <a:effectRef idx="0"/>
+          <a:lnRef idx="0">
+            <a:scrgbClr r="0" g="0" b="0"/>
+          </a:lnRef>
+          <a:fillRef idx="0">
+            <a:scrgbClr r="0" g="0" b="0"/>
+          </a:fillRef>
+          <a:effectRef idx="0">
+            <a:scrgbClr r="0" g="0" b="0"/>
+          </a:effectRef>
           <a:fontRef idx="minor"/>
         </p:style>
         <p:txBody>
           <a:bodyPr lIns="360" tIns="360" rIns="360" bIns="360" anchor="t">
             <a:noAutofit/>
           </a:bodyPr>
+          <a:lstStyle/>
           <a:p>
             <a:pPr defTabSz="914400">
               <a:lnSpc>
@@ -6176,15 +7900,22 @@
           </a:ln>
         </p:spPr>
         <p:style>
-          <a:lnRef idx="0"/>
-          <a:fillRef idx="0"/>
-          <a:effectRef idx="0"/>
+          <a:lnRef idx="0">
+            <a:scrgbClr r="0" g="0" b="0"/>
+          </a:lnRef>
+          <a:fillRef idx="0">
+            <a:scrgbClr r="0" g="0" b="0"/>
+          </a:fillRef>
+          <a:effectRef idx="0">
+            <a:scrgbClr r="0" g="0" b="0"/>
+          </a:effectRef>
           <a:fontRef idx="minor"/>
         </p:style>
         <p:txBody>
           <a:bodyPr lIns="90000" tIns="45000" rIns="90000" bIns="45000" anchor="t">
             <a:noAutofit/>
           </a:bodyPr>
+          <a:lstStyle/>
           <a:p>
             <a:endParaRPr lang="en-US" sz="1800" b="0" u="none" strike="noStrike">
               <a:solidFill>
@@ -6217,15 +7948,22 @@
           </a:ln>
         </p:spPr>
         <p:style>
-          <a:lnRef idx="0"/>
-          <a:fillRef idx="0"/>
-          <a:effectRef idx="0"/>
+          <a:lnRef idx="0">
+            <a:scrgbClr r="0" g="0" b="0"/>
+          </a:lnRef>
+          <a:fillRef idx="0">
+            <a:scrgbClr r="0" g="0" b="0"/>
+          </a:fillRef>
+          <a:effectRef idx="0">
+            <a:scrgbClr r="0" g="0" b="0"/>
+          </a:effectRef>
           <a:fontRef idx="minor"/>
         </p:style>
         <p:txBody>
           <a:bodyPr lIns="360" tIns="360" rIns="360" bIns="360" anchor="ctr">
             <a:noAutofit/>
           </a:bodyPr>
+          <a:lstStyle/>
           <a:p>
             <a:pPr defTabSz="914400">
               <a:lnSpc>
@@ -6278,15 +8016,22 @@
           </a:ln>
         </p:spPr>
         <p:style>
-          <a:lnRef idx="0"/>
-          <a:fillRef idx="0"/>
-          <a:effectRef idx="0"/>
+          <a:lnRef idx="0">
+            <a:scrgbClr r="0" g="0" b="0"/>
+          </a:lnRef>
+          <a:fillRef idx="0">
+            <a:scrgbClr r="0" g="0" b="0"/>
+          </a:fillRef>
+          <a:effectRef idx="0">
+            <a:scrgbClr r="0" g="0" b="0"/>
+          </a:effectRef>
           <a:fontRef idx="minor"/>
         </p:style>
         <p:txBody>
           <a:bodyPr lIns="0" tIns="0" rIns="0" bIns="0" anchor="ctr">
             <a:noAutofit/>
           </a:bodyPr>
+          <a:lstStyle/>
           <a:p>
             <a:pPr defTabSz="914400">
               <a:lnSpc>
@@ -6345,15 +8090,22 @@
           </a:ln>
         </p:spPr>
         <p:style>
-          <a:lnRef idx="0"/>
-          <a:fillRef idx="0"/>
-          <a:effectRef idx="0"/>
+          <a:lnRef idx="0">
+            <a:scrgbClr r="0" g="0" b="0"/>
+          </a:lnRef>
+          <a:fillRef idx="0">
+            <a:scrgbClr r="0" g="0" b="0"/>
+          </a:fillRef>
+          <a:effectRef idx="0">
+            <a:scrgbClr r="0" g="0" b="0"/>
+          </a:effectRef>
           <a:fontRef idx="minor"/>
         </p:style>
         <p:txBody>
           <a:bodyPr lIns="90000" tIns="45000" rIns="90000" bIns="45000" anchor="t">
             <a:noAutofit/>
           </a:bodyPr>
+          <a:lstStyle/>
           <a:p>
             <a:endParaRPr lang="en-US" sz="1800" b="0" u="none" strike="noStrike">
               <a:solidFill>
@@ -6386,15 +8138,22 @@
           </a:ln>
         </p:spPr>
         <p:style>
-          <a:lnRef idx="0"/>
-          <a:fillRef idx="0"/>
-          <a:effectRef idx="0"/>
+          <a:lnRef idx="0">
+            <a:scrgbClr r="0" g="0" b="0"/>
+          </a:lnRef>
+          <a:fillRef idx="0">
+            <a:scrgbClr r="0" g="0" b="0"/>
+          </a:fillRef>
+          <a:effectRef idx="0">
+            <a:scrgbClr r="0" g="0" b="0"/>
+          </a:effectRef>
           <a:fontRef idx="minor"/>
         </p:style>
         <p:txBody>
           <a:bodyPr lIns="360" tIns="360" rIns="360" bIns="360" anchor="ctr">
             <a:noAutofit/>
           </a:bodyPr>
+          <a:lstStyle/>
           <a:p>
             <a:pPr defTabSz="914400">
               <a:lnSpc>
@@ -6447,15 +8206,22 @@
           </a:ln>
         </p:spPr>
         <p:style>
-          <a:lnRef idx="0"/>
-          <a:fillRef idx="0"/>
-          <a:effectRef idx="0"/>
+          <a:lnRef idx="0">
+            <a:scrgbClr r="0" g="0" b="0"/>
+          </a:lnRef>
+          <a:fillRef idx="0">
+            <a:scrgbClr r="0" g="0" b="0"/>
+          </a:fillRef>
+          <a:effectRef idx="0">
+            <a:scrgbClr r="0" g="0" b="0"/>
+          </a:effectRef>
           <a:fontRef idx="minor"/>
         </p:style>
         <p:txBody>
           <a:bodyPr lIns="360" tIns="360" rIns="360" bIns="360" anchor="ctr">
             <a:noAutofit/>
           </a:bodyPr>
+          <a:lstStyle/>
           <a:p>
             <a:endParaRPr lang="en-US" sz="1800" b="0" u="none" strike="noStrike">
               <a:solidFill>
@@ -6488,15 +8254,22 @@
           </a:ln>
         </p:spPr>
         <p:style>
-          <a:lnRef idx="0"/>
-          <a:fillRef idx="0"/>
-          <a:effectRef idx="0"/>
+          <a:lnRef idx="0">
+            <a:scrgbClr r="0" g="0" b="0"/>
+          </a:lnRef>
+          <a:fillRef idx="0">
+            <a:scrgbClr r="0" g="0" b="0"/>
+          </a:fillRef>
+          <a:effectRef idx="0">
+            <a:scrgbClr r="0" g="0" b="0"/>
+          </a:effectRef>
           <a:fontRef idx="minor"/>
         </p:style>
         <p:txBody>
           <a:bodyPr lIns="0" tIns="0" rIns="0" bIns="0" anchor="ctr">
             <a:noAutofit/>
           </a:bodyPr>
+          <a:lstStyle/>
           <a:p>
             <a:endParaRPr lang="en-US" sz="1800" b="0" u="none" strike="noStrike">
               <a:solidFill>
@@ -6576,7 +8349,7 @@
                 <a:latin typeface="Aptos"/>
                 <a:ea typeface="Aptos"/>
               </a:rPr>
-              <a:t>&lt;number&gt;</a:t>
+              <a:t>5</a:t>
             </a:fld>
             <a:endParaRPr lang="en-US" sz="800" b="0" u="none" strike="noStrike">
               <a:solidFill>
@@ -6609,15 +8382,22 @@
           </a:ln>
         </p:spPr>
         <p:style>
-          <a:lnRef idx="0"/>
-          <a:fillRef idx="0"/>
-          <a:effectRef idx="0"/>
+          <a:lnRef idx="0">
+            <a:scrgbClr r="0" g="0" b="0"/>
+          </a:lnRef>
+          <a:fillRef idx="0">
+            <a:scrgbClr r="0" g="0" b="0"/>
+          </a:fillRef>
+          <a:effectRef idx="0">
+            <a:scrgbClr r="0" g="0" b="0"/>
+          </a:effectRef>
           <a:fontRef idx="minor"/>
         </p:style>
         <p:txBody>
           <a:bodyPr lIns="0" tIns="0" rIns="0" bIns="0" anchor="ctr">
             <a:noAutofit/>
           </a:bodyPr>
+          <a:lstStyle/>
           <a:p>
             <a:pPr defTabSz="914400">
               <a:lnSpc>
@@ -6669,15 +8449,22 @@
           </a:ln>
         </p:spPr>
         <p:style>
-          <a:lnRef idx="0"/>
-          <a:fillRef idx="0"/>
-          <a:effectRef idx="0"/>
+          <a:lnRef idx="0">
+            <a:scrgbClr r="0" g="0" b="0"/>
+          </a:lnRef>
+          <a:fillRef idx="0">
+            <a:scrgbClr r="0" g="0" b="0"/>
+          </a:fillRef>
+          <a:effectRef idx="0">
+            <a:scrgbClr r="0" g="0" b="0"/>
+          </a:effectRef>
           <a:fontRef idx="minor"/>
         </p:style>
         <p:txBody>
           <a:bodyPr lIns="0" tIns="0" rIns="0" bIns="0" anchor="ctr">
             <a:noAutofit/>
           </a:bodyPr>
+          <a:lstStyle/>
           <a:p>
             <a:pPr defTabSz="914400">
               <a:lnSpc>
@@ -6740,12 +8527,12 @@
       </p:sp>
       <p:pic>
         <p:nvPicPr>
-          <p:cNvPr id="86" name=""/>
+          <p:cNvPr id="86" name="Picture 85"/>
           <p:cNvPicPr/>
           <p:nvPr/>
         </p:nvPicPr>
         <p:blipFill>
-          <a:blip r:embed="rId1"/>
+          <a:blip r:embed="rId3"/>
           <a:stretch/>
         </p:blipFill>
         <p:spPr>
@@ -6764,19 +8551,14 @@
       </p:pic>
     </p:spTree>
   </p:cSld>
-  <mc:AlternateContent>
-    <mc:Choice Requires="p14">
-      <p:transition spd="slow" p14:dur="2000"/>
-    </mc:Choice>
-    <mc:Fallback>
-      <p:transition spd="slow"/>
-    </mc:Fallback>
-  </mc:AlternateContent>
+  <p:clrMapOvr>
+    <a:masterClrMapping/>
+  </p:clrMapOvr>
 </p:sld>
 </file>
 
-<file path=ppt/slides/slide5.xml><?xml version="1.0" encoding="utf-8"?>
-<p:sld xmlns:a="http://schemas.openxmlformats.org/drawingml/2006/main" xmlns:p="http://schemas.openxmlformats.org/presentationml/2006/main" xmlns:r="http://schemas.openxmlformats.org/officeDocument/2006/relationships" xmlns:p14="http://schemas.microsoft.com/office/powerpoint/2010/main" xmlns:p15="http://schemas.microsoft.com/office/powerpoint/2012/main" xmlns:mc="http://schemas.openxmlformats.org/markup-compatibility/2006">
+<file path=ppt/slides/slide6.xml><?xml version="1.0" encoding="utf-8"?>
+<p:sld xmlns:a="http://schemas.openxmlformats.org/drawingml/2006/main" xmlns:r="http://schemas.openxmlformats.org/officeDocument/2006/relationships" xmlns:p="http://schemas.openxmlformats.org/presentationml/2006/main">
   <p:cSld>
     <p:spTree>
       <p:nvGrpSpPr>
@@ -6812,15 +8594,22 @@
           </a:ln>
         </p:spPr>
         <p:style>
-          <a:lnRef idx="0"/>
-          <a:fillRef idx="0"/>
-          <a:effectRef idx="0"/>
+          <a:lnRef idx="0">
+            <a:scrgbClr r="0" g="0" b="0"/>
+          </a:lnRef>
+          <a:fillRef idx="0">
+            <a:scrgbClr r="0" g="0" b="0"/>
+          </a:fillRef>
+          <a:effectRef idx="0">
+            <a:scrgbClr r="0" g="0" b="0"/>
+          </a:effectRef>
           <a:fontRef idx="minor"/>
         </p:style>
         <p:txBody>
           <a:bodyPr lIns="0" tIns="0" rIns="0" bIns="0" anchor="ctr">
             <a:noAutofit/>
           </a:bodyPr>
+          <a:lstStyle/>
           <a:p>
             <a:pPr defTabSz="914400">
               <a:lnSpc>
@@ -6873,15 +8662,22 @@
           </a:ln>
         </p:spPr>
         <p:style>
-          <a:lnRef idx="0"/>
-          <a:fillRef idx="0"/>
-          <a:effectRef idx="0"/>
+          <a:lnRef idx="0">
+            <a:scrgbClr r="0" g="0" b="0"/>
+          </a:lnRef>
+          <a:fillRef idx="0">
+            <a:scrgbClr r="0" g="0" b="0"/>
+          </a:fillRef>
+          <a:effectRef idx="0">
+            <a:scrgbClr r="0" g="0" b="0"/>
+          </a:effectRef>
           <a:fontRef idx="minor"/>
         </p:style>
         <p:txBody>
           <a:bodyPr lIns="0" tIns="0" rIns="0" bIns="0" anchor="ctr">
             <a:noAutofit/>
           </a:bodyPr>
+          <a:lstStyle/>
           <a:p>
             <a:pPr defTabSz="914400">
               <a:lnSpc>
@@ -6938,15 +8734,22 @@
           </a:ln>
         </p:spPr>
         <p:style>
-          <a:lnRef idx="0"/>
-          <a:fillRef idx="0"/>
-          <a:effectRef idx="0"/>
+          <a:lnRef idx="0">
+            <a:scrgbClr r="0" g="0" b="0"/>
+          </a:lnRef>
+          <a:fillRef idx="0">
+            <a:scrgbClr r="0" g="0" b="0"/>
+          </a:fillRef>
+          <a:effectRef idx="0">
+            <a:scrgbClr r="0" g="0" b="0"/>
+          </a:effectRef>
           <a:fontRef idx="minor"/>
         </p:style>
         <p:txBody>
           <a:bodyPr lIns="90000" tIns="45000" rIns="90000" bIns="45000" anchor="t">
             <a:noAutofit/>
           </a:bodyPr>
+          <a:lstStyle/>
           <a:p>
             <a:endParaRPr lang="en-US" sz="1800" b="0" u="none" strike="noStrike">
               <a:solidFill>
@@ -6979,15 +8782,22 @@
           </a:ln>
         </p:spPr>
         <p:style>
-          <a:lnRef idx="0"/>
-          <a:fillRef idx="0"/>
-          <a:effectRef idx="0"/>
+          <a:lnRef idx="0">
+            <a:scrgbClr r="0" g="0" b="0"/>
+          </a:lnRef>
+          <a:fillRef idx="0">
+            <a:scrgbClr r="0" g="0" b="0"/>
+          </a:fillRef>
+          <a:effectRef idx="0">
+            <a:scrgbClr r="0" g="0" b="0"/>
+          </a:effectRef>
           <a:fontRef idx="minor"/>
         </p:style>
         <p:txBody>
           <a:bodyPr lIns="0" tIns="0" rIns="0" bIns="0" anchor="ctr">
             <a:noAutofit/>
           </a:bodyPr>
+          <a:lstStyle/>
           <a:p>
             <a:pPr algn="ctr" defTabSz="914400">
               <a:lnSpc>
@@ -7039,15 +8849,22 @@
           </a:ln>
         </p:spPr>
         <p:style>
-          <a:lnRef idx="0"/>
-          <a:fillRef idx="0"/>
-          <a:effectRef idx="0"/>
+          <a:lnRef idx="0">
+            <a:scrgbClr r="0" g="0" b="0"/>
+          </a:lnRef>
+          <a:fillRef idx="0">
+            <a:scrgbClr r="0" g="0" b="0"/>
+          </a:fillRef>
+          <a:effectRef idx="0">
+            <a:scrgbClr r="0" g="0" b="0"/>
+          </a:effectRef>
           <a:fontRef idx="minor"/>
         </p:style>
         <p:txBody>
           <a:bodyPr lIns="0" tIns="0" rIns="0" bIns="0" anchor="ctr">
             <a:noAutofit/>
           </a:bodyPr>
+          <a:lstStyle/>
           <a:p>
             <a:pPr defTabSz="914400">
               <a:lnSpc>
@@ -7104,15 +8921,22 @@
           </a:ln>
         </p:spPr>
         <p:style>
-          <a:lnRef idx="0"/>
-          <a:fillRef idx="0"/>
-          <a:effectRef idx="0"/>
+          <a:lnRef idx="0">
+            <a:scrgbClr r="0" g="0" b="0"/>
+          </a:lnRef>
+          <a:fillRef idx="0">
+            <a:scrgbClr r="0" g="0" b="0"/>
+          </a:fillRef>
+          <a:effectRef idx="0">
+            <a:scrgbClr r="0" g="0" b="0"/>
+          </a:effectRef>
           <a:fontRef idx="minor"/>
         </p:style>
         <p:txBody>
           <a:bodyPr lIns="90000" tIns="45000" rIns="90000" bIns="45000" anchor="t">
             <a:noAutofit/>
           </a:bodyPr>
+          <a:lstStyle/>
           <a:p>
             <a:endParaRPr lang="en-US" sz="1800" b="0" u="none" strike="noStrike">
               <a:solidFill>
@@ -7145,15 +8969,22 @@
           </a:ln>
         </p:spPr>
         <p:style>
-          <a:lnRef idx="0"/>
-          <a:fillRef idx="0"/>
-          <a:effectRef idx="0"/>
+          <a:lnRef idx="0">
+            <a:scrgbClr r="0" g="0" b="0"/>
+          </a:lnRef>
+          <a:fillRef idx="0">
+            <a:scrgbClr r="0" g="0" b="0"/>
+          </a:fillRef>
+          <a:effectRef idx="0">
+            <a:scrgbClr r="0" g="0" b="0"/>
+          </a:effectRef>
           <a:fontRef idx="minor"/>
         </p:style>
         <p:txBody>
           <a:bodyPr lIns="0" tIns="0" rIns="0" bIns="0" anchor="ctr">
             <a:noAutofit/>
           </a:bodyPr>
+          <a:lstStyle/>
           <a:p>
             <a:pPr algn="ctr" defTabSz="914400">
               <a:lnSpc>
@@ -7205,15 +9036,22 @@
           </a:ln>
         </p:spPr>
         <p:style>
-          <a:lnRef idx="0"/>
-          <a:fillRef idx="0"/>
-          <a:effectRef idx="0"/>
+          <a:lnRef idx="0">
+            <a:scrgbClr r="0" g="0" b="0"/>
+          </a:lnRef>
+          <a:fillRef idx="0">
+            <a:scrgbClr r="0" g="0" b="0"/>
+          </a:fillRef>
+          <a:effectRef idx="0">
+            <a:scrgbClr r="0" g="0" b="0"/>
+          </a:effectRef>
           <a:fontRef idx="minor"/>
         </p:style>
         <p:txBody>
           <a:bodyPr lIns="0" tIns="0" rIns="0" bIns="0" anchor="ctr">
             <a:noAutofit/>
           </a:bodyPr>
+          <a:lstStyle/>
           <a:p>
             <a:pPr defTabSz="914400">
               <a:lnSpc>
@@ -7270,15 +9108,22 @@
           </a:ln>
         </p:spPr>
         <p:style>
-          <a:lnRef idx="0"/>
-          <a:fillRef idx="0"/>
-          <a:effectRef idx="0"/>
+          <a:lnRef idx="0">
+            <a:scrgbClr r="0" g="0" b="0"/>
+          </a:lnRef>
+          <a:fillRef idx="0">
+            <a:scrgbClr r="0" g="0" b="0"/>
+          </a:fillRef>
+          <a:effectRef idx="0">
+            <a:scrgbClr r="0" g="0" b="0"/>
+          </a:effectRef>
           <a:fontRef idx="minor"/>
         </p:style>
         <p:txBody>
           <a:bodyPr lIns="90000" tIns="45000" rIns="90000" bIns="45000" anchor="t">
             <a:noAutofit/>
           </a:bodyPr>
+          <a:lstStyle/>
           <a:p>
             <a:endParaRPr lang="en-US" sz="1800" b="0" u="none" strike="noStrike">
               <a:solidFill>
@@ -7311,15 +9156,22 @@
           </a:ln>
         </p:spPr>
         <p:style>
-          <a:lnRef idx="0"/>
-          <a:fillRef idx="0"/>
-          <a:effectRef idx="0"/>
+          <a:lnRef idx="0">
+            <a:scrgbClr r="0" g="0" b="0"/>
+          </a:lnRef>
+          <a:fillRef idx="0">
+            <a:scrgbClr r="0" g="0" b="0"/>
+          </a:fillRef>
+          <a:effectRef idx="0">
+            <a:scrgbClr r="0" g="0" b="0"/>
+          </a:effectRef>
           <a:fontRef idx="minor"/>
         </p:style>
         <p:txBody>
           <a:bodyPr lIns="0" tIns="0" rIns="0" bIns="0" anchor="ctr">
             <a:noAutofit/>
           </a:bodyPr>
+          <a:lstStyle/>
           <a:p>
             <a:pPr algn="ctr" defTabSz="914400">
               <a:lnSpc>
@@ -7371,15 +9223,22 @@
           </a:ln>
         </p:spPr>
         <p:style>
-          <a:lnRef idx="0"/>
-          <a:fillRef idx="0"/>
-          <a:effectRef idx="0"/>
+          <a:lnRef idx="0">
+            <a:scrgbClr r="0" g="0" b="0"/>
+          </a:lnRef>
+          <a:fillRef idx="0">
+            <a:scrgbClr r="0" g="0" b="0"/>
+          </a:fillRef>
+          <a:effectRef idx="0">
+            <a:scrgbClr r="0" g="0" b="0"/>
+          </a:effectRef>
           <a:fontRef idx="minor"/>
         </p:style>
         <p:txBody>
           <a:bodyPr lIns="0" tIns="0" rIns="0" bIns="0" anchor="ctr">
             <a:noAutofit/>
           </a:bodyPr>
+          <a:lstStyle/>
           <a:p>
             <a:pPr defTabSz="914400">
               <a:lnSpc>
@@ -7436,15 +9295,22 @@
           </a:ln>
         </p:spPr>
         <p:style>
-          <a:lnRef idx="0"/>
-          <a:fillRef idx="0"/>
-          <a:effectRef idx="0"/>
+          <a:lnRef idx="0">
+            <a:scrgbClr r="0" g="0" b="0"/>
+          </a:lnRef>
+          <a:fillRef idx="0">
+            <a:scrgbClr r="0" g="0" b="0"/>
+          </a:fillRef>
+          <a:effectRef idx="0">
+            <a:scrgbClr r="0" g="0" b="0"/>
+          </a:effectRef>
           <a:fontRef idx="minor"/>
         </p:style>
         <p:txBody>
           <a:bodyPr lIns="90000" tIns="45000" rIns="90000" bIns="45000" anchor="t">
             <a:noAutofit/>
           </a:bodyPr>
+          <a:lstStyle/>
           <a:p>
             <a:endParaRPr lang="en-US" sz="1800" b="0" u="none" strike="noStrike">
               <a:solidFill>
@@ -7477,15 +9343,22 @@
           </a:ln>
         </p:spPr>
         <p:style>
-          <a:lnRef idx="0"/>
-          <a:fillRef idx="0"/>
-          <a:effectRef idx="0"/>
+          <a:lnRef idx="0">
+            <a:scrgbClr r="0" g="0" b="0"/>
+          </a:lnRef>
+          <a:fillRef idx="0">
+            <a:scrgbClr r="0" g="0" b="0"/>
+          </a:fillRef>
+          <a:effectRef idx="0">
+            <a:scrgbClr r="0" g="0" b="0"/>
+          </a:effectRef>
           <a:fontRef idx="minor"/>
         </p:style>
         <p:txBody>
           <a:bodyPr lIns="0" tIns="0" rIns="0" bIns="0" anchor="ctr">
             <a:noAutofit/>
           </a:bodyPr>
+          <a:lstStyle/>
           <a:p>
             <a:pPr algn="ctr" defTabSz="914400">
               <a:lnSpc>
@@ -7537,15 +9410,22 @@
           </a:ln>
         </p:spPr>
         <p:style>
-          <a:lnRef idx="0"/>
-          <a:fillRef idx="0"/>
-          <a:effectRef idx="0"/>
+          <a:lnRef idx="0">
+            <a:scrgbClr r="0" g="0" b="0"/>
+          </a:lnRef>
+          <a:fillRef idx="0">
+            <a:scrgbClr r="0" g="0" b="0"/>
+          </a:fillRef>
+          <a:effectRef idx="0">
+            <a:scrgbClr r="0" g="0" b="0"/>
+          </a:effectRef>
           <a:fontRef idx="minor"/>
         </p:style>
         <p:txBody>
           <a:bodyPr lIns="0" tIns="0" rIns="0" bIns="0" anchor="ctr">
             <a:noAutofit/>
           </a:bodyPr>
+          <a:lstStyle/>
           <a:p>
             <a:pPr defTabSz="914400">
               <a:lnSpc>
@@ -7602,15 +9482,22 @@
           </a:ln>
         </p:spPr>
         <p:style>
-          <a:lnRef idx="0"/>
-          <a:fillRef idx="0"/>
-          <a:effectRef idx="0"/>
+          <a:lnRef idx="0">
+            <a:scrgbClr r="0" g="0" b="0"/>
+          </a:lnRef>
+          <a:fillRef idx="0">
+            <a:scrgbClr r="0" g="0" b="0"/>
+          </a:fillRef>
+          <a:effectRef idx="0">
+            <a:scrgbClr r="0" g="0" b="0"/>
+          </a:effectRef>
           <a:fontRef idx="minor"/>
         </p:style>
         <p:txBody>
           <a:bodyPr lIns="90000" tIns="45000" rIns="90000" bIns="45000" anchor="t">
             <a:noAutofit/>
           </a:bodyPr>
+          <a:lstStyle/>
           <a:p>
             <a:endParaRPr lang="en-US" sz="1800" b="0" u="none" strike="noStrike">
               <a:solidFill>
@@ -7643,15 +9530,22 @@
           </a:ln>
         </p:spPr>
         <p:style>
-          <a:lnRef idx="0"/>
-          <a:fillRef idx="0"/>
-          <a:effectRef idx="0"/>
+          <a:lnRef idx="0">
+            <a:scrgbClr r="0" g="0" b="0"/>
+          </a:lnRef>
+          <a:fillRef idx="0">
+            <a:scrgbClr r="0" g="0" b="0"/>
+          </a:fillRef>
+          <a:effectRef idx="0">
+            <a:scrgbClr r="0" g="0" b="0"/>
+          </a:effectRef>
           <a:fontRef idx="minor"/>
         </p:style>
         <p:txBody>
           <a:bodyPr lIns="0" tIns="0" rIns="0" bIns="0" anchor="ctr">
             <a:noAutofit/>
           </a:bodyPr>
+          <a:lstStyle/>
           <a:p>
             <a:pPr algn="ctr" defTabSz="914400">
               <a:lnSpc>
@@ -7703,15 +9597,22 @@
           </a:ln>
         </p:spPr>
         <p:style>
-          <a:lnRef idx="0"/>
-          <a:fillRef idx="0"/>
-          <a:effectRef idx="0"/>
+          <a:lnRef idx="0">
+            <a:scrgbClr r="0" g="0" b="0"/>
+          </a:lnRef>
+          <a:fillRef idx="0">
+            <a:scrgbClr r="0" g="0" b="0"/>
+          </a:fillRef>
+          <a:effectRef idx="0">
+            <a:scrgbClr r="0" g="0" b="0"/>
+          </a:effectRef>
           <a:fontRef idx="minor"/>
         </p:style>
         <p:txBody>
           <a:bodyPr lIns="0" tIns="0" rIns="0" bIns="0" anchor="ctr">
             <a:noAutofit/>
           </a:bodyPr>
+          <a:lstStyle/>
           <a:p>
             <a:pPr defTabSz="914400">
               <a:lnSpc>
@@ -7769,7 +9670,7 @@
             <a:round/>
           </a:ln>
           <a:effectLst>
-            <a:outerShdw algn="bl" dir="0" dist="0" kx="0" ky="0" rotWithShape="0" sx="100000" sy="100000">
+            <a:outerShdw algn="bl" rotWithShape="0">
               <a:srgbClr val="000000">
                 <a:alpha val="0"/>
               </a:srgbClr>
@@ -7777,15 +9678,22 @@
           </a:effectLst>
         </p:spPr>
         <p:style>
-          <a:lnRef idx="0"/>
-          <a:fillRef idx="0"/>
-          <a:effectRef idx="0"/>
+          <a:lnRef idx="0">
+            <a:scrgbClr r="0" g="0" b="0"/>
+          </a:lnRef>
+          <a:fillRef idx="0">
+            <a:scrgbClr r="0" g="0" b="0"/>
+          </a:fillRef>
+          <a:effectRef idx="0">
+            <a:scrgbClr r="0" g="0" b="0"/>
+          </a:effectRef>
           <a:fontRef idx="minor"/>
         </p:style>
         <p:txBody>
           <a:bodyPr lIns="90000" tIns="45000" rIns="90000" bIns="45000" anchor="t">
             <a:noAutofit/>
           </a:bodyPr>
+          <a:lstStyle/>
           <a:p>
             <a:endParaRPr lang="en-US" sz="1800" b="0" u="none" strike="noStrike">
               <a:solidFill>
@@ -7818,15 +9726,22 @@
           </a:ln>
         </p:spPr>
         <p:style>
-          <a:lnRef idx="0"/>
-          <a:fillRef idx="0"/>
-          <a:effectRef idx="0"/>
+          <a:lnRef idx="0">
+            <a:scrgbClr r="0" g="0" b="0"/>
+          </a:lnRef>
+          <a:fillRef idx="0">
+            <a:scrgbClr r="0" g="0" b="0"/>
+          </a:fillRef>
+          <a:effectRef idx="0">
+            <a:scrgbClr r="0" g="0" b="0"/>
+          </a:effectRef>
           <a:fontRef idx="minor"/>
         </p:style>
         <p:txBody>
           <a:bodyPr lIns="0" tIns="0" rIns="0" bIns="0" anchor="ctr">
             <a:noAutofit/>
           </a:bodyPr>
+          <a:lstStyle/>
           <a:p>
             <a:pPr defTabSz="914400">
               <a:lnSpc>
@@ -7878,15 +9793,22 @@
           </a:ln>
         </p:spPr>
         <p:style>
-          <a:lnRef idx="0"/>
-          <a:fillRef idx="0"/>
-          <a:effectRef idx="0"/>
+          <a:lnRef idx="0">
+            <a:scrgbClr r="0" g="0" b="0"/>
+          </a:lnRef>
+          <a:fillRef idx="0">
+            <a:scrgbClr r="0" g="0" b="0"/>
+          </a:fillRef>
+          <a:effectRef idx="0">
+            <a:scrgbClr r="0" g="0" b="0"/>
+          </a:effectRef>
           <a:fontRef idx="minor"/>
         </p:style>
         <p:txBody>
           <a:bodyPr lIns="0" tIns="0" rIns="0" bIns="0" anchor="ctr">
             <a:noAutofit/>
           </a:bodyPr>
+          <a:lstStyle/>
           <a:p>
             <a:pPr defTabSz="914400">
               <a:lnSpc>
@@ -7921,7 +9843,7 @@
       <p:sp>
         <p:nvSpPr>
           <p:cNvPr id="107" name="Text 43">
-            <a:hlinkClick r:id="rId1"/>
+            <a:hlinkClick r:id="rId3"/>
           </p:cNvPr>
           <p:cNvSpPr/>
           <p:nvPr/>
@@ -7940,15 +9862,22 @@
           </a:ln>
         </p:spPr>
         <p:style>
-          <a:lnRef idx="0"/>
-          <a:fillRef idx="0"/>
-          <a:effectRef idx="0"/>
+          <a:lnRef idx="0">
+            <a:scrgbClr r="0" g="0" b="0"/>
+          </a:lnRef>
+          <a:fillRef idx="0">
+            <a:scrgbClr r="0" g="0" b="0"/>
+          </a:fillRef>
+          <a:effectRef idx="0">
+            <a:scrgbClr r="0" g="0" b="0"/>
+          </a:effectRef>
           <a:fontRef idx="minor"/>
         </p:style>
         <p:txBody>
           <a:bodyPr lIns="0" tIns="0" rIns="0" bIns="0" anchor="ctr">
             <a:normAutofit/>
           </a:bodyPr>
+          <a:lstStyle/>
           <a:p>
             <a:pPr defTabSz="914400">
               <a:lnSpc>
@@ -7966,7 +9895,7 @@
                 <a:effectLst/>
                 <a:uFillTx/>
                 <a:latin typeface="Aptos"/>
-                <a:hlinkClick r:id="rId2"/>
+                <a:hlinkClick r:id="rId3"/>
               </a:rPr>
               <a:t>https://nodejs.org/en/download</a:t>
             </a:r>
@@ -8001,15 +9930,22 @@
           </a:ln>
         </p:spPr>
         <p:style>
-          <a:lnRef idx="0"/>
-          <a:fillRef idx="0"/>
-          <a:effectRef idx="0"/>
+          <a:lnRef idx="0">
+            <a:scrgbClr r="0" g="0" b="0"/>
+          </a:lnRef>
+          <a:fillRef idx="0">
+            <a:scrgbClr r="0" g="0" b="0"/>
+          </a:fillRef>
+          <a:effectRef idx="0">
+            <a:scrgbClr r="0" g="0" b="0"/>
+          </a:effectRef>
           <a:fontRef idx="minor"/>
         </p:style>
         <p:txBody>
           <a:bodyPr lIns="0" tIns="0" rIns="0" bIns="0" anchor="ctr">
             <a:noAutofit/>
           </a:bodyPr>
+          <a:lstStyle/>
           <a:p>
             <a:pPr defTabSz="914400">
               <a:lnSpc>
@@ -8044,7 +9980,7 @@
       <p:sp>
         <p:nvSpPr>
           <p:cNvPr id="109" name="Text 45">
-            <a:hlinkClick r:id="rId3"/>
+            <a:hlinkClick r:id="rId4"/>
           </p:cNvPr>
           <p:cNvSpPr/>
           <p:nvPr/>
@@ -8063,15 +9999,22 @@
           </a:ln>
         </p:spPr>
         <p:style>
-          <a:lnRef idx="0"/>
-          <a:fillRef idx="0"/>
-          <a:effectRef idx="0"/>
+          <a:lnRef idx="0">
+            <a:scrgbClr r="0" g="0" b="0"/>
+          </a:lnRef>
+          <a:fillRef idx="0">
+            <a:scrgbClr r="0" g="0" b="0"/>
+          </a:fillRef>
+          <a:effectRef idx="0">
+            <a:scrgbClr r="0" g="0" b="0"/>
+          </a:effectRef>
           <a:fontRef idx="minor"/>
         </p:style>
         <p:txBody>
           <a:bodyPr lIns="0" tIns="0" rIns="0" bIns="0" anchor="ctr">
-            <a:normAutofit/>
-          </a:bodyPr>
+            <a:normAutofit lnSpcReduction="10000"/>
+          </a:bodyPr>
+          <a:lstStyle/>
           <a:p>
             <a:pPr defTabSz="914400">
               <a:lnSpc>
@@ -8124,15 +10067,22 @@
           </a:ln>
         </p:spPr>
         <p:style>
-          <a:lnRef idx="0"/>
-          <a:fillRef idx="0"/>
-          <a:effectRef idx="0"/>
+          <a:lnRef idx="0">
+            <a:scrgbClr r="0" g="0" b="0"/>
+          </a:lnRef>
+          <a:fillRef idx="0">
+            <a:scrgbClr r="0" g="0" b="0"/>
+          </a:fillRef>
+          <a:effectRef idx="0">
+            <a:scrgbClr r="0" g="0" b="0"/>
+          </a:effectRef>
           <a:fontRef idx="minor"/>
         </p:style>
         <p:txBody>
           <a:bodyPr lIns="0" tIns="0" rIns="0" bIns="0" anchor="ctr">
             <a:noAutofit/>
           </a:bodyPr>
+          <a:lstStyle/>
           <a:p>
             <a:pPr defTabSz="914400">
               <a:lnSpc>
@@ -8186,15 +10136,22 @@
           </a:ln>
         </p:spPr>
         <p:style>
-          <a:lnRef idx="0"/>
-          <a:fillRef idx="0"/>
-          <a:effectRef idx="0"/>
+          <a:lnRef idx="0">
+            <a:scrgbClr r="0" g="0" b="0"/>
+          </a:lnRef>
+          <a:fillRef idx="0">
+            <a:scrgbClr r="0" g="0" b="0"/>
+          </a:fillRef>
+          <a:effectRef idx="0">
+            <a:scrgbClr r="0" g="0" b="0"/>
+          </a:effectRef>
           <a:fontRef idx="minor"/>
         </p:style>
         <p:txBody>
           <a:bodyPr lIns="0" tIns="0" rIns="0" bIns="0" anchor="ctr">
-            <a:normAutofit/>
-          </a:bodyPr>
+            <a:normAutofit lnSpcReduction="10000"/>
+          </a:bodyPr>
+          <a:lstStyle/>
           <a:p>
             <a:pPr defTabSz="914400">
               <a:lnSpc>
@@ -8212,7 +10169,7 @@
                 <a:effectLst/>
                 <a:uFillTx/>
                 <a:latin typeface="Aptos"/>
-                <a:hlinkClick r:id="rId6"/>
+                <a:hlinkClick r:id="rId5"/>
               </a:rPr>
               <a:t>https://nextjs.org/docs/app/api-reference/cli/create-next-app</a:t>
             </a:r>
@@ -8247,15 +10204,22 @@
           </a:ln>
         </p:spPr>
         <p:style>
-          <a:lnRef idx="0"/>
-          <a:fillRef idx="0"/>
-          <a:effectRef idx="0"/>
+          <a:lnRef idx="0">
+            <a:scrgbClr r="0" g="0" b="0"/>
+          </a:lnRef>
+          <a:fillRef idx="0">
+            <a:scrgbClr r="0" g="0" b="0"/>
+          </a:fillRef>
+          <a:effectRef idx="0">
+            <a:scrgbClr r="0" g="0" b="0"/>
+          </a:effectRef>
           <a:fontRef idx="minor"/>
         </p:style>
         <p:txBody>
           <a:bodyPr lIns="0" tIns="0" rIns="0" bIns="0" anchor="ctr">
             <a:noAutofit/>
           </a:bodyPr>
+          <a:lstStyle/>
           <a:p>
             <a:pPr defTabSz="914400">
               <a:lnSpc>
@@ -8290,7 +10254,7 @@
       <p:sp>
         <p:nvSpPr>
           <p:cNvPr id="113" name="Text 49">
-            <a:hlinkClick r:id="rId7"/>
+            <a:hlinkClick r:id="rId6"/>
           </p:cNvPr>
           <p:cNvSpPr/>
           <p:nvPr/>
@@ -8309,15 +10273,22 @@
           </a:ln>
         </p:spPr>
         <p:style>
-          <a:lnRef idx="0"/>
-          <a:fillRef idx="0"/>
-          <a:effectRef idx="0"/>
+          <a:lnRef idx="0">
+            <a:scrgbClr r="0" g="0" b="0"/>
+          </a:lnRef>
+          <a:fillRef idx="0">
+            <a:scrgbClr r="0" g="0" b="0"/>
+          </a:fillRef>
+          <a:effectRef idx="0">
+            <a:scrgbClr r="0" g="0" b="0"/>
+          </a:effectRef>
           <a:fontRef idx="minor"/>
         </p:style>
         <p:txBody>
           <a:bodyPr lIns="0" tIns="0" rIns="0" bIns="0" anchor="ctr">
             <a:normAutofit/>
           </a:bodyPr>
+          <a:lstStyle/>
           <a:p>
             <a:pPr defTabSz="914400">
               <a:lnSpc>
@@ -8335,7 +10306,7 @@
                 <a:effectLst/>
                 <a:uFillTx/>
                 <a:latin typeface="Aptos"/>
-                <a:hlinkClick r:id="rId8"/>
+                <a:hlinkClick r:id="rId6"/>
               </a:rPr>
               <a:t>https://node-postgres.com/</a:t>
             </a:r>
@@ -8370,15 +10341,22 @@
           </a:ln>
         </p:spPr>
         <p:style>
-          <a:lnRef idx="0"/>
-          <a:fillRef idx="0"/>
-          <a:effectRef idx="0"/>
+          <a:lnRef idx="0">
+            <a:scrgbClr r="0" g="0" b="0"/>
+          </a:lnRef>
+          <a:fillRef idx="0">
+            <a:scrgbClr r="0" g="0" b="0"/>
+          </a:fillRef>
+          <a:effectRef idx="0">
+            <a:scrgbClr r="0" g="0" b="0"/>
+          </a:effectRef>
           <a:fontRef idx="minor"/>
         </p:style>
         <p:txBody>
           <a:bodyPr lIns="0" tIns="0" rIns="0" bIns="0" anchor="ctr">
             <a:noAutofit/>
           </a:bodyPr>
+          <a:lstStyle/>
           <a:p>
             <a:pPr defTabSz="914400">
               <a:lnSpc>
@@ -8413,7 +10391,7 @@
       <p:sp>
         <p:nvSpPr>
           <p:cNvPr id="115" name="Text 51">
-            <a:hlinkClick r:id="rId9"/>
+            <a:hlinkClick r:id="rId7"/>
           </p:cNvPr>
           <p:cNvSpPr/>
           <p:nvPr/>
@@ -8432,15 +10410,22 @@
           </a:ln>
         </p:spPr>
         <p:style>
-          <a:lnRef idx="0"/>
-          <a:fillRef idx="0"/>
-          <a:effectRef idx="0"/>
+          <a:lnRef idx="0">
+            <a:scrgbClr r="0" g="0" b="0"/>
+          </a:lnRef>
+          <a:fillRef idx="0">
+            <a:scrgbClr r="0" g="0" b="0"/>
+          </a:fillRef>
+          <a:effectRef idx="0">
+            <a:scrgbClr r="0" g="0" b="0"/>
+          </a:effectRef>
           <a:fontRef idx="minor"/>
         </p:style>
         <p:txBody>
           <a:bodyPr lIns="0" tIns="0" rIns="0" bIns="0" anchor="ctr">
-            <a:normAutofit/>
-          </a:bodyPr>
+            <a:normAutofit lnSpcReduction="10000"/>
+          </a:bodyPr>
+          <a:lstStyle/>
           <a:p>
             <a:pPr defTabSz="914400">
               <a:lnSpc>
@@ -8458,7 +10443,7 @@
                 <a:effectLst/>
                 <a:uFillTx/>
                 <a:latin typeface="Aptos"/>
-                <a:hlinkClick r:id="rId10"/>
+                <a:hlinkClick r:id="rId7"/>
               </a:rPr>
               <a:t>https://node-postgres.com/features/connecting</a:t>
             </a:r>
@@ -8540,7 +10525,7 @@
                 <a:latin typeface="Aptos"/>
                 <a:ea typeface="Aptos"/>
               </a:rPr>
-              <a:t>5</a:t>
+              <a:t>6</a:t>
             </a:fld>
             <a:endParaRPr lang="en-US" sz="800" b="0" u="none" strike="noStrike">
               <a:solidFill>
@@ -8555,19 +10540,14 @@
       </p:sp>
     </p:spTree>
   </p:cSld>
-  <mc:AlternateContent>
-    <mc:Choice Requires="p14">
-      <p:transition spd="slow" p14:dur="2000"/>
-    </mc:Choice>
-    <mc:Fallback>
-      <p:transition spd="slow"/>
-    </mc:Fallback>
-  </mc:AlternateContent>
+  <p:clrMapOvr>
+    <a:masterClrMapping/>
+  </p:clrMapOvr>
 </p:sld>
 </file>
 
 <file path=ppt/theme/theme1.xml><?xml version="1.0" encoding="utf-8"?>
-<a:theme xmlns:a="http://schemas.openxmlformats.org/drawingml/2006/main" xmlns:r="http://schemas.openxmlformats.org/officeDocument/2006/relationships" name="Office Theme">
+<a:theme xmlns:a="http://schemas.openxmlformats.org/drawingml/2006/main" name="Office Theme">
   <a:themeElements>
     <a:clrScheme name="Office">
       <a:dk1>
@@ -8609,12 +10589,12 @@
     </a:clrScheme>
     <a:fontScheme name="Office">
       <a:majorFont>
-        <a:latin typeface="Aptos Display" pitchFamily="0" charset="1"/>
+        <a:latin typeface="Aptos Display"/>
         <a:ea typeface=""/>
         <a:cs typeface=""/>
       </a:majorFont>
       <a:minorFont>
-        <a:latin typeface="Aptos" pitchFamily="0" charset="1"/>
+        <a:latin typeface="Aptos"/>
         <a:ea typeface=""/>
         <a:cs typeface=""/>
       </a:minorFont>
@@ -8646,7 +10626,7 @@
             </a:gs>
           </a:gsLst>
           <a:lin ang="5400000" scaled="0"/>
-          <a:tileRect l="0" t="0" r="0" b="0"/>
+          <a:tileRect/>
         </a:gradFill>
         <a:gradFill>
           <a:gsLst>
@@ -8670,7 +10650,7 @@
             </a:gs>
           </a:gsLst>
           <a:lin ang="5400000" scaled="0"/>
-          <a:tileRect l="0" t="0" r="0" b="0"/>
+          <a:tileRect/>
         </a:gradFill>
       </a:fillStyleLst>
       <a:lnStyleLst>
@@ -8730,16 +10710,18 @@
             </a:gs>
           </a:gsLst>
           <a:lin ang="5400000" scaled="0"/>
-          <a:tileRect l="0" t="0" r="0" b="0"/>
+          <a:tileRect/>
         </a:gradFill>
       </a:bgFillStyleLst>
     </a:fmtScheme>
   </a:themeElements>
+  <a:objectDefaults/>
+  <a:extraClrSchemeLst/>
 </a:theme>
 </file>
 
-<file path=ppt/theme/theme3.xml><?xml version="1.0" encoding="utf-8"?>
-<a:theme xmlns:a="http://schemas.openxmlformats.org/drawingml/2006/main" xmlns:r="http://schemas.openxmlformats.org/officeDocument/2006/relationships" name="Office Theme">
+<file path=ppt/theme/theme2.xml><?xml version="1.0" encoding="utf-8"?>
+<a:theme xmlns:a="http://schemas.openxmlformats.org/drawingml/2006/main" name="Office Theme">
   <a:themeElements>
     <a:clrScheme name="LibreOffice">
       <a:dk1>
@@ -8781,14 +10763,14 @@
     </a:clrScheme>
     <a:fontScheme name="Office">
       <a:majorFont>
-        <a:latin typeface="Arial" pitchFamily="0" charset="1"/>
-        <a:ea typeface="DejaVu Sans" pitchFamily="0" charset="1"/>
-        <a:cs typeface="DejaVu Sans" pitchFamily="0" charset="1"/>
+        <a:latin typeface="Arial"/>
+        <a:ea typeface="DejaVu Sans"/>
+        <a:cs typeface="DejaVu Sans"/>
       </a:majorFont>
       <a:minorFont>
-        <a:latin typeface="Arial" pitchFamily="0" charset="1"/>
-        <a:ea typeface="DejaVu Sans" pitchFamily="0" charset="1"/>
-        <a:cs typeface="DejaVu Sans" pitchFamily="0" charset="1"/>
+        <a:latin typeface="Arial"/>
+        <a:ea typeface="DejaVu Sans"/>
+        <a:cs typeface="DejaVu Sans"/>
       </a:minorFont>
     </a:fontScheme>
     <a:fmtScheme>
@@ -8841,5 +10823,7 @@
       </a:bgFillStyleLst>
     </a:fmtScheme>
   </a:themeElements>
+  <a:objectDefaults/>
+  <a:extraClrSchemeLst/>
 </a:theme>
 </file>